--- a/tex/ethicsreview/ethics_review_visibility/別紙2評価実験説明.pptx
+++ b/tex/ethicsreview/ethics_review_visibility/別紙2評価実験説明.pptx
@@ -7,16 +7,14 @@
   <p:sldIdLst>
     <p:sldId id="267" r:id="rId2"/>
     <p:sldId id="272" r:id="rId3"/>
-    <p:sldId id="268" r:id="rId4"/>
-    <p:sldId id="270" r:id="rId5"/>
-    <p:sldId id="271" r:id="rId6"/>
+    <p:sldId id="275" r:id="rId4"/>
+    <p:sldId id="268" r:id="rId5"/>
+    <p:sldId id="270" r:id="rId6"/>
     <p:sldId id="269" r:id="rId7"/>
     <p:sldId id="273" r:id="rId8"/>
-    <p:sldId id="274" r:id="rId9"/>
-    <p:sldId id="262" r:id="rId10"/>
-    <p:sldId id="264" r:id="rId11"/>
-    <p:sldId id="265" r:id="rId12"/>
-    <p:sldId id="266" r:id="rId13"/>
+    <p:sldId id="276" r:id="rId9"/>
+    <p:sldId id="274" r:id="rId10"/>
+    <p:sldId id="262" r:id="rId11"/>
   </p:sldIdLst>
   <p:sldSz cx="12192000" cy="6858000"/>
   <p:notesSz cx="6858000" cy="9144000"/>
@@ -309,7 +307,7 @@
           <a:p>
             <a:fld id="{416BA5EB-ECB0-409F-8DA9-B63B0BA08A82}" type="datetimeFigureOut">
               <a:rPr kumimoji="1" lang="ja-JP" altLang="en-US" smtClean="0"/>
-              <a:t>2026/5/30</a:t>
+              <a:t>2026/6/9</a:t>
             </a:fld>
             <a:endParaRPr kumimoji="1" lang="ja-JP" altLang="en-US"/>
           </a:p>
@@ -541,7 +539,7 @@
           <a:p>
             <a:fld id="{416BA5EB-ECB0-409F-8DA9-B63B0BA08A82}" type="datetimeFigureOut">
               <a:rPr kumimoji="1" lang="ja-JP" altLang="en-US" smtClean="0"/>
-              <a:t>2026/5/30</a:t>
+              <a:t>2026/6/9</a:t>
             </a:fld>
             <a:endParaRPr kumimoji="1" lang="ja-JP" altLang="en-US"/>
           </a:p>
@@ -690,7 +688,7 @@
           <a:p>
             <a:fld id="{416BA5EB-ECB0-409F-8DA9-B63B0BA08A82}" type="datetimeFigureOut">
               <a:rPr kumimoji="1" lang="ja-JP" altLang="en-US" smtClean="0"/>
-              <a:t>2026/5/30</a:t>
+              <a:t>2026/6/9</a:t>
             </a:fld>
             <a:endParaRPr kumimoji="1" lang="ja-JP" altLang="en-US"/>
           </a:p>
@@ -935,7 +933,7 @@
           <a:p>
             <a:fld id="{416BA5EB-ECB0-409F-8DA9-B63B0BA08A82}" type="datetimeFigureOut">
               <a:rPr kumimoji="1" lang="ja-JP" altLang="en-US" smtClean="0"/>
-              <a:t>2026/5/30</a:t>
+              <a:t>2026/6/9</a:t>
             </a:fld>
             <a:endParaRPr kumimoji="1" lang="ja-JP" altLang="en-US"/>
           </a:p>
@@ -1603,624 +1601,6 @@
           <a:chExt cx="0" cy="0"/>
         </a:xfrm>
       </p:grpSpPr>
-      <p:pic>
-        <p:nvPicPr>
-          <p:cNvPr id="2" name="コンテンツ プレースホルダー 1"/>
-          <p:cNvPicPr>
-            <a:picLocks noGrp="1" noChangeAspect="1"/>
-          </p:cNvPicPr>
-          <p:nvPr>
-            <p:ph idx="1"/>
-          </p:nvPr>
-        </p:nvPicPr>
-        <p:blipFill>
-          <a:blip r:embed="rId2">
-            <a:extLst>
-              <a:ext uri="{28A0092B-C50C-407E-A947-70E740481C1C}">
-                <a14:useLocalDpi xmlns:a14="http://schemas.microsoft.com/office/drawing/2010/main" val="0"/>
-              </a:ext>
-            </a:extLst>
-          </a:blip>
-          <a:stretch>
-            <a:fillRect/>
-          </a:stretch>
-        </p:blipFill>
-        <p:spPr>
-          <a:xfrm>
-            <a:off x="4119809" y="707912"/>
-            <a:ext cx="3952381" cy="5442177"/>
-          </a:xfrm>
-        </p:spPr>
-      </p:pic>
-      <p:sp>
-        <p:nvSpPr>
-          <p:cNvPr id="4" name="正方形/長方形 3">
-            <a:extLst>
-              <a:ext uri="{FF2B5EF4-FFF2-40B4-BE49-F238E27FC236}">
-                <a16:creationId xmlns:a16="http://schemas.microsoft.com/office/drawing/2014/main" id="{B41A48C1-CF1C-6BCA-3BB9-E06EB3FCB57C}"/>
-              </a:ext>
-            </a:extLst>
-          </p:cNvPr>
-          <p:cNvSpPr/>
-          <p:nvPr/>
-        </p:nvSpPr>
-        <p:spPr>
-          <a:xfrm>
-            <a:off x="0" y="0"/>
-            <a:ext cx="12192000" cy="6858000"/>
-          </a:xfrm>
-          <a:prstGeom prst="rect">
-            <a:avLst/>
-          </a:prstGeom>
-          <a:solidFill>
-            <a:schemeClr val="bg2">
-              <a:lumMod val="50000"/>
-            </a:schemeClr>
-          </a:solidFill>
-        </p:spPr>
-        <p:style>
-          <a:lnRef idx="2">
-            <a:schemeClr val="accent1">
-              <a:shade val="50000"/>
-            </a:schemeClr>
-          </a:lnRef>
-          <a:fillRef idx="1">
-            <a:schemeClr val="accent1"/>
-          </a:fillRef>
-          <a:effectRef idx="0">
-            <a:schemeClr val="accent1"/>
-          </a:effectRef>
-          <a:fontRef idx="minor">
-            <a:schemeClr val="lt1"/>
-          </a:fontRef>
-        </p:style>
-        <p:txBody>
-          <a:bodyPr rtlCol="0" anchor="ctr"/>
-          <a:lstStyle/>
-          <a:p>
-            <a:pPr algn="ctr"/>
-            <a:endParaRPr kumimoji="1" lang="ja-JP" altLang="en-US"/>
-          </a:p>
-        </p:txBody>
-      </p:sp>
-      <p:sp>
-        <p:nvSpPr>
-          <p:cNvPr id="5" name="テキスト ボックス 4">
-            <a:extLst>
-              <a:ext uri="{FF2B5EF4-FFF2-40B4-BE49-F238E27FC236}">
-                <a16:creationId xmlns:a16="http://schemas.microsoft.com/office/drawing/2014/main" id="{BF9D26FC-B76F-4628-8639-B4BD4A31EC82}"/>
-              </a:ext>
-            </a:extLst>
-          </p:cNvPr>
-          <p:cNvSpPr txBox="1"/>
-          <p:nvPr/>
-        </p:nvSpPr>
-        <p:spPr>
-          <a:xfrm>
-            <a:off x="6694098" y="530877"/>
-            <a:ext cx="4659702" cy="4955203"/>
-          </a:xfrm>
-          <a:prstGeom prst="rect">
-            <a:avLst/>
-          </a:prstGeom>
-          <a:noFill/>
-        </p:spPr>
-        <p:txBody>
-          <a:bodyPr wrap="square" rtlCol="0">
-            <a:spAutoFit/>
-          </a:bodyPr>
-          <a:lstStyle/>
-          <a:p>
-            <a:r>
-              <a:rPr lang="ja-JP" altLang="en-US" dirty="0">
-                <a:solidFill>
-                  <a:schemeClr val="bg1"/>
-                </a:solidFill>
-              </a:rPr>
-              <a:t>　</a:t>
-            </a:r>
-            <a:r>
-              <a:rPr lang="en-US" altLang="ja-JP" sz="2800" dirty="0">
-                <a:solidFill>
-                  <a:schemeClr val="bg1"/>
-                </a:solidFill>
-              </a:rPr>
-              <a:t>Section</a:t>
-            </a:r>
-            <a:r>
-              <a:rPr lang="ja-JP" altLang="en-US" sz="2800" dirty="0">
-                <a:solidFill>
-                  <a:schemeClr val="bg1"/>
-                </a:solidFill>
-              </a:rPr>
-              <a:t>１</a:t>
-            </a:r>
-            <a:endParaRPr lang="en-US" altLang="ja-JP" sz="2800" dirty="0">
-              <a:solidFill>
-                <a:schemeClr val="bg1"/>
-              </a:solidFill>
-            </a:endParaRPr>
-          </a:p>
-          <a:p>
-            <a:r>
-              <a:rPr lang="en-US" altLang="ja-JP" dirty="0">
-                <a:solidFill>
-                  <a:schemeClr val="bg1"/>
-                </a:solidFill>
-              </a:rPr>
-              <a:t>The upper monitor shows an annotated image, and Two chest x-ray images are displayed on the lower monitor.</a:t>
-            </a:r>
-          </a:p>
-          <a:p>
-            <a:endParaRPr lang="en-US" altLang="ja-JP" dirty="0">
-              <a:solidFill>
-                <a:schemeClr val="bg1"/>
-              </a:solidFill>
-            </a:endParaRPr>
-          </a:p>
-          <a:p>
-            <a:r>
-              <a:rPr lang="en-US" altLang="ja-JP" dirty="0">
-                <a:solidFill>
-                  <a:schemeClr val="bg1"/>
-                </a:solidFill>
-              </a:rPr>
-              <a:t>Of the two images displayed on the lower monitor, select the one you think is </a:t>
-            </a:r>
-            <a:r>
-              <a:rPr lang="en-US" altLang="ja-JP" b="1" dirty="0">
-                <a:solidFill>
-                  <a:schemeClr val="bg1"/>
-                </a:solidFill>
-              </a:rPr>
-              <a:t>easier to see</a:t>
-            </a:r>
-            <a:r>
-              <a:rPr lang="en-US" altLang="ja-JP" dirty="0">
-                <a:solidFill>
-                  <a:schemeClr val="bg1"/>
-                </a:solidFill>
-              </a:rPr>
-              <a:t> the lesion in the annotated area by mouse click. (Please judge without moving your face close to the monitor.)</a:t>
-            </a:r>
-          </a:p>
-          <a:p>
-            <a:endParaRPr kumimoji="1" lang="en-US" altLang="ja-JP" dirty="0">
-              <a:solidFill>
-                <a:schemeClr val="bg1"/>
-              </a:solidFill>
-            </a:endParaRPr>
-          </a:p>
-          <a:p>
-            <a:r>
-              <a:rPr lang="en-US" altLang="ja-JP" dirty="0">
-                <a:solidFill>
-                  <a:schemeClr val="bg1"/>
-                </a:solidFill>
-              </a:rPr>
-              <a:t>Once you have selected an image, the next image will </a:t>
-            </a:r>
-            <a:r>
-              <a:rPr lang="en-US" altLang="ja-JP" dirty="0" err="1">
-                <a:solidFill>
-                  <a:schemeClr val="bg1"/>
-                </a:solidFill>
-              </a:rPr>
-              <a:t>appear.Continue</a:t>
-            </a:r>
-            <a:r>
-              <a:rPr lang="en-US" altLang="ja-JP" dirty="0">
-                <a:solidFill>
-                  <a:schemeClr val="bg1"/>
-                </a:solidFill>
-              </a:rPr>
-              <a:t> selecting images until you see the image that describes Section 2.</a:t>
-            </a:r>
-          </a:p>
-          <a:p>
-            <a:endParaRPr kumimoji="1" lang="en-US" altLang="ja-JP" dirty="0">
-              <a:solidFill>
-                <a:schemeClr val="bg1"/>
-              </a:solidFill>
-            </a:endParaRPr>
-          </a:p>
-          <a:p>
-            <a:r>
-              <a:rPr lang="en-US" altLang="ja-JP" dirty="0">
-                <a:solidFill>
-                  <a:schemeClr val="bg1"/>
-                </a:solidFill>
-              </a:rPr>
-              <a:t>Press Enter to start Section 1</a:t>
-            </a:r>
-            <a:endParaRPr kumimoji="1" lang="en-US" altLang="ja-JP" dirty="0">
-              <a:solidFill>
-                <a:schemeClr val="bg1"/>
-              </a:solidFill>
-            </a:endParaRPr>
-          </a:p>
-        </p:txBody>
-      </p:sp>
-      <p:pic>
-        <p:nvPicPr>
-          <p:cNvPr id="3" name="図 2"/>
-          <p:cNvPicPr>
-            <a:picLocks noChangeAspect="1"/>
-          </p:cNvPicPr>
-          <p:nvPr/>
-        </p:nvPicPr>
-        <p:blipFill>
-          <a:blip r:embed="rId3">
-            <a:extLst>
-              <a:ext uri="{28A0092B-C50C-407E-A947-70E740481C1C}">
-                <a14:useLocalDpi xmlns:a14="http://schemas.microsoft.com/office/drawing/2010/main" val="0"/>
-              </a:ext>
-            </a:extLst>
-          </a:blip>
-          <a:stretch>
-            <a:fillRect/>
-          </a:stretch>
-        </p:blipFill>
-        <p:spPr>
-          <a:xfrm>
-            <a:off x="1454572" y="707912"/>
-            <a:ext cx="3952381" cy="5442177"/>
-          </a:xfrm>
-          <a:prstGeom prst="rect">
-            <a:avLst/>
-          </a:prstGeom>
-        </p:spPr>
-      </p:pic>
-    </p:spTree>
-    <p:extLst>
-      <p:ext uri="{BB962C8B-B14F-4D97-AF65-F5344CB8AC3E}">
-        <p14:creationId xmlns:p14="http://schemas.microsoft.com/office/powerpoint/2010/main" val="2789132846"/>
-      </p:ext>
-    </p:extLst>
-  </p:cSld>
-  <p:clrMapOvr>
-    <a:masterClrMapping/>
-  </p:clrMapOvr>
-</p:sld>
-</file>
-
-<file path=ppt/slides/slide11.xml><?xml version="1.0" encoding="utf-8"?>
-<p:sld xmlns:a="http://schemas.openxmlformats.org/drawingml/2006/main" xmlns:r="http://schemas.openxmlformats.org/officeDocument/2006/relationships" xmlns:p="http://schemas.openxmlformats.org/presentationml/2006/main">
-  <p:cSld>
-    <p:spTree>
-      <p:nvGrpSpPr>
-        <p:cNvPr id="1" name=""/>
-        <p:cNvGrpSpPr/>
-        <p:nvPr/>
-      </p:nvGrpSpPr>
-      <p:grpSpPr>
-        <a:xfrm>
-          <a:off x="0" y="0"/>
-          <a:ext cx="0" cy="0"/>
-          <a:chOff x="0" y="0"/>
-          <a:chExt cx="0" cy="0"/>
-        </a:xfrm>
-      </p:grpSpPr>
-      <p:pic>
-        <p:nvPicPr>
-          <p:cNvPr id="2" name="コンテンツ プレースホルダー 1"/>
-          <p:cNvPicPr>
-            <a:picLocks noGrp="1" noChangeAspect="1"/>
-          </p:cNvPicPr>
-          <p:nvPr>
-            <p:ph idx="1"/>
-          </p:nvPr>
-        </p:nvPicPr>
-        <p:blipFill>
-          <a:blip r:embed="rId2">
-            <a:extLst>
-              <a:ext uri="{28A0092B-C50C-407E-A947-70E740481C1C}">
-                <a14:useLocalDpi xmlns:a14="http://schemas.microsoft.com/office/drawing/2010/main" val="0"/>
-              </a:ext>
-            </a:extLst>
-          </a:blip>
-          <a:stretch>
-            <a:fillRect/>
-          </a:stretch>
-        </p:blipFill>
-        <p:spPr>
-          <a:xfrm>
-            <a:off x="4119809" y="707912"/>
-            <a:ext cx="3952381" cy="5442177"/>
-          </a:xfrm>
-        </p:spPr>
-      </p:pic>
-      <p:sp>
-        <p:nvSpPr>
-          <p:cNvPr id="4" name="正方形/長方形 3">
-            <a:extLst>
-              <a:ext uri="{FF2B5EF4-FFF2-40B4-BE49-F238E27FC236}">
-                <a16:creationId xmlns:a16="http://schemas.microsoft.com/office/drawing/2014/main" id="{B41A48C1-CF1C-6BCA-3BB9-E06EB3FCB57C}"/>
-              </a:ext>
-            </a:extLst>
-          </p:cNvPr>
-          <p:cNvSpPr/>
-          <p:nvPr/>
-        </p:nvSpPr>
-        <p:spPr>
-          <a:xfrm>
-            <a:off x="0" y="0"/>
-            <a:ext cx="12192000" cy="6858000"/>
-          </a:xfrm>
-          <a:prstGeom prst="rect">
-            <a:avLst/>
-          </a:prstGeom>
-          <a:solidFill>
-            <a:schemeClr val="bg2">
-              <a:lumMod val="50000"/>
-            </a:schemeClr>
-          </a:solidFill>
-        </p:spPr>
-        <p:style>
-          <a:lnRef idx="2">
-            <a:schemeClr val="accent1">
-              <a:shade val="50000"/>
-            </a:schemeClr>
-          </a:lnRef>
-          <a:fillRef idx="1">
-            <a:schemeClr val="accent1"/>
-          </a:fillRef>
-          <a:effectRef idx="0">
-            <a:schemeClr val="accent1"/>
-          </a:effectRef>
-          <a:fontRef idx="minor">
-            <a:schemeClr val="lt1"/>
-          </a:fontRef>
-        </p:style>
-        <p:txBody>
-          <a:bodyPr rtlCol="0" anchor="ctr"/>
-          <a:lstStyle/>
-          <a:p>
-            <a:pPr algn="ctr"/>
-            <a:endParaRPr kumimoji="1" lang="ja-JP" altLang="en-US"/>
-          </a:p>
-        </p:txBody>
-      </p:sp>
-      <p:sp>
-        <p:nvSpPr>
-          <p:cNvPr id="5" name="テキスト ボックス 4">
-            <a:extLst>
-              <a:ext uri="{FF2B5EF4-FFF2-40B4-BE49-F238E27FC236}">
-                <a16:creationId xmlns:a16="http://schemas.microsoft.com/office/drawing/2014/main" id="{BF9D26FC-B76F-4628-8639-B4BD4A31EC82}"/>
-              </a:ext>
-            </a:extLst>
-          </p:cNvPr>
-          <p:cNvSpPr txBox="1"/>
-          <p:nvPr/>
-        </p:nvSpPr>
-        <p:spPr>
-          <a:xfrm>
-            <a:off x="6694098" y="530877"/>
-            <a:ext cx="4659702" cy="5509200"/>
-          </a:xfrm>
-          <a:prstGeom prst="rect">
-            <a:avLst/>
-          </a:prstGeom>
-          <a:noFill/>
-        </p:spPr>
-        <p:txBody>
-          <a:bodyPr wrap="square" rtlCol="0">
-            <a:spAutoFit/>
-          </a:bodyPr>
-          <a:lstStyle/>
-          <a:p>
-            <a:r>
-              <a:rPr lang="ja-JP" altLang="en-US" dirty="0">
-                <a:solidFill>
-                  <a:schemeClr val="bg1"/>
-                </a:solidFill>
-              </a:rPr>
-              <a:t>　</a:t>
-            </a:r>
-            <a:r>
-              <a:rPr lang="en-US" altLang="ja-JP" sz="2800" dirty="0">
-                <a:solidFill>
-                  <a:schemeClr val="bg1"/>
-                </a:solidFill>
-              </a:rPr>
-              <a:t>Section 2</a:t>
-            </a:r>
-          </a:p>
-          <a:p>
-            <a:r>
-              <a:rPr lang="en-US" altLang="ja-JP" dirty="0">
-                <a:solidFill>
-                  <a:schemeClr val="bg1"/>
-                </a:solidFill>
-              </a:rPr>
-              <a:t>The upper monitor shows a reference x-ray image of the lung highlighted, and two x-ray images of the chest are displayed on the lower monitor.</a:t>
-            </a:r>
-          </a:p>
-          <a:p>
-            <a:endParaRPr lang="en-US" altLang="ja-JP" dirty="0">
-              <a:solidFill>
-                <a:schemeClr val="bg1"/>
-              </a:solidFill>
-            </a:endParaRPr>
-          </a:p>
-          <a:p>
-            <a:r>
-              <a:rPr lang="en-US" altLang="ja-JP" dirty="0">
-                <a:solidFill>
-                  <a:schemeClr val="bg1"/>
-                </a:solidFill>
-              </a:rPr>
-              <a:t>Of the two images displayed on the lower monitor, select the one you think maintains the content of the image on the upper monitor for </a:t>
-            </a:r>
-            <a:r>
-              <a:rPr lang="en-US" altLang="ja-JP" b="1" u="sng" dirty="0">
-                <a:solidFill>
-                  <a:schemeClr val="bg1"/>
-                </a:solidFill>
-              </a:rPr>
-              <a:t>the lung area only</a:t>
-            </a:r>
-            <a:r>
-              <a:rPr lang="en-US" altLang="ja-JP" dirty="0">
-                <a:solidFill>
-                  <a:schemeClr val="bg1"/>
-                </a:solidFill>
-              </a:rPr>
-              <a:t> by mouse click. (Please judge without moving your face close to the monitor.)</a:t>
-            </a:r>
-            <a:endParaRPr kumimoji="1" lang="en-US" altLang="ja-JP" dirty="0">
-              <a:solidFill>
-                <a:schemeClr val="bg1"/>
-              </a:solidFill>
-            </a:endParaRPr>
-          </a:p>
-          <a:p>
-            <a:endParaRPr kumimoji="1" lang="en-US" altLang="ja-JP" dirty="0">
-              <a:solidFill>
-                <a:schemeClr val="bg1"/>
-              </a:solidFill>
-            </a:endParaRPr>
-          </a:p>
-          <a:p>
-            <a:r>
-              <a:rPr lang="en-US" altLang="ja-JP" dirty="0">
-                <a:solidFill>
-                  <a:schemeClr val="bg1"/>
-                </a:solidFill>
-              </a:rPr>
-              <a:t>Once you have selected an image, the next image will appear.</a:t>
-            </a:r>
-            <a:r>
-              <a:rPr lang="ja-JP" altLang="en-US" dirty="0">
-                <a:solidFill>
-                  <a:schemeClr val="bg1"/>
-                </a:solidFill>
-              </a:rPr>
-              <a:t> </a:t>
-            </a:r>
-            <a:r>
-              <a:rPr lang="en-US" altLang="ja-JP" dirty="0">
-                <a:solidFill>
-                  <a:schemeClr val="bg1"/>
-                </a:solidFill>
-              </a:rPr>
-              <a:t>Continue selecting images until the image for the end of the section appears.</a:t>
-            </a:r>
-          </a:p>
-          <a:p>
-            <a:endParaRPr kumimoji="1" lang="en-US" altLang="ja-JP" dirty="0">
-              <a:solidFill>
-                <a:schemeClr val="bg1"/>
-              </a:solidFill>
-            </a:endParaRPr>
-          </a:p>
-          <a:p>
-            <a:r>
-              <a:rPr lang="en-US" altLang="ja-JP" dirty="0">
-                <a:solidFill>
-                  <a:schemeClr val="bg1"/>
-                </a:solidFill>
-              </a:rPr>
-              <a:t>Press Enter to start section 2</a:t>
-            </a:r>
-            <a:endParaRPr kumimoji="1" lang="en-US" altLang="ja-JP" dirty="0">
-              <a:solidFill>
-                <a:schemeClr val="bg1"/>
-              </a:solidFill>
-            </a:endParaRPr>
-          </a:p>
-        </p:txBody>
-      </p:sp>
-      <p:pic>
-        <p:nvPicPr>
-          <p:cNvPr id="3" name="図 2"/>
-          <p:cNvPicPr>
-            <a:picLocks noChangeAspect="1"/>
-          </p:cNvPicPr>
-          <p:nvPr/>
-        </p:nvPicPr>
-        <p:blipFill>
-          <a:blip r:embed="rId3">
-            <a:extLst>
-              <a:ext uri="{28A0092B-C50C-407E-A947-70E740481C1C}">
-                <a14:useLocalDpi xmlns:a14="http://schemas.microsoft.com/office/drawing/2010/main" val="0"/>
-              </a:ext>
-            </a:extLst>
-          </a:blip>
-          <a:stretch>
-            <a:fillRect/>
-          </a:stretch>
-        </p:blipFill>
-        <p:spPr>
-          <a:xfrm>
-            <a:off x="1454572" y="707912"/>
-            <a:ext cx="3952381" cy="5442177"/>
-          </a:xfrm>
-          <a:prstGeom prst="rect">
-            <a:avLst/>
-          </a:prstGeom>
-        </p:spPr>
-      </p:pic>
-      <p:pic>
-        <p:nvPicPr>
-          <p:cNvPr id="6" name="図 5"/>
-          <p:cNvPicPr>
-            <a:picLocks noChangeAspect="1"/>
-          </p:cNvPicPr>
-          <p:nvPr/>
-        </p:nvPicPr>
-        <p:blipFill>
-          <a:blip r:embed="rId4" cstate="hqprint">
-            <a:extLst>
-              <a:ext uri="{28A0092B-C50C-407E-A947-70E740481C1C}">
-                <a14:useLocalDpi xmlns:a14="http://schemas.microsoft.com/office/drawing/2010/main" val="0"/>
-              </a:ext>
-            </a:extLst>
-          </a:blip>
-          <a:stretch>
-            <a:fillRect/>
-          </a:stretch>
-        </p:blipFill>
-        <p:spPr>
-          <a:xfrm>
-            <a:off x="2548573" y="1014152"/>
-            <a:ext cx="1778924" cy="1778924"/>
-          </a:xfrm>
-          <a:prstGeom prst="rect">
-            <a:avLst/>
-          </a:prstGeom>
-        </p:spPr>
-      </p:pic>
-    </p:spTree>
-    <p:extLst>
-      <p:ext uri="{BB962C8B-B14F-4D97-AF65-F5344CB8AC3E}">
-        <p14:creationId xmlns:p14="http://schemas.microsoft.com/office/powerpoint/2010/main" val="687325516"/>
-      </p:ext>
-    </p:extLst>
-  </p:cSld>
-  <p:clrMapOvr>
-    <a:masterClrMapping/>
-  </p:clrMapOvr>
-</p:sld>
-</file>
-
-<file path=ppt/slides/slide12.xml><?xml version="1.0" encoding="utf-8"?>
-<p:sld xmlns:a="http://schemas.openxmlformats.org/drawingml/2006/main" xmlns:r="http://schemas.openxmlformats.org/officeDocument/2006/relationships" xmlns:p="http://schemas.openxmlformats.org/presentationml/2006/main">
-  <p:cSld>
-    <p:spTree>
-      <p:nvGrpSpPr>
-        <p:cNvPr id="1" name=""/>
-        <p:cNvGrpSpPr/>
-        <p:nvPr/>
-      </p:nvGrpSpPr>
-      <p:grpSpPr>
-        <a:xfrm>
-          <a:off x="0" y="0"/>
-          <a:ext cx="0" cy="0"/>
-          <a:chOff x="0" y="0"/>
-          <a:chExt cx="0" cy="0"/>
-        </a:xfrm>
-      </p:grpSpPr>
       <p:sp>
         <p:nvSpPr>
           <p:cNvPr id="3" name="コンテンツ プレースホルダー 2">
@@ -2316,8 +1696,8 @@
         </p:nvSpPr>
         <p:spPr>
           <a:xfrm>
-            <a:off x="948906" y="3013501"/>
-            <a:ext cx="10404894" cy="830997"/>
+            <a:off x="948906" y="363915"/>
+            <a:ext cx="10404894" cy="5755422"/>
           </a:xfrm>
           <a:prstGeom prst="rect">
             <a:avLst/>
@@ -2331,24 +1711,109 @@
           <a:lstStyle/>
           <a:p>
             <a:r>
-              <a:rPr lang="en-US" altLang="ja-JP" sz="2400" dirty="0">
-                <a:solidFill>
-                  <a:schemeClr val="bg1"/>
-                </a:solidFill>
-              </a:rPr>
-              <a:t>The entire experiment was finished.</a:t>
-            </a:r>
-          </a:p>
-          <a:p>
-            <a:r>
-              <a:rPr lang="en-US" altLang="ja-JP" sz="2400" dirty="0">
-                <a:solidFill>
-                  <a:schemeClr val="bg1"/>
-                </a:solidFill>
-              </a:rPr>
-              <a:t>Thank you very much for your cooperation.</a:t>
-            </a:r>
-            <a:endParaRPr lang="en-US" altLang="ja-JP" sz="3600" dirty="0">
+              <a:rPr lang="ja-JP" altLang="en-US" sz="2000" dirty="0">
+                <a:solidFill>
+                  <a:schemeClr val="bg1"/>
+                </a:solidFill>
+              </a:rPr>
+              <a:t>　</a:t>
+            </a:r>
+            <a:r>
+              <a:rPr lang="en-US" altLang="ja-JP" sz="2800" dirty="0">
+                <a:solidFill>
+                  <a:schemeClr val="bg1"/>
+                </a:solidFill>
+              </a:rPr>
+              <a:t>About this experiment</a:t>
+            </a:r>
+            <a:endParaRPr lang="en-US" altLang="ja-JP" sz="3200" dirty="0">
+              <a:solidFill>
+                <a:schemeClr val="bg1"/>
+              </a:solidFill>
+            </a:endParaRPr>
+          </a:p>
+          <a:p>
+            <a:r>
+              <a:rPr lang="en-US" altLang="ja-JP" sz="2000" dirty="0">
+                <a:solidFill>
+                  <a:schemeClr val="bg1"/>
+                </a:solidFill>
+              </a:rPr>
+              <a:t>This experiment is for the study of diagnostic aids in chest x-ray imaging. The experimenter will be asked to view two chest x-ray images and select one of them. There will be two sections, and we will explain the details of the selection criteria before each section. The time required is 15 minutes for each section and approximately 30 minutes overall.</a:t>
+            </a:r>
+          </a:p>
+          <a:p>
+            <a:endParaRPr lang="en-US" altLang="ja-JP" sz="2000" dirty="0">
+              <a:solidFill>
+                <a:schemeClr val="bg1"/>
+              </a:solidFill>
+            </a:endParaRPr>
+          </a:p>
+          <a:p>
+            <a:r>
+              <a:rPr lang="en-US" altLang="ja-JP" sz="2000" dirty="0">
+                <a:solidFill>
+                  <a:schemeClr val="bg1"/>
+                </a:solidFill>
+              </a:rPr>
+              <a:t>The experiment may cause eye fatigue. If you feel unwell, please inform the person in charge of the experiment at any time. And we will suspend or terminate the experiment.</a:t>
+            </a:r>
+          </a:p>
+          <a:p>
+            <a:endParaRPr lang="en-US" altLang="ja-JP" sz="2000" dirty="0">
+              <a:solidFill>
+                <a:schemeClr val="bg1"/>
+              </a:solidFill>
+            </a:endParaRPr>
+          </a:p>
+          <a:p>
+            <a:r>
+              <a:rPr lang="en-US" altLang="ja-JP" sz="2000" dirty="0">
+                <a:solidFill>
+                  <a:schemeClr val="bg1"/>
+                </a:solidFill>
+              </a:rPr>
+              <a:t>The data measured in this experiment will be used for research on diagnostic aids in X-ray imaging. The research results may be published in academic publications (papers, presentations at academic conferences, etc.) as well as for the purpose of publicizing the research activities of the </a:t>
+            </a:r>
+            <a:r>
+              <a:rPr lang="en-US" altLang="ja-JP" sz="2000" dirty="0" err="1">
+                <a:solidFill>
+                  <a:schemeClr val="bg1"/>
+                </a:solidFill>
+              </a:rPr>
+              <a:t>Oishi</a:t>
+            </a:r>
+            <a:r>
+              <a:rPr lang="en-US" altLang="ja-JP" sz="2000" dirty="0">
+                <a:solidFill>
+                  <a:schemeClr val="bg1"/>
+                </a:solidFill>
+              </a:rPr>
+              <a:t> Laboratory. When analyzing and publishing experimental data, all data will be anonymized, and privacy information will not be disclosed.</a:t>
+            </a:r>
+            <a:endParaRPr kumimoji="1" lang="en-US" altLang="ja-JP" sz="2000" dirty="0">
+              <a:solidFill>
+                <a:schemeClr val="bg1"/>
+              </a:solidFill>
+            </a:endParaRPr>
+          </a:p>
+          <a:p>
+            <a:endParaRPr lang="en-US" altLang="ja-JP" sz="2000" dirty="0">
+              <a:solidFill>
+                <a:schemeClr val="bg1"/>
+              </a:solidFill>
+            </a:endParaRPr>
+          </a:p>
+          <a:p>
+            <a:r>
+              <a:rPr lang="en-US" altLang="ja-JP" sz="2000" dirty="0">
+                <a:solidFill>
+                  <a:schemeClr val="bg1"/>
+                </a:solidFill>
+              </a:rPr>
+              <a:t>Press Space key to go next.</a:t>
+            </a:r>
+            <a:endParaRPr kumimoji="1" lang="en-US" altLang="ja-JP" sz="2000" dirty="0">
               <a:solidFill>
                 <a:schemeClr val="bg1"/>
               </a:solidFill>
@@ -2359,7 +1824,7 @@
     </p:spTree>
     <p:extLst>
       <p:ext uri="{BB962C8B-B14F-4D97-AF65-F5344CB8AC3E}">
-        <p14:creationId xmlns:p14="http://schemas.microsoft.com/office/powerpoint/2010/main" val="1560222864"/>
+        <p14:creationId xmlns:p14="http://schemas.microsoft.com/office/powerpoint/2010/main" val="1285185960"/>
       </p:ext>
     </p:extLst>
   </p:cSld>
@@ -2592,6 +2057,196 @@
         <p:cNvPr id="1" name="">
           <a:extLst>
             <a:ext uri="{FF2B5EF4-FFF2-40B4-BE49-F238E27FC236}">
+              <a16:creationId xmlns:a16="http://schemas.microsoft.com/office/drawing/2014/main" id="{FC5C5AF3-9201-45E8-C4AF-918B1AE3E3ED}"/>
+            </a:ext>
+          </a:extLst>
+        </p:cNvPr>
+        <p:cNvGrpSpPr/>
+        <p:nvPr/>
+      </p:nvGrpSpPr>
+      <p:grpSpPr>
+        <a:xfrm>
+          <a:off x="0" y="0"/>
+          <a:ext cx="0" cy="0"/>
+          <a:chOff x="0" y="0"/>
+          <a:chExt cx="0" cy="0"/>
+        </a:xfrm>
+      </p:grpSpPr>
+      <p:sp>
+        <p:nvSpPr>
+          <p:cNvPr id="2" name="テキスト ボックス 1">
+            <a:extLst>
+              <a:ext uri="{FF2B5EF4-FFF2-40B4-BE49-F238E27FC236}">
+                <a16:creationId xmlns:a16="http://schemas.microsoft.com/office/drawing/2014/main" id="{54492BFC-0C69-E102-7E94-85E3698C354A}"/>
+              </a:ext>
+            </a:extLst>
+          </p:cNvPr>
+          <p:cNvSpPr txBox="1"/>
+          <p:nvPr/>
+        </p:nvSpPr>
+        <p:spPr>
+          <a:xfrm>
+            <a:off x="893553" y="705177"/>
+            <a:ext cx="10404894" cy="2331407"/>
+          </a:xfrm>
+          <a:prstGeom prst="rect">
+            <a:avLst/>
+          </a:prstGeom>
+          <a:noFill/>
+        </p:spPr>
+        <p:txBody>
+          <a:bodyPr wrap="square" rtlCol="0">
+            <a:spAutoFit/>
+          </a:bodyPr>
+          <a:lstStyle/>
+          <a:p>
+            <a:r>
+              <a:rPr lang="ja-JP" altLang="en-US" sz="2550" b="1" dirty="0">
+                <a:solidFill>
+                  <a:schemeClr val="bg1"/>
+                </a:solidFill>
+                <a:latin typeface="+mj-ea"/>
+                <a:ea typeface="+mj-ea"/>
+              </a:rPr>
+              <a:t>トレーニングセッション</a:t>
+            </a:r>
+            <a:endParaRPr lang="en-US" altLang="ja-JP" sz="2550" b="1" dirty="0">
+              <a:solidFill>
+                <a:schemeClr val="bg1"/>
+              </a:solidFill>
+              <a:latin typeface="+mj-ea"/>
+              <a:ea typeface="+mj-ea"/>
+            </a:endParaRPr>
+          </a:p>
+          <a:p>
+            <a:r>
+              <a:rPr kumimoji="1" lang="ja-JP" altLang="en-US" sz="2000" dirty="0">
+                <a:solidFill>
+                  <a:schemeClr val="bg1"/>
+                </a:solidFill>
+              </a:rPr>
+              <a:t>実験本番に移る前に、各セクションで行うタスクに慣れるためのトレーニングを行います。</a:t>
+            </a:r>
+            <a:endParaRPr kumimoji="1" lang="en-US" altLang="ja-JP" sz="2000" dirty="0">
+              <a:solidFill>
+                <a:schemeClr val="bg1"/>
+              </a:solidFill>
+            </a:endParaRPr>
+          </a:p>
+          <a:p>
+            <a:r>
+              <a:rPr kumimoji="1" lang="ja-JP" altLang="en-US" sz="2000" dirty="0">
+                <a:solidFill>
+                  <a:schemeClr val="bg1"/>
+                </a:solidFill>
+              </a:rPr>
+              <a:t>セクションの順番は本番と同じです。</a:t>
+            </a:r>
+            <a:endParaRPr kumimoji="1" lang="en-US" altLang="ja-JP" sz="2000" dirty="0">
+              <a:solidFill>
+                <a:schemeClr val="bg1"/>
+              </a:solidFill>
+            </a:endParaRPr>
+          </a:p>
+          <a:p>
+            <a:r>
+              <a:rPr kumimoji="1" lang="ja-JP" altLang="en-US" sz="2000" dirty="0">
+                <a:solidFill>
+                  <a:schemeClr val="bg1"/>
+                </a:solidFill>
+              </a:rPr>
+              <a:t>このトレーニングはタスクに慣れるまで、最大</a:t>
+            </a:r>
+            <a:r>
+              <a:rPr kumimoji="1" lang="en-US" altLang="ja-JP" sz="2000" dirty="0">
+                <a:solidFill>
+                  <a:schemeClr val="bg1"/>
+                </a:solidFill>
+              </a:rPr>
+              <a:t>3</a:t>
+            </a:r>
+            <a:r>
+              <a:rPr kumimoji="1" lang="ja-JP" altLang="en-US" sz="2000" dirty="0">
+                <a:solidFill>
+                  <a:schemeClr val="bg1"/>
+                </a:solidFill>
+              </a:rPr>
+              <a:t>回まで行うことができます。</a:t>
+            </a:r>
+            <a:endParaRPr kumimoji="1" lang="en-US" altLang="ja-JP" sz="2000" dirty="0">
+              <a:solidFill>
+                <a:schemeClr val="bg1"/>
+              </a:solidFill>
+            </a:endParaRPr>
+          </a:p>
+          <a:p>
+            <a:endParaRPr kumimoji="1" lang="en-US" altLang="ja-JP" sz="2000" dirty="0">
+              <a:solidFill>
+                <a:schemeClr val="bg1"/>
+              </a:solidFill>
+            </a:endParaRPr>
+          </a:p>
+          <a:p>
+            <a:endParaRPr lang="en-US" altLang="ja-JP" sz="2000" dirty="0">
+              <a:solidFill>
+                <a:schemeClr val="bg1"/>
+              </a:solidFill>
+            </a:endParaRPr>
+          </a:p>
+          <a:p>
+            <a:r>
+              <a:rPr kumimoji="1" lang="en-US" altLang="ja-JP" sz="2000" dirty="0">
+                <a:solidFill>
+                  <a:schemeClr val="bg1"/>
+                </a:solidFill>
+              </a:rPr>
+              <a:t>Space</a:t>
+            </a:r>
+            <a:r>
+              <a:rPr kumimoji="1" lang="ja-JP" altLang="en-US" sz="2000" dirty="0">
+                <a:solidFill>
+                  <a:schemeClr val="bg1"/>
+                </a:solidFill>
+              </a:rPr>
+              <a:t>キーで次へ進みます</a:t>
+            </a:r>
+            <a:endParaRPr kumimoji="1" lang="en-US" altLang="ja-JP" sz="2000" dirty="0">
+              <a:solidFill>
+                <a:schemeClr val="bg1"/>
+              </a:solidFill>
+            </a:endParaRPr>
+          </a:p>
+        </p:txBody>
+      </p:sp>
+    </p:spTree>
+    <p:extLst>
+      <p:ext uri="{BB962C8B-B14F-4D97-AF65-F5344CB8AC3E}">
+        <p14:creationId xmlns:p14="http://schemas.microsoft.com/office/powerpoint/2010/main" val="1682353084"/>
+      </p:ext>
+    </p:extLst>
+  </p:cSld>
+  <p:clrMapOvr>
+    <a:masterClrMapping/>
+  </p:clrMapOvr>
+</p:sld>
+</file>
+
+<file path=ppt/slides/slide4.xml><?xml version="1.0" encoding="utf-8"?>
+<p:sld xmlns:a="http://schemas.openxmlformats.org/drawingml/2006/main" xmlns:r="http://schemas.openxmlformats.org/officeDocument/2006/relationships" xmlns:p="http://schemas.openxmlformats.org/presentationml/2006/main">
+  <p:cSld>
+    <p:bg>
+      <p:bgPr>
+        <a:solidFill>
+          <a:schemeClr val="tx2"/>
+        </a:solidFill>
+        <a:effectLst/>
+      </p:bgPr>
+    </p:bg>
+    <p:spTree>
+      <p:nvGrpSpPr>
+        <p:cNvPr id="1" name="">
+          <a:extLst>
+            <a:ext uri="{FF2B5EF4-FFF2-40B4-BE49-F238E27FC236}">
               <a16:creationId xmlns:a16="http://schemas.microsoft.com/office/drawing/2014/main" id="{540CEEFB-F9BA-027C-017D-7BBC65D4EE59}"/>
             </a:ext>
           </a:extLst>
@@ -2765,7 +2420,7 @@
 </p:sld>
 </file>
 
-<file path=ppt/slides/slide4.xml><?xml version="1.0" encoding="utf-8"?>
+<file path=ppt/slides/slide5.xml><?xml version="1.0" encoding="utf-8"?>
 <p:sld xmlns:a="http://schemas.openxmlformats.org/drawingml/2006/main" xmlns:r="http://schemas.openxmlformats.org/officeDocument/2006/relationships" xmlns:p="http://schemas.openxmlformats.org/presentationml/2006/main">
   <p:cSld>
     <p:bg>
@@ -2958,231 +2613,6 @@
     <p:extLst>
       <p:ext uri="{BB962C8B-B14F-4D97-AF65-F5344CB8AC3E}">
         <p14:creationId xmlns:p14="http://schemas.microsoft.com/office/powerpoint/2010/main" val="291621791"/>
-      </p:ext>
-    </p:extLst>
-  </p:cSld>
-  <p:clrMapOvr>
-    <a:masterClrMapping/>
-  </p:clrMapOvr>
-</p:sld>
-</file>
-
-<file path=ppt/slides/slide5.xml><?xml version="1.0" encoding="utf-8"?>
-<p:sld xmlns:a="http://schemas.openxmlformats.org/drawingml/2006/main" xmlns:r="http://schemas.openxmlformats.org/officeDocument/2006/relationships" xmlns:p="http://schemas.openxmlformats.org/presentationml/2006/main">
-  <p:cSld>
-    <p:bg>
-      <p:bgPr>
-        <a:solidFill>
-          <a:schemeClr val="tx2"/>
-        </a:solidFill>
-        <a:effectLst/>
-      </p:bgPr>
-    </p:bg>
-    <p:spTree>
-      <p:nvGrpSpPr>
-        <p:cNvPr id="1" name="">
-          <a:extLst>
-            <a:ext uri="{FF2B5EF4-FFF2-40B4-BE49-F238E27FC236}">
-              <a16:creationId xmlns:a16="http://schemas.microsoft.com/office/drawing/2014/main" id="{AC77846D-0B1C-EF65-93D2-32F46017CB93}"/>
-            </a:ext>
-          </a:extLst>
-        </p:cNvPr>
-        <p:cNvGrpSpPr/>
-        <p:nvPr/>
-      </p:nvGrpSpPr>
-      <p:grpSpPr>
-        <a:xfrm>
-          <a:off x="0" y="0"/>
-          <a:ext cx="0" cy="0"/>
-          <a:chOff x="0" y="0"/>
-          <a:chExt cx="0" cy="0"/>
-        </a:xfrm>
-      </p:grpSpPr>
-      <p:sp>
-        <p:nvSpPr>
-          <p:cNvPr id="3" name="テキスト ボックス 2">
-            <a:extLst>
-              <a:ext uri="{FF2B5EF4-FFF2-40B4-BE49-F238E27FC236}">
-                <a16:creationId xmlns:a16="http://schemas.microsoft.com/office/drawing/2014/main" id="{4FAB9FDF-7352-6FBF-D05B-5175B6701D56}"/>
-              </a:ext>
-            </a:extLst>
-          </p:cNvPr>
-          <p:cNvSpPr txBox="1"/>
-          <p:nvPr/>
-        </p:nvSpPr>
-        <p:spPr>
-          <a:xfrm>
-            <a:off x="4655127" y="705177"/>
-            <a:ext cx="6643320" cy="5101397"/>
-          </a:xfrm>
-          <a:prstGeom prst="rect">
-            <a:avLst/>
-          </a:prstGeom>
-          <a:noFill/>
-        </p:spPr>
-        <p:txBody>
-          <a:bodyPr wrap="square" rtlCol="0">
-            <a:spAutoFit/>
-          </a:bodyPr>
-          <a:lstStyle/>
-          <a:p>
-            <a:r>
-              <a:rPr lang="ja-JP" altLang="en-US" sz="2550" b="1" dirty="0">
-                <a:solidFill>
-                  <a:schemeClr val="bg1"/>
-                </a:solidFill>
-                <a:latin typeface="+mj-ea"/>
-                <a:ea typeface="+mj-ea"/>
-              </a:rPr>
-              <a:t>色キャリブレーション</a:t>
-            </a:r>
-            <a:endParaRPr lang="en-US" altLang="ja-JP" sz="2000" dirty="0">
-              <a:solidFill>
-                <a:schemeClr val="bg1"/>
-              </a:solidFill>
-            </a:endParaRPr>
-          </a:p>
-          <a:p>
-            <a:r>
-              <a:rPr kumimoji="1" lang="ja-JP" altLang="en-US" sz="2000" dirty="0">
-                <a:solidFill>
-                  <a:schemeClr val="bg1"/>
-                </a:solidFill>
-              </a:rPr>
-              <a:t>中央の表示領域には、上下に同じ刺激画像が表示されています。このうち、上半分の刺激画像のみ、奥のディスプレイに表示されています。</a:t>
-            </a:r>
-            <a:endParaRPr kumimoji="1" lang="en-US" altLang="ja-JP" sz="2000" dirty="0">
-              <a:solidFill>
-                <a:schemeClr val="bg1"/>
-              </a:solidFill>
-            </a:endParaRPr>
-          </a:p>
-          <a:p>
-            <a:endParaRPr kumimoji="1" lang="en-US" altLang="ja-JP" sz="2000" dirty="0">
-              <a:solidFill>
-                <a:schemeClr val="bg1"/>
-              </a:solidFill>
-            </a:endParaRPr>
-          </a:p>
-          <a:p>
-            <a:r>
-              <a:rPr kumimoji="1" lang="ja-JP" altLang="en-US" sz="2000" dirty="0">
-                <a:solidFill>
-                  <a:schemeClr val="bg1"/>
-                </a:solidFill>
-              </a:rPr>
-              <a:t>まず、上半分の領域において、刺激画像の色の見え方を確認してください。</a:t>
-            </a:r>
-            <a:endParaRPr kumimoji="1" lang="en-US" altLang="ja-JP" sz="2000" dirty="0">
-              <a:solidFill>
-                <a:schemeClr val="bg1"/>
-              </a:solidFill>
-            </a:endParaRPr>
-          </a:p>
-          <a:p>
-            <a:r>
-              <a:rPr kumimoji="1" lang="ja-JP" altLang="en-US" sz="2000" dirty="0">
-                <a:solidFill>
-                  <a:schemeClr val="bg1"/>
-                </a:solidFill>
-              </a:rPr>
-              <a:t>その後、操作用</a:t>
-            </a:r>
-            <a:r>
-              <a:rPr kumimoji="1" lang="en-US" altLang="ja-JP" sz="2000" dirty="0">
-                <a:solidFill>
-                  <a:schemeClr val="bg1"/>
-                </a:solidFill>
-              </a:rPr>
-              <a:t>PC</a:t>
-            </a:r>
-            <a:r>
-              <a:rPr kumimoji="1" lang="ja-JP" altLang="en-US" sz="2000" dirty="0">
-                <a:solidFill>
-                  <a:schemeClr val="bg1"/>
-                </a:solidFill>
-              </a:rPr>
-              <a:t>の矢印キーを用いて、下半分の刺激画像の色の見え方を、上半分と一致させてください。</a:t>
-            </a:r>
-            <a:endParaRPr kumimoji="1" lang="en-US" altLang="ja-JP" sz="2000" dirty="0">
-              <a:solidFill>
-                <a:schemeClr val="bg1"/>
-              </a:solidFill>
-            </a:endParaRPr>
-          </a:p>
-          <a:p>
-            <a:r>
-              <a:rPr kumimoji="1" lang="ja-JP" altLang="en-US" sz="2000" dirty="0">
-                <a:solidFill>
-                  <a:schemeClr val="bg1"/>
-                </a:solidFill>
-              </a:rPr>
-              <a:t>上下矢印キー、左右矢印キーで計二つのパラメータを操作します。</a:t>
-            </a:r>
-            <a:endParaRPr kumimoji="1" lang="en-US" altLang="ja-JP" sz="2000" dirty="0">
-              <a:solidFill>
-                <a:schemeClr val="bg1"/>
-              </a:solidFill>
-            </a:endParaRPr>
-          </a:p>
-          <a:p>
-            <a:r>
-              <a:rPr kumimoji="1" lang="ja-JP" altLang="en-US" sz="2000" dirty="0">
-                <a:solidFill>
-                  <a:schemeClr val="bg1"/>
-                </a:solidFill>
-              </a:rPr>
-              <a:t>これを、完全に一致すると感じるまで繰り返してください。</a:t>
-            </a:r>
-            <a:endParaRPr kumimoji="1" lang="en-US" altLang="ja-JP" sz="2000" dirty="0">
-              <a:solidFill>
-                <a:schemeClr val="bg1"/>
-              </a:solidFill>
-            </a:endParaRPr>
-          </a:p>
-          <a:p>
-            <a:endParaRPr kumimoji="1" lang="en-US" altLang="ja-JP" sz="2000" dirty="0">
-              <a:solidFill>
-                <a:schemeClr val="bg1"/>
-              </a:solidFill>
-            </a:endParaRPr>
-          </a:p>
-          <a:p>
-            <a:endParaRPr lang="en-US" altLang="ja-JP" sz="2000" dirty="0">
-              <a:solidFill>
-                <a:schemeClr val="bg1"/>
-              </a:solidFill>
-            </a:endParaRPr>
-          </a:p>
-          <a:p>
-            <a:r>
-              <a:rPr kumimoji="1" lang="en-US" altLang="ja-JP" sz="2000" dirty="0">
-                <a:solidFill>
-                  <a:schemeClr val="bg1"/>
-                </a:solidFill>
-              </a:rPr>
-              <a:t>Enter</a:t>
-            </a:r>
-            <a:r>
-              <a:rPr kumimoji="1" lang="ja-JP" altLang="en-US" sz="2000" dirty="0">
-                <a:solidFill>
-                  <a:schemeClr val="bg1"/>
-                </a:solidFill>
-              </a:rPr>
-              <a:t>キーで確定し、次の刺激へ進みます</a:t>
-            </a:r>
-            <a:endParaRPr kumimoji="1" lang="en-US" altLang="ja-JP" sz="2000" dirty="0">
-              <a:solidFill>
-                <a:schemeClr val="bg1"/>
-              </a:solidFill>
-            </a:endParaRPr>
-          </a:p>
-        </p:txBody>
-      </p:sp>
-    </p:spTree>
-    <p:extLst>
-      <p:ext uri="{BB962C8B-B14F-4D97-AF65-F5344CB8AC3E}">
-        <p14:creationId xmlns:p14="http://schemas.microsoft.com/office/powerpoint/2010/main" val="350544350"/>
       </p:ext>
     </p:extLst>
   </p:cSld>
@@ -3647,6 +3077,181 @@
     </p:bg>
     <p:spTree>
       <p:nvGrpSpPr>
+        <p:cNvPr id="1" name="">
+          <a:extLst>
+            <a:ext uri="{FF2B5EF4-FFF2-40B4-BE49-F238E27FC236}">
+              <a16:creationId xmlns:a16="http://schemas.microsoft.com/office/drawing/2014/main" id="{0F24FED2-85A1-8005-E543-1C5ECC2472E2}"/>
+            </a:ext>
+          </a:extLst>
+        </p:cNvPr>
+        <p:cNvGrpSpPr/>
+        <p:nvPr/>
+      </p:nvGrpSpPr>
+      <p:grpSpPr>
+        <a:xfrm>
+          <a:off x="0" y="0"/>
+          <a:ext cx="0" cy="0"/>
+          <a:chOff x="0" y="0"/>
+          <a:chExt cx="0" cy="0"/>
+        </a:xfrm>
+      </p:grpSpPr>
+      <p:sp>
+        <p:nvSpPr>
+          <p:cNvPr id="2" name="テキスト ボックス 1">
+            <a:extLst>
+              <a:ext uri="{FF2B5EF4-FFF2-40B4-BE49-F238E27FC236}">
+                <a16:creationId xmlns:a16="http://schemas.microsoft.com/office/drawing/2014/main" id="{E0375E41-7500-D920-505B-BF618CE4175C}"/>
+              </a:ext>
+            </a:extLst>
+          </p:cNvPr>
+          <p:cNvSpPr txBox="1"/>
+          <p:nvPr/>
+        </p:nvSpPr>
+        <p:spPr>
+          <a:xfrm>
+            <a:off x="893553" y="705177"/>
+            <a:ext cx="10404894" cy="2023631"/>
+          </a:xfrm>
+          <a:prstGeom prst="rect">
+            <a:avLst/>
+          </a:prstGeom>
+          <a:noFill/>
+        </p:spPr>
+        <p:txBody>
+          <a:bodyPr wrap="square" rtlCol="0">
+            <a:spAutoFit/>
+          </a:bodyPr>
+          <a:lstStyle/>
+          <a:p>
+            <a:r>
+              <a:rPr lang="ja-JP" altLang="en-US" sz="2550" b="1" dirty="0">
+                <a:solidFill>
+                  <a:schemeClr val="bg1"/>
+                </a:solidFill>
+                <a:latin typeface="+mj-ea"/>
+                <a:ea typeface="+mj-ea"/>
+              </a:rPr>
+              <a:t>本番セッション</a:t>
+            </a:r>
+            <a:endParaRPr lang="en-US" altLang="ja-JP" sz="2550" b="1" dirty="0">
+              <a:solidFill>
+                <a:schemeClr val="bg1"/>
+              </a:solidFill>
+              <a:latin typeface="+mj-ea"/>
+              <a:ea typeface="+mj-ea"/>
+            </a:endParaRPr>
+          </a:p>
+          <a:p>
+            <a:r>
+              <a:rPr kumimoji="1" lang="ja-JP" altLang="en-US" sz="2000" dirty="0">
+                <a:solidFill>
+                  <a:schemeClr val="bg1"/>
+                </a:solidFill>
+              </a:rPr>
+              <a:t>実験本番です。トレーニングセッションと同じタスクを、同じ順番で行います。</a:t>
+            </a:r>
+            <a:endParaRPr kumimoji="1" lang="en-US" altLang="ja-JP" sz="2000" dirty="0">
+              <a:solidFill>
+                <a:schemeClr val="bg1"/>
+              </a:solidFill>
+            </a:endParaRPr>
+          </a:p>
+          <a:p>
+            <a:r>
+              <a:rPr kumimoji="1" lang="ja-JP" altLang="en-US" sz="2000" dirty="0">
+                <a:solidFill>
+                  <a:schemeClr val="bg1"/>
+                </a:solidFill>
+              </a:rPr>
+              <a:t>このセッションは</a:t>
+            </a:r>
+            <a:r>
+              <a:rPr kumimoji="1" lang="en-US" altLang="ja-JP" sz="2000" dirty="0">
+                <a:solidFill>
+                  <a:schemeClr val="bg1"/>
+                </a:solidFill>
+              </a:rPr>
+              <a:t>1</a:t>
+            </a:r>
+            <a:r>
+              <a:rPr kumimoji="1" lang="ja-JP" altLang="en-US" sz="2000" dirty="0">
+                <a:solidFill>
+                  <a:schemeClr val="bg1"/>
+                </a:solidFill>
+              </a:rPr>
+              <a:t>回のみ行います。</a:t>
+            </a:r>
+            <a:endParaRPr kumimoji="1" lang="en-US" altLang="ja-JP" sz="2000" dirty="0">
+              <a:solidFill>
+                <a:schemeClr val="bg1"/>
+              </a:solidFill>
+            </a:endParaRPr>
+          </a:p>
+          <a:p>
+            <a:endParaRPr kumimoji="1" lang="en-US" altLang="ja-JP" sz="2000" dirty="0">
+              <a:solidFill>
+                <a:schemeClr val="bg1"/>
+              </a:solidFill>
+            </a:endParaRPr>
+          </a:p>
+          <a:p>
+            <a:endParaRPr lang="en-US" altLang="ja-JP" sz="2000" dirty="0">
+              <a:solidFill>
+                <a:schemeClr val="bg1"/>
+              </a:solidFill>
+            </a:endParaRPr>
+          </a:p>
+          <a:p>
+            <a:r>
+              <a:rPr kumimoji="1" lang="en-US" altLang="ja-JP" sz="2000" dirty="0">
+                <a:solidFill>
+                  <a:schemeClr val="bg1"/>
+                </a:solidFill>
+              </a:rPr>
+              <a:t>Space</a:t>
+            </a:r>
+            <a:r>
+              <a:rPr kumimoji="1" lang="ja-JP" altLang="en-US" sz="2000" dirty="0">
+                <a:solidFill>
+                  <a:schemeClr val="bg1"/>
+                </a:solidFill>
+              </a:rPr>
+              <a:t>キーで次へ進みます</a:t>
+            </a:r>
+            <a:endParaRPr kumimoji="1" lang="en-US" altLang="ja-JP" sz="2000" dirty="0">
+              <a:solidFill>
+                <a:schemeClr val="bg1"/>
+              </a:solidFill>
+            </a:endParaRPr>
+          </a:p>
+        </p:txBody>
+      </p:sp>
+    </p:spTree>
+    <p:extLst>
+      <p:ext uri="{BB962C8B-B14F-4D97-AF65-F5344CB8AC3E}">
+        <p14:creationId xmlns:p14="http://schemas.microsoft.com/office/powerpoint/2010/main" val="3199074743"/>
+      </p:ext>
+    </p:extLst>
+  </p:cSld>
+  <p:clrMapOvr>
+    <a:masterClrMapping/>
+  </p:clrMapOvr>
+</p:sld>
+</file>
+
+<file path=ppt/slides/slide9.xml><?xml version="1.0" encoding="utf-8"?>
+<p:sld xmlns:a="http://schemas.openxmlformats.org/drawingml/2006/main" xmlns:r="http://schemas.openxmlformats.org/officeDocument/2006/relationships" xmlns:p="http://schemas.openxmlformats.org/presentationml/2006/main">
+  <p:cSld>
+    <p:bg>
+      <p:bgPr>
+        <a:solidFill>
+          <a:schemeClr val="tx2"/>
+        </a:solidFill>
+        <a:effectLst/>
+      </p:bgPr>
+    </p:bg>
+    <p:spTree>
+      <p:nvGrpSpPr>
         <p:cNvPr id="1" name=""/>
         <p:cNvGrpSpPr/>
         <p:nvPr/>
@@ -3724,256 +3329,6 @@
     <p:extLst>
       <p:ext uri="{BB962C8B-B14F-4D97-AF65-F5344CB8AC3E}">
         <p14:creationId xmlns:p14="http://schemas.microsoft.com/office/powerpoint/2010/main" val="206050647"/>
-      </p:ext>
-    </p:extLst>
-  </p:cSld>
-  <p:clrMapOvr>
-    <a:masterClrMapping/>
-  </p:clrMapOvr>
-</p:sld>
-</file>
-
-<file path=ppt/slides/slide9.xml><?xml version="1.0" encoding="utf-8"?>
-<p:sld xmlns:a="http://schemas.openxmlformats.org/drawingml/2006/main" xmlns:r="http://schemas.openxmlformats.org/officeDocument/2006/relationships" xmlns:p="http://schemas.openxmlformats.org/presentationml/2006/main">
-  <p:cSld>
-    <p:spTree>
-      <p:nvGrpSpPr>
-        <p:cNvPr id="1" name=""/>
-        <p:cNvGrpSpPr/>
-        <p:nvPr/>
-      </p:nvGrpSpPr>
-      <p:grpSpPr>
-        <a:xfrm>
-          <a:off x="0" y="0"/>
-          <a:ext cx="0" cy="0"/>
-          <a:chOff x="0" y="0"/>
-          <a:chExt cx="0" cy="0"/>
-        </a:xfrm>
-      </p:grpSpPr>
-      <p:sp>
-        <p:nvSpPr>
-          <p:cNvPr id="3" name="コンテンツ プレースホルダー 2">
-            <a:extLst>
-              <a:ext uri="{FF2B5EF4-FFF2-40B4-BE49-F238E27FC236}">
-                <a16:creationId xmlns:a16="http://schemas.microsoft.com/office/drawing/2014/main" id="{4E4051A4-2FD0-A31B-ABFC-37343669B3A2}"/>
-              </a:ext>
-            </a:extLst>
-          </p:cNvPr>
-          <p:cNvSpPr>
-            <a:spLocks noGrp="1"/>
-          </p:cNvSpPr>
-          <p:nvPr>
-            <p:ph idx="1"/>
-          </p:nvPr>
-        </p:nvSpPr>
-        <p:spPr>
-          <a:xfrm>
-            <a:off x="838200" y="681487"/>
-            <a:ext cx="10515600" cy="5495476"/>
-          </a:xfrm>
-        </p:spPr>
-        <p:txBody>
-          <a:bodyPr/>
-          <a:lstStyle/>
-          <a:p>
-            <a:endParaRPr kumimoji="1" lang="ja-JP" altLang="en-US" dirty="0"/>
-          </a:p>
-        </p:txBody>
-      </p:sp>
-      <p:sp>
-        <p:nvSpPr>
-          <p:cNvPr id="4" name="正方形/長方形 3">
-            <a:extLst>
-              <a:ext uri="{FF2B5EF4-FFF2-40B4-BE49-F238E27FC236}">
-                <a16:creationId xmlns:a16="http://schemas.microsoft.com/office/drawing/2014/main" id="{B41A48C1-CF1C-6BCA-3BB9-E06EB3FCB57C}"/>
-              </a:ext>
-            </a:extLst>
-          </p:cNvPr>
-          <p:cNvSpPr/>
-          <p:nvPr/>
-        </p:nvSpPr>
-        <p:spPr>
-          <a:xfrm>
-            <a:off x="0" y="0"/>
-            <a:ext cx="12192000" cy="6858000"/>
-          </a:xfrm>
-          <a:prstGeom prst="rect">
-            <a:avLst/>
-          </a:prstGeom>
-          <a:solidFill>
-            <a:schemeClr val="bg2">
-              <a:lumMod val="50000"/>
-            </a:schemeClr>
-          </a:solidFill>
-        </p:spPr>
-        <p:style>
-          <a:lnRef idx="2">
-            <a:schemeClr val="accent1">
-              <a:shade val="50000"/>
-            </a:schemeClr>
-          </a:lnRef>
-          <a:fillRef idx="1">
-            <a:schemeClr val="accent1"/>
-          </a:fillRef>
-          <a:effectRef idx="0">
-            <a:schemeClr val="accent1"/>
-          </a:effectRef>
-          <a:fontRef idx="minor">
-            <a:schemeClr val="lt1"/>
-          </a:fontRef>
-        </p:style>
-        <p:txBody>
-          <a:bodyPr rtlCol="0" anchor="ctr"/>
-          <a:lstStyle/>
-          <a:p>
-            <a:pPr algn="ctr"/>
-            <a:endParaRPr kumimoji="1" lang="ja-JP" altLang="en-US"/>
-          </a:p>
-        </p:txBody>
-      </p:sp>
-      <p:sp>
-        <p:nvSpPr>
-          <p:cNvPr id="5" name="テキスト ボックス 4">
-            <a:extLst>
-              <a:ext uri="{FF2B5EF4-FFF2-40B4-BE49-F238E27FC236}">
-                <a16:creationId xmlns:a16="http://schemas.microsoft.com/office/drawing/2014/main" id="{BF9D26FC-B76F-4628-8639-B4BD4A31EC82}"/>
-              </a:ext>
-            </a:extLst>
-          </p:cNvPr>
-          <p:cNvSpPr txBox="1"/>
-          <p:nvPr/>
-        </p:nvSpPr>
-        <p:spPr>
-          <a:xfrm>
-            <a:off x="948906" y="363915"/>
-            <a:ext cx="10404894" cy="5755422"/>
-          </a:xfrm>
-          <a:prstGeom prst="rect">
-            <a:avLst/>
-          </a:prstGeom>
-          <a:noFill/>
-        </p:spPr>
-        <p:txBody>
-          <a:bodyPr wrap="square" rtlCol="0">
-            <a:spAutoFit/>
-          </a:bodyPr>
-          <a:lstStyle/>
-          <a:p>
-            <a:r>
-              <a:rPr lang="ja-JP" altLang="en-US" sz="2000" dirty="0">
-                <a:solidFill>
-                  <a:schemeClr val="bg1"/>
-                </a:solidFill>
-              </a:rPr>
-              <a:t>　</a:t>
-            </a:r>
-            <a:r>
-              <a:rPr lang="en-US" altLang="ja-JP" sz="2800" dirty="0">
-                <a:solidFill>
-                  <a:schemeClr val="bg1"/>
-                </a:solidFill>
-              </a:rPr>
-              <a:t>About this experiment</a:t>
-            </a:r>
-            <a:endParaRPr lang="en-US" altLang="ja-JP" sz="3200" dirty="0">
-              <a:solidFill>
-                <a:schemeClr val="bg1"/>
-              </a:solidFill>
-            </a:endParaRPr>
-          </a:p>
-          <a:p>
-            <a:r>
-              <a:rPr lang="en-US" altLang="ja-JP" sz="2000" dirty="0">
-                <a:solidFill>
-                  <a:schemeClr val="bg1"/>
-                </a:solidFill>
-              </a:rPr>
-              <a:t>This experiment is for the study of diagnostic aids in chest x-ray imaging. The experimenter will be asked to view two chest x-ray images and select one of them. There will be two sections, and we will explain the details of the selection criteria before each section. The time required is 15 minutes for each section and approximately 30 minutes overall.</a:t>
-            </a:r>
-          </a:p>
-          <a:p>
-            <a:endParaRPr lang="en-US" altLang="ja-JP" sz="2000" dirty="0">
-              <a:solidFill>
-                <a:schemeClr val="bg1"/>
-              </a:solidFill>
-            </a:endParaRPr>
-          </a:p>
-          <a:p>
-            <a:r>
-              <a:rPr lang="en-US" altLang="ja-JP" sz="2000" dirty="0">
-                <a:solidFill>
-                  <a:schemeClr val="bg1"/>
-                </a:solidFill>
-              </a:rPr>
-              <a:t>The experiment may cause eye fatigue. If you feel unwell, please inform the person in charge of the experiment at any time. And we will suspend or terminate the experiment.</a:t>
-            </a:r>
-          </a:p>
-          <a:p>
-            <a:endParaRPr lang="en-US" altLang="ja-JP" sz="2000" dirty="0">
-              <a:solidFill>
-                <a:schemeClr val="bg1"/>
-              </a:solidFill>
-            </a:endParaRPr>
-          </a:p>
-          <a:p>
-            <a:r>
-              <a:rPr lang="en-US" altLang="ja-JP" sz="2000" dirty="0">
-                <a:solidFill>
-                  <a:schemeClr val="bg1"/>
-                </a:solidFill>
-              </a:rPr>
-              <a:t>The data measured in this experiment will be used for research on diagnostic aids in X-ray imaging. The research results may be published in academic publications (papers, presentations at academic conferences, etc.) as well as for the purpose of publicizing the research activities of the </a:t>
-            </a:r>
-            <a:r>
-              <a:rPr lang="en-US" altLang="ja-JP" sz="2000" dirty="0" err="1">
-                <a:solidFill>
-                  <a:schemeClr val="bg1"/>
-                </a:solidFill>
-              </a:rPr>
-              <a:t>Oishi</a:t>
-            </a:r>
-            <a:r>
-              <a:rPr lang="en-US" altLang="ja-JP" sz="2000" dirty="0">
-                <a:solidFill>
-                  <a:schemeClr val="bg1"/>
-                </a:solidFill>
-              </a:rPr>
-              <a:t> Laboratory. When analyzing and publishing experimental data, all data will be anonymized, and privacy information will not be disclosed.</a:t>
-            </a:r>
-            <a:endParaRPr kumimoji="1" lang="en-US" altLang="ja-JP" sz="2000" dirty="0">
-              <a:solidFill>
-                <a:schemeClr val="bg1"/>
-              </a:solidFill>
-            </a:endParaRPr>
-          </a:p>
-          <a:p>
-            <a:endParaRPr lang="en-US" altLang="ja-JP" sz="2000" dirty="0">
-              <a:solidFill>
-                <a:schemeClr val="bg1"/>
-              </a:solidFill>
-            </a:endParaRPr>
-          </a:p>
-          <a:p>
-            <a:r>
-              <a:rPr lang="en-US" altLang="ja-JP" sz="2000" dirty="0">
-                <a:solidFill>
-                  <a:schemeClr val="bg1"/>
-                </a:solidFill>
-              </a:rPr>
-              <a:t>Press Space key to go next.</a:t>
-            </a:r>
-            <a:endParaRPr kumimoji="1" lang="en-US" altLang="ja-JP" sz="2000" dirty="0">
-              <a:solidFill>
-                <a:schemeClr val="bg1"/>
-              </a:solidFill>
-            </a:endParaRPr>
-          </a:p>
-        </p:txBody>
-      </p:sp>
-    </p:spTree>
-    <p:extLst>
-      <p:ext uri="{BB962C8B-B14F-4D97-AF65-F5344CB8AC3E}">
-        <p14:creationId xmlns:p14="http://schemas.microsoft.com/office/powerpoint/2010/main" val="1285185960"/>
       </p:ext>
     </p:extLst>
   </p:cSld>

--- a/tex/ethicsreview/ethics_review_visibility/別紙2評価実験説明.pptx
+++ b/tex/ethicsreview/ethics_review_visibility/別紙2評価実験説明.pptx
@@ -2407,6 +2407,95 @@
           </a:p>
         </p:txBody>
       </p:sp>
+      <p:grpSp>
+        <p:nvGrpSpPr>
+          <p:cNvPr id="9" name="グループ化 8">
+            <a:extLst>
+              <a:ext uri="{FF2B5EF4-FFF2-40B4-BE49-F238E27FC236}">
+                <a16:creationId xmlns:a16="http://schemas.microsoft.com/office/drawing/2014/main" id="{3B84175B-CA6D-8A2F-7872-20E7FB818A34}"/>
+              </a:ext>
+            </a:extLst>
+          </p:cNvPr>
+          <p:cNvGrpSpPr/>
+          <p:nvPr/>
+        </p:nvGrpSpPr>
+        <p:grpSpPr>
+          <a:xfrm>
+            <a:off x="601853" y="2029180"/>
+            <a:ext cx="3789056" cy="2799639"/>
+            <a:chOff x="674590" y="1865879"/>
+            <a:chExt cx="3789056" cy="2799639"/>
+          </a:xfrm>
+        </p:grpSpPr>
+        <p:pic>
+          <p:nvPicPr>
+            <p:cNvPr id="8" name="図 7">
+              <a:extLst>
+                <a:ext uri="{FF2B5EF4-FFF2-40B4-BE49-F238E27FC236}">
+                  <a16:creationId xmlns:a16="http://schemas.microsoft.com/office/drawing/2014/main" id="{8F5E52EA-BC18-4BD3-FD47-2D28A0D72435}"/>
+                </a:ext>
+              </a:extLst>
+            </p:cNvPr>
+            <p:cNvPicPr>
+              <a:picLocks noChangeAspect="1"/>
+            </p:cNvPicPr>
+            <p:nvPr/>
+          </p:nvPicPr>
+          <p:blipFill>
+            <a:blip r:embed="rId2"/>
+            <a:stretch>
+              <a:fillRect/>
+            </a:stretch>
+          </p:blipFill>
+          <p:spPr>
+            <a:xfrm>
+              <a:off x="674590" y="2456054"/>
+              <a:ext cx="3789056" cy="1945892"/>
+            </a:xfrm>
+            <a:prstGeom prst="rect">
+              <a:avLst/>
+            </a:prstGeom>
+          </p:spPr>
+        </p:pic>
+        <p:pic>
+          <p:nvPicPr>
+            <p:cNvPr id="4" name="図 3">
+              <a:extLst>
+                <a:ext uri="{FF2B5EF4-FFF2-40B4-BE49-F238E27FC236}">
+                  <a16:creationId xmlns:a16="http://schemas.microsoft.com/office/drawing/2014/main" id="{6E2910DB-18C9-630A-D99B-0171144EDB6A}"/>
+                </a:ext>
+              </a:extLst>
+            </p:cNvPr>
+            <p:cNvPicPr>
+              <a:picLocks noChangeAspect="1"/>
+            </p:cNvPicPr>
+            <p:nvPr/>
+          </p:nvPicPr>
+          <p:blipFill rotWithShape="1">
+            <a:blip r:embed="rId3">
+              <a:alphaModFix amt="42000"/>
+              <a:extLst>
+                <a:ext uri="{28A0092B-C50C-407E-A947-70E740481C1C}">
+                  <a14:useLocalDpi xmlns:a14="http://schemas.microsoft.com/office/drawing/2010/main" val="0"/>
+                </a:ext>
+              </a:extLst>
+            </a:blip>
+            <a:srcRect l="24283" r="24283"/>
+            <a:stretch>
+              <a:fillRect/>
+            </a:stretch>
+          </p:blipFill>
+          <p:spPr>
+            <a:xfrm>
+              <a:off x="1013435" y="1865879"/>
+              <a:ext cx="2799639" cy="2799639"/>
+            </a:xfrm>
+            <a:prstGeom prst="rect">
+              <a:avLst/>
+            </a:prstGeom>
+          </p:spPr>
+        </p:pic>
+      </p:grpSp>
     </p:spTree>
     <p:extLst>
       <p:ext uri="{BB962C8B-B14F-4D97-AF65-F5344CB8AC3E}">
@@ -2555,7 +2644,7 @@
                   <a:schemeClr val="bg1"/>
                 </a:solidFill>
               </a:rPr>
-              <a:t>の左右矢印キーを用いて、下半分の刺激画像のぼけ方を、上半分におけるボケ方と一致させてください。</a:t>
+              <a:t>の左右矢印キーを用いて、下半分の刺激画像のぼけ方を、上半分におけるぼけ方と一致させてください。右に行くほどぼけが強くなります。</a:t>
             </a:r>
             <a:endParaRPr kumimoji="1" lang="en-US" altLang="ja-JP" sz="2000" dirty="0">
               <a:solidFill>
@@ -2757,7 +2846,7 @@
                   <a:schemeClr val="bg1"/>
                 </a:solidFill>
               </a:rPr>
-              <a:t>の左右矢印キーを用いて、下半分の刺激画像の見え方を、上半分の見え方と一致させてください。</a:t>
+              <a:t>の左右矢印キーを用いて、下半分の刺激画像の見え方を、上半分の見え方と一致させてください。右に行くほど見え方が濃くなります。</a:t>
             </a:r>
             <a:endParaRPr kumimoji="1" lang="en-US" altLang="ja-JP" sz="2000" dirty="0">
               <a:solidFill>
@@ -2819,6 +2908,43 @@
           </a:p>
         </p:txBody>
       </p:sp>
+      <p:pic>
+        <p:nvPicPr>
+          <p:cNvPr id="4" name="図 3">
+            <a:extLst>
+              <a:ext uri="{FF2B5EF4-FFF2-40B4-BE49-F238E27FC236}">
+                <a16:creationId xmlns:a16="http://schemas.microsoft.com/office/drawing/2014/main" id="{9B7854CB-ADCD-EA94-0FB2-D78104FAFCB4}"/>
+              </a:ext>
+            </a:extLst>
+          </p:cNvPr>
+          <p:cNvPicPr>
+            <a:picLocks noChangeAspect="1"/>
+          </p:cNvPicPr>
+          <p:nvPr/>
+        </p:nvPicPr>
+        <p:blipFill rotWithShape="1">
+          <a:blip r:embed="rId2">
+            <a:extLst>
+              <a:ext uri="{28A0092B-C50C-407E-A947-70E740481C1C}">
+                <a14:useLocalDpi xmlns:a14="http://schemas.microsoft.com/office/drawing/2010/main" val="0"/>
+              </a:ext>
+            </a:extLst>
+          </a:blip>
+          <a:srcRect l="24295" r="24295"/>
+          <a:stretch>
+            <a:fillRect/>
+          </a:stretch>
+        </p:blipFill>
+        <p:spPr>
+          <a:xfrm flipH="1">
+            <a:off x="462121" y="1161965"/>
+            <a:ext cx="3829324" cy="3880044"/>
+          </a:xfrm>
+          <a:prstGeom prst="rect">
+            <a:avLst/>
+          </a:prstGeom>
+        </p:spPr>
+      </p:pic>
     </p:spTree>
     <p:extLst>
       <p:ext uri="{BB962C8B-B14F-4D97-AF65-F5344CB8AC3E}">

--- a/tex/ethicsreview/ethics_review_visibility/別紙2評価実験説明.pptx
+++ b/tex/ethicsreview/ethics_review_visibility/別紙2評価実験説明.pptx
@@ -307,7 +307,7 @@
           <a:p>
             <a:fld id="{416BA5EB-ECB0-409F-8DA9-B63B0BA08A82}" type="datetimeFigureOut">
               <a:rPr kumimoji="1" lang="ja-JP" altLang="en-US" smtClean="0"/>
-              <a:t>2026/6/9</a:t>
+              <a:t>2026/6/11</a:t>
             </a:fld>
             <a:endParaRPr kumimoji="1" lang="ja-JP" altLang="en-US"/>
           </a:p>
@@ -539,7 +539,7 @@
           <a:p>
             <a:fld id="{416BA5EB-ECB0-409F-8DA9-B63B0BA08A82}" type="datetimeFigureOut">
               <a:rPr kumimoji="1" lang="ja-JP" altLang="en-US" smtClean="0"/>
-              <a:t>2026/6/9</a:t>
+              <a:t>2026/6/11</a:t>
             </a:fld>
             <a:endParaRPr kumimoji="1" lang="ja-JP" altLang="en-US"/>
           </a:p>
@@ -688,7 +688,7 @@
           <a:p>
             <a:fld id="{416BA5EB-ECB0-409F-8DA9-B63B0BA08A82}" type="datetimeFigureOut">
               <a:rPr kumimoji="1" lang="ja-JP" altLang="en-US" smtClean="0"/>
-              <a:t>2026/6/9</a:t>
+              <a:t>2026/6/11</a:t>
             </a:fld>
             <a:endParaRPr kumimoji="1" lang="ja-JP" altLang="en-US"/>
           </a:p>
@@ -933,7 +933,7 @@
           <a:p>
             <a:fld id="{416BA5EB-ECB0-409F-8DA9-B63B0BA08A82}" type="datetimeFigureOut">
               <a:rPr kumimoji="1" lang="ja-JP" altLang="en-US" smtClean="0"/>
-              <a:t>2026/6/9</a:t>
+              <a:t>2026/6/11</a:t>
             </a:fld>
             <a:endParaRPr kumimoji="1" lang="ja-JP" altLang="en-US"/>
           </a:p>
@@ -1880,7 +1880,7 @@
         <p:spPr>
           <a:xfrm>
             <a:off x="893553" y="705177"/>
-            <a:ext cx="10404894" cy="2639184"/>
+            <a:ext cx="10404894" cy="3870290"/>
           </a:xfrm>
           <a:prstGeom prst="rect">
             <a:avLst/>
@@ -1989,6 +1989,84 @@
                 </a:solidFill>
               </a:rPr>
               <a:t>刺激の見え方を一致させるタスクの際は、一致点の前後を行き来するように、慎重に行ってください。</a:t>
+            </a:r>
+            <a:endParaRPr kumimoji="1" lang="en-US" altLang="ja-JP" sz="2000" dirty="0">
+              <a:solidFill>
+                <a:schemeClr val="bg1"/>
+              </a:solidFill>
+            </a:endParaRPr>
+          </a:p>
+          <a:p>
+            <a:endParaRPr kumimoji="1" lang="en-US" altLang="ja-JP" sz="2000" dirty="0">
+              <a:solidFill>
+                <a:schemeClr val="bg1"/>
+              </a:solidFill>
+            </a:endParaRPr>
+          </a:p>
+          <a:p>
+            <a:r>
+              <a:rPr kumimoji="1" lang="ja-JP" altLang="en-US" sz="2000">
+                <a:solidFill>
+                  <a:schemeClr val="bg1"/>
+                </a:solidFill>
+              </a:rPr>
+              <a:t>なお、キャリブレーションや調整実験では、性質上</a:t>
+            </a:r>
+            <a:r>
+              <a:rPr kumimoji="1" lang="ja-JP" altLang="en-US" sz="2000" dirty="0">
+                <a:solidFill>
+                  <a:schemeClr val="bg1"/>
+                </a:solidFill>
+              </a:rPr>
+              <a:t>、前景ディスプレイの</a:t>
+            </a:r>
+            <a:r>
+              <a:rPr kumimoji="1" lang="en-US" altLang="ja-JP" sz="2000" dirty="0">
+                <a:solidFill>
+                  <a:schemeClr val="bg1"/>
+                </a:solidFill>
+              </a:rPr>
+              <a:t>Test</a:t>
+            </a:r>
+            <a:r>
+              <a:rPr kumimoji="1" lang="ja-JP" altLang="en-US" sz="2000" dirty="0">
+                <a:solidFill>
+                  <a:schemeClr val="bg1"/>
+                </a:solidFill>
+              </a:rPr>
+              <a:t>刺激にに焦点を合わせづらい場合があります。この場合は、</a:t>
+            </a:r>
+            <a:r>
+              <a:rPr kumimoji="1" lang="en-US" altLang="ja-JP" sz="2000" dirty="0">
+                <a:solidFill>
+                  <a:schemeClr val="bg1"/>
+                </a:solidFill>
+              </a:rPr>
+              <a:t>Test</a:t>
+            </a:r>
+            <a:r>
+              <a:rPr kumimoji="1" lang="ja-JP" altLang="en-US" sz="2000" dirty="0">
+                <a:solidFill>
+                  <a:schemeClr val="bg1"/>
+                </a:solidFill>
+              </a:rPr>
+              <a:t>刺激は凝視せず、</a:t>
+            </a:r>
+            <a:r>
+              <a:rPr kumimoji="1" lang="en-US" altLang="ja-JP" sz="2000" dirty="0">
+                <a:solidFill>
+                  <a:schemeClr val="bg1"/>
+                </a:solidFill>
+              </a:rPr>
+              <a:t>Reference</a:t>
+            </a:r>
+            <a:r>
+              <a:rPr kumimoji="1" lang="ja-JP" altLang="en-US" sz="2000" dirty="0">
+                <a:solidFill>
+                  <a:schemeClr val="bg1"/>
+                </a:solidFill>
+              </a:rPr>
+              <a:t>刺激との間で素早く視線を移動させることで、焦点の変化を防ぐようお願いします。</a:t>
             </a:r>
             <a:endParaRPr kumimoji="1" lang="en-US" altLang="ja-JP" sz="2000" dirty="0">
               <a:solidFill>

--- a/tex/ethicsreview/ethics_review_visibility/別紙2評価実験説明.pptx
+++ b/tex/ethicsreview/ethics_review_visibility/別紙2評価実験説明.pptx
@@ -13,8 +13,25 @@
     <p:sldId id="269" r:id="rId7"/>
     <p:sldId id="273" r:id="rId8"/>
     <p:sldId id="276" r:id="rId9"/>
-    <p:sldId id="274" r:id="rId10"/>
-    <p:sldId id="262" r:id="rId11"/>
+    <p:sldId id="286" r:id="rId10"/>
+    <p:sldId id="287" r:id="rId11"/>
+    <p:sldId id="288" r:id="rId12"/>
+    <p:sldId id="289" r:id="rId13"/>
+    <p:sldId id="290" r:id="rId14"/>
+    <p:sldId id="274" r:id="rId15"/>
+    <p:sldId id="277" r:id="rId16"/>
+    <p:sldId id="278" r:id="rId17"/>
+    <p:sldId id="279" r:id="rId18"/>
+    <p:sldId id="280" r:id="rId19"/>
+    <p:sldId id="281" r:id="rId20"/>
+    <p:sldId id="282" r:id="rId21"/>
+    <p:sldId id="283" r:id="rId22"/>
+    <p:sldId id="284" r:id="rId23"/>
+    <p:sldId id="291" r:id="rId24"/>
+    <p:sldId id="292" r:id="rId25"/>
+    <p:sldId id="293" r:id="rId26"/>
+    <p:sldId id="294" r:id="rId27"/>
+    <p:sldId id="285" r:id="rId28"/>
   </p:sldIdLst>
   <p:sldSz cx="12192000" cy="6858000"/>
   <p:notesSz cx="6858000" cy="9144000"/>
@@ -307,7 +324,7 @@
           <a:p>
             <a:fld id="{416BA5EB-ECB0-409F-8DA9-B63B0BA08A82}" type="datetimeFigureOut">
               <a:rPr kumimoji="1" lang="ja-JP" altLang="en-US" smtClean="0"/>
-              <a:t>2026/6/11</a:t>
+              <a:t>2026/6/15</a:t>
             </a:fld>
             <a:endParaRPr kumimoji="1" lang="ja-JP" altLang="en-US"/>
           </a:p>
@@ -539,7 +556,7 @@
           <a:p>
             <a:fld id="{416BA5EB-ECB0-409F-8DA9-B63B0BA08A82}" type="datetimeFigureOut">
               <a:rPr kumimoji="1" lang="ja-JP" altLang="en-US" smtClean="0"/>
-              <a:t>2026/6/11</a:t>
+              <a:t>2026/6/15</a:t>
             </a:fld>
             <a:endParaRPr kumimoji="1" lang="ja-JP" altLang="en-US"/>
           </a:p>
@@ -688,7 +705,7 @@
           <a:p>
             <a:fld id="{416BA5EB-ECB0-409F-8DA9-B63B0BA08A82}" type="datetimeFigureOut">
               <a:rPr kumimoji="1" lang="ja-JP" altLang="en-US" smtClean="0"/>
-              <a:t>2026/6/11</a:t>
+              <a:t>2026/6/15</a:t>
             </a:fld>
             <a:endParaRPr kumimoji="1" lang="ja-JP" altLang="en-US"/>
           </a:p>
@@ -933,7 +950,7 @@
           <a:p>
             <a:fld id="{416BA5EB-ECB0-409F-8DA9-B63B0BA08A82}" type="datetimeFigureOut">
               <a:rPr kumimoji="1" lang="ja-JP" altLang="en-US" smtClean="0"/>
-              <a:t>2026/6/11</a:t>
+              <a:t>2026/6/15</a:t>
             </a:fld>
             <a:endParaRPr kumimoji="1" lang="ja-JP" altLang="en-US"/>
           </a:p>
@@ -1587,6 +1604,1104 @@
 <file path=ppt/slides/slide10.xml><?xml version="1.0" encoding="utf-8"?>
 <p:sld xmlns:a="http://schemas.openxmlformats.org/drawingml/2006/main" xmlns:r="http://schemas.openxmlformats.org/officeDocument/2006/relationships" xmlns:p="http://schemas.openxmlformats.org/presentationml/2006/main">
   <p:cSld>
+    <p:bg>
+      <p:bgPr>
+        <a:solidFill>
+          <a:schemeClr val="tx2"/>
+        </a:solidFill>
+        <a:effectLst/>
+      </p:bgPr>
+    </p:bg>
+    <p:spTree>
+      <p:nvGrpSpPr>
+        <p:cNvPr id="1" name="">
+          <a:extLst>
+            <a:ext uri="{FF2B5EF4-FFF2-40B4-BE49-F238E27FC236}">
+              <a16:creationId xmlns:a16="http://schemas.microsoft.com/office/drawing/2014/main" id="{82702AF8-6931-1E9A-708B-718C3D64713C}"/>
+            </a:ext>
+          </a:extLst>
+        </p:cNvPr>
+        <p:cNvGrpSpPr/>
+        <p:nvPr/>
+      </p:nvGrpSpPr>
+      <p:grpSpPr>
+        <a:xfrm>
+          <a:off x="0" y="0"/>
+          <a:ext cx="0" cy="0"/>
+          <a:chOff x="0" y="0"/>
+          <a:chExt cx="0" cy="0"/>
+        </a:xfrm>
+      </p:grpSpPr>
+      <p:sp>
+        <p:nvSpPr>
+          <p:cNvPr id="3" name="テキスト ボックス 2">
+            <a:extLst>
+              <a:ext uri="{FF2B5EF4-FFF2-40B4-BE49-F238E27FC236}">
+                <a16:creationId xmlns:a16="http://schemas.microsoft.com/office/drawing/2014/main" id="{68A58177-C553-0287-15D7-7841138801C4}"/>
+              </a:ext>
+            </a:extLst>
+          </p:cNvPr>
+          <p:cNvSpPr txBox="1"/>
+          <p:nvPr/>
+        </p:nvSpPr>
+        <p:spPr>
+          <a:xfrm>
+            <a:off x="4655127" y="705177"/>
+            <a:ext cx="6643320" cy="4793620"/>
+          </a:xfrm>
+          <a:prstGeom prst="rect">
+            <a:avLst/>
+          </a:prstGeom>
+          <a:noFill/>
+        </p:spPr>
+        <p:txBody>
+          <a:bodyPr wrap="square" rtlCol="0">
+            <a:spAutoFit/>
+          </a:bodyPr>
+          <a:lstStyle/>
+          <a:p>
+            <a:r>
+              <a:rPr lang="ja-JP" altLang="en-US" sz="2550" b="1" dirty="0">
+                <a:solidFill>
+                  <a:schemeClr val="bg1"/>
+                </a:solidFill>
+                <a:latin typeface="+mj-ea"/>
+                <a:ea typeface="+mj-ea"/>
+              </a:rPr>
+              <a:t>ぼけキャリブレーション</a:t>
+            </a:r>
+            <a:endParaRPr lang="en-US" altLang="ja-JP" sz="2000" dirty="0">
+              <a:solidFill>
+                <a:schemeClr val="bg1"/>
+              </a:solidFill>
+            </a:endParaRPr>
+          </a:p>
+          <a:p>
+            <a:r>
+              <a:rPr kumimoji="1" lang="ja-JP" altLang="en-US" sz="2000" dirty="0">
+                <a:solidFill>
+                  <a:schemeClr val="bg1"/>
+                </a:solidFill>
+              </a:rPr>
+              <a:t>中央の表示領域には、上下に同じ刺激画像とマーカーが表示されています。このうち、上半分の刺激画像のみ、奥のディスプレイに表示されています。</a:t>
+            </a:r>
+            <a:endParaRPr kumimoji="1" lang="en-US" altLang="ja-JP" sz="2000" dirty="0">
+              <a:solidFill>
+                <a:schemeClr val="bg1"/>
+              </a:solidFill>
+            </a:endParaRPr>
+          </a:p>
+          <a:p>
+            <a:endParaRPr kumimoji="1" lang="en-US" altLang="ja-JP" sz="2000" dirty="0">
+              <a:solidFill>
+                <a:schemeClr val="bg1"/>
+              </a:solidFill>
+            </a:endParaRPr>
+          </a:p>
+          <a:p>
+            <a:r>
+              <a:rPr kumimoji="1" lang="ja-JP" altLang="en-US" sz="2000" dirty="0">
+                <a:solidFill>
+                  <a:schemeClr val="bg1"/>
+                </a:solidFill>
+              </a:rPr>
+              <a:t>まず、上半分の領域において、手前のマーカーに焦点を合わせつつ、奥の刺激画像のぼけを確認してください。</a:t>
+            </a:r>
+            <a:endParaRPr kumimoji="1" lang="en-US" altLang="ja-JP" sz="2000" dirty="0">
+              <a:solidFill>
+                <a:schemeClr val="bg1"/>
+              </a:solidFill>
+            </a:endParaRPr>
+          </a:p>
+          <a:p>
+            <a:r>
+              <a:rPr kumimoji="1" lang="ja-JP" altLang="en-US" sz="2000" dirty="0">
+                <a:solidFill>
+                  <a:schemeClr val="bg1"/>
+                </a:solidFill>
+              </a:rPr>
+              <a:t>その後、操作用</a:t>
+            </a:r>
+            <a:r>
+              <a:rPr kumimoji="1" lang="en-US" altLang="ja-JP" sz="2000" dirty="0">
+                <a:solidFill>
+                  <a:schemeClr val="bg1"/>
+                </a:solidFill>
+              </a:rPr>
+              <a:t>PC</a:t>
+            </a:r>
+            <a:r>
+              <a:rPr kumimoji="1" lang="ja-JP" altLang="en-US" sz="2000" dirty="0">
+                <a:solidFill>
+                  <a:schemeClr val="bg1"/>
+                </a:solidFill>
+              </a:rPr>
+              <a:t>の左右矢印キーを用いて、下半分の刺激画像のぼけ方を、上半分におけるぼけ方と一致させてください。右に行くほどぼけが強くなります。</a:t>
+            </a:r>
+            <a:endParaRPr kumimoji="1" lang="en-US" altLang="ja-JP" sz="2000" dirty="0">
+              <a:solidFill>
+                <a:schemeClr val="bg1"/>
+              </a:solidFill>
+            </a:endParaRPr>
+          </a:p>
+          <a:p>
+            <a:r>
+              <a:rPr kumimoji="1" lang="ja-JP" altLang="en-US" sz="2000" dirty="0">
+                <a:solidFill>
+                  <a:schemeClr val="bg1"/>
+                </a:solidFill>
+              </a:rPr>
+              <a:t>これを、完全に一致すると感じるまで繰り返してください。</a:t>
+            </a:r>
+            <a:endParaRPr kumimoji="1" lang="en-US" altLang="ja-JP" sz="2000" dirty="0">
+              <a:solidFill>
+                <a:schemeClr val="bg1"/>
+              </a:solidFill>
+            </a:endParaRPr>
+          </a:p>
+          <a:p>
+            <a:endParaRPr kumimoji="1" lang="en-US" altLang="ja-JP" sz="2000" dirty="0">
+              <a:solidFill>
+                <a:schemeClr val="bg1"/>
+              </a:solidFill>
+            </a:endParaRPr>
+          </a:p>
+          <a:p>
+            <a:endParaRPr lang="en-US" altLang="ja-JP" sz="2000" dirty="0">
+              <a:solidFill>
+                <a:schemeClr val="bg1"/>
+              </a:solidFill>
+            </a:endParaRPr>
+          </a:p>
+          <a:p>
+            <a:r>
+              <a:rPr kumimoji="1" lang="ja-JP" altLang="en-US" sz="2000" dirty="0">
+                <a:solidFill>
+                  <a:schemeClr val="bg1"/>
+                </a:solidFill>
+              </a:rPr>
+              <a:t>下矢印キーで確定し、次の刺激へ進みます</a:t>
+            </a:r>
+            <a:endParaRPr kumimoji="1" lang="en-US" altLang="ja-JP" sz="2000" dirty="0">
+              <a:solidFill>
+                <a:schemeClr val="bg1"/>
+              </a:solidFill>
+            </a:endParaRPr>
+          </a:p>
+        </p:txBody>
+      </p:sp>
+      <p:pic>
+        <p:nvPicPr>
+          <p:cNvPr id="4" name="図 3">
+            <a:extLst>
+              <a:ext uri="{FF2B5EF4-FFF2-40B4-BE49-F238E27FC236}">
+                <a16:creationId xmlns:a16="http://schemas.microsoft.com/office/drawing/2014/main" id="{5A466B92-6E6A-F05E-74B5-903A05E2FD72}"/>
+              </a:ext>
+            </a:extLst>
+          </p:cNvPr>
+          <p:cNvPicPr>
+            <a:picLocks noChangeAspect="1"/>
+          </p:cNvPicPr>
+          <p:nvPr/>
+        </p:nvPicPr>
+        <p:blipFill>
+          <a:blip r:embed="rId2">
+            <a:extLst>
+              <a:ext uri="{28A0092B-C50C-407E-A947-70E740481C1C}">
+                <a14:useLocalDpi xmlns:a14="http://schemas.microsoft.com/office/drawing/2010/main" val="0"/>
+              </a:ext>
+            </a:extLst>
+          </a:blip>
+          <a:stretch>
+            <a:fillRect/>
+          </a:stretch>
+        </p:blipFill>
+        <p:spPr>
+          <a:xfrm>
+            <a:off x="505486" y="1089174"/>
+            <a:ext cx="3744000" cy="4679652"/>
+          </a:xfrm>
+          <a:prstGeom prst="rect">
+            <a:avLst/>
+          </a:prstGeom>
+        </p:spPr>
+      </p:pic>
+    </p:spTree>
+    <p:extLst>
+      <p:ext uri="{BB962C8B-B14F-4D97-AF65-F5344CB8AC3E}">
+        <p14:creationId xmlns:p14="http://schemas.microsoft.com/office/powerpoint/2010/main" val="1800344402"/>
+      </p:ext>
+    </p:extLst>
+  </p:cSld>
+  <p:clrMapOvr>
+    <a:masterClrMapping/>
+  </p:clrMapOvr>
+</p:sld>
+</file>
+
+<file path=ppt/slides/slide11.xml><?xml version="1.0" encoding="utf-8"?>
+<p:sld xmlns:a="http://schemas.openxmlformats.org/drawingml/2006/main" xmlns:r="http://schemas.openxmlformats.org/officeDocument/2006/relationships" xmlns:p="http://schemas.openxmlformats.org/presentationml/2006/main">
+  <p:cSld>
+    <p:bg>
+      <p:bgPr>
+        <a:solidFill>
+          <a:schemeClr val="tx2"/>
+        </a:solidFill>
+        <a:effectLst/>
+      </p:bgPr>
+    </p:bg>
+    <p:spTree>
+      <p:nvGrpSpPr>
+        <p:cNvPr id="1" name="">
+          <a:extLst>
+            <a:ext uri="{FF2B5EF4-FFF2-40B4-BE49-F238E27FC236}">
+              <a16:creationId xmlns:a16="http://schemas.microsoft.com/office/drawing/2014/main" id="{EF3C46E1-4D72-07E6-3E88-5BF28B26A08A}"/>
+            </a:ext>
+          </a:extLst>
+        </p:cNvPr>
+        <p:cNvGrpSpPr/>
+        <p:nvPr/>
+      </p:nvGrpSpPr>
+      <p:grpSpPr>
+        <a:xfrm>
+          <a:off x="0" y="0"/>
+          <a:ext cx="0" cy="0"/>
+          <a:chOff x="0" y="0"/>
+          <a:chExt cx="0" cy="0"/>
+        </a:xfrm>
+      </p:grpSpPr>
+      <p:sp>
+        <p:nvSpPr>
+          <p:cNvPr id="2" name="テキスト ボックス 1">
+            <a:extLst>
+              <a:ext uri="{FF2B5EF4-FFF2-40B4-BE49-F238E27FC236}">
+                <a16:creationId xmlns:a16="http://schemas.microsoft.com/office/drawing/2014/main" id="{72BB2A4B-519D-9B16-DF99-80D77C1307EF}"/>
+              </a:ext>
+            </a:extLst>
+          </p:cNvPr>
+          <p:cNvSpPr txBox="1"/>
+          <p:nvPr/>
+        </p:nvSpPr>
+        <p:spPr>
+          <a:xfrm>
+            <a:off x="4655127" y="705177"/>
+            <a:ext cx="6643320" cy="4793620"/>
+          </a:xfrm>
+          <a:prstGeom prst="rect">
+            <a:avLst/>
+          </a:prstGeom>
+          <a:noFill/>
+        </p:spPr>
+        <p:txBody>
+          <a:bodyPr wrap="square" rtlCol="0">
+            <a:spAutoFit/>
+          </a:bodyPr>
+          <a:lstStyle/>
+          <a:p>
+            <a:r>
+              <a:rPr lang="ja-JP" altLang="en-US" sz="2550" b="1" dirty="0">
+                <a:solidFill>
+                  <a:schemeClr val="bg1"/>
+                </a:solidFill>
+                <a:latin typeface="+mj-ea"/>
+                <a:ea typeface="+mj-ea"/>
+              </a:rPr>
+              <a:t>調整実験</a:t>
+            </a:r>
+            <a:endParaRPr lang="en-US" altLang="ja-JP" sz="2000" dirty="0">
+              <a:solidFill>
+                <a:schemeClr val="bg1"/>
+              </a:solidFill>
+            </a:endParaRPr>
+          </a:p>
+          <a:p>
+            <a:r>
+              <a:rPr kumimoji="1" lang="ja-JP" altLang="en-US" sz="2000" dirty="0">
+                <a:solidFill>
+                  <a:schemeClr val="bg1"/>
+                </a:solidFill>
+              </a:rPr>
+              <a:t>中央の表示領域には、上下に刺激画像が表示されています。下半分の画像は、上半分の画像の背景に、ノイズを加えたものです。</a:t>
+            </a:r>
+            <a:endParaRPr kumimoji="1" lang="en-US" altLang="ja-JP" sz="2000" dirty="0">
+              <a:solidFill>
+                <a:schemeClr val="bg1"/>
+              </a:solidFill>
+            </a:endParaRPr>
+          </a:p>
+          <a:p>
+            <a:endParaRPr kumimoji="1" lang="en-US" altLang="ja-JP" sz="2000" dirty="0">
+              <a:solidFill>
+                <a:schemeClr val="bg1"/>
+              </a:solidFill>
+            </a:endParaRPr>
+          </a:p>
+          <a:p>
+            <a:r>
+              <a:rPr kumimoji="1" lang="ja-JP" altLang="en-US" sz="2000" dirty="0">
+                <a:solidFill>
+                  <a:schemeClr val="bg1"/>
+                </a:solidFill>
+              </a:rPr>
+              <a:t>まず、上半分の領域において、刺激画像の見え方を確認してください。</a:t>
+            </a:r>
+            <a:endParaRPr kumimoji="1" lang="en-US" altLang="ja-JP" sz="2000" dirty="0">
+              <a:solidFill>
+                <a:schemeClr val="bg1"/>
+              </a:solidFill>
+            </a:endParaRPr>
+          </a:p>
+          <a:p>
+            <a:r>
+              <a:rPr kumimoji="1" lang="ja-JP" altLang="en-US" sz="2000" dirty="0">
+                <a:solidFill>
+                  <a:schemeClr val="bg1"/>
+                </a:solidFill>
+              </a:rPr>
+              <a:t>その後、操作用</a:t>
+            </a:r>
+            <a:r>
+              <a:rPr kumimoji="1" lang="en-US" altLang="ja-JP" sz="2000" dirty="0">
+                <a:solidFill>
+                  <a:schemeClr val="bg1"/>
+                </a:solidFill>
+              </a:rPr>
+              <a:t>PC</a:t>
+            </a:r>
+            <a:r>
+              <a:rPr kumimoji="1" lang="ja-JP" altLang="en-US" sz="2000" dirty="0">
+                <a:solidFill>
+                  <a:schemeClr val="bg1"/>
+                </a:solidFill>
+              </a:rPr>
+              <a:t>の左右矢印キーを用いて、下半分の刺激画像の見え方を、上半分の見え方と一致させてください。右に行くほど見え方が濃くなります。</a:t>
+            </a:r>
+            <a:endParaRPr kumimoji="1" lang="en-US" altLang="ja-JP" sz="2000" dirty="0">
+              <a:solidFill>
+                <a:schemeClr val="bg1"/>
+              </a:solidFill>
+            </a:endParaRPr>
+          </a:p>
+          <a:p>
+            <a:r>
+              <a:rPr kumimoji="1" lang="ja-JP" altLang="en-US" sz="2000" dirty="0">
+                <a:solidFill>
+                  <a:schemeClr val="bg1"/>
+                </a:solidFill>
+              </a:rPr>
+              <a:t>これを、完全に一致すると感じるまで繰り返してください。</a:t>
+            </a:r>
+            <a:endParaRPr kumimoji="1" lang="en-US" altLang="ja-JP" sz="2000" dirty="0">
+              <a:solidFill>
+                <a:schemeClr val="bg1"/>
+              </a:solidFill>
+            </a:endParaRPr>
+          </a:p>
+          <a:p>
+            <a:endParaRPr kumimoji="1" lang="en-US" altLang="ja-JP" sz="2000" dirty="0">
+              <a:solidFill>
+                <a:schemeClr val="bg1"/>
+              </a:solidFill>
+            </a:endParaRPr>
+          </a:p>
+          <a:p>
+            <a:endParaRPr lang="en-US" altLang="ja-JP" sz="2000" dirty="0">
+              <a:solidFill>
+                <a:schemeClr val="bg1"/>
+              </a:solidFill>
+            </a:endParaRPr>
+          </a:p>
+          <a:p>
+            <a:r>
+              <a:rPr kumimoji="1" lang="en-US" altLang="ja-JP" sz="2000" dirty="0">
+                <a:solidFill>
+                  <a:schemeClr val="bg1"/>
+                </a:solidFill>
+              </a:rPr>
+              <a:t>Enter</a:t>
+            </a:r>
+            <a:r>
+              <a:rPr kumimoji="1" lang="ja-JP" altLang="en-US" sz="2000" dirty="0">
+                <a:solidFill>
+                  <a:schemeClr val="bg1"/>
+                </a:solidFill>
+              </a:rPr>
+              <a:t>キーで確定し、次の刺激へ進みます</a:t>
+            </a:r>
+            <a:endParaRPr kumimoji="1" lang="en-US" altLang="ja-JP" sz="2000" dirty="0">
+              <a:solidFill>
+                <a:schemeClr val="bg1"/>
+              </a:solidFill>
+            </a:endParaRPr>
+          </a:p>
+        </p:txBody>
+      </p:sp>
+      <p:pic>
+        <p:nvPicPr>
+          <p:cNvPr id="4" name="図 3">
+            <a:extLst>
+              <a:ext uri="{FF2B5EF4-FFF2-40B4-BE49-F238E27FC236}">
+                <a16:creationId xmlns:a16="http://schemas.microsoft.com/office/drawing/2014/main" id="{88C9368C-38C0-F3D2-9E70-248A669C2F46}"/>
+              </a:ext>
+            </a:extLst>
+          </p:cNvPr>
+          <p:cNvPicPr>
+            <a:picLocks noChangeAspect="1"/>
+          </p:cNvPicPr>
+          <p:nvPr/>
+        </p:nvPicPr>
+        <p:blipFill rotWithShape="1">
+          <a:blip r:embed="rId2">
+            <a:extLst>
+              <a:ext uri="{28A0092B-C50C-407E-A947-70E740481C1C}">
+                <a14:useLocalDpi xmlns:a14="http://schemas.microsoft.com/office/drawing/2010/main" val="0"/>
+              </a:ext>
+            </a:extLst>
+          </a:blip>
+          <a:srcRect l="24295" r="24295"/>
+          <a:stretch>
+            <a:fillRect/>
+          </a:stretch>
+        </p:blipFill>
+        <p:spPr>
+          <a:xfrm flipH="1">
+            <a:off x="451730" y="1205192"/>
+            <a:ext cx="3744000" cy="3793590"/>
+          </a:xfrm>
+          <a:prstGeom prst="rect">
+            <a:avLst/>
+          </a:prstGeom>
+        </p:spPr>
+      </p:pic>
+    </p:spTree>
+    <p:extLst>
+      <p:ext uri="{BB962C8B-B14F-4D97-AF65-F5344CB8AC3E}">
+        <p14:creationId xmlns:p14="http://schemas.microsoft.com/office/powerpoint/2010/main" val="2295579754"/>
+      </p:ext>
+    </p:extLst>
+  </p:cSld>
+  <p:clrMapOvr>
+    <a:masterClrMapping/>
+  </p:clrMapOvr>
+</p:sld>
+</file>
+
+<file path=ppt/slides/slide12.xml><?xml version="1.0" encoding="utf-8"?>
+<p:sld xmlns:a="http://schemas.openxmlformats.org/drawingml/2006/main" xmlns:r="http://schemas.openxmlformats.org/officeDocument/2006/relationships" xmlns:p="http://schemas.openxmlformats.org/presentationml/2006/main">
+  <p:cSld>
+    <p:bg>
+      <p:bgPr>
+        <a:solidFill>
+          <a:schemeClr val="tx2"/>
+        </a:solidFill>
+        <a:effectLst/>
+      </p:bgPr>
+    </p:bg>
+    <p:spTree>
+      <p:nvGrpSpPr>
+        <p:cNvPr id="1" name="">
+          <a:extLst>
+            <a:ext uri="{FF2B5EF4-FFF2-40B4-BE49-F238E27FC236}">
+              <a16:creationId xmlns:a16="http://schemas.microsoft.com/office/drawing/2014/main" id="{0428B59E-7A58-969B-0FD0-22B5AD6A1D74}"/>
+            </a:ext>
+          </a:extLst>
+        </p:cNvPr>
+        <p:cNvGrpSpPr/>
+        <p:nvPr/>
+      </p:nvGrpSpPr>
+      <p:grpSpPr>
+        <a:xfrm>
+          <a:off x="0" y="0"/>
+          <a:ext cx="0" cy="0"/>
+          <a:chOff x="0" y="0"/>
+          <a:chExt cx="0" cy="0"/>
+        </a:xfrm>
+      </p:grpSpPr>
+      <p:sp>
+        <p:nvSpPr>
+          <p:cNvPr id="2" name="テキスト ボックス 1">
+            <a:extLst>
+              <a:ext uri="{FF2B5EF4-FFF2-40B4-BE49-F238E27FC236}">
+                <a16:creationId xmlns:a16="http://schemas.microsoft.com/office/drawing/2014/main" id="{7D4885A7-248A-2407-1F7C-AEAEF1F3CB77}"/>
+              </a:ext>
+            </a:extLst>
+          </p:cNvPr>
+          <p:cNvSpPr txBox="1"/>
+          <p:nvPr/>
+        </p:nvSpPr>
+        <p:spPr>
+          <a:xfrm>
+            <a:off x="4655127" y="705177"/>
+            <a:ext cx="6643320" cy="4485843"/>
+          </a:xfrm>
+          <a:prstGeom prst="rect">
+            <a:avLst/>
+          </a:prstGeom>
+          <a:noFill/>
+        </p:spPr>
+        <p:txBody>
+          <a:bodyPr wrap="square" rtlCol="0">
+            <a:spAutoFit/>
+          </a:bodyPr>
+          <a:lstStyle/>
+          <a:p>
+            <a:r>
+              <a:rPr lang="ja-JP" altLang="en-US" sz="2550" b="1" dirty="0">
+                <a:solidFill>
+                  <a:schemeClr val="bg1"/>
+                </a:solidFill>
+                <a:latin typeface="+mj-ea"/>
+                <a:ea typeface="+mj-ea"/>
+              </a:rPr>
+              <a:t>推定実験</a:t>
+            </a:r>
+            <a:endParaRPr lang="en-US" altLang="ja-JP" sz="2000" dirty="0">
+              <a:solidFill>
+                <a:schemeClr val="bg1"/>
+              </a:solidFill>
+            </a:endParaRPr>
+          </a:p>
+          <a:p>
+            <a:r>
+              <a:rPr kumimoji="1" lang="ja-JP" altLang="en-US" sz="2000" dirty="0">
+                <a:solidFill>
+                  <a:schemeClr val="bg1"/>
+                </a:solidFill>
+              </a:rPr>
+              <a:t>中央の表示領域に、刺激画像が順番に表示されます。</a:t>
+            </a:r>
+            <a:endParaRPr kumimoji="1" lang="en-US" altLang="ja-JP" sz="2000" dirty="0">
+              <a:solidFill>
+                <a:schemeClr val="bg1"/>
+              </a:solidFill>
+            </a:endParaRPr>
+          </a:p>
+          <a:p>
+            <a:endParaRPr kumimoji="1" lang="en-US" altLang="ja-JP" sz="2000" dirty="0">
+              <a:solidFill>
+                <a:schemeClr val="bg1"/>
+              </a:solidFill>
+            </a:endParaRPr>
+          </a:p>
+          <a:p>
+            <a:r>
+              <a:rPr kumimoji="1" lang="ja-JP" altLang="en-US" sz="2000" dirty="0">
+                <a:solidFill>
+                  <a:schemeClr val="bg1"/>
+                </a:solidFill>
+              </a:rPr>
+              <a:t>まず、手前のディスプレイに画像が表示されます。</a:t>
+            </a:r>
+            <a:endParaRPr kumimoji="1" lang="en-US" altLang="ja-JP" sz="2000" dirty="0">
+              <a:solidFill>
+                <a:schemeClr val="bg1"/>
+              </a:solidFill>
+            </a:endParaRPr>
+          </a:p>
+          <a:p>
+            <a:r>
+              <a:rPr kumimoji="1" lang="ja-JP" altLang="en-US" sz="2000" dirty="0">
+                <a:solidFill>
+                  <a:schemeClr val="bg1"/>
+                </a:solidFill>
+              </a:rPr>
+              <a:t>暗転を挟んだ後、手前のディスプレイに同じ画像が、奥のディスプレイに背景となる画像が重ねて表示されます。</a:t>
+            </a:r>
+            <a:endParaRPr kumimoji="1" lang="en-US" altLang="ja-JP" sz="2000" dirty="0">
+              <a:solidFill>
+                <a:schemeClr val="bg1"/>
+              </a:solidFill>
+            </a:endParaRPr>
+          </a:p>
+          <a:p>
+            <a:endParaRPr kumimoji="1" lang="en-US" altLang="ja-JP" sz="2000" dirty="0">
+              <a:solidFill>
+                <a:schemeClr val="bg1"/>
+              </a:solidFill>
+            </a:endParaRPr>
+          </a:p>
+          <a:p>
+            <a:r>
+              <a:rPr kumimoji="1" lang="ja-JP" altLang="en-US" sz="2000" dirty="0">
+                <a:solidFill>
+                  <a:schemeClr val="bg1"/>
+                </a:solidFill>
+              </a:rPr>
+              <a:t>刺激表示終了後に、背景の追加によって生じた、手前の画像の視認性低下の程度を、</a:t>
+            </a:r>
+            <a:r>
+              <a:rPr kumimoji="1" lang="en-US" altLang="ja-JP" sz="2000" dirty="0">
+                <a:solidFill>
+                  <a:schemeClr val="bg1"/>
+                </a:solidFill>
+              </a:rPr>
+              <a:t>5</a:t>
+            </a:r>
+            <a:r>
+              <a:rPr kumimoji="1" lang="ja-JP" altLang="en-US" sz="2000" dirty="0">
+                <a:solidFill>
+                  <a:schemeClr val="bg1"/>
+                </a:solidFill>
+              </a:rPr>
+              <a:t>段階で評価してください。</a:t>
+            </a:r>
+            <a:endParaRPr kumimoji="1" lang="en-US" altLang="ja-JP" sz="2000" dirty="0">
+              <a:solidFill>
+                <a:schemeClr val="bg1"/>
+              </a:solidFill>
+            </a:endParaRPr>
+          </a:p>
+          <a:p>
+            <a:r>
+              <a:rPr kumimoji="1" lang="ja-JP" altLang="en-US" sz="2000" dirty="0">
+                <a:solidFill>
+                  <a:schemeClr val="bg1"/>
+                </a:solidFill>
+              </a:rPr>
+              <a:t>評価基準は、「輪郭や構造、色など、その画像に含まれる特徴をどの程度よく認識できるか」です。</a:t>
+            </a:r>
+            <a:endParaRPr kumimoji="1" lang="en-US" altLang="ja-JP" sz="2000" dirty="0">
+              <a:solidFill>
+                <a:schemeClr val="bg1"/>
+              </a:solidFill>
+            </a:endParaRPr>
+          </a:p>
+          <a:p>
+            <a:endParaRPr kumimoji="1" lang="en-US" altLang="ja-JP" sz="2000" dirty="0">
+              <a:solidFill>
+                <a:schemeClr val="bg1"/>
+              </a:solidFill>
+            </a:endParaRPr>
+          </a:p>
+          <a:p>
+            <a:endParaRPr lang="en-US" altLang="ja-JP" sz="2000" dirty="0">
+              <a:solidFill>
+                <a:schemeClr val="bg1"/>
+              </a:solidFill>
+            </a:endParaRPr>
+          </a:p>
+          <a:p>
+            <a:r>
+              <a:rPr kumimoji="1" lang="en-US" altLang="ja-JP" sz="2000" dirty="0">
+                <a:solidFill>
+                  <a:schemeClr val="bg1"/>
+                </a:solidFill>
+              </a:rPr>
+              <a:t>Enter</a:t>
+            </a:r>
+            <a:r>
+              <a:rPr kumimoji="1" lang="ja-JP" altLang="en-US" sz="2000" dirty="0">
+                <a:solidFill>
+                  <a:schemeClr val="bg1"/>
+                </a:solidFill>
+              </a:rPr>
+              <a:t>キーで確定し、次の刺激へ進みます。</a:t>
+            </a:r>
+            <a:endParaRPr kumimoji="1" lang="en-US" altLang="ja-JP" sz="2000" dirty="0">
+              <a:solidFill>
+                <a:schemeClr val="bg1"/>
+              </a:solidFill>
+            </a:endParaRPr>
+          </a:p>
+        </p:txBody>
+      </p:sp>
+      <p:pic>
+        <p:nvPicPr>
+          <p:cNvPr id="7" name="図 6">
+            <a:extLst>
+              <a:ext uri="{FF2B5EF4-FFF2-40B4-BE49-F238E27FC236}">
+                <a16:creationId xmlns:a16="http://schemas.microsoft.com/office/drawing/2014/main" id="{EDAD783C-AB0C-5545-97CE-C91D09FDF12D}"/>
+              </a:ext>
+            </a:extLst>
+          </p:cNvPr>
+          <p:cNvPicPr>
+            <a:picLocks noChangeAspect="1"/>
+          </p:cNvPicPr>
+          <p:nvPr/>
+        </p:nvPicPr>
+        <p:blipFill rotWithShape="1">
+          <a:blip r:embed="rId2">
+            <a:extLst>
+              <a:ext uri="{28A0092B-C50C-407E-A947-70E740481C1C}">
+                <a14:useLocalDpi xmlns:a14="http://schemas.microsoft.com/office/drawing/2010/main" val="0"/>
+              </a:ext>
+            </a:extLst>
+          </a:blip>
+          <a:srcRect t="10625" b="10625"/>
+          <a:stretch>
+            <a:fillRect/>
+          </a:stretch>
+        </p:blipFill>
+        <p:spPr>
+          <a:xfrm>
+            <a:off x="686189" y="2497500"/>
+            <a:ext cx="3312000" cy="1863000"/>
+          </a:xfrm>
+          <a:prstGeom prst="rect">
+            <a:avLst/>
+          </a:prstGeom>
+        </p:spPr>
+      </p:pic>
+      <p:pic>
+        <p:nvPicPr>
+          <p:cNvPr id="8" name="図 7">
+            <a:extLst>
+              <a:ext uri="{FF2B5EF4-FFF2-40B4-BE49-F238E27FC236}">
+                <a16:creationId xmlns:a16="http://schemas.microsoft.com/office/drawing/2014/main" id="{54F406C8-254E-379A-7C9F-0548AC2A4536}"/>
+              </a:ext>
+            </a:extLst>
+          </p:cNvPr>
+          <p:cNvPicPr>
+            <a:picLocks noChangeAspect="1"/>
+          </p:cNvPicPr>
+          <p:nvPr/>
+        </p:nvPicPr>
+        <p:blipFill rotWithShape="1">
+          <a:blip r:embed="rId3">
+            <a:extLst>
+              <a:ext uri="{28A0092B-C50C-407E-A947-70E740481C1C}">
+                <a14:useLocalDpi xmlns:a14="http://schemas.microsoft.com/office/drawing/2010/main" val="0"/>
+              </a:ext>
+            </a:extLst>
+          </a:blip>
+          <a:srcRect t="10628" b="10628"/>
+          <a:stretch>
+            <a:fillRect/>
+          </a:stretch>
+        </p:blipFill>
+        <p:spPr>
+          <a:xfrm>
+            <a:off x="686189" y="345660"/>
+            <a:ext cx="3312000" cy="1863000"/>
+          </a:xfrm>
+          <a:prstGeom prst="rect">
+            <a:avLst/>
+          </a:prstGeom>
+        </p:spPr>
+      </p:pic>
+      <p:pic>
+        <p:nvPicPr>
+          <p:cNvPr id="4" name="図 3">
+            <a:extLst>
+              <a:ext uri="{FF2B5EF4-FFF2-40B4-BE49-F238E27FC236}">
+                <a16:creationId xmlns:a16="http://schemas.microsoft.com/office/drawing/2014/main" id="{1C5C45AF-738A-A5FE-F289-1D8983D15F1B}"/>
+              </a:ext>
+            </a:extLst>
+          </p:cNvPr>
+          <p:cNvPicPr>
+            <a:picLocks noChangeAspect="1"/>
+          </p:cNvPicPr>
+          <p:nvPr/>
+        </p:nvPicPr>
+        <p:blipFill>
+          <a:blip r:embed="rId4"/>
+          <a:stretch>
+            <a:fillRect/>
+          </a:stretch>
+        </p:blipFill>
+        <p:spPr>
+          <a:xfrm>
+            <a:off x="686189" y="4649340"/>
+            <a:ext cx="3312000" cy="1937092"/>
+          </a:xfrm>
+          <a:prstGeom prst="rect">
+            <a:avLst/>
+          </a:prstGeom>
+        </p:spPr>
+      </p:pic>
+      <p:sp>
+        <p:nvSpPr>
+          <p:cNvPr id="5" name="矢印: 下 4">
+            <a:extLst>
+              <a:ext uri="{FF2B5EF4-FFF2-40B4-BE49-F238E27FC236}">
+                <a16:creationId xmlns:a16="http://schemas.microsoft.com/office/drawing/2014/main" id="{F25D4691-7674-22E3-8E27-943D0DD30CB8}"/>
+              </a:ext>
+            </a:extLst>
+          </p:cNvPr>
+          <p:cNvSpPr/>
+          <p:nvPr/>
+        </p:nvSpPr>
+        <p:spPr>
+          <a:xfrm>
+            <a:off x="1879793" y="2208660"/>
+            <a:ext cx="924791" cy="288840"/>
+          </a:xfrm>
+          <a:prstGeom prst="downArrow">
+            <a:avLst/>
+          </a:prstGeom>
+          <a:solidFill>
+            <a:schemeClr val="accent5"/>
+          </a:solidFill>
+        </p:spPr>
+        <p:style>
+          <a:lnRef idx="1">
+            <a:schemeClr val="accent1"/>
+          </a:lnRef>
+          <a:fillRef idx="3">
+            <a:schemeClr val="accent1"/>
+          </a:fillRef>
+          <a:effectRef idx="2">
+            <a:schemeClr val="accent1"/>
+          </a:effectRef>
+          <a:fontRef idx="minor">
+            <a:schemeClr val="lt1"/>
+          </a:fontRef>
+        </p:style>
+        <p:txBody>
+          <a:bodyPr rtlCol="0" anchor="ctr"/>
+          <a:lstStyle/>
+          <a:p>
+            <a:pPr algn="ctr"/>
+            <a:endParaRPr kumimoji="1" lang="ja-JP" altLang="en-US"/>
+          </a:p>
+        </p:txBody>
+      </p:sp>
+      <p:sp>
+        <p:nvSpPr>
+          <p:cNvPr id="9" name="矢印: 下 8">
+            <a:extLst>
+              <a:ext uri="{FF2B5EF4-FFF2-40B4-BE49-F238E27FC236}">
+                <a16:creationId xmlns:a16="http://schemas.microsoft.com/office/drawing/2014/main" id="{24D4ADAF-64E6-6B7A-6555-0B2F93880A14}"/>
+              </a:ext>
+            </a:extLst>
+          </p:cNvPr>
+          <p:cNvSpPr/>
+          <p:nvPr/>
+        </p:nvSpPr>
+        <p:spPr>
+          <a:xfrm>
+            <a:off x="1879793" y="4360500"/>
+            <a:ext cx="924791" cy="288840"/>
+          </a:xfrm>
+          <a:prstGeom prst="downArrow">
+            <a:avLst/>
+          </a:prstGeom>
+          <a:solidFill>
+            <a:schemeClr val="accent5"/>
+          </a:solidFill>
+        </p:spPr>
+        <p:style>
+          <a:lnRef idx="1">
+            <a:schemeClr val="accent1"/>
+          </a:lnRef>
+          <a:fillRef idx="3">
+            <a:schemeClr val="accent1"/>
+          </a:fillRef>
+          <a:effectRef idx="2">
+            <a:schemeClr val="accent1"/>
+          </a:effectRef>
+          <a:fontRef idx="minor">
+            <a:schemeClr val="lt1"/>
+          </a:fontRef>
+        </p:style>
+        <p:txBody>
+          <a:bodyPr rtlCol="0" anchor="ctr"/>
+          <a:lstStyle/>
+          <a:p>
+            <a:pPr algn="ctr"/>
+            <a:endParaRPr kumimoji="1" lang="ja-JP" altLang="en-US"/>
+          </a:p>
+        </p:txBody>
+      </p:sp>
+    </p:spTree>
+    <p:extLst>
+      <p:ext uri="{BB962C8B-B14F-4D97-AF65-F5344CB8AC3E}">
+        <p14:creationId xmlns:p14="http://schemas.microsoft.com/office/powerpoint/2010/main" val="1483537528"/>
+      </p:ext>
+    </p:extLst>
+  </p:cSld>
+  <p:clrMapOvr>
+    <a:masterClrMapping/>
+  </p:clrMapOvr>
+</p:sld>
+</file>
+
+<file path=ppt/slides/slide13.xml><?xml version="1.0" encoding="utf-8"?>
+<p:sld xmlns:a="http://schemas.openxmlformats.org/drawingml/2006/main" xmlns:r="http://schemas.openxmlformats.org/officeDocument/2006/relationships" xmlns:p="http://schemas.openxmlformats.org/presentationml/2006/main">
+  <p:cSld>
+    <p:bg>
+      <p:bgPr>
+        <a:solidFill>
+          <a:schemeClr val="tx2"/>
+        </a:solidFill>
+        <a:effectLst/>
+      </p:bgPr>
+    </p:bg>
+    <p:spTree>
+      <p:nvGrpSpPr>
+        <p:cNvPr id="1" name="">
+          <a:extLst>
+            <a:ext uri="{FF2B5EF4-FFF2-40B4-BE49-F238E27FC236}">
+              <a16:creationId xmlns:a16="http://schemas.microsoft.com/office/drawing/2014/main" id="{727490C9-5882-E858-8D26-0E21730107AE}"/>
+            </a:ext>
+          </a:extLst>
+        </p:cNvPr>
+        <p:cNvGrpSpPr/>
+        <p:nvPr/>
+      </p:nvGrpSpPr>
+      <p:grpSpPr>
+        <a:xfrm>
+          <a:off x="0" y="0"/>
+          <a:ext cx="0" cy="0"/>
+          <a:chOff x="0" y="0"/>
+          <a:chExt cx="0" cy="0"/>
+        </a:xfrm>
+      </p:grpSpPr>
+      <p:sp>
+        <p:nvSpPr>
+          <p:cNvPr id="2" name="テキスト ボックス 1">
+            <a:extLst>
+              <a:ext uri="{FF2B5EF4-FFF2-40B4-BE49-F238E27FC236}">
+                <a16:creationId xmlns:a16="http://schemas.microsoft.com/office/drawing/2014/main" id="{F7AE1931-7346-421B-6BD0-DC183A6EB5C8}"/>
+              </a:ext>
+            </a:extLst>
+          </p:cNvPr>
+          <p:cNvSpPr txBox="1"/>
+          <p:nvPr/>
+        </p:nvSpPr>
+        <p:spPr>
+          <a:xfrm>
+            <a:off x="893553" y="705177"/>
+            <a:ext cx="10404894" cy="2023631"/>
+          </a:xfrm>
+          <a:prstGeom prst="rect">
+            <a:avLst/>
+          </a:prstGeom>
+          <a:noFill/>
+        </p:spPr>
+        <p:txBody>
+          <a:bodyPr wrap="square" rtlCol="0">
+            <a:spAutoFit/>
+          </a:bodyPr>
+          <a:lstStyle/>
+          <a:p>
+            <a:r>
+              <a:rPr lang="ja-JP" altLang="en-US" sz="2550" b="1" dirty="0">
+                <a:solidFill>
+                  <a:schemeClr val="bg1"/>
+                </a:solidFill>
+                <a:latin typeface="+mj-ea"/>
+                <a:ea typeface="+mj-ea"/>
+              </a:rPr>
+              <a:t>本番セッション</a:t>
+            </a:r>
+            <a:endParaRPr lang="en-US" altLang="ja-JP" sz="2550" b="1" dirty="0">
+              <a:solidFill>
+                <a:schemeClr val="bg1"/>
+              </a:solidFill>
+              <a:latin typeface="+mj-ea"/>
+              <a:ea typeface="+mj-ea"/>
+            </a:endParaRPr>
+          </a:p>
+          <a:p>
+            <a:r>
+              <a:rPr kumimoji="1" lang="ja-JP" altLang="en-US" sz="2000" dirty="0">
+                <a:solidFill>
+                  <a:schemeClr val="bg1"/>
+                </a:solidFill>
+              </a:rPr>
+              <a:t>実験本番です。トレーニングセッションと同じタスクを、同じ順番で行います。</a:t>
+            </a:r>
+            <a:endParaRPr kumimoji="1" lang="en-US" altLang="ja-JP" sz="2000" dirty="0">
+              <a:solidFill>
+                <a:schemeClr val="bg1"/>
+              </a:solidFill>
+            </a:endParaRPr>
+          </a:p>
+          <a:p>
+            <a:r>
+              <a:rPr kumimoji="1" lang="ja-JP" altLang="en-US" sz="2000" dirty="0">
+                <a:solidFill>
+                  <a:schemeClr val="bg1"/>
+                </a:solidFill>
+              </a:rPr>
+              <a:t>このセッションは</a:t>
+            </a:r>
+            <a:r>
+              <a:rPr kumimoji="1" lang="en-US" altLang="ja-JP" sz="2000" dirty="0">
+                <a:solidFill>
+                  <a:schemeClr val="bg1"/>
+                </a:solidFill>
+              </a:rPr>
+              <a:t>1</a:t>
+            </a:r>
+            <a:r>
+              <a:rPr kumimoji="1" lang="ja-JP" altLang="en-US" sz="2000" dirty="0">
+                <a:solidFill>
+                  <a:schemeClr val="bg1"/>
+                </a:solidFill>
+              </a:rPr>
+              <a:t>回のみ行います。</a:t>
+            </a:r>
+            <a:endParaRPr kumimoji="1" lang="en-US" altLang="ja-JP" sz="2000" dirty="0">
+              <a:solidFill>
+                <a:schemeClr val="bg1"/>
+              </a:solidFill>
+            </a:endParaRPr>
+          </a:p>
+          <a:p>
+            <a:endParaRPr kumimoji="1" lang="en-US" altLang="ja-JP" sz="2000" dirty="0">
+              <a:solidFill>
+                <a:schemeClr val="bg1"/>
+              </a:solidFill>
+            </a:endParaRPr>
+          </a:p>
+          <a:p>
+            <a:endParaRPr lang="en-US" altLang="ja-JP" sz="2000" dirty="0">
+              <a:solidFill>
+                <a:schemeClr val="bg1"/>
+              </a:solidFill>
+            </a:endParaRPr>
+          </a:p>
+          <a:p>
+            <a:r>
+              <a:rPr kumimoji="1" lang="en-US" altLang="ja-JP" sz="2000" dirty="0">
+                <a:solidFill>
+                  <a:schemeClr val="bg1"/>
+                </a:solidFill>
+              </a:rPr>
+              <a:t>Space</a:t>
+            </a:r>
+            <a:r>
+              <a:rPr kumimoji="1" lang="ja-JP" altLang="en-US" sz="2000" dirty="0">
+                <a:solidFill>
+                  <a:schemeClr val="bg1"/>
+                </a:solidFill>
+              </a:rPr>
+              <a:t>キーで次へ進みます</a:t>
+            </a:r>
+            <a:endParaRPr kumimoji="1" lang="en-US" altLang="ja-JP" sz="2000" dirty="0">
+              <a:solidFill>
+                <a:schemeClr val="bg1"/>
+              </a:solidFill>
+            </a:endParaRPr>
+          </a:p>
+        </p:txBody>
+      </p:sp>
+    </p:spTree>
+    <p:extLst>
+      <p:ext uri="{BB962C8B-B14F-4D97-AF65-F5344CB8AC3E}">
+        <p14:creationId xmlns:p14="http://schemas.microsoft.com/office/powerpoint/2010/main" val="1590212992"/>
+      </p:ext>
+    </p:extLst>
+  </p:cSld>
+  <p:clrMapOvr>
+    <a:masterClrMapping/>
+  </p:clrMapOvr>
+</p:sld>
+</file>
+
+<file path=ppt/slides/slide14.xml><?xml version="1.0" encoding="utf-8"?>
+<p:sld xmlns:a="http://schemas.openxmlformats.org/drawingml/2006/main" xmlns:r="http://schemas.openxmlformats.org/officeDocument/2006/relationships" xmlns:p="http://schemas.openxmlformats.org/presentationml/2006/main">
+  <p:cSld>
+    <p:bg>
+      <p:bgPr>
+        <a:solidFill>
+          <a:schemeClr val="tx2"/>
+        </a:solidFill>
+        <a:effectLst/>
+      </p:bgPr>
+    </p:bg>
     <p:spTree>
       <p:nvGrpSpPr>
         <p:cNvPr id="1" name=""/>
@@ -1603,91 +2718,10 @@
       </p:grpSpPr>
       <p:sp>
         <p:nvSpPr>
-          <p:cNvPr id="3" name="コンテンツ プレースホルダー 2">
+          <p:cNvPr id="2" name="テキスト ボックス 1">
             <a:extLst>
               <a:ext uri="{FF2B5EF4-FFF2-40B4-BE49-F238E27FC236}">
-                <a16:creationId xmlns:a16="http://schemas.microsoft.com/office/drawing/2014/main" id="{4E4051A4-2FD0-A31B-ABFC-37343669B3A2}"/>
-              </a:ext>
-            </a:extLst>
-          </p:cNvPr>
-          <p:cNvSpPr>
-            <a:spLocks noGrp="1"/>
-          </p:cNvSpPr>
-          <p:nvPr>
-            <p:ph idx="1"/>
-          </p:nvPr>
-        </p:nvSpPr>
-        <p:spPr>
-          <a:xfrm>
-            <a:off x="838200" y="681487"/>
-            <a:ext cx="10515600" cy="5495476"/>
-          </a:xfrm>
-        </p:spPr>
-        <p:txBody>
-          <a:bodyPr/>
-          <a:lstStyle/>
-          <a:p>
-            <a:endParaRPr kumimoji="1" lang="ja-JP" altLang="en-US" dirty="0"/>
-          </a:p>
-        </p:txBody>
-      </p:sp>
-      <p:sp>
-        <p:nvSpPr>
-          <p:cNvPr id="4" name="正方形/長方形 3">
-            <a:extLst>
-              <a:ext uri="{FF2B5EF4-FFF2-40B4-BE49-F238E27FC236}">
-                <a16:creationId xmlns:a16="http://schemas.microsoft.com/office/drawing/2014/main" id="{B41A48C1-CF1C-6BCA-3BB9-E06EB3FCB57C}"/>
-              </a:ext>
-            </a:extLst>
-          </p:cNvPr>
-          <p:cNvSpPr/>
-          <p:nvPr/>
-        </p:nvSpPr>
-        <p:spPr>
-          <a:xfrm>
-            <a:off x="0" y="0"/>
-            <a:ext cx="12192000" cy="6858000"/>
-          </a:xfrm>
-          <a:prstGeom prst="rect">
-            <a:avLst/>
-          </a:prstGeom>
-          <a:solidFill>
-            <a:schemeClr val="bg2">
-              <a:lumMod val="50000"/>
-            </a:schemeClr>
-          </a:solidFill>
-        </p:spPr>
-        <p:style>
-          <a:lnRef idx="2">
-            <a:schemeClr val="accent1">
-              <a:shade val="50000"/>
-            </a:schemeClr>
-          </a:lnRef>
-          <a:fillRef idx="1">
-            <a:schemeClr val="accent1"/>
-          </a:fillRef>
-          <a:effectRef idx="0">
-            <a:schemeClr val="accent1"/>
-          </a:effectRef>
-          <a:fontRef idx="minor">
-            <a:schemeClr val="lt1"/>
-          </a:fontRef>
-        </p:style>
-        <p:txBody>
-          <a:bodyPr rtlCol="0" anchor="ctr"/>
-          <a:lstStyle/>
-          <a:p>
-            <a:pPr algn="ctr"/>
-            <a:endParaRPr kumimoji="1" lang="ja-JP" altLang="en-US"/>
-          </a:p>
-        </p:txBody>
-      </p:sp>
-      <p:sp>
-        <p:nvSpPr>
-          <p:cNvPr id="5" name="テキスト ボックス 4">
-            <a:extLst>
-              <a:ext uri="{FF2B5EF4-FFF2-40B4-BE49-F238E27FC236}">
-                <a16:creationId xmlns:a16="http://schemas.microsoft.com/office/drawing/2014/main" id="{BF9D26FC-B76F-4628-8639-B4BD4A31EC82}"/>
+                <a16:creationId xmlns:a16="http://schemas.microsoft.com/office/drawing/2014/main" id="{58BE3E49-0AFA-E18C-F7A8-CF22391C9531}"/>
               </a:ext>
             </a:extLst>
           </p:cNvPr>
@@ -1696,8 +2730,113 @@
         </p:nvSpPr>
         <p:spPr>
           <a:xfrm>
-            <a:off x="948906" y="363915"/>
-            <a:ext cx="10404894" cy="5755422"/>
+            <a:off x="948906" y="3013501"/>
+            <a:ext cx="10404894" cy="830997"/>
+          </a:xfrm>
+          <a:prstGeom prst="rect">
+            <a:avLst/>
+          </a:prstGeom>
+          <a:solidFill>
+            <a:schemeClr val="tx2"/>
+          </a:solidFill>
+        </p:spPr>
+        <p:txBody>
+          <a:bodyPr wrap="square" rtlCol="0">
+            <a:spAutoFit/>
+          </a:bodyPr>
+          <a:lstStyle/>
+          <a:p>
+            <a:r>
+              <a:rPr lang="ja-JP" altLang="en-US" sz="2400" dirty="0">
+                <a:solidFill>
+                  <a:schemeClr val="bg1"/>
+                </a:solidFill>
+              </a:rPr>
+              <a:t>これにて全実験終了となります</a:t>
+            </a:r>
+            <a:endParaRPr lang="en-US" altLang="ja-JP" sz="2400" dirty="0">
+              <a:solidFill>
+                <a:schemeClr val="bg1"/>
+              </a:solidFill>
+            </a:endParaRPr>
+          </a:p>
+          <a:p>
+            <a:r>
+              <a:rPr lang="ja-JP" altLang="en-US" sz="2400" dirty="0">
+                <a:solidFill>
+                  <a:schemeClr val="bg1"/>
+                </a:solidFill>
+              </a:rPr>
+              <a:t>ご協力いただきありがとうございました</a:t>
+            </a:r>
+            <a:endParaRPr lang="en-US" altLang="ja-JP" sz="3600" dirty="0">
+              <a:solidFill>
+                <a:schemeClr val="bg1"/>
+              </a:solidFill>
+            </a:endParaRPr>
+          </a:p>
+        </p:txBody>
+      </p:sp>
+    </p:spTree>
+    <p:extLst>
+      <p:ext uri="{BB962C8B-B14F-4D97-AF65-F5344CB8AC3E}">
+        <p14:creationId xmlns:p14="http://schemas.microsoft.com/office/powerpoint/2010/main" val="206050647"/>
+      </p:ext>
+    </p:extLst>
+  </p:cSld>
+  <p:clrMapOvr>
+    <a:masterClrMapping/>
+  </p:clrMapOvr>
+</p:sld>
+</file>
+
+<file path=ppt/slides/slide15.xml><?xml version="1.0" encoding="utf-8"?>
+<p:sld xmlns:a="http://schemas.openxmlformats.org/drawingml/2006/main" xmlns:r="http://schemas.openxmlformats.org/officeDocument/2006/relationships" xmlns:p="http://schemas.openxmlformats.org/presentationml/2006/main">
+  <p:cSld>
+    <p:bg>
+      <p:bgPr>
+        <a:solidFill>
+          <a:schemeClr val="tx2"/>
+        </a:solidFill>
+        <a:effectLst/>
+      </p:bgPr>
+    </p:bg>
+    <p:spTree>
+      <p:nvGrpSpPr>
+        <p:cNvPr id="1" name="">
+          <a:extLst>
+            <a:ext uri="{FF2B5EF4-FFF2-40B4-BE49-F238E27FC236}">
+              <a16:creationId xmlns:a16="http://schemas.microsoft.com/office/drawing/2014/main" id="{F02EABA4-8FA1-0C84-A8FF-D9555D21D034}"/>
+            </a:ext>
+          </a:extLst>
+        </p:cNvPr>
+        <p:cNvGrpSpPr/>
+        <p:nvPr/>
+      </p:nvGrpSpPr>
+      <p:grpSpPr>
+        <a:xfrm>
+          <a:off x="0" y="0"/>
+          <a:ext cx="0" cy="0"/>
+          <a:chOff x="0" y="0"/>
+          <a:chExt cx="0" cy="0"/>
+        </a:xfrm>
+      </p:grpSpPr>
+      <p:sp>
+        <p:nvSpPr>
+          <p:cNvPr id="2" name="テキスト ボックス 1">
+            <a:extLst>
+              <a:ext uri="{FF2B5EF4-FFF2-40B4-BE49-F238E27FC236}">
+                <a16:creationId xmlns:a16="http://schemas.microsoft.com/office/drawing/2014/main" id="{7BC84E06-6A44-BE77-AF9D-87EC16A5D443}"/>
+              </a:ext>
+            </a:extLst>
+          </p:cNvPr>
+          <p:cNvSpPr txBox="1"/>
+          <p:nvPr/>
+        </p:nvSpPr>
+        <p:spPr>
+          <a:xfrm>
+            <a:off x="893553" y="243513"/>
+            <a:ext cx="10404894" cy="6370975"/>
           </a:xfrm>
           <a:prstGeom prst="rect">
             <a:avLst/>
@@ -1711,111 +2850,107 @@
           <a:lstStyle/>
           <a:p>
             <a:r>
-              <a:rPr lang="ja-JP" altLang="en-US" sz="2000" dirty="0">
-                <a:solidFill>
-                  <a:schemeClr val="bg1"/>
-                </a:solidFill>
-              </a:rPr>
-              <a:t>　</a:t>
-            </a:r>
-            <a:r>
-              <a:rPr lang="en-US" altLang="ja-JP" sz="2800" dirty="0">
-                <a:solidFill>
-                  <a:schemeClr val="bg1"/>
+              <a:rPr lang="ja-JP" altLang="ja-JP" sz="2800" b="1" dirty="0">
+                <a:solidFill>
+                  <a:schemeClr val="bg2"/>
                 </a:solidFill>
               </a:rPr>
               <a:t>About this experiment</a:t>
             </a:r>
-            <a:endParaRPr lang="en-US" altLang="ja-JP" sz="3200" dirty="0">
-              <a:solidFill>
-                <a:schemeClr val="bg1"/>
-              </a:solidFill>
-            </a:endParaRPr>
-          </a:p>
-          <a:p>
-            <a:r>
-              <a:rPr lang="en-US" altLang="ja-JP" sz="2000" dirty="0">
-                <a:solidFill>
-                  <a:schemeClr val="bg1"/>
-                </a:solidFill>
-              </a:rPr>
-              <a:t>This experiment is for the study of diagnostic aids in chest x-ray imaging. The experimenter will be asked to view two chest x-ray images and select one of them. There will be two sections, and we will explain the details of the selection criteria before each section. The time required is 15 minutes for each section and approximately 30 minutes overall.</a:t>
-            </a:r>
-          </a:p>
-          <a:p>
+            <a:endParaRPr lang="ja-JP" altLang="ja-JP" sz="2800" dirty="0">
+              <a:solidFill>
+                <a:schemeClr val="bg2"/>
+              </a:solidFill>
+            </a:endParaRPr>
+          </a:p>
+          <a:p>
+            <a:r>
+              <a:rPr lang="ja-JP" altLang="ja-JP" sz="2000" dirty="0">
+                <a:solidFill>
+                  <a:schemeClr val="bg2"/>
+                </a:solidFill>
+              </a:rPr>
+              <a:t>This experiment is for the study of perceptual visibility prediction in optical see-through AR.</a:t>
+            </a:r>
+          </a:p>
+          <a:p>
+            <a:r>
+              <a:rPr lang="ja-JP" altLang="ja-JP" sz="2000" dirty="0">
+                <a:solidFill>
+                  <a:schemeClr val="bg2"/>
+                </a:solidFill>
+              </a:rPr>
+              <a:t>You will be asked to view two stimulus images, a Reference image and a Test image, and perform operations or make judgments based on them. The experiment consists of a calibration section and two experimental sections. The details of the operations and judgments will be explained before each section. The two experimental sections are expected to take about 40 minutes each, for approximately 80 minutes overall.</a:t>
+            </a:r>
             <a:endParaRPr lang="en-US" altLang="ja-JP" sz="2000" dirty="0">
               <a:solidFill>
-                <a:schemeClr val="bg1"/>
-              </a:solidFill>
-            </a:endParaRPr>
-          </a:p>
-          <a:p>
-            <a:r>
-              <a:rPr lang="en-US" altLang="ja-JP" sz="2000" dirty="0">
-                <a:solidFill>
-                  <a:schemeClr val="bg1"/>
-                </a:solidFill>
-              </a:rPr>
-              <a:t>The experiment may cause eye fatigue. If you feel unwell, please inform the person in charge of the experiment at any time. And we will suspend or terminate the experiment.</a:t>
-            </a:r>
-          </a:p>
-          <a:p>
+                <a:schemeClr val="bg2"/>
+              </a:solidFill>
+            </a:endParaRPr>
+          </a:p>
+          <a:p>
+            <a:endParaRPr lang="ja-JP" altLang="ja-JP" sz="2000" dirty="0">
+              <a:solidFill>
+                <a:schemeClr val="bg2"/>
+              </a:solidFill>
+            </a:endParaRPr>
+          </a:p>
+          <a:p>
+            <a:r>
+              <a:rPr lang="ja-JP" altLang="ja-JP" sz="2000" dirty="0">
+                <a:solidFill>
+                  <a:schemeClr val="bg2"/>
+                </a:solidFill>
+              </a:rPr>
+              <a:t>The experiment may cause eye fatigue. If you feel unwell or have any concerns, please inform the person in charge of the experiment at any time. We will suspend or terminate the experiment as needed.</a:t>
+            </a:r>
             <a:endParaRPr lang="en-US" altLang="ja-JP" sz="2000" dirty="0">
               <a:solidFill>
-                <a:schemeClr val="bg1"/>
-              </a:solidFill>
-            </a:endParaRPr>
-          </a:p>
-          <a:p>
-            <a:r>
-              <a:rPr lang="en-US" altLang="ja-JP" sz="2000" dirty="0">
-                <a:solidFill>
-                  <a:schemeClr val="bg1"/>
-                </a:solidFill>
-              </a:rPr>
-              <a:t>The data measured in this experiment will be used for research on diagnostic aids in X-ray imaging. The research results may be published in academic publications (papers, presentations at academic conferences, etc.) as well as for the purpose of publicizing the research activities of the </a:t>
-            </a:r>
-            <a:r>
-              <a:rPr lang="en-US" altLang="ja-JP" sz="2000" dirty="0" err="1">
-                <a:solidFill>
-                  <a:schemeClr val="bg1"/>
-                </a:solidFill>
-              </a:rPr>
-              <a:t>Oishi</a:t>
-            </a:r>
-            <a:r>
-              <a:rPr lang="en-US" altLang="ja-JP" sz="2000" dirty="0">
-                <a:solidFill>
-                  <a:schemeClr val="bg1"/>
-                </a:solidFill>
-              </a:rPr>
-              <a:t> Laboratory. When analyzing and publishing experimental data, all data will be anonymized, and privacy information will not be disclosed.</a:t>
-            </a:r>
-            <a:endParaRPr kumimoji="1" lang="en-US" altLang="ja-JP" sz="2000" dirty="0">
-              <a:solidFill>
-                <a:schemeClr val="bg1"/>
-              </a:solidFill>
-            </a:endParaRPr>
-          </a:p>
-          <a:p>
+                <a:schemeClr val="bg2"/>
+              </a:solidFill>
+            </a:endParaRPr>
+          </a:p>
+          <a:p>
+            <a:endParaRPr lang="ja-JP" altLang="ja-JP" sz="2000" dirty="0">
+              <a:solidFill>
+                <a:schemeClr val="bg2"/>
+              </a:solidFill>
+            </a:endParaRPr>
+          </a:p>
+          <a:p>
+            <a:r>
+              <a:rPr lang="ja-JP" altLang="ja-JP" sz="2000" dirty="0">
+                <a:solidFill>
+                  <a:schemeClr val="bg2"/>
+                </a:solidFill>
+              </a:rPr>
+              <a:t>The data measured in this experiment will be used for research on perceptual visibility prediction in optical see-through AR. The research results may be published in academic publications, such as papers and presentations at academic conferences, as well as for the purpose of publicizing the research activities of the Oishi Laboratory. When analyzing and publishing the experimental data, all data will be anonymized, and no privacy-related information will be disclosed.</a:t>
+            </a:r>
             <a:endParaRPr lang="en-US" altLang="ja-JP" sz="2000" dirty="0">
               <a:solidFill>
-                <a:schemeClr val="bg1"/>
-              </a:solidFill>
-            </a:endParaRPr>
-          </a:p>
-          <a:p>
-            <a:r>
-              <a:rPr lang="en-US" altLang="ja-JP" sz="2000" dirty="0">
-                <a:solidFill>
-                  <a:schemeClr val="bg1"/>
-                </a:solidFill>
-              </a:rPr>
-              <a:t>Press Space key to go next.</a:t>
-            </a:r>
-            <a:endParaRPr kumimoji="1" lang="en-US" altLang="ja-JP" sz="2000" dirty="0">
-              <a:solidFill>
-                <a:schemeClr val="bg1"/>
+                <a:schemeClr val="bg2"/>
+              </a:solidFill>
+            </a:endParaRPr>
+          </a:p>
+          <a:p>
+            <a:endParaRPr lang="ja-JP" altLang="ja-JP" sz="2000" dirty="0">
+              <a:solidFill>
+                <a:schemeClr val="bg2"/>
+              </a:solidFill>
+            </a:endParaRPr>
+          </a:p>
+          <a:p>
+            <a:r>
+              <a:rPr lang="ja-JP" altLang="ja-JP" sz="2000" dirty="0">
+                <a:solidFill>
+                  <a:schemeClr val="bg2"/>
+                </a:solidFill>
+              </a:rPr>
+              <a:t>Press the Space key to go to the next page.</a:t>
+            </a:r>
+            <a:endParaRPr kumimoji="1" lang="en-US" altLang="ja-JP" sz="2000" dirty="0">
+              <a:solidFill>
+                <a:schemeClr val="bg2"/>
               </a:solidFill>
             </a:endParaRPr>
           </a:p>
@@ -1824,7 +2959,708 @@
     </p:spTree>
     <p:extLst>
       <p:ext uri="{BB962C8B-B14F-4D97-AF65-F5344CB8AC3E}">
-        <p14:creationId xmlns:p14="http://schemas.microsoft.com/office/powerpoint/2010/main" val="1285185960"/>
+        <p14:creationId xmlns:p14="http://schemas.microsoft.com/office/powerpoint/2010/main" val="2973236220"/>
+      </p:ext>
+    </p:extLst>
+  </p:cSld>
+  <p:clrMapOvr>
+    <a:masterClrMapping/>
+  </p:clrMapOvr>
+</p:sld>
+</file>
+
+<file path=ppt/slides/slide16.xml><?xml version="1.0" encoding="utf-8"?>
+<p:sld xmlns:a="http://schemas.openxmlformats.org/drawingml/2006/main" xmlns:r="http://schemas.openxmlformats.org/officeDocument/2006/relationships" xmlns:p="http://schemas.openxmlformats.org/presentationml/2006/main">
+  <p:cSld>
+    <p:bg>
+      <p:bgPr>
+        <a:solidFill>
+          <a:schemeClr val="tx2"/>
+        </a:solidFill>
+        <a:effectLst/>
+      </p:bgPr>
+    </p:bg>
+    <p:spTree>
+      <p:nvGrpSpPr>
+        <p:cNvPr id="1" name="">
+          <a:extLst>
+            <a:ext uri="{FF2B5EF4-FFF2-40B4-BE49-F238E27FC236}">
+              <a16:creationId xmlns:a16="http://schemas.microsoft.com/office/drawing/2014/main" id="{FF7BD16B-74EC-EC4A-5336-FF89C5B9AD97}"/>
+            </a:ext>
+          </a:extLst>
+        </p:cNvPr>
+        <p:cNvGrpSpPr/>
+        <p:nvPr/>
+      </p:nvGrpSpPr>
+      <p:grpSpPr>
+        <a:xfrm>
+          <a:off x="0" y="0"/>
+          <a:ext cx="0" cy="0"/>
+          <a:chOff x="0" y="0"/>
+          <a:chExt cx="0" cy="0"/>
+        </a:xfrm>
+      </p:grpSpPr>
+      <p:sp>
+        <p:nvSpPr>
+          <p:cNvPr id="2" name="テキスト ボックス 1">
+            <a:extLst>
+              <a:ext uri="{FF2B5EF4-FFF2-40B4-BE49-F238E27FC236}">
+                <a16:creationId xmlns:a16="http://schemas.microsoft.com/office/drawing/2014/main" id="{8A1AB0D9-E2D5-0648-5AAD-3FB67388D27A}"/>
+              </a:ext>
+            </a:extLst>
+          </p:cNvPr>
+          <p:cNvSpPr txBox="1"/>
+          <p:nvPr/>
+        </p:nvSpPr>
+        <p:spPr>
+          <a:xfrm>
+            <a:off x="893553" y="705177"/>
+            <a:ext cx="10404894" cy="4524315"/>
+          </a:xfrm>
+          <a:prstGeom prst="rect">
+            <a:avLst/>
+          </a:prstGeom>
+          <a:noFill/>
+        </p:spPr>
+        <p:txBody>
+          <a:bodyPr wrap="square" rtlCol="0">
+            <a:spAutoFit/>
+          </a:bodyPr>
+          <a:lstStyle/>
+          <a:p>
+            <a:r>
+              <a:rPr lang="ja-JP" altLang="ja-JP" sz="2800" b="1" dirty="0">
+                <a:solidFill>
+                  <a:schemeClr val="bg2"/>
+                </a:solidFill>
+              </a:rPr>
+              <a:t>Operational notes</a:t>
+            </a:r>
+            <a:endParaRPr lang="ja-JP" altLang="ja-JP" sz="2800" dirty="0">
+              <a:solidFill>
+                <a:schemeClr val="bg2"/>
+              </a:solidFill>
+            </a:endParaRPr>
+          </a:p>
+          <a:p>
+            <a:r>
+              <a:rPr lang="ja-JP" altLang="ja-JP" sz="2000" dirty="0">
+                <a:solidFill>
+                  <a:schemeClr val="bg2"/>
+                </a:solidFill>
+              </a:rPr>
+              <a:t>In each section of this experiment, you will manipulate the stimuli and make judgments using the arrow keys on the control PC.</a:t>
+            </a:r>
+            <a:endParaRPr lang="en-US" altLang="ja-JP" sz="2000" dirty="0">
+              <a:solidFill>
+                <a:schemeClr val="bg2"/>
+              </a:solidFill>
+            </a:endParaRPr>
+          </a:p>
+          <a:p>
+            <a:endParaRPr lang="ja-JP" altLang="ja-JP" sz="2000" dirty="0">
+              <a:solidFill>
+                <a:schemeClr val="bg2"/>
+              </a:solidFill>
+            </a:endParaRPr>
+          </a:p>
+          <a:p>
+            <a:r>
+              <a:rPr lang="ja-JP" altLang="ja-JP" sz="2000" dirty="0">
+                <a:solidFill>
+                  <a:schemeClr val="bg2"/>
+                </a:solidFill>
+              </a:rPr>
+              <a:t>For tasks in which you are asked to match the appearance of the Reference stimulus and the Test stimulus, please proceed carefully by moving back and forth around the point at which the two stimuli appear to match.</a:t>
+            </a:r>
+            <a:endParaRPr lang="en-US" altLang="ja-JP" sz="2000" dirty="0">
+              <a:solidFill>
+                <a:schemeClr val="bg2"/>
+              </a:solidFill>
+            </a:endParaRPr>
+          </a:p>
+          <a:p>
+            <a:endParaRPr lang="ja-JP" altLang="ja-JP" sz="2000" dirty="0">
+              <a:solidFill>
+                <a:schemeClr val="bg2"/>
+              </a:solidFill>
+            </a:endParaRPr>
+          </a:p>
+          <a:p>
+            <a:r>
+              <a:rPr lang="ja-JP" altLang="ja-JP" sz="2000" dirty="0">
+                <a:solidFill>
+                  <a:schemeClr val="bg2"/>
+                </a:solidFill>
+              </a:rPr>
+              <a:t>Please note that, in the calibration and adjustment experiments, it may be difficult to focus on the Test stimulus displayed on the foreground display due to the nature of the setup. In such cases, please avoid staring at the Test stimulus. Instead, quickly shift your gaze between the Test stimulus and the Reference stimulus to prevent changes in focus.</a:t>
+            </a:r>
+            <a:endParaRPr lang="en-US" altLang="ja-JP" sz="2000" dirty="0">
+              <a:solidFill>
+                <a:schemeClr val="bg2"/>
+              </a:solidFill>
+            </a:endParaRPr>
+          </a:p>
+          <a:p>
+            <a:endParaRPr lang="ja-JP" altLang="ja-JP" sz="2000" dirty="0">
+              <a:solidFill>
+                <a:schemeClr val="bg2"/>
+              </a:solidFill>
+            </a:endParaRPr>
+          </a:p>
+          <a:p>
+            <a:r>
+              <a:rPr lang="ja-JP" altLang="ja-JP" sz="2000" dirty="0">
+                <a:solidFill>
+                  <a:schemeClr val="bg2"/>
+                </a:solidFill>
+              </a:rPr>
+              <a:t>Press the Space key to go to the next page.</a:t>
+            </a:r>
+          </a:p>
+        </p:txBody>
+      </p:sp>
+    </p:spTree>
+    <p:extLst>
+      <p:ext uri="{BB962C8B-B14F-4D97-AF65-F5344CB8AC3E}">
+        <p14:creationId xmlns:p14="http://schemas.microsoft.com/office/powerpoint/2010/main" val="2730837265"/>
+      </p:ext>
+    </p:extLst>
+  </p:cSld>
+  <p:clrMapOvr>
+    <a:masterClrMapping/>
+  </p:clrMapOvr>
+</p:sld>
+</file>
+
+<file path=ppt/slides/slide17.xml><?xml version="1.0" encoding="utf-8"?>
+<p:sld xmlns:a="http://schemas.openxmlformats.org/drawingml/2006/main" xmlns:r="http://schemas.openxmlformats.org/officeDocument/2006/relationships" xmlns:p="http://schemas.openxmlformats.org/presentationml/2006/main">
+  <p:cSld>
+    <p:bg>
+      <p:bgPr>
+        <a:solidFill>
+          <a:schemeClr val="tx2"/>
+        </a:solidFill>
+        <a:effectLst/>
+      </p:bgPr>
+    </p:bg>
+    <p:spTree>
+      <p:nvGrpSpPr>
+        <p:cNvPr id="1" name="">
+          <a:extLst>
+            <a:ext uri="{FF2B5EF4-FFF2-40B4-BE49-F238E27FC236}">
+              <a16:creationId xmlns:a16="http://schemas.microsoft.com/office/drawing/2014/main" id="{FAF79FDE-75EA-A3B1-AB9D-C909D567B8AC}"/>
+            </a:ext>
+          </a:extLst>
+        </p:cNvPr>
+        <p:cNvGrpSpPr/>
+        <p:nvPr/>
+      </p:nvGrpSpPr>
+      <p:grpSpPr>
+        <a:xfrm>
+          <a:off x="0" y="0"/>
+          <a:ext cx="0" cy="0"/>
+          <a:chOff x="0" y="0"/>
+          <a:chExt cx="0" cy="0"/>
+        </a:xfrm>
+      </p:grpSpPr>
+      <p:sp>
+        <p:nvSpPr>
+          <p:cNvPr id="2" name="テキスト ボックス 1">
+            <a:extLst>
+              <a:ext uri="{FF2B5EF4-FFF2-40B4-BE49-F238E27FC236}">
+                <a16:creationId xmlns:a16="http://schemas.microsoft.com/office/drawing/2014/main" id="{9C6A8E45-71F4-E02B-E55E-77A1D39E91C4}"/>
+              </a:ext>
+            </a:extLst>
+          </p:cNvPr>
+          <p:cNvSpPr txBox="1"/>
+          <p:nvPr/>
+        </p:nvSpPr>
+        <p:spPr>
+          <a:xfrm>
+            <a:off x="893553" y="705177"/>
+            <a:ext cx="10404894" cy="2677656"/>
+          </a:xfrm>
+          <a:prstGeom prst="rect">
+            <a:avLst/>
+          </a:prstGeom>
+          <a:noFill/>
+        </p:spPr>
+        <p:txBody>
+          <a:bodyPr wrap="square" rtlCol="0">
+            <a:spAutoFit/>
+          </a:bodyPr>
+          <a:lstStyle/>
+          <a:p>
+            <a:r>
+              <a:rPr lang="ja-JP" altLang="ja-JP" sz="2800" b="1" dirty="0">
+                <a:solidFill>
+                  <a:schemeClr val="bg2"/>
+                </a:solidFill>
+              </a:rPr>
+              <a:t>Training session</a:t>
+            </a:r>
+            <a:endParaRPr lang="ja-JP" altLang="ja-JP" sz="2800" dirty="0">
+              <a:solidFill>
+                <a:schemeClr val="bg2"/>
+              </a:solidFill>
+            </a:endParaRPr>
+          </a:p>
+          <a:p>
+            <a:r>
+              <a:rPr lang="ja-JP" altLang="ja-JP" sz="2000" dirty="0">
+                <a:solidFill>
+                  <a:schemeClr val="bg2"/>
+                </a:solidFill>
+              </a:rPr>
+              <a:t>Before proceeding to the main experiment, you will complete a training session to become familiar with the tasks performed in each section.</a:t>
+            </a:r>
+          </a:p>
+          <a:p>
+            <a:r>
+              <a:rPr lang="ja-JP" altLang="ja-JP" sz="2000" dirty="0">
+                <a:solidFill>
+                  <a:schemeClr val="bg2"/>
+                </a:solidFill>
+              </a:rPr>
+              <a:t>The sections will be presented in the same order as in the main experiment.</a:t>
+            </a:r>
+          </a:p>
+          <a:p>
+            <a:r>
+              <a:rPr lang="ja-JP" altLang="ja-JP" sz="2000" dirty="0">
+                <a:solidFill>
+                  <a:schemeClr val="bg2"/>
+                </a:solidFill>
+              </a:rPr>
+              <a:t>You may repeat this training up to three times, until you become familiar with the tasks.</a:t>
+            </a:r>
+            <a:endParaRPr lang="en-US" altLang="ja-JP" sz="2000" dirty="0">
+              <a:solidFill>
+                <a:schemeClr val="bg2"/>
+              </a:solidFill>
+            </a:endParaRPr>
+          </a:p>
+          <a:p>
+            <a:endParaRPr lang="ja-JP" altLang="ja-JP" sz="2000" dirty="0">
+              <a:solidFill>
+                <a:schemeClr val="bg2"/>
+              </a:solidFill>
+            </a:endParaRPr>
+          </a:p>
+          <a:p>
+            <a:r>
+              <a:rPr lang="ja-JP" altLang="ja-JP" sz="2000" dirty="0">
+                <a:solidFill>
+                  <a:schemeClr val="bg2"/>
+                </a:solidFill>
+              </a:rPr>
+              <a:t>Press the Space key to go to the next page.</a:t>
+            </a:r>
+          </a:p>
+          <a:p>
+            <a:endParaRPr kumimoji="1" lang="en-US" altLang="ja-JP" sz="2000" dirty="0">
+              <a:solidFill>
+                <a:schemeClr val="bg2"/>
+              </a:solidFill>
+            </a:endParaRPr>
+          </a:p>
+        </p:txBody>
+      </p:sp>
+    </p:spTree>
+    <p:extLst>
+      <p:ext uri="{BB962C8B-B14F-4D97-AF65-F5344CB8AC3E}">
+        <p14:creationId xmlns:p14="http://schemas.microsoft.com/office/powerpoint/2010/main" val="1826573407"/>
+      </p:ext>
+    </p:extLst>
+  </p:cSld>
+  <p:clrMapOvr>
+    <a:masterClrMapping/>
+  </p:clrMapOvr>
+</p:sld>
+</file>
+
+<file path=ppt/slides/slide18.xml><?xml version="1.0" encoding="utf-8"?>
+<p:sld xmlns:a="http://schemas.openxmlformats.org/drawingml/2006/main" xmlns:r="http://schemas.openxmlformats.org/officeDocument/2006/relationships" xmlns:p="http://schemas.openxmlformats.org/presentationml/2006/main">
+  <p:cSld>
+    <p:bg>
+      <p:bgPr>
+        <a:solidFill>
+          <a:schemeClr val="tx2"/>
+        </a:solidFill>
+        <a:effectLst/>
+      </p:bgPr>
+    </p:bg>
+    <p:spTree>
+      <p:nvGrpSpPr>
+        <p:cNvPr id="1" name="">
+          <a:extLst>
+            <a:ext uri="{FF2B5EF4-FFF2-40B4-BE49-F238E27FC236}">
+              <a16:creationId xmlns:a16="http://schemas.microsoft.com/office/drawing/2014/main" id="{173EF7C9-532C-A758-9B7A-F0580337826E}"/>
+            </a:ext>
+          </a:extLst>
+        </p:cNvPr>
+        <p:cNvGrpSpPr/>
+        <p:nvPr/>
+      </p:nvGrpSpPr>
+      <p:grpSpPr>
+        <a:xfrm>
+          <a:off x="0" y="0"/>
+          <a:ext cx="0" cy="0"/>
+          <a:chOff x="0" y="0"/>
+          <a:chExt cx="0" cy="0"/>
+        </a:xfrm>
+      </p:grpSpPr>
+      <p:sp>
+        <p:nvSpPr>
+          <p:cNvPr id="3" name="テキスト ボックス 2">
+            <a:extLst>
+              <a:ext uri="{FF2B5EF4-FFF2-40B4-BE49-F238E27FC236}">
+                <a16:creationId xmlns:a16="http://schemas.microsoft.com/office/drawing/2014/main" id="{120884E8-D2D7-87B0-994F-BF2BCD6220D4}"/>
+              </a:ext>
+            </a:extLst>
+          </p:cNvPr>
+          <p:cNvSpPr txBox="1"/>
+          <p:nvPr/>
+        </p:nvSpPr>
+        <p:spPr>
+          <a:xfrm>
+            <a:off x="4655125" y="705177"/>
+            <a:ext cx="6643321" cy="4216539"/>
+          </a:xfrm>
+          <a:prstGeom prst="rect">
+            <a:avLst/>
+          </a:prstGeom>
+          <a:noFill/>
+        </p:spPr>
+        <p:txBody>
+          <a:bodyPr wrap="square" rtlCol="0">
+            <a:spAutoFit/>
+          </a:bodyPr>
+          <a:lstStyle/>
+          <a:p>
+            <a:r>
+              <a:rPr lang="ja-JP" altLang="ja-JP" sz="2800" b="1" dirty="0">
+                <a:solidFill>
+                  <a:schemeClr val="bg2"/>
+                </a:solidFill>
+              </a:rPr>
+              <a:t>Position calibration</a:t>
+            </a:r>
+            <a:endParaRPr lang="ja-JP" altLang="ja-JP" sz="2800" dirty="0">
+              <a:solidFill>
+                <a:schemeClr val="bg2"/>
+              </a:solidFill>
+            </a:endParaRPr>
+          </a:p>
+          <a:p>
+            <a:r>
+              <a:rPr lang="ja-JP" altLang="ja-JP" sz="2000" dirty="0">
+                <a:solidFill>
+                  <a:schemeClr val="bg2"/>
+                </a:solidFill>
+              </a:rPr>
+              <a:t>Using the arrow keys on the control PC, move the position of the square frame displayed on the rear display (red) and align it with the square frame displayed on the front display (white).</a:t>
+            </a:r>
+            <a:endParaRPr lang="en-US" altLang="ja-JP" sz="2000" dirty="0">
+              <a:solidFill>
+                <a:schemeClr val="bg2"/>
+              </a:solidFill>
+            </a:endParaRPr>
+          </a:p>
+          <a:p>
+            <a:endParaRPr lang="ja-JP" altLang="ja-JP" sz="2000" dirty="0">
+              <a:solidFill>
+                <a:schemeClr val="bg2"/>
+              </a:solidFill>
+            </a:endParaRPr>
+          </a:p>
+          <a:p>
+            <a:r>
+              <a:rPr lang="ja-JP" altLang="ja-JP" sz="2000" dirty="0">
+                <a:solidFill>
+                  <a:schemeClr val="bg2"/>
+                </a:solidFill>
+              </a:rPr>
+              <a:t>This procedure will be performed separately for the right eye and the left eye. Please cover the eye not being used with the eye patch provided.</a:t>
+            </a:r>
+            <a:endParaRPr lang="en-US" altLang="ja-JP" sz="2000" dirty="0">
+              <a:solidFill>
+                <a:schemeClr val="bg2"/>
+              </a:solidFill>
+            </a:endParaRPr>
+          </a:p>
+          <a:p>
+            <a:endParaRPr lang="ja-JP" altLang="ja-JP" sz="2000" dirty="0">
+              <a:solidFill>
+                <a:schemeClr val="bg2"/>
+              </a:solidFill>
+            </a:endParaRPr>
+          </a:p>
+          <a:p>
+            <a:r>
+              <a:rPr lang="ja-JP" altLang="ja-JP" sz="2000" dirty="0">
+                <a:solidFill>
+                  <a:schemeClr val="bg2"/>
+                </a:solidFill>
+              </a:rPr>
+              <a:t>Press the Enter key to confirm and proceed to the next step.</a:t>
+            </a:r>
+          </a:p>
+          <a:p>
+            <a:endParaRPr kumimoji="1" lang="en-US" altLang="ja-JP" sz="2000" dirty="0">
+              <a:solidFill>
+                <a:schemeClr val="bg2"/>
+              </a:solidFill>
+            </a:endParaRPr>
+          </a:p>
+        </p:txBody>
+      </p:sp>
+      <p:pic>
+        <p:nvPicPr>
+          <p:cNvPr id="7" name="図 6">
+            <a:extLst>
+              <a:ext uri="{FF2B5EF4-FFF2-40B4-BE49-F238E27FC236}">
+                <a16:creationId xmlns:a16="http://schemas.microsoft.com/office/drawing/2014/main" id="{DE67171A-F091-F061-0385-17689739AB73}"/>
+              </a:ext>
+            </a:extLst>
+          </p:cNvPr>
+          <p:cNvPicPr>
+            <a:picLocks noChangeAspect="1"/>
+          </p:cNvPicPr>
+          <p:nvPr/>
+        </p:nvPicPr>
+        <p:blipFill>
+          <a:blip r:embed="rId2">
+            <a:extLst>
+              <a:ext uri="{28A0092B-C50C-407E-A947-70E740481C1C}">
+                <a14:useLocalDpi xmlns:a14="http://schemas.microsoft.com/office/drawing/2010/main" val="0"/>
+              </a:ext>
+            </a:extLst>
+          </a:blip>
+          <a:stretch>
+            <a:fillRect/>
+          </a:stretch>
+        </p:blipFill>
+        <p:spPr>
+          <a:xfrm>
+            <a:off x="625105" y="1096241"/>
+            <a:ext cx="3744484" cy="4665518"/>
+          </a:xfrm>
+          <a:prstGeom prst="rect">
+            <a:avLst/>
+          </a:prstGeom>
+        </p:spPr>
+      </p:pic>
+    </p:spTree>
+    <p:extLst>
+      <p:ext uri="{BB962C8B-B14F-4D97-AF65-F5344CB8AC3E}">
+        <p14:creationId xmlns:p14="http://schemas.microsoft.com/office/powerpoint/2010/main" val="372765942"/>
+      </p:ext>
+    </p:extLst>
+  </p:cSld>
+  <p:clrMapOvr>
+    <a:masterClrMapping/>
+  </p:clrMapOvr>
+</p:sld>
+</file>
+
+<file path=ppt/slides/slide19.xml><?xml version="1.0" encoding="utf-8"?>
+<p:sld xmlns:a="http://schemas.openxmlformats.org/drawingml/2006/main" xmlns:r="http://schemas.openxmlformats.org/officeDocument/2006/relationships" xmlns:p="http://schemas.openxmlformats.org/presentationml/2006/main">
+  <p:cSld>
+    <p:bg>
+      <p:bgPr>
+        <a:solidFill>
+          <a:schemeClr val="tx2"/>
+        </a:solidFill>
+        <a:effectLst/>
+      </p:bgPr>
+    </p:bg>
+    <p:spTree>
+      <p:nvGrpSpPr>
+        <p:cNvPr id="1" name="">
+          <a:extLst>
+            <a:ext uri="{FF2B5EF4-FFF2-40B4-BE49-F238E27FC236}">
+              <a16:creationId xmlns:a16="http://schemas.microsoft.com/office/drawing/2014/main" id="{3350EA5C-2469-08FF-9889-08F575FA8DD9}"/>
+            </a:ext>
+          </a:extLst>
+        </p:cNvPr>
+        <p:cNvGrpSpPr/>
+        <p:nvPr/>
+      </p:nvGrpSpPr>
+      <p:grpSpPr>
+        <a:xfrm>
+          <a:off x="0" y="0"/>
+          <a:ext cx="0" cy="0"/>
+          <a:chOff x="0" y="0"/>
+          <a:chExt cx="0" cy="0"/>
+        </a:xfrm>
+      </p:grpSpPr>
+      <p:sp>
+        <p:nvSpPr>
+          <p:cNvPr id="3" name="テキスト ボックス 2">
+            <a:extLst>
+              <a:ext uri="{FF2B5EF4-FFF2-40B4-BE49-F238E27FC236}">
+                <a16:creationId xmlns:a16="http://schemas.microsoft.com/office/drawing/2014/main" id="{505801EC-12DF-8207-47A1-0FD0BDCBB230}"/>
+              </a:ext>
+            </a:extLst>
+          </p:cNvPr>
+          <p:cNvSpPr txBox="1"/>
+          <p:nvPr/>
+        </p:nvSpPr>
+        <p:spPr>
+          <a:xfrm>
+            <a:off x="4655127" y="705177"/>
+            <a:ext cx="6643320" cy="6063198"/>
+          </a:xfrm>
+          <a:prstGeom prst="rect">
+            <a:avLst/>
+          </a:prstGeom>
+          <a:noFill/>
+        </p:spPr>
+        <p:txBody>
+          <a:bodyPr wrap="square" rtlCol="0">
+            <a:spAutoFit/>
+          </a:bodyPr>
+          <a:lstStyle/>
+          <a:p>
+            <a:r>
+              <a:rPr lang="ja-JP" altLang="ja-JP" sz="2800" b="1" dirty="0">
+                <a:solidFill>
+                  <a:schemeClr val="bg2"/>
+                </a:solidFill>
+              </a:rPr>
+              <a:t>Blur calibration</a:t>
+            </a:r>
+            <a:endParaRPr lang="ja-JP" altLang="ja-JP" sz="2800" dirty="0">
+              <a:solidFill>
+                <a:schemeClr val="bg2"/>
+              </a:solidFill>
+            </a:endParaRPr>
+          </a:p>
+          <a:p>
+            <a:r>
+              <a:rPr lang="ja-JP" altLang="ja-JP" sz="2000" dirty="0">
+                <a:solidFill>
+                  <a:schemeClr val="bg2"/>
+                </a:solidFill>
+              </a:rPr>
+              <a:t>In the central display area, the same stimulus image and marker are shown in the upper and lower halves. Among these, only the stimulus image in the upper half is displayed on the rear display.</a:t>
+            </a:r>
+            <a:endParaRPr lang="en-US" altLang="ja-JP" sz="2000" dirty="0">
+              <a:solidFill>
+                <a:schemeClr val="bg2"/>
+              </a:solidFill>
+            </a:endParaRPr>
+          </a:p>
+          <a:p>
+            <a:endParaRPr lang="ja-JP" altLang="ja-JP" sz="2000" dirty="0">
+              <a:solidFill>
+                <a:schemeClr val="bg2"/>
+              </a:solidFill>
+            </a:endParaRPr>
+          </a:p>
+          <a:p>
+            <a:r>
+              <a:rPr lang="ja-JP" altLang="ja-JP" sz="2000" dirty="0">
+                <a:solidFill>
+                  <a:schemeClr val="bg2"/>
+                </a:solidFill>
+              </a:rPr>
+              <a:t>First, in the upper half of the display area, focus on the marker on the front display while observing the blur of the stimulus image on the rear display.</a:t>
+            </a:r>
+          </a:p>
+          <a:p>
+            <a:r>
+              <a:rPr lang="ja-JP" altLang="ja-JP" sz="2000" dirty="0">
+                <a:solidFill>
+                  <a:schemeClr val="bg2"/>
+                </a:solidFill>
+              </a:rPr>
+              <a:t>Then, using the left and right arrow keys on the control PC, adjust the blur of the stimulus image in the lower half so that it matches the blur observed in the upper half. The blur becomes stronger as you move to the right.</a:t>
+            </a:r>
+          </a:p>
+          <a:p>
+            <a:r>
+              <a:rPr lang="ja-JP" altLang="ja-JP" sz="2000" dirty="0">
+                <a:solidFill>
+                  <a:schemeClr val="bg2"/>
+                </a:solidFill>
+              </a:rPr>
+              <a:t>Repeat this process until you feel that the two levels of blur match completely.</a:t>
+            </a:r>
+            <a:endParaRPr lang="en-US" altLang="ja-JP" sz="2000" dirty="0">
+              <a:solidFill>
+                <a:schemeClr val="bg2"/>
+              </a:solidFill>
+            </a:endParaRPr>
+          </a:p>
+          <a:p>
+            <a:endParaRPr lang="ja-JP" altLang="ja-JP" sz="2000" dirty="0">
+              <a:solidFill>
+                <a:schemeClr val="bg2"/>
+              </a:solidFill>
+            </a:endParaRPr>
+          </a:p>
+          <a:p>
+            <a:r>
+              <a:rPr lang="ja-JP" altLang="ja-JP" sz="2000" dirty="0">
+                <a:solidFill>
+                  <a:schemeClr val="bg2"/>
+                </a:solidFill>
+              </a:rPr>
+              <a:t>Press the down arrow key to confirm and proceed to the next stimulus.</a:t>
+            </a:r>
+          </a:p>
+          <a:p>
+            <a:endParaRPr kumimoji="1" lang="en-US" altLang="ja-JP" sz="2000" dirty="0">
+              <a:solidFill>
+                <a:schemeClr val="bg2"/>
+              </a:solidFill>
+            </a:endParaRPr>
+          </a:p>
+        </p:txBody>
+      </p:sp>
+      <p:pic>
+        <p:nvPicPr>
+          <p:cNvPr id="4" name="図 3">
+            <a:extLst>
+              <a:ext uri="{FF2B5EF4-FFF2-40B4-BE49-F238E27FC236}">
+                <a16:creationId xmlns:a16="http://schemas.microsoft.com/office/drawing/2014/main" id="{6C402133-1581-93CB-1ED7-36557977FA9E}"/>
+              </a:ext>
+            </a:extLst>
+          </p:cNvPr>
+          <p:cNvPicPr>
+            <a:picLocks noChangeAspect="1"/>
+          </p:cNvPicPr>
+          <p:nvPr/>
+        </p:nvPicPr>
+        <p:blipFill>
+          <a:blip r:embed="rId2">
+            <a:extLst>
+              <a:ext uri="{28A0092B-C50C-407E-A947-70E740481C1C}">
+                <a14:useLocalDpi xmlns:a14="http://schemas.microsoft.com/office/drawing/2010/main" val="0"/>
+              </a:ext>
+            </a:extLst>
+          </a:blip>
+          <a:stretch>
+            <a:fillRect/>
+          </a:stretch>
+        </p:blipFill>
+        <p:spPr>
+          <a:xfrm>
+            <a:off x="505486" y="1089174"/>
+            <a:ext cx="3744000" cy="4679652"/>
+          </a:xfrm>
+          <a:prstGeom prst="rect">
+            <a:avLst/>
+          </a:prstGeom>
+        </p:spPr>
+      </p:pic>
+    </p:spTree>
+    <p:extLst>
+      <p:ext uri="{BB962C8B-B14F-4D97-AF65-F5344CB8AC3E}">
+        <p14:creationId xmlns:p14="http://schemas.microsoft.com/office/powerpoint/2010/main" val="234778964"/>
       </p:ext>
     </p:extLst>
   </p:cSld>
@@ -2110,6 +3946,1801 @@
     <p:extLst>
       <p:ext uri="{BB962C8B-B14F-4D97-AF65-F5344CB8AC3E}">
         <p14:creationId xmlns:p14="http://schemas.microsoft.com/office/powerpoint/2010/main" val="2584556245"/>
+      </p:ext>
+    </p:extLst>
+  </p:cSld>
+  <p:clrMapOvr>
+    <a:masterClrMapping/>
+  </p:clrMapOvr>
+</p:sld>
+</file>
+
+<file path=ppt/slides/slide20.xml><?xml version="1.0" encoding="utf-8"?>
+<p:sld xmlns:a="http://schemas.openxmlformats.org/drawingml/2006/main" xmlns:r="http://schemas.openxmlformats.org/officeDocument/2006/relationships" xmlns:p="http://schemas.openxmlformats.org/presentationml/2006/main">
+  <p:cSld>
+    <p:bg>
+      <p:bgPr>
+        <a:solidFill>
+          <a:schemeClr val="tx2"/>
+        </a:solidFill>
+        <a:effectLst/>
+      </p:bgPr>
+    </p:bg>
+    <p:spTree>
+      <p:nvGrpSpPr>
+        <p:cNvPr id="1" name="">
+          <a:extLst>
+            <a:ext uri="{FF2B5EF4-FFF2-40B4-BE49-F238E27FC236}">
+              <a16:creationId xmlns:a16="http://schemas.microsoft.com/office/drawing/2014/main" id="{8DA0B158-5F6E-15F9-88DD-65CC594181FC}"/>
+            </a:ext>
+          </a:extLst>
+        </p:cNvPr>
+        <p:cNvGrpSpPr/>
+        <p:nvPr/>
+      </p:nvGrpSpPr>
+      <p:grpSpPr>
+        <a:xfrm>
+          <a:off x="0" y="0"/>
+          <a:ext cx="0" cy="0"/>
+          <a:chOff x="0" y="0"/>
+          <a:chExt cx="0" cy="0"/>
+        </a:xfrm>
+      </p:grpSpPr>
+      <p:sp>
+        <p:nvSpPr>
+          <p:cNvPr id="2" name="テキスト ボックス 1">
+            <a:extLst>
+              <a:ext uri="{FF2B5EF4-FFF2-40B4-BE49-F238E27FC236}">
+                <a16:creationId xmlns:a16="http://schemas.microsoft.com/office/drawing/2014/main" id="{E0BD14D7-B441-9064-52CD-6F32FEB7997B}"/>
+              </a:ext>
+            </a:extLst>
+          </p:cNvPr>
+          <p:cNvSpPr txBox="1"/>
+          <p:nvPr/>
+        </p:nvSpPr>
+        <p:spPr>
+          <a:xfrm>
+            <a:off x="4655127" y="705177"/>
+            <a:ext cx="6643320" cy="6063198"/>
+          </a:xfrm>
+          <a:prstGeom prst="rect">
+            <a:avLst/>
+          </a:prstGeom>
+          <a:noFill/>
+        </p:spPr>
+        <p:txBody>
+          <a:bodyPr wrap="square" rtlCol="0">
+            <a:spAutoFit/>
+          </a:bodyPr>
+          <a:lstStyle/>
+          <a:p>
+            <a:r>
+              <a:rPr lang="ja-JP" altLang="ja-JP" sz="2800" b="1" dirty="0">
+                <a:solidFill>
+                  <a:schemeClr val="bg2"/>
+                </a:solidFill>
+              </a:rPr>
+              <a:t>Adjustment experiment</a:t>
+            </a:r>
+            <a:endParaRPr lang="ja-JP" altLang="ja-JP" sz="2800" dirty="0">
+              <a:solidFill>
+                <a:schemeClr val="bg2"/>
+              </a:solidFill>
+            </a:endParaRPr>
+          </a:p>
+          <a:p>
+            <a:r>
+              <a:rPr lang="ja-JP" altLang="ja-JP" sz="2000" dirty="0">
+                <a:solidFill>
+                  <a:schemeClr val="bg2"/>
+                </a:solidFill>
+              </a:rPr>
+              <a:t>In the central display area, stimulus images are shown in the upper and lower halves. The image in the lower half is created by adding noise to the background of the image in the upper half.</a:t>
+            </a:r>
+            <a:endParaRPr lang="en-US" altLang="ja-JP" sz="2000" dirty="0">
+              <a:solidFill>
+                <a:schemeClr val="bg2"/>
+              </a:solidFill>
+            </a:endParaRPr>
+          </a:p>
+          <a:p>
+            <a:endParaRPr lang="ja-JP" altLang="ja-JP" sz="2000" dirty="0">
+              <a:solidFill>
+                <a:schemeClr val="bg2"/>
+              </a:solidFill>
+            </a:endParaRPr>
+          </a:p>
+          <a:p>
+            <a:r>
+              <a:rPr lang="ja-JP" altLang="ja-JP" sz="2000" dirty="0">
+                <a:solidFill>
+                  <a:schemeClr val="bg2"/>
+                </a:solidFill>
+              </a:rPr>
+              <a:t>First, observe the appearance of the stimulus image in the upper half of the display area.</a:t>
+            </a:r>
+          </a:p>
+          <a:p>
+            <a:r>
+              <a:rPr lang="ja-JP" altLang="ja-JP" sz="2000" dirty="0">
+                <a:solidFill>
+                  <a:schemeClr val="bg2"/>
+                </a:solidFill>
+              </a:rPr>
+              <a:t>Then, using the left and right arrow keys on the control PC, adjust the appearance of the stimulus image in the lower half so that it matches the appearance of the upper half. The appearance becomes stronger as you move to the right.</a:t>
+            </a:r>
+          </a:p>
+          <a:p>
+            <a:r>
+              <a:rPr lang="ja-JP" altLang="ja-JP" sz="2000" dirty="0">
+                <a:solidFill>
+                  <a:schemeClr val="bg2"/>
+                </a:solidFill>
+              </a:rPr>
+              <a:t>Repeat this process until you feel that the two appearances match completely.</a:t>
+            </a:r>
+            <a:endParaRPr lang="en-US" altLang="ja-JP" sz="2000" dirty="0">
+              <a:solidFill>
+                <a:schemeClr val="bg2"/>
+              </a:solidFill>
+            </a:endParaRPr>
+          </a:p>
+          <a:p>
+            <a:endParaRPr lang="ja-JP" altLang="ja-JP" sz="2000" dirty="0">
+              <a:solidFill>
+                <a:schemeClr val="bg2"/>
+              </a:solidFill>
+            </a:endParaRPr>
+          </a:p>
+          <a:p>
+            <a:r>
+              <a:rPr lang="ja-JP" altLang="ja-JP" sz="2000" dirty="0">
+                <a:solidFill>
+                  <a:schemeClr val="bg2"/>
+                </a:solidFill>
+              </a:rPr>
+              <a:t>Press the Enter key to confirm and proceed to the next stimulus.</a:t>
+            </a:r>
+          </a:p>
+          <a:p>
+            <a:endParaRPr kumimoji="1" lang="en-US" altLang="ja-JP" sz="2000" dirty="0">
+              <a:solidFill>
+                <a:schemeClr val="bg2"/>
+              </a:solidFill>
+            </a:endParaRPr>
+          </a:p>
+        </p:txBody>
+      </p:sp>
+      <p:pic>
+        <p:nvPicPr>
+          <p:cNvPr id="4" name="図 3">
+            <a:extLst>
+              <a:ext uri="{FF2B5EF4-FFF2-40B4-BE49-F238E27FC236}">
+                <a16:creationId xmlns:a16="http://schemas.microsoft.com/office/drawing/2014/main" id="{EFBC59DC-13C1-5848-F6E6-E5A83F493FFC}"/>
+              </a:ext>
+            </a:extLst>
+          </p:cNvPr>
+          <p:cNvPicPr>
+            <a:picLocks noChangeAspect="1"/>
+          </p:cNvPicPr>
+          <p:nvPr/>
+        </p:nvPicPr>
+        <p:blipFill rotWithShape="1">
+          <a:blip r:embed="rId2">
+            <a:extLst>
+              <a:ext uri="{28A0092B-C50C-407E-A947-70E740481C1C}">
+                <a14:useLocalDpi xmlns:a14="http://schemas.microsoft.com/office/drawing/2010/main" val="0"/>
+              </a:ext>
+            </a:extLst>
+          </a:blip>
+          <a:srcRect l="24295" r="24295"/>
+          <a:stretch>
+            <a:fillRect/>
+          </a:stretch>
+        </p:blipFill>
+        <p:spPr>
+          <a:xfrm flipH="1">
+            <a:off x="451730" y="1205192"/>
+            <a:ext cx="3744000" cy="3793590"/>
+          </a:xfrm>
+          <a:prstGeom prst="rect">
+            <a:avLst/>
+          </a:prstGeom>
+        </p:spPr>
+      </p:pic>
+    </p:spTree>
+    <p:extLst>
+      <p:ext uri="{BB962C8B-B14F-4D97-AF65-F5344CB8AC3E}">
+        <p14:creationId xmlns:p14="http://schemas.microsoft.com/office/powerpoint/2010/main" val="1677405722"/>
+      </p:ext>
+    </p:extLst>
+  </p:cSld>
+  <p:clrMapOvr>
+    <a:masterClrMapping/>
+  </p:clrMapOvr>
+</p:sld>
+</file>
+
+<file path=ppt/slides/slide21.xml><?xml version="1.0" encoding="utf-8"?>
+<p:sld xmlns:a="http://schemas.openxmlformats.org/drawingml/2006/main" xmlns:r="http://schemas.openxmlformats.org/officeDocument/2006/relationships" xmlns:p="http://schemas.openxmlformats.org/presentationml/2006/main">
+  <p:cSld>
+    <p:bg>
+      <p:bgPr>
+        <a:solidFill>
+          <a:schemeClr val="tx2"/>
+        </a:solidFill>
+        <a:effectLst/>
+      </p:bgPr>
+    </p:bg>
+    <p:spTree>
+      <p:nvGrpSpPr>
+        <p:cNvPr id="1" name="">
+          <a:extLst>
+            <a:ext uri="{FF2B5EF4-FFF2-40B4-BE49-F238E27FC236}">
+              <a16:creationId xmlns:a16="http://schemas.microsoft.com/office/drawing/2014/main" id="{1E685B2F-408C-0D54-3810-FF20B870997E}"/>
+            </a:ext>
+          </a:extLst>
+        </p:cNvPr>
+        <p:cNvGrpSpPr/>
+        <p:nvPr/>
+      </p:nvGrpSpPr>
+      <p:grpSpPr>
+        <a:xfrm>
+          <a:off x="0" y="0"/>
+          <a:ext cx="0" cy="0"/>
+          <a:chOff x="0" y="0"/>
+          <a:chExt cx="0" cy="0"/>
+        </a:xfrm>
+      </p:grpSpPr>
+      <p:sp>
+        <p:nvSpPr>
+          <p:cNvPr id="2" name="テキスト ボックス 1">
+            <a:extLst>
+              <a:ext uri="{FF2B5EF4-FFF2-40B4-BE49-F238E27FC236}">
+                <a16:creationId xmlns:a16="http://schemas.microsoft.com/office/drawing/2014/main" id="{A86A7029-2B16-BFAC-94BF-46D750A2C4B2}"/>
+              </a:ext>
+            </a:extLst>
+          </p:cNvPr>
+          <p:cNvSpPr txBox="1"/>
+          <p:nvPr/>
+        </p:nvSpPr>
+        <p:spPr>
+          <a:xfrm>
+            <a:off x="4655127" y="705177"/>
+            <a:ext cx="6643320" cy="5755422"/>
+          </a:xfrm>
+          <a:prstGeom prst="rect">
+            <a:avLst/>
+          </a:prstGeom>
+          <a:noFill/>
+        </p:spPr>
+        <p:txBody>
+          <a:bodyPr wrap="square" rtlCol="0">
+            <a:spAutoFit/>
+          </a:bodyPr>
+          <a:lstStyle/>
+          <a:p>
+            <a:r>
+              <a:rPr lang="ja-JP" altLang="ja-JP" sz="2800" b="1" dirty="0">
+                <a:solidFill>
+                  <a:schemeClr val="bg2"/>
+                </a:solidFill>
+              </a:rPr>
+              <a:t>Estimation experiment</a:t>
+            </a:r>
+            <a:endParaRPr lang="ja-JP" altLang="ja-JP" sz="2800" dirty="0">
+              <a:solidFill>
+                <a:schemeClr val="bg2"/>
+              </a:solidFill>
+            </a:endParaRPr>
+          </a:p>
+          <a:p>
+            <a:r>
+              <a:rPr lang="ja-JP" altLang="ja-JP" sz="2000" dirty="0">
+                <a:solidFill>
+                  <a:schemeClr val="bg2"/>
+                </a:solidFill>
+              </a:rPr>
+              <a:t>Stimulus images will be presented sequentially in the central display area.</a:t>
+            </a:r>
+            <a:endParaRPr lang="en-US" altLang="ja-JP" sz="2000" dirty="0">
+              <a:solidFill>
+                <a:schemeClr val="bg2"/>
+              </a:solidFill>
+            </a:endParaRPr>
+          </a:p>
+          <a:p>
+            <a:endParaRPr lang="ja-JP" altLang="ja-JP" sz="2000" dirty="0">
+              <a:solidFill>
+                <a:schemeClr val="bg2"/>
+              </a:solidFill>
+            </a:endParaRPr>
+          </a:p>
+          <a:p>
+            <a:r>
+              <a:rPr lang="ja-JP" altLang="ja-JP" sz="2000" dirty="0">
+                <a:solidFill>
+                  <a:schemeClr val="bg2"/>
+                </a:solidFill>
+              </a:rPr>
+              <a:t>First, an image will be displayed on the front display.</a:t>
+            </a:r>
+          </a:p>
+          <a:p>
+            <a:r>
+              <a:rPr lang="ja-JP" altLang="ja-JP" sz="2000" dirty="0">
+                <a:solidFill>
+                  <a:schemeClr val="bg2"/>
+                </a:solidFill>
+              </a:rPr>
+              <a:t>After a blank interval, the same image will be displayed on the front display, while a background image will be superimposed on the rear display.</a:t>
+            </a:r>
+          </a:p>
+          <a:p>
+            <a:r>
+              <a:rPr lang="ja-JP" altLang="ja-JP" sz="2000" dirty="0">
+                <a:solidFill>
+                  <a:schemeClr val="bg2"/>
+                </a:solidFill>
+              </a:rPr>
+              <a:t>After the stimulus presentation ends, please rate the degree of visibility reduction in the front image caused by the addition of the background on a 5-point scale.</a:t>
+            </a:r>
+          </a:p>
+          <a:p>
+            <a:r>
+              <a:rPr lang="ja-JP" altLang="ja-JP" sz="2000" dirty="0">
+                <a:solidFill>
+                  <a:schemeClr val="bg2"/>
+                </a:solidFill>
+              </a:rPr>
+              <a:t>The rating criterion is how well you can recognize the features contained in the image, such as contours, structures, and colors.</a:t>
+            </a:r>
+            <a:endParaRPr lang="en-US" altLang="ja-JP" sz="2000" dirty="0">
+              <a:solidFill>
+                <a:schemeClr val="bg2"/>
+              </a:solidFill>
+            </a:endParaRPr>
+          </a:p>
+          <a:p>
+            <a:endParaRPr lang="ja-JP" altLang="ja-JP" sz="2000" dirty="0">
+              <a:solidFill>
+                <a:schemeClr val="bg2"/>
+              </a:solidFill>
+            </a:endParaRPr>
+          </a:p>
+          <a:p>
+            <a:r>
+              <a:rPr lang="ja-JP" altLang="ja-JP" sz="2000" dirty="0">
+                <a:solidFill>
+                  <a:schemeClr val="bg2"/>
+                </a:solidFill>
+              </a:rPr>
+              <a:t>Press the Enter key to confirm and proceed to the next stimulus.</a:t>
+            </a:r>
+          </a:p>
+          <a:p>
+            <a:endParaRPr kumimoji="1" lang="en-US" altLang="ja-JP" sz="2000" dirty="0">
+              <a:solidFill>
+                <a:schemeClr val="bg2"/>
+              </a:solidFill>
+            </a:endParaRPr>
+          </a:p>
+        </p:txBody>
+      </p:sp>
+      <p:pic>
+        <p:nvPicPr>
+          <p:cNvPr id="7" name="図 6">
+            <a:extLst>
+              <a:ext uri="{FF2B5EF4-FFF2-40B4-BE49-F238E27FC236}">
+                <a16:creationId xmlns:a16="http://schemas.microsoft.com/office/drawing/2014/main" id="{68097415-4921-ECC7-B547-B5F0A684AE59}"/>
+              </a:ext>
+            </a:extLst>
+          </p:cNvPr>
+          <p:cNvPicPr>
+            <a:picLocks noChangeAspect="1"/>
+          </p:cNvPicPr>
+          <p:nvPr/>
+        </p:nvPicPr>
+        <p:blipFill rotWithShape="1">
+          <a:blip r:embed="rId2">
+            <a:extLst>
+              <a:ext uri="{28A0092B-C50C-407E-A947-70E740481C1C}">
+                <a14:useLocalDpi xmlns:a14="http://schemas.microsoft.com/office/drawing/2010/main" val="0"/>
+              </a:ext>
+            </a:extLst>
+          </a:blip>
+          <a:srcRect t="10625" b="10625"/>
+          <a:stretch>
+            <a:fillRect/>
+          </a:stretch>
+        </p:blipFill>
+        <p:spPr>
+          <a:xfrm>
+            <a:off x="686189" y="2497500"/>
+            <a:ext cx="3312000" cy="1863000"/>
+          </a:xfrm>
+          <a:prstGeom prst="rect">
+            <a:avLst/>
+          </a:prstGeom>
+        </p:spPr>
+      </p:pic>
+      <p:pic>
+        <p:nvPicPr>
+          <p:cNvPr id="8" name="図 7">
+            <a:extLst>
+              <a:ext uri="{FF2B5EF4-FFF2-40B4-BE49-F238E27FC236}">
+                <a16:creationId xmlns:a16="http://schemas.microsoft.com/office/drawing/2014/main" id="{D3234BD3-2863-80EB-96E3-81BBAD593B0F}"/>
+              </a:ext>
+            </a:extLst>
+          </p:cNvPr>
+          <p:cNvPicPr>
+            <a:picLocks noChangeAspect="1"/>
+          </p:cNvPicPr>
+          <p:nvPr/>
+        </p:nvPicPr>
+        <p:blipFill rotWithShape="1">
+          <a:blip r:embed="rId3">
+            <a:extLst>
+              <a:ext uri="{28A0092B-C50C-407E-A947-70E740481C1C}">
+                <a14:useLocalDpi xmlns:a14="http://schemas.microsoft.com/office/drawing/2010/main" val="0"/>
+              </a:ext>
+            </a:extLst>
+          </a:blip>
+          <a:srcRect t="10628" b="10628"/>
+          <a:stretch>
+            <a:fillRect/>
+          </a:stretch>
+        </p:blipFill>
+        <p:spPr>
+          <a:xfrm>
+            <a:off x="686189" y="345660"/>
+            <a:ext cx="3312000" cy="1863000"/>
+          </a:xfrm>
+          <a:prstGeom prst="rect">
+            <a:avLst/>
+          </a:prstGeom>
+        </p:spPr>
+      </p:pic>
+      <p:pic>
+        <p:nvPicPr>
+          <p:cNvPr id="4" name="図 3">
+            <a:extLst>
+              <a:ext uri="{FF2B5EF4-FFF2-40B4-BE49-F238E27FC236}">
+                <a16:creationId xmlns:a16="http://schemas.microsoft.com/office/drawing/2014/main" id="{749C6080-B468-0EA3-CB02-7E1B59DFB100}"/>
+              </a:ext>
+            </a:extLst>
+          </p:cNvPr>
+          <p:cNvPicPr>
+            <a:picLocks noChangeAspect="1"/>
+          </p:cNvPicPr>
+          <p:nvPr/>
+        </p:nvPicPr>
+        <p:blipFill>
+          <a:blip r:embed="rId4"/>
+          <a:stretch>
+            <a:fillRect/>
+          </a:stretch>
+        </p:blipFill>
+        <p:spPr>
+          <a:xfrm>
+            <a:off x="686189" y="4649340"/>
+            <a:ext cx="3312000" cy="1937092"/>
+          </a:xfrm>
+          <a:prstGeom prst="rect">
+            <a:avLst/>
+          </a:prstGeom>
+        </p:spPr>
+      </p:pic>
+      <p:sp>
+        <p:nvSpPr>
+          <p:cNvPr id="5" name="矢印: 下 4">
+            <a:extLst>
+              <a:ext uri="{FF2B5EF4-FFF2-40B4-BE49-F238E27FC236}">
+                <a16:creationId xmlns:a16="http://schemas.microsoft.com/office/drawing/2014/main" id="{06BEBCBC-318A-E0FD-3DE1-CEE35120BD5D}"/>
+              </a:ext>
+            </a:extLst>
+          </p:cNvPr>
+          <p:cNvSpPr/>
+          <p:nvPr/>
+        </p:nvSpPr>
+        <p:spPr>
+          <a:xfrm>
+            <a:off x="1879793" y="2208660"/>
+            <a:ext cx="924791" cy="288840"/>
+          </a:xfrm>
+          <a:prstGeom prst="downArrow">
+            <a:avLst/>
+          </a:prstGeom>
+          <a:solidFill>
+            <a:schemeClr val="accent5"/>
+          </a:solidFill>
+        </p:spPr>
+        <p:style>
+          <a:lnRef idx="1">
+            <a:schemeClr val="accent1"/>
+          </a:lnRef>
+          <a:fillRef idx="3">
+            <a:schemeClr val="accent1"/>
+          </a:fillRef>
+          <a:effectRef idx="2">
+            <a:schemeClr val="accent1"/>
+          </a:effectRef>
+          <a:fontRef idx="minor">
+            <a:schemeClr val="lt1"/>
+          </a:fontRef>
+        </p:style>
+        <p:txBody>
+          <a:bodyPr rtlCol="0" anchor="ctr"/>
+          <a:lstStyle/>
+          <a:p>
+            <a:pPr algn="ctr"/>
+            <a:endParaRPr kumimoji="1" lang="ja-JP" altLang="en-US"/>
+          </a:p>
+        </p:txBody>
+      </p:sp>
+      <p:sp>
+        <p:nvSpPr>
+          <p:cNvPr id="9" name="矢印: 下 8">
+            <a:extLst>
+              <a:ext uri="{FF2B5EF4-FFF2-40B4-BE49-F238E27FC236}">
+                <a16:creationId xmlns:a16="http://schemas.microsoft.com/office/drawing/2014/main" id="{EE9610AC-AB78-C672-BDD1-BDF59933811E}"/>
+              </a:ext>
+            </a:extLst>
+          </p:cNvPr>
+          <p:cNvSpPr/>
+          <p:nvPr/>
+        </p:nvSpPr>
+        <p:spPr>
+          <a:xfrm>
+            <a:off x="1879793" y="4360500"/>
+            <a:ext cx="924791" cy="288840"/>
+          </a:xfrm>
+          <a:prstGeom prst="downArrow">
+            <a:avLst/>
+          </a:prstGeom>
+          <a:solidFill>
+            <a:schemeClr val="accent5"/>
+          </a:solidFill>
+        </p:spPr>
+        <p:style>
+          <a:lnRef idx="1">
+            <a:schemeClr val="accent1"/>
+          </a:lnRef>
+          <a:fillRef idx="3">
+            <a:schemeClr val="accent1"/>
+          </a:fillRef>
+          <a:effectRef idx="2">
+            <a:schemeClr val="accent1"/>
+          </a:effectRef>
+          <a:fontRef idx="minor">
+            <a:schemeClr val="lt1"/>
+          </a:fontRef>
+        </p:style>
+        <p:txBody>
+          <a:bodyPr rtlCol="0" anchor="ctr"/>
+          <a:lstStyle/>
+          <a:p>
+            <a:pPr algn="ctr"/>
+            <a:endParaRPr kumimoji="1" lang="ja-JP" altLang="en-US"/>
+          </a:p>
+        </p:txBody>
+      </p:sp>
+    </p:spTree>
+    <p:extLst>
+      <p:ext uri="{BB962C8B-B14F-4D97-AF65-F5344CB8AC3E}">
+        <p14:creationId xmlns:p14="http://schemas.microsoft.com/office/powerpoint/2010/main" val="3615845275"/>
+      </p:ext>
+    </p:extLst>
+  </p:cSld>
+  <p:clrMapOvr>
+    <a:masterClrMapping/>
+  </p:clrMapOvr>
+</p:sld>
+</file>
+
+<file path=ppt/slides/slide22.xml><?xml version="1.0" encoding="utf-8"?>
+<p:sld xmlns:a="http://schemas.openxmlformats.org/drawingml/2006/main" xmlns:r="http://schemas.openxmlformats.org/officeDocument/2006/relationships" xmlns:p="http://schemas.openxmlformats.org/presentationml/2006/main">
+  <p:cSld>
+    <p:bg>
+      <p:bgPr>
+        <a:solidFill>
+          <a:schemeClr val="tx2"/>
+        </a:solidFill>
+        <a:effectLst/>
+      </p:bgPr>
+    </p:bg>
+    <p:spTree>
+      <p:nvGrpSpPr>
+        <p:cNvPr id="1" name="">
+          <a:extLst>
+            <a:ext uri="{FF2B5EF4-FFF2-40B4-BE49-F238E27FC236}">
+              <a16:creationId xmlns:a16="http://schemas.microsoft.com/office/drawing/2014/main" id="{4B8BFD6C-A9BC-33A6-6303-654FF4429EF5}"/>
+            </a:ext>
+          </a:extLst>
+        </p:cNvPr>
+        <p:cNvGrpSpPr/>
+        <p:nvPr/>
+      </p:nvGrpSpPr>
+      <p:grpSpPr>
+        <a:xfrm>
+          <a:off x="0" y="0"/>
+          <a:ext cx="0" cy="0"/>
+          <a:chOff x="0" y="0"/>
+          <a:chExt cx="0" cy="0"/>
+        </a:xfrm>
+      </p:grpSpPr>
+      <p:sp>
+        <p:nvSpPr>
+          <p:cNvPr id="2" name="テキスト ボックス 1">
+            <a:extLst>
+              <a:ext uri="{FF2B5EF4-FFF2-40B4-BE49-F238E27FC236}">
+                <a16:creationId xmlns:a16="http://schemas.microsoft.com/office/drawing/2014/main" id="{BA1FC238-BCC4-CA88-D5DA-7FE660DD98C3}"/>
+              </a:ext>
+            </a:extLst>
+          </p:cNvPr>
+          <p:cNvSpPr txBox="1"/>
+          <p:nvPr/>
+        </p:nvSpPr>
+        <p:spPr>
+          <a:xfrm>
+            <a:off x="893553" y="705177"/>
+            <a:ext cx="10404894" cy="2369880"/>
+          </a:xfrm>
+          <a:prstGeom prst="rect">
+            <a:avLst/>
+          </a:prstGeom>
+          <a:noFill/>
+        </p:spPr>
+        <p:txBody>
+          <a:bodyPr wrap="square" rtlCol="0">
+            <a:spAutoFit/>
+          </a:bodyPr>
+          <a:lstStyle/>
+          <a:p>
+            <a:r>
+              <a:rPr lang="ja-JP" altLang="ja-JP" sz="2800" b="1" dirty="0">
+                <a:solidFill>
+                  <a:schemeClr val="bg2"/>
+                </a:solidFill>
+              </a:rPr>
+              <a:t>Main session</a:t>
+            </a:r>
+            <a:endParaRPr lang="ja-JP" altLang="ja-JP" sz="2800" dirty="0">
+              <a:solidFill>
+                <a:schemeClr val="bg2"/>
+              </a:solidFill>
+            </a:endParaRPr>
+          </a:p>
+          <a:p>
+            <a:r>
+              <a:rPr lang="ja-JP" altLang="ja-JP" sz="2000" dirty="0">
+                <a:solidFill>
+                  <a:schemeClr val="bg2"/>
+                </a:solidFill>
+              </a:rPr>
+              <a:t>This is the main experiment. You will perform the same tasks as in the training session, in the same order.</a:t>
+            </a:r>
+          </a:p>
+          <a:p>
+            <a:r>
+              <a:rPr lang="ja-JP" altLang="ja-JP" sz="2000" dirty="0">
+                <a:solidFill>
+                  <a:schemeClr val="bg2"/>
+                </a:solidFill>
+              </a:rPr>
+              <a:t>This session will be performed only once.</a:t>
+            </a:r>
+            <a:endParaRPr lang="en-US" altLang="ja-JP" sz="2000" dirty="0">
+              <a:solidFill>
+                <a:schemeClr val="bg2"/>
+              </a:solidFill>
+            </a:endParaRPr>
+          </a:p>
+          <a:p>
+            <a:endParaRPr lang="ja-JP" altLang="ja-JP" sz="2000" dirty="0">
+              <a:solidFill>
+                <a:schemeClr val="bg2"/>
+              </a:solidFill>
+            </a:endParaRPr>
+          </a:p>
+          <a:p>
+            <a:r>
+              <a:rPr lang="ja-JP" altLang="ja-JP" sz="2000" dirty="0">
+                <a:solidFill>
+                  <a:schemeClr val="bg2"/>
+                </a:solidFill>
+              </a:rPr>
+              <a:t>Press the Space key to go to the next page.</a:t>
+            </a:r>
+          </a:p>
+          <a:p>
+            <a:endParaRPr kumimoji="1" lang="en-US" altLang="ja-JP" sz="2000" dirty="0">
+              <a:solidFill>
+                <a:schemeClr val="bg2"/>
+              </a:solidFill>
+            </a:endParaRPr>
+          </a:p>
+        </p:txBody>
+      </p:sp>
+    </p:spTree>
+    <p:extLst>
+      <p:ext uri="{BB962C8B-B14F-4D97-AF65-F5344CB8AC3E}">
+        <p14:creationId xmlns:p14="http://schemas.microsoft.com/office/powerpoint/2010/main" val="976128152"/>
+      </p:ext>
+    </p:extLst>
+  </p:cSld>
+  <p:clrMapOvr>
+    <a:masterClrMapping/>
+  </p:clrMapOvr>
+</p:sld>
+</file>
+
+<file path=ppt/slides/slide23.xml><?xml version="1.0" encoding="utf-8"?>
+<p:sld xmlns:a="http://schemas.openxmlformats.org/drawingml/2006/main" xmlns:r="http://schemas.openxmlformats.org/officeDocument/2006/relationships" xmlns:p="http://schemas.openxmlformats.org/presentationml/2006/main">
+  <p:cSld>
+    <p:bg>
+      <p:bgPr>
+        <a:solidFill>
+          <a:schemeClr val="tx2"/>
+        </a:solidFill>
+        <a:effectLst/>
+      </p:bgPr>
+    </p:bg>
+    <p:spTree>
+      <p:nvGrpSpPr>
+        <p:cNvPr id="1" name="">
+          <a:extLst>
+            <a:ext uri="{FF2B5EF4-FFF2-40B4-BE49-F238E27FC236}">
+              <a16:creationId xmlns:a16="http://schemas.microsoft.com/office/drawing/2014/main" id="{743D2A4F-198E-D30E-820A-FA89FFD8CD89}"/>
+            </a:ext>
+          </a:extLst>
+        </p:cNvPr>
+        <p:cNvGrpSpPr/>
+        <p:nvPr/>
+      </p:nvGrpSpPr>
+      <p:grpSpPr>
+        <a:xfrm>
+          <a:off x="0" y="0"/>
+          <a:ext cx="0" cy="0"/>
+          <a:chOff x="0" y="0"/>
+          <a:chExt cx="0" cy="0"/>
+        </a:xfrm>
+      </p:grpSpPr>
+      <p:sp>
+        <p:nvSpPr>
+          <p:cNvPr id="3" name="テキスト ボックス 2">
+            <a:extLst>
+              <a:ext uri="{FF2B5EF4-FFF2-40B4-BE49-F238E27FC236}">
+                <a16:creationId xmlns:a16="http://schemas.microsoft.com/office/drawing/2014/main" id="{F09BEAB5-BF8D-AA2C-0E27-DBB107637E76}"/>
+              </a:ext>
+            </a:extLst>
+          </p:cNvPr>
+          <p:cNvSpPr txBox="1"/>
+          <p:nvPr/>
+        </p:nvSpPr>
+        <p:spPr>
+          <a:xfrm>
+            <a:off x="4655125" y="705177"/>
+            <a:ext cx="6643321" cy="4216539"/>
+          </a:xfrm>
+          <a:prstGeom prst="rect">
+            <a:avLst/>
+          </a:prstGeom>
+          <a:noFill/>
+        </p:spPr>
+        <p:txBody>
+          <a:bodyPr wrap="square" rtlCol="0">
+            <a:spAutoFit/>
+          </a:bodyPr>
+          <a:lstStyle/>
+          <a:p>
+            <a:r>
+              <a:rPr lang="ja-JP" altLang="ja-JP" sz="2800" b="1" dirty="0">
+                <a:solidFill>
+                  <a:schemeClr val="bg2"/>
+                </a:solidFill>
+              </a:rPr>
+              <a:t>Position calibration</a:t>
+            </a:r>
+            <a:endParaRPr lang="ja-JP" altLang="ja-JP" sz="2800" dirty="0">
+              <a:solidFill>
+                <a:schemeClr val="bg2"/>
+              </a:solidFill>
+            </a:endParaRPr>
+          </a:p>
+          <a:p>
+            <a:r>
+              <a:rPr lang="ja-JP" altLang="ja-JP" sz="2000" dirty="0">
+                <a:solidFill>
+                  <a:schemeClr val="bg2"/>
+                </a:solidFill>
+              </a:rPr>
+              <a:t>Using the arrow keys on the control PC, move the position of the square frame displayed on the rear display (red) and align it with the square frame displayed on the front display (white).</a:t>
+            </a:r>
+            <a:endParaRPr lang="en-US" altLang="ja-JP" sz="2000" dirty="0">
+              <a:solidFill>
+                <a:schemeClr val="bg2"/>
+              </a:solidFill>
+            </a:endParaRPr>
+          </a:p>
+          <a:p>
+            <a:endParaRPr lang="ja-JP" altLang="ja-JP" sz="2000" dirty="0">
+              <a:solidFill>
+                <a:schemeClr val="bg2"/>
+              </a:solidFill>
+            </a:endParaRPr>
+          </a:p>
+          <a:p>
+            <a:r>
+              <a:rPr lang="ja-JP" altLang="ja-JP" sz="2000" dirty="0">
+                <a:solidFill>
+                  <a:schemeClr val="bg2"/>
+                </a:solidFill>
+              </a:rPr>
+              <a:t>This procedure will be performed separately for the right eye and the left eye. Please cover the eye not being used with the eye patch provided.</a:t>
+            </a:r>
+            <a:endParaRPr lang="en-US" altLang="ja-JP" sz="2000" dirty="0">
+              <a:solidFill>
+                <a:schemeClr val="bg2"/>
+              </a:solidFill>
+            </a:endParaRPr>
+          </a:p>
+          <a:p>
+            <a:endParaRPr lang="ja-JP" altLang="ja-JP" sz="2000" dirty="0">
+              <a:solidFill>
+                <a:schemeClr val="bg2"/>
+              </a:solidFill>
+            </a:endParaRPr>
+          </a:p>
+          <a:p>
+            <a:r>
+              <a:rPr lang="ja-JP" altLang="ja-JP" sz="2000" dirty="0">
+                <a:solidFill>
+                  <a:schemeClr val="bg2"/>
+                </a:solidFill>
+              </a:rPr>
+              <a:t>Press the Enter key to confirm and proceed to the next step.</a:t>
+            </a:r>
+          </a:p>
+          <a:p>
+            <a:endParaRPr kumimoji="1" lang="en-US" altLang="ja-JP" sz="2000" dirty="0">
+              <a:solidFill>
+                <a:schemeClr val="bg2"/>
+              </a:solidFill>
+            </a:endParaRPr>
+          </a:p>
+        </p:txBody>
+      </p:sp>
+      <p:pic>
+        <p:nvPicPr>
+          <p:cNvPr id="7" name="図 6">
+            <a:extLst>
+              <a:ext uri="{FF2B5EF4-FFF2-40B4-BE49-F238E27FC236}">
+                <a16:creationId xmlns:a16="http://schemas.microsoft.com/office/drawing/2014/main" id="{642EB9F6-338D-792C-EBDD-7322F47F16EA}"/>
+              </a:ext>
+            </a:extLst>
+          </p:cNvPr>
+          <p:cNvPicPr>
+            <a:picLocks noChangeAspect="1"/>
+          </p:cNvPicPr>
+          <p:nvPr/>
+        </p:nvPicPr>
+        <p:blipFill>
+          <a:blip r:embed="rId2">
+            <a:extLst>
+              <a:ext uri="{28A0092B-C50C-407E-A947-70E740481C1C}">
+                <a14:useLocalDpi xmlns:a14="http://schemas.microsoft.com/office/drawing/2010/main" val="0"/>
+              </a:ext>
+            </a:extLst>
+          </a:blip>
+          <a:stretch>
+            <a:fillRect/>
+          </a:stretch>
+        </p:blipFill>
+        <p:spPr>
+          <a:xfrm>
+            <a:off x="625105" y="1096241"/>
+            <a:ext cx="3744484" cy="4665518"/>
+          </a:xfrm>
+          <a:prstGeom prst="rect">
+            <a:avLst/>
+          </a:prstGeom>
+        </p:spPr>
+      </p:pic>
+    </p:spTree>
+    <p:extLst>
+      <p:ext uri="{BB962C8B-B14F-4D97-AF65-F5344CB8AC3E}">
+        <p14:creationId xmlns:p14="http://schemas.microsoft.com/office/powerpoint/2010/main" val="1464005948"/>
+      </p:ext>
+    </p:extLst>
+  </p:cSld>
+  <p:clrMapOvr>
+    <a:masterClrMapping/>
+  </p:clrMapOvr>
+</p:sld>
+</file>
+
+<file path=ppt/slides/slide24.xml><?xml version="1.0" encoding="utf-8"?>
+<p:sld xmlns:a="http://schemas.openxmlformats.org/drawingml/2006/main" xmlns:r="http://schemas.openxmlformats.org/officeDocument/2006/relationships" xmlns:p="http://schemas.openxmlformats.org/presentationml/2006/main">
+  <p:cSld>
+    <p:bg>
+      <p:bgPr>
+        <a:solidFill>
+          <a:schemeClr val="tx2"/>
+        </a:solidFill>
+        <a:effectLst/>
+      </p:bgPr>
+    </p:bg>
+    <p:spTree>
+      <p:nvGrpSpPr>
+        <p:cNvPr id="1" name="">
+          <a:extLst>
+            <a:ext uri="{FF2B5EF4-FFF2-40B4-BE49-F238E27FC236}">
+              <a16:creationId xmlns:a16="http://schemas.microsoft.com/office/drawing/2014/main" id="{F0F3BCA2-6FA0-5F14-A2C1-B9502BBB3210}"/>
+            </a:ext>
+          </a:extLst>
+        </p:cNvPr>
+        <p:cNvGrpSpPr/>
+        <p:nvPr/>
+      </p:nvGrpSpPr>
+      <p:grpSpPr>
+        <a:xfrm>
+          <a:off x="0" y="0"/>
+          <a:ext cx="0" cy="0"/>
+          <a:chOff x="0" y="0"/>
+          <a:chExt cx="0" cy="0"/>
+        </a:xfrm>
+      </p:grpSpPr>
+      <p:sp>
+        <p:nvSpPr>
+          <p:cNvPr id="3" name="テキスト ボックス 2">
+            <a:extLst>
+              <a:ext uri="{FF2B5EF4-FFF2-40B4-BE49-F238E27FC236}">
+                <a16:creationId xmlns:a16="http://schemas.microsoft.com/office/drawing/2014/main" id="{BB716376-6CDC-74AD-167C-0D7568707465}"/>
+              </a:ext>
+            </a:extLst>
+          </p:cNvPr>
+          <p:cNvSpPr txBox="1"/>
+          <p:nvPr/>
+        </p:nvSpPr>
+        <p:spPr>
+          <a:xfrm>
+            <a:off x="4655127" y="705177"/>
+            <a:ext cx="6643320" cy="6063198"/>
+          </a:xfrm>
+          <a:prstGeom prst="rect">
+            <a:avLst/>
+          </a:prstGeom>
+          <a:noFill/>
+        </p:spPr>
+        <p:txBody>
+          <a:bodyPr wrap="square" rtlCol="0">
+            <a:spAutoFit/>
+          </a:bodyPr>
+          <a:lstStyle/>
+          <a:p>
+            <a:r>
+              <a:rPr lang="ja-JP" altLang="ja-JP" sz="2800" b="1" dirty="0">
+                <a:solidFill>
+                  <a:schemeClr val="bg2"/>
+                </a:solidFill>
+              </a:rPr>
+              <a:t>Blur calibration</a:t>
+            </a:r>
+            <a:endParaRPr lang="ja-JP" altLang="ja-JP" sz="2800" dirty="0">
+              <a:solidFill>
+                <a:schemeClr val="bg2"/>
+              </a:solidFill>
+            </a:endParaRPr>
+          </a:p>
+          <a:p>
+            <a:r>
+              <a:rPr lang="ja-JP" altLang="ja-JP" sz="2000" dirty="0">
+                <a:solidFill>
+                  <a:schemeClr val="bg2"/>
+                </a:solidFill>
+              </a:rPr>
+              <a:t>In the central display area, the same stimulus image and marker are shown in the upper and lower halves. Among these, only the stimulus image in the upper half is displayed on the rear display.</a:t>
+            </a:r>
+            <a:endParaRPr lang="en-US" altLang="ja-JP" sz="2000" dirty="0">
+              <a:solidFill>
+                <a:schemeClr val="bg2"/>
+              </a:solidFill>
+            </a:endParaRPr>
+          </a:p>
+          <a:p>
+            <a:endParaRPr lang="ja-JP" altLang="ja-JP" sz="2000" dirty="0">
+              <a:solidFill>
+                <a:schemeClr val="bg2"/>
+              </a:solidFill>
+            </a:endParaRPr>
+          </a:p>
+          <a:p>
+            <a:r>
+              <a:rPr lang="ja-JP" altLang="ja-JP" sz="2000" dirty="0">
+                <a:solidFill>
+                  <a:schemeClr val="bg2"/>
+                </a:solidFill>
+              </a:rPr>
+              <a:t>First, in the upper half of the display area, focus on the marker on the front display while observing the blur of the stimulus image on the rear display.</a:t>
+            </a:r>
+          </a:p>
+          <a:p>
+            <a:r>
+              <a:rPr lang="ja-JP" altLang="ja-JP" sz="2000" dirty="0">
+                <a:solidFill>
+                  <a:schemeClr val="bg2"/>
+                </a:solidFill>
+              </a:rPr>
+              <a:t>Then, using the left and right arrow keys on the control PC, adjust the blur of the stimulus image in the lower half so that it matches the blur observed in the upper half. The blur becomes stronger as you move to the right.</a:t>
+            </a:r>
+          </a:p>
+          <a:p>
+            <a:r>
+              <a:rPr lang="ja-JP" altLang="ja-JP" sz="2000" dirty="0">
+                <a:solidFill>
+                  <a:schemeClr val="bg2"/>
+                </a:solidFill>
+              </a:rPr>
+              <a:t>Repeat this process until you feel that the two levels of blur match completely.</a:t>
+            </a:r>
+            <a:endParaRPr lang="en-US" altLang="ja-JP" sz="2000" dirty="0">
+              <a:solidFill>
+                <a:schemeClr val="bg2"/>
+              </a:solidFill>
+            </a:endParaRPr>
+          </a:p>
+          <a:p>
+            <a:endParaRPr lang="ja-JP" altLang="ja-JP" sz="2000" dirty="0">
+              <a:solidFill>
+                <a:schemeClr val="bg2"/>
+              </a:solidFill>
+            </a:endParaRPr>
+          </a:p>
+          <a:p>
+            <a:r>
+              <a:rPr lang="ja-JP" altLang="ja-JP" sz="2000" dirty="0">
+                <a:solidFill>
+                  <a:schemeClr val="bg2"/>
+                </a:solidFill>
+              </a:rPr>
+              <a:t>Press the down arrow key to confirm and proceed to the next stimulus.</a:t>
+            </a:r>
+          </a:p>
+          <a:p>
+            <a:endParaRPr kumimoji="1" lang="en-US" altLang="ja-JP" sz="2000" dirty="0">
+              <a:solidFill>
+                <a:schemeClr val="bg2"/>
+              </a:solidFill>
+            </a:endParaRPr>
+          </a:p>
+        </p:txBody>
+      </p:sp>
+      <p:pic>
+        <p:nvPicPr>
+          <p:cNvPr id="4" name="図 3">
+            <a:extLst>
+              <a:ext uri="{FF2B5EF4-FFF2-40B4-BE49-F238E27FC236}">
+                <a16:creationId xmlns:a16="http://schemas.microsoft.com/office/drawing/2014/main" id="{45CF841D-0B8D-7DA2-7BB6-03EE606A6C14}"/>
+              </a:ext>
+            </a:extLst>
+          </p:cNvPr>
+          <p:cNvPicPr>
+            <a:picLocks noChangeAspect="1"/>
+          </p:cNvPicPr>
+          <p:nvPr/>
+        </p:nvPicPr>
+        <p:blipFill>
+          <a:blip r:embed="rId2">
+            <a:extLst>
+              <a:ext uri="{28A0092B-C50C-407E-A947-70E740481C1C}">
+                <a14:useLocalDpi xmlns:a14="http://schemas.microsoft.com/office/drawing/2010/main" val="0"/>
+              </a:ext>
+            </a:extLst>
+          </a:blip>
+          <a:stretch>
+            <a:fillRect/>
+          </a:stretch>
+        </p:blipFill>
+        <p:spPr>
+          <a:xfrm>
+            <a:off x="505486" y="1089174"/>
+            <a:ext cx="3744000" cy="4679652"/>
+          </a:xfrm>
+          <a:prstGeom prst="rect">
+            <a:avLst/>
+          </a:prstGeom>
+        </p:spPr>
+      </p:pic>
+    </p:spTree>
+    <p:extLst>
+      <p:ext uri="{BB962C8B-B14F-4D97-AF65-F5344CB8AC3E}">
+        <p14:creationId xmlns:p14="http://schemas.microsoft.com/office/powerpoint/2010/main" val="266943146"/>
+      </p:ext>
+    </p:extLst>
+  </p:cSld>
+  <p:clrMapOvr>
+    <a:masterClrMapping/>
+  </p:clrMapOvr>
+</p:sld>
+</file>
+
+<file path=ppt/slides/slide25.xml><?xml version="1.0" encoding="utf-8"?>
+<p:sld xmlns:a="http://schemas.openxmlformats.org/drawingml/2006/main" xmlns:r="http://schemas.openxmlformats.org/officeDocument/2006/relationships" xmlns:p="http://schemas.openxmlformats.org/presentationml/2006/main">
+  <p:cSld>
+    <p:bg>
+      <p:bgPr>
+        <a:solidFill>
+          <a:schemeClr val="tx2"/>
+        </a:solidFill>
+        <a:effectLst/>
+      </p:bgPr>
+    </p:bg>
+    <p:spTree>
+      <p:nvGrpSpPr>
+        <p:cNvPr id="1" name="">
+          <a:extLst>
+            <a:ext uri="{FF2B5EF4-FFF2-40B4-BE49-F238E27FC236}">
+              <a16:creationId xmlns:a16="http://schemas.microsoft.com/office/drawing/2014/main" id="{DF1E6F8F-A27C-DC80-C042-F510AD99CE65}"/>
+            </a:ext>
+          </a:extLst>
+        </p:cNvPr>
+        <p:cNvGrpSpPr/>
+        <p:nvPr/>
+      </p:nvGrpSpPr>
+      <p:grpSpPr>
+        <a:xfrm>
+          <a:off x="0" y="0"/>
+          <a:ext cx="0" cy="0"/>
+          <a:chOff x="0" y="0"/>
+          <a:chExt cx="0" cy="0"/>
+        </a:xfrm>
+      </p:grpSpPr>
+      <p:sp>
+        <p:nvSpPr>
+          <p:cNvPr id="2" name="テキスト ボックス 1">
+            <a:extLst>
+              <a:ext uri="{FF2B5EF4-FFF2-40B4-BE49-F238E27FC236}">
+                <a16:creationId xmlns:a16="http://schemas.microsoft.com/office/drawing/2014/main" id="{0769E6FF-A9B6-B77C-5393-B4A7FBD91FF1}"/>
+              </a:ext>
+            </a:extLst>
+          </p:cNvPr>
+          <p:cNvSpPr txBox="1"/>
+          <p:nvPr/>
+        </p:nvSpPr>
+        <p:spPr>
+          <a:xfrm>
+            <a:off x="4655127" y="705177"/>
+            <a:ext cx="6643320" cy="6063198"/>
+          </a:xfrm>
+          <a:prstGeom prst="rect">
+            <a:avLst/>
+          </a:prstGeom>
+          <a:noFill/>
+        </p:spPr>
+        <p:txBody>
+          <a:bodyPr wrap="square" rtlCol="0">
+            <a:spAutoFit/>
+          </a:bodyPr>
+          <a:lstStyle/>
+          <a:p>
+            <a:r>
+              <a:rPr lang="ja-JP" altLang="ja-JP" sz="2800" b="1" dirty="0">
+                <a:solidFill>
+                  <a:schemeClr val="bg2"/>
+                </a:solidFill>
+              </a:rPr>
+              <a:t>Adjustment experiment</a:t>
+            </a:r>
+            <a:endParaRPr lang="ja-JP" altLang="ja-JP" sz="2800" dirty="0">
+              <a:solidFill>
+                <a:schemeClr val="bg2"/>
+              </a:solidFill>
+            </a:endParaRPr>
+          </a:p>
+          <a:p>
+            <a:r>
+              <a:rPr lang="ja-JP" altLang="ja-JP" sz="2000" dirty="0">
+                <a:solidFill>
+                  <a:schemeClr val="bg2"/>
+                </a:solidFill>
+              </a:rPr>
+              <a:t>In the central display area, stimulus images are shown in the upper and lower halves. The image in the lower half is created by adding noise to the background of the image in the upper half.</a:t>
+            </a:r>
+            <a:endParaRPr lang="en-US" altLang="ja-JP" sz="2000" dirty="0">
+              <a:solidFill>
+                <a:schemeClr val="bg2"/>
+              </a:solidFill>
+            </a:endParaRPr>
+          </a:p>
+          <a:p>
+            <a:endParaRPr lang="ja-JP" altLang="ja-JP" sz="2000" dirty="0">
+              <a:solidFill>
+                <a:schemeClr val="bg2"/>
+              </a:solidFill>
+            </a:endParaRPr>
+          </a:p>
+          <a:p>
+            <a:r>
+              <a:rPr lang="ja-JP" altLang="ja-JP" sz="2000" dirty="0">
+                <a:solidFill>
+                  <a:schemeClr val="bg2"/>
+                </a:solidFill>
+              </a:rPr>
+              <a:t>First, observe the appearance of the stimulus image in the upper half of the display area.</a:t>
+            </a:r>
+          </a:p>
+          <a:p>
+            <a:r>
+              <a:rPr lang="ja-JP" altLang="ja-JP" sz="2000" dirty="0">
+                <a:solidFill>
+                  <a:schemeClr val="bg2"/>
+                </a:solidFill>
+              </a:rPr>
+              <a:t>Then, using the left and right arrow keys on the control PC, adjust the appearance of the stimulus image in the lower half so that it matches the appearance of the upper half. The appearance becomes stronger as you move to the right.</a:t>
+            </a:r>
+          </a:p>
+          <a:p>
+            <a:r>
+              <a:rPr lang="ja-JP" altLang="ja-JP" sz="2000" dirty="0">
+                <a:solidFill>
+                  <a:schemeClr val="bg2"/>
+                </a:solidFill>
+              </a:rPr>
+              <a:t>Repeat this process until you feel that the two appearances match completely.</a:t>
+            </a:r>
+            <a:endParaRPr lang="en-US" altLang="ja-JP" sz="2000" dirty="0">
+              <a:solidFill>
+                <a:schemeClr val="bg2"/>
+              </a:solidFill>
+            </a:endParaRPr>
+          </a:p>
+          <a:p>
+            <a:endParaRPr lang="ja-JP" altLang="ja-JP" sz="2000" dirty="0">
+              <a:solidFill>
+                <a:schemeClr val="bg2"/>
+              </a:solidFill>
+            </a:endParaRPr>
+          </a:p>
+          <a:p>
+            <a:r>
+              <a:rPr lang="ja-JP" altLang="ja-JP" sz="2000" dirty="0">
+                <a:solidFill>
+                  <a:schemeClr val="bg2"/>
+                </a:solidFill>
+              </a:rPr>
+              <a:t>Press the Enter key to confirm and proceed to the next stimulus.</a:t>
+            </a:r>
+          </a:p>
+          <a:p>
+            <a:endParaRPr kumimoji="1" lang="en-US" altLang="ja-JP" sz="2000" dirty="0">
+              <a:solidFill>
+                <a:schemeClr val="bg2"/>
+              </a:solidFill>
+            </a:endParaRPr>
+          </a:p>
+        </p:txBody>
+      </p:sp>
+      <p:pic>
+        <p:nvPicPr>
+          <p:cNvPr id="4" name="図 3">
+            <a:extLst>
+              <a:ext uri="{FF2B5EF4-FFF2-40B4-BE49-F238E27FC236}">
+                <a16:creationId xmlns:a16="http://schemas.microsoft.com/office/drawing/2014/main" id="{AB1E5889-3C1F-D6C5-C3B8-CF7277D63A4D}"/>
+              </a:ext>
+            </a:extLst>
+          </p:cNvPr>
+          <p:cNvPicPr>
+            <a:picLocks noChangeAspect="1"/>
+          </p:cNvPicPr>
+          <p:nvPr/>
+        </p:nvPicPr>
+        <p:blipFill rotWithShape="1">
+          <a:blip r:embed="rId2">
+            <a:extLst>
+              <a:ext uri="{28A0092B-C50C-407E-A947-70E740481C1C}">
+                <a14:useLocalDpi xmlns:a14="http://schemas.microsoft.com/office/drawing/2010/main" val="0"/>
+              </a:ext>
+            </a:extLst>
+          </a:blip>
+          <a:srcRect l="24295" r="24295"/>
+          <a:stretch>
+            <a:fillRect/>
+          </a:stretch>
+        </p:blipFill>
+        <p:spPr>
+          <a:xfrm flipH="1">
+            <a:off x="451730" y="1205192"/>
+            <a:ext cx="3744000" cy="3793590"/>
+          </a:xfrm>
+          <a:prstGeom prst="rect">
+            <a:avLst/>
+          </a:prstGeom>
+        </p:spPr>
+      </p:pic>
+    </p:spTree>
+    <p:extLst>
+      <p:ext uri="{BB962C8B-B14F-4D97-AF65-F5344CB8AC3E}">
+        <p14:creationId xmlns:p14="http://schemas.microsoft.com/office/powerpoint/2010/main" val="2567110444"/>
+      </p:ext>
+    </p:extLst>
+  </p:cSld>
+  <p:clrMapOvr>
+    <a:masterClrMapping/>
+  </p:clrMapOvr>
+</p:sld>
+</file>
+
+<file path=ppt/slides/slide26.xml><?xml version="1.0" encoding="utf-8"?>
+<p:sld xmlns:a="http://schemas.openxmlformats.org/drawingml/2006/main" xmlns:r="http://schemas.openxmlformats.org/officeDocument/2006/relationships" xmlns:p="http://schemas.openxmlformats.org/presentationml/2006/main">
+  <p:cSld>
+    <p:bg>
+      <p:bgPr>
+        <a:solidFill>
+          <a:schemeClr val="tx2"/>
+        </a:solidFill>
+        <a:effectLst/>
+      </p:bgPr>
+    </p:bg>
+    <p:spTree>
+      <p:nvGrpSpPr>
+        <p:cNvPr id="1" name="">
+          <a:extLst>
+            <a:ext uri="{FF2B5EF4-FFF2-40B4-BE49-F238E27FC236}">
+              <a16:creationId xmlns:a16="http://schemas.microsoft.com/office/drawing/2014/main" id="{63A7854C-1B5E-C277-0C22-457F194F2E0A}"/>
+            </a:ext>
+          </a:extLst>
+        </p:cNvPr>
+        <p:cNvGrpSpPr/>
+        <p:nvPr/>
+      </p:nvGrpSpPr>
+      <p:grpSpPr>
+        <a:xfrm>
+          <a:off x="0" y="0"/>
+          <a:ext cx="0" cy="0"/>
+          <a:chOff x="0" y="0"/>
+          <a:chExt cx="0" cy="0"/>
+        </a:xfrm>
+      </p:grpSpPr>
+      <p:sp>
+        <p:nvSpPr>
+          <p:cNvPr id="2" name="テキスト ボックス 1">
+            <a:extLst>
+              <a:ext uri="{FF2B5EF4-FFF2-40B4-BE49-F238E27FC236}">
+                <a16:creationId xmlns:a16="http://schemas.microsoft.com/office/drawing/2014/main" id="{12B38A45-DE9F-E055-C196-EED0063BDC0E}"/>
+              </a:ext>
+            </a:extLst>
+          </p:cNvPr>
+          <p:cNvSpPr txBox="1"/>
+          <p:nvPr/>
+        </p:nvSpPr>
+        <p:spPr>
+          <a:xfrm>
+            <a:off x="4655127" y="705177"/>
+            <a:ext cx="6643320" cy="5755422"/>
+          </a:xfrm>
+          <a:prstGeom prst="rect">
+            <a:avLst/>
+          </a:prstGeom>
+          <a:noFill/>
+        </p:spPr>
+        <p:txBody>
+          <a:bodyPr wrap="square" rtlCol="0">
+            <a:spAutoFit/>
+          </a:bodyPr>
+          <a:lstStyle/>
+          <a:p>
+            <a:r>
+              <a:rPr lang="ja-JP" altLang="ja-JP" sz="2800" b="1" dirty="0">
+                <a:solidFill>
+                  <a:schemeClr val="bg2"/>
+                </a:solidFill>
+              </a:rPr>
+              <a:t>Estimation experiment</a:t>
+            </a:r>
+            <a:endParaRPr lang="ja-JP" altLang="ja-JP" sz="2800" dirty="0">
+              <a:solidFill>
+                <a:schemeClr val="bg2"/>
+              </a:solidFill>
+            </a:endParaRPr>
+          </a:p>
+          <a:p>
+            <a:r>
+              <a:rPr lang="ja-JP" altLang="ja-JP" sz="2000" dirty="0">
+                <a:solidFill>
+                  <a:schemeClr val="bg2"/>
+                </a:solidFill>
+              </a:rPr>
+              <a:t>Stimulus images will be presented sequentially in the central display area.</a:t>
+            </a:r>
+            <a:endParaRPr lang="en-US" altLang="ja-JP" sz="2000" dirty="0">
+              <a:solidFill>
+                <a:schemeClr val="bg2"/>
+              </a:solidFill>
+            </a:endParaRPr>
+          </a:p>
+          <a:p>
+            <a:endParaRPr lang="ja-JP" altLang="ja-JP" sz="2000" dirty="0">
+              <a:solidFill>
+                <a:schemeClr val="bg2"/>
+              </a:solidFill>
+            </a:endParaRPr>
+          </a:p>
+          <a:p>
+            <a:r>
+              <a:rPr lang="ja-JP" altLang="ja-JP" sz="2000" dirty="0">
+                <a:solidFill>
+                  <a:schemeClr val="bg2"/>
+                </a:solidFill>
+              </a:rPr>
+              <a:t>First, an image will be displayed on the front display.</a:t>
+            </a:r>
+          </a:p>
+          <a:p>
+            <a:r>
+              <a:rPr lang="ja-JP" altLang="ja-JP" sz="2000" dirty="0">
+                <a:solidFill>
+                  <a:schemeClr val="bg2"/>
+                </a:solidFill>
+              </a:rPr>
+              <a:t>After a blank interval, the same image will be displayed on the front display, while a background image will be superimposed on the rear display.</a:t>
+            </a:r>
+          </a:p>
+          <a:p>
+            <a:r>
+              <a:rPr lang="ja-JP" altLang="ja-JP" sz="2000" dirty="0">
+                <a:solidFill>
+                  <a:schemeClr val="bg2"/>
+                </a:solidFill>
+              </a:rPr>
+              <a:t>After the stimulus presentation ends, please rate the degree of visibility reduction in the front image caused by the addition of the background on a 5-point scale.</a:t>
+            </a:r>
+          </a:p>
+          <a:p>
+            <a:r>
+              <a:rPr lang="ja-JP" altLang="ja-JP" sz="2000" dirty="0">
+                <a:solidFill>
+                  <a:schemeClr val="bg2"/>
+                </a:solidFill>
+              </a:rPr>
+              <a:t>The rating criterion is how well you can recognize the features contained in the image, such as contours, structures, and colors.</a:t>
+            </a:r>
+            <a:endParaRPr lang="en-US" altLang="ja-JP" sz="2000" dirty="0">
+              <a:solidFill>
+                <a:schemeClr val="bg2"/>
+              </a:solidFill>
+            </a:endParaRPr>
+          </a:p>
+          <a:p>
+            <a:endParaRPr lang="ja-JP" altLang="ja-JP" sz="2000" dirty="0">
+              <a:solidFill>
+                <a:schemeClr val="bg2"/>
+              </a:solidFill>
+            </a:endParaRPr>
+          </a:p>
+          <a:p>
+            <a:r>
+              <a:rPr lang="ja-JP" altLang="ja-JP" sz="2000" dirty="0">
+                <a:solidFill>
+                  <a:schemeClr val="bg2"/>
+                </a:solidFill>
+              </a:rPr>
+              <a:t>Press the Enter key to confirm and proceed to the next stimulus.</a:t>
+            </a:r>
+          </a:p>
+          <a:p>
+            <a:endParaRPr kumimoji="1" lang="en-US" altLang="ja-JP" sz="2000" dirty="0">
+              <a:solidFill>
+                <a:schemeClr val="bg2"/>
+              </a:solidFill>
+            </a:endParaRPr>
+          </a:p>
+        </p:txBody>
+      </p:sp>
+      <p:pic>
+        <p:nvPicPr>
+          <p:cNvPr id="7" name="図 6">
+            <a:extLst>
+              <a:ext uri="{FF2B5EF4-FFF2-40B4-BE49-F238E27FC236}">
+                <a16:creationId xmlns:a16="http://schemas.microsoft.com/office/drawing/2014/main" id="{8650CA67-83ED-DA56-2237-A76DF5869838}"/>
+              </a:ext>
+            </a:extLst>
+          </p:cNvPr>
+          <p:cNvPicPr>
+            <a:picLocks noChangeAspect="1"/>
+          </p:cNvPicPr>
+          <p:nvPr/>
+        </p:nvPicPr>
+        <p:blipFill rotWithShape="1">
+          <a:blip r:embed="rId2">
+            <a:extLst>
+              <a:ext uri="{28A0092B-C50C-407E-A947-70E740481C1C}">
+                <a14:useLocalDpi xmlns:a14="http://schemas.microsoft.com/office/drawing/2010/main" val="0"/>
+              </a:ext>
+            </a:extLst>
+          </a:blip>
+          <a:srcRect t="10625" b="10625"/>
+          <a:stretch>
+            <a:fillRect/>
+          </a:stretch>
+        </p:blipFill>
+        <p:spPr>
+          <a:xfrm>
+            <a:off x="686189" y="2497500"/>
+            <a:ext cx="3312000" cy="1863000"/>
+          </a:xfrm>
+          <a:prstGeom prst="rect">
+            <a:avLst/>
+          </a:prstGeom>
+        </p:spPr>
+      </p:pic>
+      <p:pic>
+        <p:nvPicPr>
+          <p:cNvPr id="8" name="図 7">
+            <a:extLst>
+              <a:ext uri="{FF2B5EF4-FFF2-40B4-BE49-F238E27FC236}">
+                <a16:creationId xmlns:a16="http://schemas.microsoft.com/office/drawing/2014/main" id="{9F5CFD7B-5CD0-7D11-A24E-C940FE68BB43}"/>
+              </a:ext>
+            </a:extLst>
+          </p:cNvPr>
+          <p:cNvPicPr>
+            <a:picLocks noChangeAspect="1"/>
+          </p:cNvPicPr>
+          <p:nvPr/>
+        </p:nvPicPr>
+        <p:blipFill rotWithShape="1">
+          <a:blip r:embed="rId3">
+            <a:extLst>
+              <a:ext uri="{28A0092B-C50C-407E-A947-70E740481C1C}">
+                <a14:useLocalDpi xmlns:a14="http://schemas.microsoft.com/office/drawing/2010/main" val="0"/>
+              </a:ext>
+            </a:extLst>
+          </a:blip>
+          <a:srcRect t="10628" b="10628"/>
+          <a:stretch>
+            <a:fillRect/>
+          </a:stretch>
+        </p:blipFill>
+        <p:spPr>
+          <a:xfrm>
+            <a:off x="686189" y="345660"/>
+            <a:ext cx="3312000" cy="1863000"/>
+          </a:xfrm>
+          <a:prstGeom prst="rect">
+            <a:avLst/>
+          </a:prstGeom>
+        </p:spPr>
+      </p:pic>
+      <p:pic>
+        <p:nvPicPr>
+          <p:cNvPr id="4" name="図 3">
+            <a:extLst>
+              <a:ext uri="{FF2B5EF4-FFF2-40B4-BE49-F238E27FC236}">
+                <a16:creationId xmlns:a16="http://schemas.microsoft.com/office/drawing/2014/main" id="{9BA50069-E273-C06B-D9F4-876EA7985693}"/>
+              </a:ext>
+            </a:extLst>
+          </p:cNvPr>
+          <p:cNvPicPr>
+            <a:picLocks noChangeAspect="1"/>
+          </p:cNvPicPr>
+          <p:nvPr/>
+        </p:nvPicPr>
+        <p:blipFill>
+          <a:blip r:embed="rId4"/>
+          <a:stretch>
+            <a:fillRect/>
+          </a:stretch>
+        </p:blipFill>
+        <p:spPr>
+          <a:xfrm>
+            <a:off x="686189" y="4649340"/>
+            <a:ext cx="3312000" cy="1937092"/>
+          </a:xfrm>
+          <a:prstGeom prst="rect">
+            <a:avLst/>
+          </a:prstGeom>
+        </p:spPr>
+      </p:pic>
+      <p:sp>
+        <p:nvSpPr>
+          <p:cNvPr id="5" name="矢印: 下 4">
+            <a:extLst>
+              <a:ext uri="{FF2B5EF4-FFF2-40B4-BE49-F238E27FC236}">
+                <a16:creationId xmlns:a16="http://schemas.microsoft.com/office/drawing/2014/main" id="{170FB0FD-DEF3-8039-AFEF-BB42DE1EEEFD}"/>
+              </a:ext>
+            </a:extLst>
+          </p:cNvPr>
+          <p:cNvSpPr/>
+          <p:nvPr/>
+        </p:nvSpPr>
+        <p:spPr>
+          <a:xfrm>
+            <a:off x="1879793" y="2208660"/>
+            <a:ext cx="924791" cy="288840"/>
+          </a:xfrm>
+          <a:prstGeom prst="downArrow">
+            <a:avLst/>
+          </a:prstGeom>
+          <a:solidFill>
+            <a:schemeClr val="accent5"/>
+          </a:solidFill>
+        </p:spPr>
+        <p:style>
+          <a:lnRef idx="1">
+            <a:schemeClr val="accent1"/>
+          </a:lnRef>
+          <a:fillRef idx="3">
+            <a:schemeClr val="accent1"/>
+          </a:fillRef>
+          <a:effectRef idx="2">
+            <a:schemeClr val="accent1"/>
+          </a:effectRef>
+          <a:fontRef idx="minor">
+            <a:schemeClr val="lt1"/>
+          </a:fontRef>
+        </p:style>
+        <p:txBody>
+          <a:bodyPr rtlCol="0" anchor="ctr"/>
+          <a:lstStyle/>
+          <a:p>
+            <a:pPr algn="ctr"/>
+            <a:endParaRPr kumimoji="1" lang="ja-JP" altLang="en-US"/>
+          </a:p>
+        </p:txBody>
+      </p:sp>
+      <p:sp>
+        <p:nvSpPr>
+          <p:cNvPr id="9" name="矢印: 下 8">
+            <a:extLst>
+              <a:ext uri="{FF2B5EF4-FFF2-40B4-BE49-F238E27FC236}">
+                <a16:creationId xmlns:a16="http://schemas.microsoft.com/office/drawing/2014/main" id="{2F871BF7-1702-1E7D-F1B0-D199DC1A98DC}"/>
+              </a:ext>
+            </a:extLst>
+          </p:cNvPr>
+          <p:cNvSpPr/>
+          <p:nvPr/>
+        </p:nvSpPr>
+        <p:spPr>
+          <a:xfrm>
+            <a:off x="1879793" y="4360500"/>
+            <a:ext cx="924791" cy="288840"/>
+          </a:xfrm>
+          <a:prstGeom prst="downArrow">
+            <a:avLst/>
+          </a:prstGeom>
+          <a:solidFill>
+            <a:schemeClr val="accent5"/>
+          </a:solidFill>
+        </p:spPr>
+        <p:style>
+          <a:lnRef idx="1">
+            <a:schemeClr val="accent1"/>
+          </a:lnRef>
+          <a:fillRef idx="3">
+            <a:schemeClr val="accent1"/>
+          </a:fillRef>
+          <a:effectRef idx="2">
+            <a:schemeClr val="accent1"/>
+          </a:effectRef>
+          <a:fontRef idx="minor">
+            <a:schemeClr val="lt1"/>
+          </a:fontRef>
+        </p:style>
+        <p:txBody>
+          <a:bodyPr rtlCol="0" anchor="ctr"/>
+          <a:lstStyle/>
+          <a:p>
+            <a:pPr algn="ctr"/>
+            <a:endParaRPr kumimoji="1" lang="ja-JP" altLang="en-US"/>
+          </a:p>
+        </p:txBody>
+      </p:sp>
+    </p:spTree>
+    <p:extLst>
+      <p:ext uri="{BB962C8B-B14F-4D97-AF65-F5344CB8AC3E}">
+        <p14:creationId xmlns:p14="http://schemas.microsoft.com/office/powerpoint/2010/main" val="4125237718"/>
+      </p:ext>
+    </p:extLst>
+  </p:cSld>
+  <p:clrMapOvr>
+    <a:masterClrMapping/>
+  </p:clrMapOvr>
+</p:sld>
+</file>
+
+<file path=ppt/slides/slide27.xml><?xml version="1.0" encoding="utf-8"?>
+<p:sld xmlns:a="http://schemas.openxmlformats.org/drawingml/2006/main" xmlns:r="http://schemas.openxmlformats.org/officeDocument/2006/relationships" xmlns:p="http://schemas.openxmlformats.org/presentationml/2006/main">
+  <p:cSld>
+    <p:bg>
+      <p:bgPr>
+        <a:solidFill>
+          <a:schemeClr val="tx2"/>
+        </a:solidFill>
+        <a:effectLst/>
+      </p:bgPr>
+    </p:bg>
+    <p:spTree>
+      <p:nvGrpSpPr>
+        <p:cNvPr id="1" name="">
+          <a:extLst>
+            <a:ext uri="{FF2B5EF4-FFF2-40B4-BE49-F238E27FC236}">
+              <a16:creationId xmlns:a16="http://schemas.microsoft.com/office/drawing/2014/main" id="{3504046E-B4D5-DDC9-85BA-3CF44010F60C}"/>
+            </a:ext>
+          </a:extLst>
+        </p:cNvPr>
+        <p:cNvGrpSpPr/>
+        <p:nvPr/>
+      </p:nvGrpSpPr>
+      <p:grpSpPr>
+        <a:xfrm>
+          <a:off x="0" y="0"/>
+          <a:ext cx="0" cy="0"/>
+          <a:chOff x="0" y="0"/>
+          <a:chExt cx="0" cy="0"/>
+        </a:xfrm>
+      </p:grpSpPr>
+      <p:sp>
+        <p:nvSpPr>
+          <p:cNvPr id="2" name="テキスト ボックス 1">
+            <a:extLst>
+              <a:ext uri="{FF2B5EF4-FFF2-40B4-BE49-F238E27FC236}">
+                <a16:creationId xmlns:a16="http://schemas.microsoft.com/office/drawing/2014/main" id="{158DDEE6-5E17-8CCD-3480-B96396AC964B}"/>
+              </a:ext>
+            </a:extLst>
+          </p:cNvPr>
+          <p:cNvSpPr txBox="1"/>
+          <p:nvPr/>
+        </p:nvSpPr>
+        <p:spPr>
+          <a:xfrm>
+            <a:off x="948906" y="3013501"/>
+            <a:ext cx="10404894" cy="1200329"/>
+          </a:xfrm>
+          <a:prstGeom prst="rect">
+            <a:avLst/>
+          </a:prstGeom>
+          <a:solidFill>
+            <a:schemeClr val="tx2"/>
+          </a:solidFill>
+        </p:spPr>
+        <p:txBody>
+          <a:bodyPr wrap="square" rtlCol="0">
+            <a:spAutoFit/>
+          </a:bodyPr>
+          <a:lstStyle/>
+          <a:p>
+            <a:r>
+              <a:rPr lang="ja-JP" altLang="ja-JP" sz="2400" dirty="0">
+                <a:solidFill>
+                  <a:schemeClr val="bg2"/>
+                </a:solidFill>
+              </a:rPr>
+              <a:t>This concludes the entire experiment.</a:t>
+            </a:r>
+          </a:p>
+          <a:p>
+            <a:r>
+              <a:rPr lang="ja-JP" altLang="ja-JP" sz="2400" dirty="0">
+                <a:solidFill>
+                  <a:schemeClr val="bg2"/>
+                </a:solidFill>
+              </a:rPr>
+              <a:t>Thank you very much for your cooperation.</a:t>
+            </a:r>
+          </a:p>
+          <a:p>
+            <a:endParaRPr lang="en-US" altLang="ja-JP" sz="2400" dirty="0">
+              <a:solidFill>
+                <a:schemeClr val="bg2"/>
+              </a:solidFill>
+            </a:endParaRPr>
+          </a:p>
+        </p:txBody>
+      </p:sp>
+    </p:spTree>
+    <p:extLst>
+      <p:ext uri="{BB962C8B-B14F-4D97-AF65-F5344CB8AC3E}">
+        <p14:creationId xmlns:p14="http://schemas.microsoft.com/office/powerpoint/2010/main" val="784816001"/>
       </p:ext>
     </p:extLst>
   </p:cSld>
@@ -2485,95 +6116,42 @@
           </a:p>
         </p:txBody>
       </p:sp>
-      <p:grpSp>
-        <p:nvGrpSpPr>
-          <p:cNvPr id="9" name="グループ化 8">
+      <p:pic>
+        <p:nvPicPr>
+          <p:cNvPr id="7" name="図 6">
             <a:extLst>
               <a:ext uri="{FF2B5EF4-FFF2-40B4-BE49-F238E27FC236}">
-                <a16:creationId xmlns:a16="http://schemas.microsoft.com/office/drawing/2014/main" id="{3B84175B-CA6D-8A2F-7872-20E7FB818A34}"/>
+                <a16:creationId xmlns:a16="http://schemas.microsoft.com/office/drawing/2014/main" id="{BD8D3F9E-F85A-1AF2-214A-20415D694B8C}"/>
               </a:ext>
             </a:extLst>
           </p:cNvPr>
-          <p:cNvGrpSpPr/>
+          <p:cNvPicPr>
+            <a:picLocks noChangeAspect="1"/>
+          </p:cNvPicPr>
           <p:nvPr/>
-        </p:nvGrpSpPr>
-        <p:grpSpPr>
+        </p:nvPicPr>
+        <p:blipFill>
+          <a:blip r:embed="rId2">
+            <a:extLst>
+              <a:ext uri="{28A0092B-C50C-407E-A947-70E740481C1C}">
+                <a14:useLocalDpi xmlns:a14="http://schemas.microsoft.com/office/drawing/2010/main" val="0"/>
+              </a:ext>
+            </a:extLst>
+          </a:blip>
+          <a:stretch>
+            <a:fillRect/>
+          </a:stretch>
+        </p:blipFill>
+        <p:spPr>
           <a:xfrm>
-            <a:off x="601853" y="2029180"/>
-            <a:ext cx="3789056" cy="2799639"/>
-            <a:chOff x="674590" y="1865879"/>
-            <a:chExt cx="3789056" cy="2799639"/>
+            <a:off x="625105" y="1096241"/>
+            <a:ext cx="3744484" cy="4665518"/>
           </a:xfrm>
-        </p:grpSpPr>
-        <p:pic>
-          <p:nvPicPr>
-            <p:cNvPr id="8" name="図 7">
-              <a:extLst>
-                <a:ext uri="{FF2B5EF4-FFF2-40B4-BE49-F238E27FC236}">
-                  <a16:creationId xmlns:a16="http://schemas.microsoft.com/office/drawing/2014/main" id="{8F5E52EA-BC18-4BD3-FD47-2D28A0D72435}"/>
-                </a:ext>
-              </a:extLst>
-            </p:cNvPr>
-            <p:cNvPicPr>
-              <a:picLocks noChangeAspect="1"/>
-            </p:cNvPicPr>
-            <p:nvPr/>
-          </p:nvPicPr>
-          <p:blipFill>
-            <a:blip r:embed="rId2"/>
-            <a:stretch>
-              <a:fillRect/>
-            </a:stretch>
-          </p:blipFill>
-          <p:spPr>
-            <a:xfrm>
-              <a:off x="674590" y="2456054"/>
-              <a:ext cx="3789056" cy="1945892"/>
-            </a:xfrm>
-            <a:prstGeom prst="rect">
-              <a:avLst/>
-            </a:prstGeom>
-          </p:spPr>
-        </p:pic>
-        <p:pic>
-          <p:nvPicPr>
-            <p:cNvPr id="4" name="図 3">
-              <a:extLst>
-                <a:ext uri="{FF2B5EF4-FFF2-40B4-BE49-F238E27FC236}">
-                  <a16:creationId xmlns:a16="http://schemas.microsoft.com/office/drawing/2014/main" id="{6E2910DB-18C9-630A-D99B-0171144EDB6A}"/>
-                </a:ext>
-              </a:extLst>
-            </p:cNvPr>
-            <p:cNvPicPr>
-              <a:picLocks noChangeAspect="1"/>
-            </p:cNvPicPr>
-            <p:nvPr/>
-          </p:nvPicPr>
-          <p:blipFill rotWithShape="1">
-            <a:blip r:embed="rId3">
-              <a:alphaModFix amt="42000"/>
-              <a:extLst>
-                <a:ext uri="{28A0092B-C50C-407E-A947-70E740481C1C}">
-                  <a14:useLocalDpi xmlns:a14="http://schemas.microsoft.com/office/drawing/2010/main" val="0"/>
-                </a:ext>
-              </a:extLst>
-            </a:blip>
-            <a:srcRect l="24283" r="24283"/>
-            <a:stretch>
-              <a:fillRect/>
-            </a:stretch>
-          </p:blipFill>
-          <p:spPr>
-            <a:xfrm>
-              <a:off x="1013435" y="1865879"/>
-              <a:ext cx="2799639" cy="2799639"/>
-            </a:xfrm>
-            <a:prstGeom prst="rect">
-              <a:avLst/>
-            </a:prstGeom>
-          </p:spPr>
-        </p:pic>
-      </p:grpSp>
+          <a:prstGeom prst="rect">
+            <a:avLst/>
+          </a:prstGeom>
+        </p:spPr>
+      </p:pic>
     </p:spTree>
     <p:extLst>
       <p:ext uri="{BB962C8B-B14F-4D97-AF65-F5344CB8AC3E}">
@@ -2776,6 +6354,42 @@
           </a:p>
         </p:txBody>
       </p:sp>
+      <p:pic>
+        <p:nvPicPr>
+          <p:cNvPr id="4" name="図 3">
+            <a:extLst>
+              <a:ext uri="{FF2B5EF4-FFF2-40B4-BE49-F238E27FC236}">
+                <a16:creationId xmlns:a16="http://schemas.microsoft.com/office/drawing/2014/main" id="{B00F01A0-F192-76AD-5C55-8F4368967E0D}"/>
+              </a:ext>
+            </a:extLst>
+          </p:cNvPr>
+          <p:cNvPicPr>
+            <a:picLocks noChangeAspect="1"/>
+          </p:cNvPicPr>
+          <p:nvPr/>
+        </p:nvPicPr>
+        <p:blipFill>
+          <a:blip r:embed="rId2">
+            <a:extLst>
+              <a:ext uri="{28A0092B-C50C-407E-A947-70E740481C1C}">
+                <a14:useLocalDpi xmlns:a14="http://schemas.microsoft.com/office/drawing/2010/main" val="0"/>
+              </a:ext>
+            </a:extLst>
+          </a:blip>
+          <a:stretch>
+            <a:fillRect/>
+          </a:stretch>
+        </p:blipFill>
+        <p:spPr>
+          <a:xfrm>
+            <a:off x="505486" y="1089174"/>
+            <a:ext cx="3744000" cy="4679652"/>
+          </a:xfrm>
+          <a:prstGeom prst="rect">
+            <a:avLst/>
+          </a:prstGeom>
+        </p:spPr>
+      </p:pic>
     </p:spTree>
     <p:extLst>
       <p:ext uri="{BB962C8B-B14F-4D97-AF65-F5344CB8AC3E}">
@@ -3015,8 +6629,8 @@
         </p:blipFill>
         <p:spPr>
           <a:xfrm flipH="1">
-            <a:off x="462121" y="1161965"/>
-            <a:ext cx="3829324" cy="3880044"/>
+            <a:off x="451730" y="1205192"/>
+            <a:ext cx="3744000" cy="3793590"/>
           </a:xfrm>
           <a:prstGeom prst="rect">
             <a:avLst/>
@@ -3255,6 +6869,204 @@
           </a:p>
         </p:txBody>
       </p:sp>
+      <p:pic>
+        <p:nvPicPr>
+          <p:cNvPr id="7" name="図 6">
+            <a:extLst>
+              <a:ext uri="{FF2B5EF4-FFF2-40B4-BE49-F238E27FC236}">
+                <a16:creationId xmlns:a16="http://schemas.microsoft.com/office/drawing/2014/main" id="{61A37143-021E-3E02-3951-7919E7E5B03A}"/>
+              </a:ext>
+            </a:extLst>
+          </p:cNvPr>
+          <p:cNvPicPr>
+            <a:picLocks noChangeAspect="1"/>
+          </p:cNvPicPr>
+          <p:nvPr/>
+        </p:nvPicPr>
+        <p:blipFill rotWithShape="1">
+          <a:blip r:embed="rId2">
+            <a:extLst>
+              <a:ext uri="{28A0092B-C50C-407E-A947-70E740481C1C}">
+                <a14:useLocalDpi xmlns:a14="http://schemas.microsoft.com/office/drawing/2010/main" val="0"/>
+              </a:ext>
+            </a:extLst>
+          </a:blip>
+          <a:srcRect t="10625" b="10625"/>
+          <a:stretch>
+            <a:fillRect/>
+          </a:stretch>
+        </p:blipFill>
+        <p:spPr>
+          <a:xfrm>
+            <a:off x="686189" y="2497500"/>
+            <a:ext cx="3312000" cy="1863000"/>
+          </a:xfrm>
+          <a:prstGeom prst="rect">
+            <a:avLst/>
+          </a:prstGeom>
+        </p:spPr>
+      </p:pic>
+      <p:pic>
+        <p:nvPicPr>
+          <p:cNvPr id="8" name="図 7">
+            <a:extLst>
+              <a:ext uri="{FF2B5EF4-FFF2-40B4-BE49-F238E27FC236}">
+                <a16:creationId xmlns:a16="http://schemas.microsoft.com/office/drawing/2014/main" id="{4EE72AF4-E718-6F5B-10C5-C99B75979F76}"/>
+              </a:ext>
+            </a:extLst>
+          </p:cNvPr>
+          <p:cNvPicPr>
+            <a:picLocks noChangeAspect="1"/>
+          </p:cNvPicPr>
+          <p:nvPr/>
+        </p:nvPicPr>
+        <p:blipFill rotWithShape="1">
+          <a:blip r:embed="rId3">
+            <a:extLst>
+              <a:ext uri="{28A0092B-C50C-407E-A947-70E740481C1C}">
+                <a14:useLocalDpi xmlns:a14="http://schemas.microsoft.com/office/drawing/2010/main" val="0"/>
+              </a:ext>
+            </a:extLst>
+          </a:blip>
+          <a:srcRect t="10628" b="10628"/>
+          <a:stretch>
+            <a:fillRect/>
+          </a:stretch>
+        </p:blipFill>
+        <p:spPr>
+          <a:xfrm>
+            <a:off x="686189" y="345660"/>
+            <a:ext cx="3312000" cy="1863000"/>
+          </a:xfrm>
+          <a:prstGeom prst="rect">
+            <a:avLst/>
+          </a:prstGeom>
+        </p:spPr>
+      </p:pic>
+      <p:pic>
+        <p:nvPicPr>
+          <p:cNvPr id="4" name="図 3">
+            <a:extLst>
+              <a:ext uri="{FF2B5EF4-FFF2-40B4-BE49-F238E27FC236}">
+                <a16:creationId xmlns:a16="http://schemas.microsoft.com/office/drawing/2014/main" id="{BD1AB912-FE21-BAE8-13DC-BEEA63B52477}"/>
+              </a:ext>
+            </a:extLst>
+          </p:cNvPr>
+          <p:cNvPicPr>
+            <a:picLocks noChangeAspect="1"/>
+          </p:cNvPicPr>
+          <p:nvPr/>
+        </p:nvPicPr>
+        <p:blipFill>
+          <a:blip r:embed="rId4"/>
+          <a:stretch>
+            <a:fillRect/>
+          </a:stretch>
+        </p:blipFill>
+        <p:spPr>
+          <a:xfrm>
+            <a:off x="686189" y="4649340"/>
+            <a:ext cx="3312000" cy="1937092"/>
+          </a:xfrm>
+          <a:prstGeom prst="rect">
+            <a:avLst/>
+          </a:prstGeom>
+        </p:spPr>
+      </p:pic>
+      <p:sp>
+        <p:nvSpPr>
+          <p:cNvPr id="5" name="矢印: 下 4">
+            <a:extLst>
+              <a:ext uri="{FF2B5EF4-FFF2-40B4-BE49-F238E27FC236}">
+                <a16:creationId xmlns:a16="http://schemas.microsoft.com/office/drawing/2014/main" id="{971B9A4C-A212-3AD8-2489-B9E9BD44FB6A}"/>
+              </a:ext>
+            </a:extLst>
+          </p:cNvPr>
+          <p:cNvSpPr/>
+          <p:nvPr/>
+        </p:nvSpPr>
+        <p:spPr>
+          <a:xfrm>
+            <a:off x="1879793" y="2208660"/>
+            <a:ext cx="924791" cy="288840"/>
+          </a:xfrm>
+          <a:prstGeom prst="downArrow">
+            <a:avLst/>
+          </a:prstGeom>
+          <a:solidFill>
+            <a:schemeClr val="accent5"/>
+          </a:solidFill>
+        </p:spPr>
+        <p:style>
+          <a:lnRef idx="1">
+            <a:schemeClr val="accent1"/>
+          </a:lnRef>
+          <a:fillRef idx="3">
+            <a:schemeClr val="accent1"/>
+          </a:fillRef>
+          <a:effectRef idx="2">
+            <a:schemeClr val="accent1"/>
+          </a:effectRef>
+          <a:fontRef idx="minor">
+            <a:schemeClr val="lt1"/>
+          </a:fontRef>
+        </p:style>
+        <p:txBody>
+          <a:bodyPr rtlCol="0" anchor="ctr"/>
+          <a:lstStyle/>
+          <a:p>
+            <a:pPr algn="ctr"/>
+            <a:endParaRPr kumimoji="1" lang="ja-JP" altLang="en-US"/>
+          </a:p>
+        </p:txBody>
+      </p:sp>
+      <p:sp>
+        <p:nvSpPr>
+          <p:cNvPr id="9" name="矢印: 下 8">
+            <a:extLst>
+              <a:ext uri="{FF2B5EF4-FFF2-40B4-BE49-F238E27FC236}">
+                <a16:creationId xmlns:a16="http://schemas.microsoft.com/office/drawing/2014/main" id="{85A5CB5A-43B1-301D-B890-FC0D3398665F}"/>
+              </a:ext>
+            </a:extLst>
+          </p:cNvPr>
+          <p:cNvSpPr/>
+          <p:nvPr/>
+        </p:nvSpPr>
+        <p:spPr>
+          <a:xfrm>
+            <a:off x="1879793" y="4360500"/>
+            <a:ext cx="924791" cy="288840"/>
+          </a:xfrm>
+          <a:prstGeom prst="downArrow">
+            <a:avLst/>
+          </a:prstGeom>
+          <a:solidFill>
+            <a:schemeClr val="accent5"/>
+          </a:solidFill>
+        </p:spPr>
+        <p:style>
+          <a:lnRef idx="1">
+            <a:schemeClr val="accent1"/>
+          </a:lnRef>
+          <a:fillRef idx="3">
+            <a:schemeClr val="accent1"/>
+          </a:fillRef>
+          <a:effectRef idx="2">
+            <a:schemeClr val="accent1"/>
+          </a:effectRef>
+          <a:fontRef idx="minor">
+            <a:schemeClr val="lt1"/>
+          </a:fontRef>
+        </p:style>
+        <p:txBody>
+          <a:bodyPr rtlCol="0" anchor="ctr"/>
+          <a:lstStyle/>
+          <a:p>
+            <a:pPr algn="ctr"/>
+            <a:endParaRPr kumimoji="1" lang="ja-JP" altLang="en-US"/>
+          </a:p>
+        </p:txBody>
+      </p:sp>
     </p:spTree>
     <p:extLst>
       <p:ext uri="{BB962C8B-B14F-4D97-AF65-F5344CB8AC3E}">
@@ -3456,7 +7268,13 @@
     </p:bg>
     <p:spTree>
       <p:nvGrpSpPr>
-        <p:cNvPr id="1" name=""/>
+        <p:cNvPr id="1" name="">
+          <a:extLst>
+            <a:ext uri="{FF2B5EF4-FFF2-40B4-BE49-F238E27FC236}">
+              <a16:creationId xmlns:a16="http://schemas.microsoft.com/office/drawing/2014/main" id="{3D0AA7F7-94A8-27FC-F16E-E99757B66783}"/>
+            </a:ext>
+          </a:extLst>
+        </p:cNvPr>
         <p:cNvGrpSpPr/>
         <p:nvPr/>
       </p:nvGrpSpPr>
@@ -3470,10 +7288,10 @@
       </p:grpSpPr>
       <p:sp>
         <p:nvSpPr>
-          <p:cNvPr id="2" name="テキスト ボックス 1">
+          <p:cNvPr id="3" name="テキスト ボックス 2">
             <a:extLst>
               <a:ext uri="{FF2B5EF4-FFF2-40B4-BE49-F238E27FC236}">
-                <a16:creationId xmlns:a16="http://schemas.microsoft.com/office/drawing/2014/main" id="{58BE3E49-0AFA-E18C-F7A8-CF22391C9531}"/>
+                <a16:creationId xmlns:a16="http://schemas.microsoft.com/office/drawing/2014/main" id="{BA8E8BD9-3F83-842A-0E88-2F2D568B59FE}"/>
               </a:ext>
             </a:extLst>
           </p:cNvPr>
@@ -3482,15 +7300,13 @@
         </p:nvSpPr>
         <p:spPr>
           <a:xfrm>
-            <a:off x="948906" y="3013501"/>
-            <a:ext cx="10404894" cy="830997"/>
+            <a:off x="4655125" y="705177"/>
+            <a:ext cx="6643321" cy="3870290"/>
           </a:xfrm>
           <a:prstGeom prst="rect">
             <a:avLst/>
           </a:prstGeom>
-          <a:solidFill>
-            <a:schemeClr val="tx2"/>
-          </a:solidFill>
+          <a:noFill/>
         </p:spPr>
         <p:txBody>
           <a:bodyPr wrap="square" rtlCol="0">
@@ -3499,29 +7315,115 @@
           <a:lstStyle/>
           <a:p>
             <a:r>
-              <a:rPr lang="ja-JP" altLang="en-US" sz="2400" dirty="0">
-                <a:solidFill>
-                  <a:schemeClr val="bg1"/>
-                </a:solidFill>
-              </a:rPr>
-              <a:t>これにて全実験終了となります</a:t>
-            </a:r>
-            <a:endParaRPr lang="en-US" altLang="ja-JP" sz="2400" dirty="0">
-              <a:solidFill>
-                <a:schemeClr val="bg1"/>
-              </a:solidFill>
-            </a:endParaRPr>
-          </a:p>
-          <a:p>
-            <a:r>
-              <a:rPr lang="ja-JP" altLang="en-US" sz="2400" dirty="0">
-                <a:solidFill>
-                  <a:schemeClr val="bg1"/>
-                </a:solidFill>
-              </a:rPr>
-              <a:t>ご協力いただきありがとうございました</a:t>
-            </a:r>
-            <a:endParaRPr lang="en-US" altLang="ja-JP" sz="3600" dirty="0">
+              <a:rPr lang="ja-JP" altLang="en-US" sz="2550" b="1" dirty="0">
+                <a:solidFill>
+                  <a:schemeClr val="bg1"/>
+                </a:solidFill>
+                <a:latin typeface="+mj-ea"/>
+                <a:ea typeface="+mj-ea"/>
+              </a:rPr>
+              <a:t>位置キャリブレーション</a:t>
+            </a:r>
+            <a:endParaRPr lang="en-US" altLang="ja-JP" sz="2550" b="1" dirty="0">
+              <a:solidFill>
+                <a:schemeClr val="bg1"/>
+              </a:solidFill>
+              <a:latin typeface="+mj-ea"/>
+              <a:ea typeface="+mj-ea"/>
+            </a:endParaRPr>
+          </a:p>
+          <a:p>
+            <a:endParaRPr lang="en-US" altLang="ja-JP" sz="2000" dirty="0">
+              <a:solidFill>
+                <a:schemeClr val="bg1"/>
+              </a:solidFill>
+            </a:endParaRPr>
+          </a:p>
+          <a:p>
+            <a:r>
+              <a:rPr lang="ja-JP" altLang="en-US" sz="2000" dirty="0">
+                <a:solidFill>
+                  <a:schemeClr val="bg1"/>
+                </a:solidFill>
+              </a:rPr>
+              <a:t>操作用</a:t>
+            </a:r>
+            <a:r>
+              <a:rPr lang="en-US" altLang="ja-JP" sz="2000" dirty="0">
+                <a:solidFill>
+                  <a:schemeClr val="bg1"/>
+                </a:solidFill>
+              </a:rPr>
+              <a:t>PC</a:t>
+            </a:r>
+            <a:r>
+              <a:rPr lang="ja-JP" altLang="en-US" sz="2000" dirty="0">
+                <a:solidFill>
+                  <a:schemeClr val="bg1"/>
+                </a:solidFill>
+              </a:rPr>
+              <a:t>の矢印キーを用いて、奥のディスプレイに表示されている正方形の枠（赤）の位置を動かし、手前のディスプレイに表示されている正方形の枠（白）に合わせます。</a:t>
+            </a:r>
+            <a:endParaRPr lang="en-US" altLang="ja-JP" sz="2000" dirty="0">
+              <a:solidFill>
+                <a:schemeClr val="bg1"/>
+              </a:solidFill>
+            </a:endParaRPr>
+          </a:p>
+          <a:p>
+            <a:endParaRPr kumimoji="1" lang="en-US" altLang="ja-JP" sz="2000" dirty="0">
+              <a:solidFill>
+                <a:schemeClr val="bg1"/>
+              </a:solidFill>
+            </a:endParaRPr>
+          </a:p>
+          <a:p>
+            <a:r>
+              <a:rPr kumimoji="1" lang="ja-JP" altLang="en-US" sz="2000" dirty="0">
+                <a:solidFill>
+                  <a:schemeClr val="bg1"/>
+                </a:solidFill>
+              </a:rPr>
+              <a:t>この操作は、右目と左目片方ずつ行うので、使用していない方の目は、手元の目隠しで覆ってください。</a:t>
+            </a:r>
+            <a:endParaRPr kumimoji="1" lang="en-US" altLang="ja-JP" sz="2000" dirty="0">
+              <a:solidFill>
+                <a:schemeClr val="bg1"/>
+              </a:solidFill>
+            </a:endParaRPr>
+          </a:p>
+          <a:p>
+            <a:endParaRPr kumimoji="1" lang="en-US" altLang="ja-JP" sz="2000" dirty="0">
+              <a:solidFill>
+                <a:schemeClr val="bg1"/>
+              </a:solidFill>
+            </a:endParaRPr>
+          </a:p>
+          <a:p>
+            <a:endParaRPr lang="en-US" altLang="ja-JP" sz="2000" dirty="0">
+              <a:solidFill>
+                <a:schemeClr val="bg1"/>
+              </a:solidFill>
+            </a:endParaRPr>
+          </a:p>
+          <a:p>
+            <a:r>
+              <a:rPr kumimoji="1" lang="en-US" altLang="ja-JP" sz="2000" dirty="0">
+                <a:solidFill>
+                  <a:schemeClr val="bg1"/>
+                </a:solidFill>
+              </a:rPr>
+              <a:t>Enter</a:t>
+            </a:r>
+            <a:r>
+              <a:rPr kumimoji="1" lang="ja-JP" altLang="en-US" sz="2000" dirty="0">
+                <a:solidFill>
+                  <a:schemeClr val="bg1"/>
+                </a:solidFill>
+              </a:rPr>
+              <a:t>キーで確定し、次に進みます。</a:t>
+            </a:r>
+            <a:endParaRPr kumimoji="1" lang="en-US" altLang="ja-JP" sz="2000" dirty="0">
               <a:solidFill>
                 <a:schemeClr val="bg1"/>
               </a:solidFill>
@@ -3529,10 +7431,46 @@
           </a:p>
         </p:txBody>
       </p:sp>
+      <p:pic>
+        <p:nvPicPr>
+          <p:cNvPr id="7" name="図 6">
+            <a:extLst>
+              <a:ext uri="{FF2B5EF4-FFF2-40B4-BE49-F238E27FC236}">
+                <a16:creationId xmlns:a16="http://schemas.microsoft.com/office/drawing/2014/main" id="{01AE8888-E6C6-638D-BF5D-D42E3DECA8E1}"/>
+              </a:ext>
+            </a:extLst>
+          </p:cNvPr>
+          <p:cNvPicPr>
+            <a:picLocks noChangeAspect="1"/>
+          </p:cNvPicPr>
+          <p:nvPr/>
+        </p:nvPicPr>
+        <p:blipFill>
+          <a:blip r:embed="rId2">
+            <a:extLst>
+              <a:ext uri="{28A0092B-C50C-407E-A947-70E740481C1C}">
+                <a14:useLocalDpi xmlns:a14="http://schemas.microsoft.com/office/drawing/2010/main" val="0"/>
+              </a:ext>
+            </a:extLst>
+          </a:blip>
+          <a:stretch>
+            <a:fillRect/>
+          </a:stretch>
+        </p:blipFill>
+        <p:spPr>
+          <a:xfrm>
+            <a:off x="625105" y="1096241"/>
+            <a:ext cx="3744484" cy="4665518"/>
+          </a:xfrm>
+          <a:prstGeom prst="rect">
+            <a:avLst/>
+          </a:prstGeom>
+        </p:spPr>
+      </p:pic>
     </p:spTree>
     <p:extLst>
       <p:ext uri="{BB962C8B-B14F-4D97-AF65-F5344CB8AC3E}">
-        <p14:creationId xmlns:p14="http://schemas.microsoft.com/office/powerpoint/2010/main" val="206050647"/>
+        <p14:creationId xmlns:p14="http://schemas.microsoft.com/office/powerpoint/2010/main" val="799801735"/>
       </p:ext>
     </p:extLst>
   </p:cSld>

--- a/tex/ethicsreview/ethics_review_visibility/別紙2評価実験説明.pptx
+++ b/tex/ethicsreview/ethics_review_visibility/別紙2評価実験説明.pptx
@@ -7,31 +7,33 @@
   <p:sldIdLst>
     <p:sldId id="267" r:id="rId2"/>
     <p:sldId id="272" r:id="rId3"/>
-    <p:sldId id="275" r:id="rId4"/>
-    <p:sldId id="268" r:id="rId5"/>
-    <p:sldId id="270" r:id="rId6"/>
-    <p:sldId id="269" r:id="rId7"/>
-    <p:sldId id="273" r:id="rId8"/>
-    <p:sldId id="276" r:id="rId9"/>
-    <p:sldId id="286" r:id="rId10"/>
-    <p:sldId id="287" r:id="rId11"/>
-    <p:sldId id="288" r:id="rId12"/>
-    <p:sldId id="289" r:id="rId13"/>
-    <p:sldId id="290" r:id="rId14"/>
-    <p:sldId id="274" r:id="rId15"/>
-    <p:sldId id="277" r:id="rId16"/>
-    <p:sldId id="278" r:id="rId17"/>
-    <p:sldId id="279" r:id="rId18"/>
-    <p:sldId id="280" r:id="rId19"/>
-    <p:sldId id="281" r:id="rId20"/>
-    <p:sldId id="282" r:id="rId21"/>
-    <p:sldId id="283" r:id="rId22"/>
-    <p:sldId id="284" r:id="rId23"/>
-    <p:sldId id="291" r:id="rId24"/>
-    <p:sldId id="292" r:id="rId25"/>
-    <p:sldId id="293" r:id="rId26"/>
-    <p:sldId id="294" r:id="rId27"/>
-    <p:sldId id="285" r:id="rId28"/>
+    <p:sldId id="295" r:id="rId4"/>
+    <p:sldId id="275" r:id="rId5"/>
+    <p:sldId id="268" r:id="rId6"/>
+    <p:sldId id="270" r:id="rId7"/>
+    <p:sldId id="269" r:id="rId8"/>
+    <p:sldId id="273" r:id="rId9"/>
+    <p:sldId id="276" r:id="rId10"/>
+    <p:sldId id="286" r:id="rId11"/>
+    <p:sldId id="287" r:id="rId12"/>
+    <p:sldId id="288" r:id="rId13"/>
+    <p:sldId id="289" r:id="rId14"/>
+    <p:sldId id="290" r:id="rId15"/>
+    <p:sldId id="274" r:id="rId16"/>
+    <p:sldId id="277" r:id="rId17"/>
+    <p:sldId id="278" r:id="rId18"/>
+    <p:sldId id="296" r:id="rId19"/>
+    <p:sldId id="279" r:id="rId20"/>
+    <p:sldId id="280" r:id="rId21"/>
+    <p:sldId id="281" r:id="rId22"/>
+    <p:sldId id="282" r:id="rId23"/>
+    <p:sldId id="283" r:id="rId24"/>
+    <p:sldId id="284" r:id="rId25"/>
+    <p:sldId id="291" r:id="rId26"/>
+    <p:sldId id="292" r:id="rId27"/>
+    <p:sldId id="293" r:id="rId28"/>
+    <p:sldId id="294" r:id="rId29"/>
+    <p:sldId id="285" r:id="rId30"/>
   </p:sldIdLst>
   <p:sldSz cx="12192000" cy="6858000"/>
   <p:notesSz cx="6858000" cy="9144000"/>
@@ -324,7 +326,7 @@
           <a:p>
             <a:fld id="{416BA5EB-ECB0-409F-8DA9-B63B0BA08A82}" type="datetimeFigureOut">
               <a:rPr kumimoji="1" lang="ja-JP" altLang="en-US" smtClean="0"/>
-              <a:t>2026/6/15</a:t>
+              <a:t>2026/7/19</a:t>
             </a:fld>
             <a:endParaRPr kumimoji="1" lang="ja-JP" altLang="en-US"/>
           </a:p>
@@ -556,7 +558,7 @@
           <a:p>
             <a:fld id="{416BA5EB-ECB0-409F-8DA9-B63B0BA08A82}" type="datetimeFigureOut">
               <a:rPr kumimoji="1" lang="ja-JP" altLang="en-US" smtClean="0"/>
-              <a:t>2026/6/15</a:t>
+              <a:t>2026/7/19</a:t>
             </a:fld>
             <a:endParaRPr kumimoji="1" lang="ja-JP" altLang="en-US"/>
           </a:p>
@@ -705,7 +707,7 @@
           <a:p>
             <a:fld id="{416BA5EB-ECB0-409F-8DA9-B63B0BA08A82}" type="datetimeFigureOut">
               <a:rPr kumimoji="1" lang="ja-JP" altLang="en-US" smtClean="0"/>
-              <a:t>2026/6/15</a:t>
+              <a:t>2026/7/19</a:t>
             </a:fld>
             <a:endParaRPr kumimoji="1" lang="ja-JP" altLang="en-US"/>
           </a:p>
@@ -950,7 +952,7 @@
           <a:p>
             <a:fld id="{416BA5EB-ECB0-409F-8DA9-B63B0BA08A82}" type="datetimeFigureOut">
               <a:rPr kumimoji="1" lang="ja-JP" altLang="en-US" smtClean="0"/>
-              <a:t>2026/6/15</a:t>
+              <a:t>2026/7/19</a:t>
             </a:fld>
             <a:endParaRPr kumimoji="1" lang="ja-JP" altLang="en-US"/>
           </a:p>
@@ -1617,6 +1619,231 @@
         <p:cNvPr id="1" name="">
           <a:extLst>
             <a:ext uri="{FF2B5EF4-FFF2-40B4-BE49-F238E27FC236}">
+              <a16:creationId xmlns:a16="http://schemas.microsoft.com/office/drawing/2014/main" id="{3D0AA7F7-94A8-27FC-F16E-E99757B66783}"/>
+            </a:ext>
+          </a:extLst>
+        </p:cNvPr>
+        <p:cNvGrpSpPr/>
+        <p:nvPr/>
+      </p:nvGrpSpPr>
+      <p:grpSpPr>
+        <a:xfrm>
+          <a:off x="0" y="0"/>
+          <a:ext cx="0" cy="0"/>
+          <a:chOff x="0" y="0"/>
+          <a:chExt cx="0" cy="0"/>
+        </a:xfrm>
+      </p:grpSpPr>
+      <p:sp>
+        <p:nvSpPr>
+          <p:cNvPr id="3" name="テキスト ボックス 2">
+            <a:extLst>
+              <a:ext uri="{FF2B5EF4-FFF2-40B4-BE49-F238E27FC236}">
+                <a16:creationId xmlns:a16="http://schemas.microsoft.com/office/drawing/2014/main" id="{BA8E8BD9-3F83-842A-0E88-2F2D568B59FE}"/>
+              </a:ext>
+            </a:extLst>
+          </p:cNvPr>
+          <p:cNvSpPr txBox="1"/>
+          <p:nvPr/>
+        </p:nvSpPr>
+        <p:spPr>
+          <a:xfrm>
+            <a:off x="4655125" y="705177"/>
+            <a:ext cx="6643321" cy="3870290"/>
+          </a:xfrm>
+          <a:prstGeom prst="rect">
+            <a:avLst/>
+          </a:prstGeom>
+          <a:noFill/>
+        </p:spPr>
+        <p:txBody>
+          <a:bodyPr wrap="square" rtlCol="0">
+            <a:spAutoFit/>
+          </a:bodyPr>
+          <a:lstStyle/>
+          <a:p>
+            <a:r>
+              <a:rPr lang="ja-JP" altLang="en-US" sz="2550" b="1" dirty="0">
+                <a:solidFill>
+                  <a:schemeClr val="bg1"/>
+                </a:solidFill>
+                <a:latin typeface="+mj-ea"/>
+                <a:ea typeface="+mj-ea"/>
+              </a:rPr>
+              <a:t>位置キャリブレーション</a:t>
+            </a:r>
+            <a:endParaRPr lang="en-US" altLang="ja-JP" sz="2550" b="1" dirty="0">
+              <a:solidFill>
+                <a:schemeClr val="bg1"/>
+              </a:solidFill>
+              <a:latin typeface="+mj-ea"/>
+              <a:ea typeface="+mj-ea"/>
+            </a:endParaRPr>
+          </a:p>
+          <a:p>
+            <a:endParaRPr lang="en-US" altLang="ja-JP" sz="2000" dirty="0">
+              <a:solidFill>
+                <a:schemeClr val="bg1"/>
+              </a:solidFill>
+            </a:endParaRPr>
+          </a:p>
+          <a:p>
+            <a:r>
+              <a:rPr lang="ja-JP" altLang="en-US" sz="2000" dirty="0">
+                <a:solidFill>
+                  <a:schemeClr val="bg1"/>
+                </a:solidFill>
+              </a:rPr>
+              <a:t>操作用</a:t>
+            </a:r>
+            <a:r>
+              <a:rPr lang="en-US" altLang="ja-JP" sz="2000" dirty="0">
+                <a:solidFill>
+                  <a:schemeClr val="bg1"/>
+                </a:solidFill>
+              </a:rPr>
+              <a:t>PC</a:t>
+            </a:r>
+            <a:r>
+              <a:rPr lang="ja-JP" altLang="en-US" sz="2000" dirty="0">
+                <a:solidFill>
+                  <a:schemeClr val="bg1"/>
+                </a:solidFill>
+              </a:rPr>
+              <a:t>の矢印キーを用いて、奥のディスプレイに表示されている正方形の枠（赤）の位置を動かし、手前のディスプレイに表示されている正方形の枠（白）に合わせます。</a:t>
+            </a:r>
+            <a:endParaRPr lang="en-US" altLang="ja-JP" sz="2000" dirty="0">
+              <a:solidFill>
+                <a:schemeClr val="bg1"/>
+              </a:solidFill>
+            </a:endParaRPr>
+          </a:p>
+          <a:p>
+            <a:endParaRPr kumimoji="1" lang="en-US" altLang="ja-JP" sz="2000" dirty="0">
+              <a:solidFill>
+                <a:schemeClr val="bg1"/>
+              </a:solidFill>
+            </a:endParaRPr>
+          </a:p>
+          <a:p>
+            <a:r>
+              <a:rPr kumimoji="1" lang="ja-JP" altLang="en-US" sz="2000" dirty="0">
+                <a:solidFill>
+                  <a:schemeClr val="bg1"/>
+                </a:solidFill>
+              </a:rPr>
+              <a:t>この操作は、右目と左目片方ずつ行うので、使用していない方の目は、手元の目隠しで覆ってください。</a:t>
+            </a:r>
+            <a:endParaRPr kumimoji="1" lang="en-US" altLang="ja-JP" sz="2000" dirty="0">
+              <a:solidFill>
+                <a:schemeClr val="bg1"/>
+              </a:solidFill>
+            </a:endParaRPr>
+          </a:p>
+          <a:p>
+            <a:endParaRPr kumimoji="1" lang="en-US" altLang="ja-JP" sz="2000" dirty="0">
+              <a:solidFill>
+                <a:schemeClr val="bg1"/>
+              </a:solidFill>
+            </a:endParaRPr>
+          </a:p>
+          <a:p>
+            <a:endParaRPr lang="en-US" altLang="ja-JP" sz="2000" dirty="0">
+              <a:solidFill>
+                <a:schemeClr val="bg1"/>
+              </a:solidFill>
+            </a:endParaRPr>
+          </a:p>
+          <a:p>
+            <a:r>
+              <a:rPr kumimoji="1" lang="en-US" altLang="ja-JP" sz="2000" dirty="0">
+                <a:solidFill>
+                  <a:schemeClr val="bg1"/>
+                </a:solidFill>
+              </a:rPr>
+              <a:t>Enter</a:t>
+            </a:r>
+            <a:r>
+              <a:rPr kumimoji="1" lang="ja-JP" altLang="en-US" sz="2000" dirty="0">
+                <a:solidFill>
+                  <a:schemeClr val="bg1"/>
+                </a:solidFill>
+              </a:rPr>
+              <a:t>キーで確定し、次に進みます。</a:t>
+            </a:r>
+            <a:endParaRPr kumimoji="1" lang="en-US" altLang="ja-JP" sz="2000" dirty="0">
+              <a:solidFill>
+                <a:schemeClr val="bg1"/>
+              </a:solidFill>
+            </a:endParaRPr>
+          </a:p>
+        </p:txBody>
+      </p:sp>
+      <p:pic>
+        <p:nvPicPr>
+          <p:cNvPr id="7" name="図 6">
+            <a:extLst>
+              <a:ext uri="{FF2B5EF4-FFF2-40B4-BE49-F238E27FC236}">
+                <a16:creationId xmlns:a16="http://schemas.microsoft.com/office/drawing/2014/main" id="{01AE8888-E6C6-638D-BF5D-D42E3DECA8E1}"/>
+              </a:ext>
+            </a:extLst>
+          </p:cNvPr>
+          <p:cNvPicPr>
+            <a:picLocks noChangeAspect="1"/>
+          </p:cNvPicPr>
+          <p:nvPr/>
+        </p:nvPicPr>
+        <p:blipFill>
+          <a:blip r:embed="rId2">
+            <a:extLst>
+              <a:ext uri="{28A0092B-C50C-407E-A947-70E740481C1C}">
+                <a14:useLocalDpi xmlns:a14="http://schemas.microsoft.com/office/drawing/2010/main" val="0"/>
+              </a:ext>
+            </a:extLst>
+          </a:blip>
+          <a:stretch>
+            <a:fillRect/>
+          </a:stretch>
+        </p:blipFill>
+        <p:spPr>
+          <a:xfrm>
+            <a:off x="625105" y="1096241"/>
+            <a:ext cx="3744484" cy="4665518"/>
+          </a:xfrm>
+          <a:prstGeom prst="rect">
+            <a:avLst/>
+          </a:prstGeom>
+        </p:spPr>
+      </p:pic>
+    </p:spTree>
+    <p:extLst>
+      <p:ext uri="{BB962C8B-B14F-4D97-AF65-F5344CB8AC3E}">
+        <p14:creationId xmlns:p14="http://schemas.microsoft.com/office/powerpoint/2010/main" val="799801735"/>
+      </p:ext>
+    </p:extLst>
+  </p:cSld>
+  <p:clrMapOvr>
+    <a:masterClrMapping/>
+  </p:clrMapOvr>
+</p:sld>
+</file>
+
+<file path=ppt/slides/slide11.xml><?xml version="1.0" encoding="utf-8"?>
+<p:sld xmlns:a="http://schemas.openxmlformats.org/drawingml/2006/main" xmlns:r="http://schemas.openxmlformats.org/officeDocument/2006/relationships" xmlns:p="http://schemas.openxmlformats.org/presentationml/2006/main">
+  <p:cSld>
+    <p:bg>
+      <p:bgPr>
+        <a:solidFill>
+          <a:schemeClr val="tx2"/>
+        </a:solidFill>
+        <a:effectLst/>
+      </p:bgPr>
+    </p:bg>
+    <p:spTree>
+      <p:nvGrpSpPr>
+        <p:cNvPr id="1" name="">
+          <a:extLst>
+            <a:ext uri="{FF2B5EF4-FFF2-40B4-BE49-F238E27FC236}">
               <a16:creationId xmlns:a16="http://schemas.microsoft.com/office/drawing/2014/main" id="{82702AF8-6931-1E9A-708B-718C3D64713C}"/>
             </a:ext>
           </a:extLst>
@@ -1839,7 +2066,7 @@
 </p:sld>
 </file>
 
-<file path=ppt/slides/slide11.xml><?xml version="1.0" encoding="utf-8"?>
+<file path=ppt/slides/slide12.xml><?xml version="1.0" encoding="utf-8"?>
 <p:sld xmlns:a="http://schemas.openxmlformats.org/drawingml/2006/main" xmlns:r="http://schemas.openxmlformats.org/officeDocument/2006/relationships" xmlns:p="http://schemas.openxmlformats.org/presentationml/2006/main">
   <p:cSld>
     <p:bg>
@@ -2086,7 +2313,7 @@
 </p:sld>
 </file>
 
-<file path=ppt/slides/slide12.xml><?xml version="1.0" encoding="utf-8"?>
+<file path=ppt/slides/slide13.xml><?xml version="1.0" encoding="utf-8"?>
 <p:sld xmlns:a="http://schemas.openxmlformats.org/drawingml/2006/main" xmlns:r="http://schemas.openxmlformats.org/officeDocument/2006/relationships" xmlns:p="http://schemas.openxmlformats.org/presentationml/2006/main">
   <p:cSld>
     <p:bg>
@@ -2516,7 +2743,7 @@
 </p:sld>
 </file>
 
-<file path=ppt/slides/slide13.xml><?xml version="1.0" encoding="utf-8"?>
+<file path=ppt/slides/slide14.xml><?xml version="1.0" encoding="utf-8"?>
 <p:sld xmlns:a="http://schemas.openxmlformats.org/drawingml/2006/main" xmlns:r="http://schemas.openxmlformats.org/officeDocument/2006/relationships" xmlns:p="http://schemas.openxmlformats.org/presentationml/2006/main">
   <p:cSld>
     <p:bg>
@@ -2691,7 +2918,7 @@
 </p:sld>
 </file>
 
-<file path=ppt/slides/slide14.xml><?xml version="1.0" encoding="utf-8"?>
+<file path=ppt/slides/slide15.xml><?xml version="1.0" encoding="utf-8"?>
 <p:sld xmlns:a="http://schemas.openxmlformats.org/drawingml/2006/main" xmlns:r="http://schemas.openxmlformats.org/officeDocument/2006/relationships" xmlns:p="http://schemas.openxmlformats.org/presentationml/2006/main">
   <p:cSld>
     <p:bg>
@@ -2790,7 +3017,7 @@
 </p:sld>
 </file>
 
-<file path=ppt/slides/slide15.xml><?xml version="1.0" encoding="utf-8"?>
+<file path=ppt/slides/slide16.xml><?xml version="1.0" encoding="utf-8"?>
 <p:sld xmlns:a="http://schemas.openxmlformats.org/drawingml/2006/main" xmlns:r="http://schemas.openxmlformats.org/officeDocument/2006/relationships" xmlns:p="http://schemas.openxmlformats.org/presentationml/2006/main">
   <p:cSld>
     <p:bg>
@@ -2969,7 +3196,7 @@
 </p:sld>
 </file>
 
-<file path=ppt/slides/slide16.xml><?xml version="1.0" encoding="utf-8"?>
+<file path=ppt/slides/slide17.xml><?xml version="1.0" encoding="utf-8"?>
 <p:sld xmlns:a="http://schemas.openxmlformats.org/drawingml/2006/main" xmlns:r="http://schemas.openxmlformats.org/officeDocument/2006/relationships" xmlns:p="http://schemas.openxmlformats.org/presentationml/2006/main">
   <p:cSld>
     <p:bg>
@@ -3133,7 +3360,263 @@
 </p:sld>
 </file>
 
-<file path=ppt/slides/slide17.xml><?xml version="1.0" encoding="utf-8"?>
+<file path=ppt/slides/slide18.xml><?xml version="1.0" encoding="utf-8"?>
+<p:sld xmlns:a="http://schemas.openxmlformats.org/drawingml/2006/main" xmlns:r="http://schemas.openxmlformats.org/officeDocument/2006/relationships" xmlns:p="http://schemas.openxmlformats.org/presentationml/2006/main">
+  <p:cSld>
+    <p:bg>
+      <p:bgPr>
+        <a:solidFill>
+          <a:schemeClr val="tx2"/>
+        </a:solidFill>
+        <a:effectLst/>
+      </p:bgPr>
+    </p:bg>
+    <p:spTree>
+      <p:nvGrpSpPr>
+        <p:cNvPr id="1" name="">
+          <a:extLst>
+            <a:ext uri="{FF2B5EF4-FFF2-40B4-BE49-F238E27FC236}">
+              <a16:creationId xmlns:a16="http://schemas.microsoft.com/office/drawing/2014/main" id="{6224948F-CC32-BECF-467A-55468A63F8CF}"/>
+            </a:ext>
+          </a:extLst>
+        </p:cNvPr>
+        <p:cNvGrpSpPr/>
+        <p:nvPr/>
+      </p:nvGrpSpPr>
+      <p:grpSpPr>
+        <a:xfrm>
+          <a:off x="0" y="0"/>
+          <a:ext cx="0" cy="0"/>
+          <a:chOff x="0" y="0"/>
+          <a:chExt cx="0" cy="0"/>
+        </a:xfrm>
+      </p:grpSpPr>
+      <p:sp>
+        <p:nvSpPr>
+          <p:cNvPr id="2" name="テキスト ボックス 1">
+            <a:extLst>
+              <a:ext uri="{FF2B5EF4-FFF2-40B4-BE49-F238E27FC236}">
+                <a16:creationId xmlns:a16="http://schemas.microsoft.com/office/drawing/2014/main" id="{4563C982-25D5-EA0E-1AAB-06506D3989E8}"/>
+              </a:ext>
+            </a:extLst>
+          </p:cNvPr>
+          <p:cNvSpPr txBox="1"/>
+          <p:nvPr/>
+        </p:nvSpPr>
+        <p:spPr>
+          <a:xfrm>
+            <a:off x="893553" y="705177"/>
+            <a:ext cx="10404894" cy="5755422"/>
+          </a:xfrm>
+          <a:prstGeom prst="rect">
+            <a:avLst/>
+          </a:prstGeom>
+          <a:noFill/>
+        </p:spPr>
+        <p:txBody>
+          <a:bodyPr wrap="square" rtlCol="0">
+            <a:spAutoFit/>
+          </a:bodyPr>
+          <a:lstStyle/>
+          <a:p>
+            <a:r>
+              <a:rPr lang="ja-JP" altLang="ja-JP" sz="2800" b="1" dirty="0">
+                <a:solidFill>
+                  <a:schemeClr val="bg1"/>
+                </a:solidFill>
+              </a:rPr>
+              <a:t>Recording Participant Information</a:t>
+            </a:r>
+            <a:endParaRPr lang="ja-JP" altLang="ja-JP" sz="2800" dirty="0">
+              <a:solidFill>
+                <a:schemeClr val="bg1"/>
+              </a:solidFill>
+            </a:endParaRPr>
+          </a:p>
+          <a:p>
+            <a:r>
+              <a:rPr lang="ja-JP" altLang="ja-JP" sz="2000" dirty="0">
+                <a:solidFill>
+                  <a:schemeClr val="bg1"/>
+                </a:solidFill>
+              </a:rPr>
+              <a:t>Before the main task, we will record your gender, age, dominant eye, and interpupillary distance.</a:t>
+            </a:r>
+            <a:endParaRPr lang="en-US" altLang="ja-JP" sz="2000" dirty="0">
+              <a:solidFill>
+                <a:schemeClr val="bg1"/>
+              </a:solidFill>
+            </a:endParaRPr>
+          </a:p>
+          <a:p>
+            <a:endParaRPr lang="ja-JP" altLang="ja-JP" sz="2000" dirty="0">
+              <a:solidFill>
+                <a:schemeClr val="bg1"/>
+              </a:solidFill>
+            </a:endParaRPr>
+          </a:p>
+          <a:p>
+            <a:r>
+              <a:rPr lang="ja-JP" altLang="ja-JP" sz="2000" dirty="0">
+                <a:solidFill>
+                  <a:schemeClr val="bg1"/>
+                </a:solidFill>
+              </a:rPr>
+              <a:t>The experimenter will ask your gender and age. </a:t>
+            </a:r>
+            <a:endParaRPr lang="en-US" altLang="ja-JP" sz="2000" dirty="0">
+              <a:solidFill>
+                <a:schemeClr val="bg1"/>
+              </a:solidFill>
+            </a:endParaRPr>
+          </a:p>
+          <a:p>
+            <a:r>
+              <a:rPr lang="ja-JP" altLang="ja-JP" sz="2000" dirty="0">
+                <a:solidFill>
+                  <a:schemeClr val="bg1"/>
+                </a:solidFill>
+              </a:rPr>
+              <a:t>To determine your dominant eye, follow these steps:</a:t>
+            </a:r>
+          </a:p>
+          <a:p>
+            <a:pPr marL="457200" indent="-457200">
+              <a:buFont typeface="+mj-lt"/>
+              <a:buAutoNum type="arabicPeriod"/>
+            </a:pPr>
+            <a:r>
+              <a:rPr lang="ja-JP" altLang="ja-JP" sz="2000" dirty="0">
+                <a:solidFill>
+                  <a:schemeClr val="bg1"/>
+                </a:solidFill>
+              </a:rPr>
+              <a:t>Extend your arms and form a small triangle with your thumbs and index fingers.</a:t>
+            </a:r>
+          </a:p>
+          <a:p>
+            <a:pPr marL="457200" indent="-457200">
+              <a:buFont typeface="+mj-lt"/>
+              <a:buAutoNum type="arabicPeriod"/>
+            </a:pPr>
+            <a:r>
+              <a:rPr lang="ja-JP" altLang="ja-JP" sz="2000" dirty="0">
+                <a:solidFill>
+                  <a:schemeClr val="bg1"/>
+                </a:solidFill>
+              </a:rPr>
+              <a:t>With both eyes open, center the specified target in the triangle.</a:t>
+            </a:r>
+          </a:p>
+          <a:p>
+            <a:pPr marL="457200" indent="-457200">
+              <a:buFont typeface="+mj-lt"/>
+              <a:buAutoNum type="arabicPeriod"/>
+            </a:pPr>
+            <a:r>
+              <a:rPr lang="ja-JP" altLang="ja-JP" sz="2000" dirty="0">
+                <a:solidFill>
+                  <a:schemeClr val="bg1"/>
+                </a:solidFill>
+              </a:rPr>
+              <a:t>Without moving your hands or head, close each eye in turn.</a:t>
+            </a:r>
+          </a:p>
+          <a:p>
+            <a:pPr marL="457200" indent="-457200">
+              <a:buFont typeface="+mj-lt"/>
+              <a:buAutoNum type="arabicPeriod"/>
+            </a:pPr>
+            <a:r>
+              <a:rPr lang="ja-JP" altLang="ja-JP" sz="2000" dirty="0">
+                <a:solidFill>
+                  <a:schemeClr val="bg1"/>
+                </a:solidFill>
+              </a:rPr>
+              <a:t>The eye that keeps the target centered is your dominant eye.</a:t>
+            </a:r>
+          </a:p>
+          <a:p>
+            <a:r>
+              <a:rPr lang="ja-JP" altLang="ja-JP" sz="2000" dirty="0">
+                <a:solidFill>
+                  <a:schemeClr val="bg1"/>
+                </a:solidFill>
+              </a:rPr>
+              <a:t>To measure your interpupillary distance, we will photograph you holding a ruler near your eyebrows. The photograph will be deleted in your presence immediately after the measurement.</a:t>
+            </a:r>
+          </a:p>
+          <a:p>
+            <a:endParaRPr lang="en-US" altLang="ja-JP" sz="2000" dirty="0">
+              <a:solidFill>
+                <a:schemeClr val="bg1"/>
+              </a:solidFill>
+            </a:endParaRPr>
+          </a:p>
+          <a:p>
+            <a:r>
+              <a:rPr lang="ja-JP" altLang="ja-JP" sz="2000" dirty="0">
+                <a:solidFill>
+                  <a:schemeClr val="bg1"/>
+                </a:solidFill>
+              </a:rPr>
+              <a:t>All data will be anonymized for analysis and publication. No private or personally identifiable information will be disclosed.</a:t>
+            </a:r>
+            <a:endParaRPr lang="en-US" altLang="ja-JP" sz="2000" dirty="0">
+              <a:solidFill>
+                <a:schemeClr val="bg1"/>
+              </a:solidFill>
+            </a:endParaRPr>
+          </a:p>
+          <a:p>
+            <a:endParaRPr lang="ja-JP" altLang="ja-JP" sz="2000" dirty="0">
+              <a:solidFill>
+                <a:schemeClr val="bg1"/>
+              </a:solidFill>
+            </a:endParaRPr>
+          </a:p>
+          <a:p>
+            <a:r>
+              <a:rPr lang="ja-JP" altLang="ja-JP" sz="2000" dirty="0">
+                <a:solidFill>
+                  <a:schemeClr val="bg1"/>
+                </a:solidFill>
+              </a:rPr>
+              <a:t>Press the </a:t>
+            </a:r>
+            <a:r>
+              <a:rPr lang="ja-JP" altLang="ja-JP" sz="2000" b="1" dirty="0">
+                <a:solidFill>
+                  <a:schemeClr val="bg1"/>
+                </a:solidFill>
+              </a:rPr>
+              <a:t>Spacebar</a:t>
+            </a:r>
+            <a:r>
+              <a:rPr lang="ja-JP" altLang="ja-JP" sz="2000" dirty="0">
+                <a:solidFill>
+                  <a:schemeClr val="bg1"/>
+                </a:solidFill>
+              </a:rPr>
+              <a:t> to continue.</a:t>
+            </a:r>
+          </a:p>
+        </p:txBody>
+      </p:sp>
+    </p:spTree>
+    <p:extLst>
+      <p:ext uri="{BB962C8B-B14F-4D97-AF65-F5344CB8AC3E}">
+        <p14:creationId xmlns:p14="http://schemas.microsoft.com/office/powerpoint/2010/main" val="1229615444"/>
+      </p:ext>
+    </p:extLst>
+  </p:cSld>
+  <p:clrMapOvr>
+    <a:masterClrMapping/>
+  </p:clrMapOvr>
+</p:sld>
+</file>
+
+<file path=ppt/slides/slide19.xml><?xml version="1.0" encoding="utf-8"?>
 <p:sld xmlns:a="http://schemas.openxmlformats.org/drawingml/2006/main" xmlns:r="http://schemas.openxmlformats.org/officeDocument/2006/relationships" xmlns:p="http://schemas.openxmlformats.org/presentationml/2006/main">
   <p:cSld>
     <p:bg>
@@ -3271,396 +3754,6 @@
     <p:extLst>
       <p:ext uri="{BB962C8B-B14F-4D97-AF65-F5344CB8AC3E}">
         <p14:creationId xmlns:p14="http://schemas.microsoft.com/office/powerpoint/2010/main" val="1826573407"/>
-      </p:ext>
-    </p:extLst>
-  </p:cSld>
-  <p:clrMapOvr>
-    <a:masterClrMapping/>
-  </p:clrMapOvr>
-</p:sld>
-</file>
-
-<file path=ppt/slides/slide18.xml><?xml version="1.0" encoding="utf-8"?>
-<p:sld xmlns:a="http://schemas.openxmlformats.org/drawingml/2006/main" xmlns:r="http://schemas.openxmlformats.org/officeDocument/2006/relationships" xmlns:p="http://schemas.openxmlformats.org/presentationml/2006/main">
-  <p:cSld>
-    <p:bg>
-      <p:bgPr>
-        <a:solidFill>
-          <a:schemeClr val="tx2"/>
-        </a:solidFill>
-        <a:effectLst/>
-      </p:bgPr>
-    </p:bg>
-    <p:spTree>
-      <p:nvGrpSpPr>
-        <p:cNvPr id="1" name="">
-          <a:extLst>
-            <a:ext uri="{FF2B5EF4-FFF2-40B4-BE49-F238E27FC236}">
-              <a16:creationId xmlns:a16="http://schemas.microsoft.com/office/drawing/2014/main" id="{173EF7C9-532C-A758-9B7A-F0580337826E}"/>
-            </a:ext>
-          </a:extLst>
-        </p:cNvPr>
-        <p:cNvGrpSpPr/>
-        <p:nvPr/>
-      </p:nvGrpSpPr>
-      <p:grpSpPr>
-        <a:xfrm>
-          <a:off x="0" y="0"/>
-          <a:ext cx="0" cy="0"/>
-          <a:chOff x="0" y="0"/>
-          <a:chExt cx="0" cy="0"/>
-        </a:xfrm>
-      </p:grpSpPr>
-      <p:sp>
-        <p:nvSpPr>
-          <p:cNvPr id="3" name="テキスト ボックス 2">
-            <a:extLst>
-              <a:ext uri="{FF2B5EF4-FFF2-40B4-BE49-F238E27FC236}">
-                <a16:creationId xmlns:a16="http://schemas.microsoft.com/office/drawing/2014/main" id="{120884E8-D2D7-87B0-994F-BF2BCD6220D4}"/>
-              </a:ext>
-            </a:extLst>
-          </p:cNvPr>
-          <p:cNvSpPr txBox="1"/>
-          <p:nvPr/>
-        </p:nvSpPr>
-        <p:spPr>
-          <a:xfrm>
-            <a:off x="4655125" y="705177"/>
-            <a:ext cx="6643321" cy="4216539"/>
-          </a:xfrm>
-          <a:prstGeom prst="rect">
-            <a:avLst/>
-          </a:prstGeom>
-          <a:noFill/>
-        </p:spPr>
-        <p:txBody>
-          <a:bodyPr wrap="square" rtlCol="0">
-            <a:spAutoFit/>
-          </a:bodyPr>
-          <a:lstStyle/>
-          <a:p>
-            <a:r>
-              <a:rPr lang="ja-JP" altLang="ja-JP" sz="2800" b="1" dirty="0">
-                <a:solidFill>
-                  <a:schemeClr val="bg2"/>
-                </a:solidFill>
-              </a:rPr>
-              <a:t>Position calibration</a:t>
-            </a:r>
-            <a:endParaRPr lang="ja-JP" altLang="ja-JP" sz="2800" dirty="0">
-              <a:solidFill>
-                <a:schemeClr val="bg2"/>
-              </a:solidFill>
-            </a:endParaRPr>
-          </a:p>
-          <a:p>
-            <a:r>
-              <a:rPr lang="ja-JP" altLang="ja-JP" sz="2000" dirty="0">
-                <a:solidFill>
-                  <a:schemeClr val="bg2"/>
-                </a:solidFill>
-              </a:rPr>
-              <a:t>Using the arrow keys on the control PC, move the position of the square frame displayed on the rear display (red) and align it with the square frame displayed on the front display (white).</a:t>
-            </a:r>
-            <a:endParaRPr lang="en-US" altLang="ja-JP" sz="2000" dirty="0">
-              <a:solidFill>
-                <a:schemeClr val="bg2"/>
-              </a:solidFill>
-            </a:endParaRPr>
-          </a:p>
-          <a:p>
-            <a:endParaRPr lang="ja-JP" altLang="ja-JP" sz="2000" dirty="0">
-              <a:solidFill>
-                <a:schemeClr val="bg2"/>
-              </a:solidFill>
-            </a:endParaRPr>
-          </a:p>
-          <a:p>
-            <a:r>
-              <a:rPr lang="ja-JP" altLang="ja-JP" sz="2000" dirty="0">
-                <a:solidFill>
-                  <a:schemeClr val="bg2"/>
-                </a:solidFill>
-              </a:rPr>
-              <a:t>This procedure will be performed separately for the right eye and the left eye. Please cover the eye not being used with the eye patch provided.</a:t>
-            </a:r>
-            <a:endParaRPr lang="en-US" altLang="ja-JP" sz="2000" dirty="0">
-              <a:solidFill>
-                <a:schemeClr val="bg2"/>
-              </a:solidFill>
-            </a:endParaRPr>
-          </a:p>
-          <a:p>
-            <a:endParaRPr lang="ja-JP" altLang="ja-JP" sz="2000" dirty="0">
-              <a:solidFill>
-                <a:schemeClr val="bg2"/>
-              </a:solidFill>
-            </a:endParaRPr>
-          </a:p>
-          <a:p>
-            <a:r>
-              <a:rPr lang="ja-JP" altLang="ja-JP" sz="2000" dirty="0">
-                <a:solidFill>
-                  <a:schemeClr val="bg2"/>
-                </a:solidFill>
-              </a:rPr>
-              <a:t>Press the Enter key to confirm and proceed to the next step.</a:t>
-            </a:r>
-          </a:p>
-          <a:p>
-            <a:endParaRPr kumimoji="1" lang="en-US" altLang="ja-JP" sz="2000" dirty="0">
-              <a:solidFill>
-                <a:schemeClr val="bg2"/>
-              </a:solidFill>
-            </a:endParaRPr>
-          </a:p>
-        </p:txBody>
-      </p:sp>
-      <p:pic>
-        <p:nvPicPr>
-          <p:cNvPr id="7" name="図 6">
-            <a:extLst>
-              <a:ext uri="{FF2B5EF4-FFF2-40B4-BE49-F238E27FC236}">
-                <a16:creationId xmlns:a16="http://schemas.microsoft.com/office/drawing/2014/main" id="{DE67171A-F091-F061-0385-17689739AB73}"/>
-              </a:ext>
-            </a:extLst>
-          </p:cNvPr>
-          <p:cNvPicPr>
-            <a:picLocks noChangeAspect="1"/>
-          </p:cNvPicPr>
-          <p:nvPr/>
-        </p:nvPicPr>
-        <p:blipFill>
-          <a:blip r:embed="rId2">
-            <a:extLst>
-              <a:ext uri="{28A0092B-C50C-407E-A947-70E740481C1C}">
-                <a14:useLocalDpi xmlns:a14="http://schemas.microsoft.com/office/drawing/2010/main" val="0"/>
-              </a:ext>
-            </a:extLst>
-          </a:blip>
-          <a:stretch>
-            <a:fillRect/>
-          </a:stretch>
-        </p:blipFill>
-        <p:spPr>
-          <a:xfrm>
-            <a:off x="625105" y="1096241"/>
-            <a:ext cx="3744484" cy="4665518"/>
-          </a:xfrm>
-          <a:prstGeom prst="rect">
-            <a:avLst/>
-          </a:prstGeom>
-        </p:spPr>
-      </p:pic>
-    </p:spTree>
-    <p:extLst>
-      <p:ext uri="{BB962C8B-B14F-4D97-AF65-F5344CB8AC3E}">
-        <p14:creationId xmlns:p14="http://schemas.microsoft.com/office/powerpoint/2010/main" val="372765942"/>
-      </p:ext>
-    </p:extLst>
-  </p:cSld>
-  <p:clrMapOvr>
-    <a:masterClrMapping/>
-  </p:clrMapOvr>
-</p:sld>
-</file>
-
-<file path=ppt/slides/slide19.xml><?xml version="1.0" encoding="utf-8"?>
-<p:sld xmlns:a="http://schemas.openxmlformats.org/drawingml/2006/main" xmlns:r="http://schemas.openxmlformats.org/officeDocument/2006/relationships" xmlns:p="http://schemas.openxmlformats.org/presentationml/2006/main">
-  <p:cSld>
-    <p:bg>
-      <p:bgPr>
-        <a:solidFill>
-          <a:schemeClr val="tx2"/>
-        </a:solidFill>
-        <a:effectLst/>
-      </p:bgPr>
-    </p:bg>
-    <p:spTree>
-      <p:nvGrpSpPr>
-        <p:cNvPr id="1" name="">
-          <a:extLst>
-            <a:ext uri="{FF2B5EF4-FFF2-40B4-BE49-F238E27FC236}">
-              <a16:creationId xmlns:a16="http://schemas.microsoft.com/office/drawing/2014/main" id="{3350EA5C-2469-08FF-9889-08F575FA8DD9}"/>
-            </a:ext>
-          </a:extLst>
-        </p:cNvPr>
-        <p:cNvGrpSpPr/>
-        <p:nvPr/>
-      </p:nvGrpSpPr>
-      <p:grpSpPr>
-        <a:xfrm>
-          <a:off x="0" y="0"/>
-          <a:ext cx="0" cy="0"/>
-          <a:chOff x="0" y="0"/>
-          <a:chExt cx="0" cy="0"/>
-        </a:xfrm>
-      </p:grpSpPr>
-      <p:sp>
-        <p:nvSpPr>
-          <p:cNvPr id="3" name="テキスト ボックス 2">
-            <a:extLst>
-              <a:ext uri="{FF2B5EF4-FFF2-40B4-BE49-F238E27FC236}">
-                <a16:creationId xmlns:a16="http://schemas.microsoft.com/office/drawing/2014/main" id="{505801EC-12DF-8207-47A1-0FD0BDCBB230}"/>
-              </a:ext>
-            </a:extLst>
-          </p:cNvPr>
-          <p:cNvSpPr txBox="1"/>
-          <p:nvPr/>
-        </p:nvSpPr>
-        <p:spPr>
-          <a:xfrm>
-            <a:off x="4655127" y="705177"/>
-            <a:ext cx="6643320" cy="6063198"/>
-          </a:xfrm>
-          <a:prstGeom prst="rect">
-            <a:avLst/>
-          </a:prstGeom>
-          <a:noFill/>
-        </p:spPr>
-        <p:txBody>
-          <a:bodyPr wrap="square" rtlCol="0">
-            <a:spAutoFit/>
-          </a:bodyPr>
-          <a:lstStyle/>
-          <a:p>
-            <a:r>
-              <a:rPr lang="ja-JP" altLang="ja-JP" sz="2800" b="1" dirty="0">
-                <a:solidFill>
-                  <a:schemeClr val="bg2"/>
-                </a:solidFill>
-              </a:rPr>
-              <a:t>Blur calibration</a:t>
-            </a:r>
-            <a:endParaRPr lang="ja-JP" altLang="ja-JP" sz="2800" dirty="0">
-              <a:solidFill>
-                <a:schemeClr val="bg2"/>
-              </a:solidFill>
-            </a:endParaRPr>
-          </a:p>
-          <a:p>
-            <a:r>
-              <a:rPr lang="ja-JP" altLang="ja-JP" sz="2000" dirty="0">
-                <a:solidFill>
-                  <a:schemeClr val="bg2"/>
-                </a:solidFill>
-              </a:rPr>
-              <a:t>In the central display area, the same stimulus image and marker are shown in the upper and lower halves. Among these, only the stimulus image in the upper half is displayed on the rear display.</a:t>
-            </a:r>
-            <a:endParaRPr lang="en-US" altLang="ja-JP" sz="2000" dirty="0">
-              <a:solidFill>
-                <a:schemeClr val="bg2"/>
-              </a:solidFill>
-            </a:endParaRPr>
-          </a:p>
-          <a:p>
-            <a:endParaRPr lang="ja-JP" altLang="ja-JP" sz="2000" dirty="0">
-              <a:solidFill>
-                <a:schemeClr val="bg2"/>
-              </a:solidFill>
-            </a:endParaRPr>
-          </a:p>
-          <a:p>
-            <a:r>
-              <a:rPr lang="ja-JP" altLang="ja-JP" sz="2000" dirty="0">
-                <a:solidFill>
-                  <a:schemeClr val="bg2"/>
-                </a:solidFill>
-              </a:rPr>
-              <a:t>First, in the upper half of the display area, focus on the marker on the front display while observing the blur of the stimulus image on the rear display.</a:t>
-            </a:r>
-          </a:p>
-          <a:p>
-            <a:r>
-              <a:rPr lang="ja-JP" altLang="ja-JP" sz="2000" dirty="0">
-                <a:solidFill>
-                  <a:schemeClr val="bg2"/>
-                </a:solidFill>
-              </a:rPr>
-              <a:t>Then, using the left and right arrow keys on the control PC, adjust the blur of the stimulus image in the lower half so that it matches the blur observed in the upper half. The blur becomes stronger as you move to the right.</a:t>
-            </a:r>
-          </a:p>
-          <a:p>
-            <a:r>
-              <a:rPr lang="ja-JP" altLang="ja-JP" sz="2000" dirty="0">
-                <a:solidFill>
-                  <a:schemeClr val="bg2"/>
-                </a:solidFill>
-              </a:rPr>
-              <a:t>Repeat this process until you feel that the two levels of blur match completely.</a:t>
-            </a:r>
-            <a:endParaRPr lang="en-US" altLang="ja-JP" sz="2000" dirty="0">
-              <a:solidFill>
-                <a:schemeClr val="bg2"/>
-              </a:solidFill>
-            </a:endParaRPr>
-          </a:p>
-          <a:p>
-            <a:endParaRPr lang="ja-JP" altLang="ja-JP" sz="2000" dirty="0">
-              <a:solidFill>
-                <a:schemeClr val="bg2"/>
-              </a:solidFill>
-            </a:endParaRPr>
-          </a:p>
-          <a:p>
-            <a:r>
-              <a:rPr lang="ja-JP" altLang="ja-JP" sz="2000" dirty="0">
-                <a:solidFill>
-                  <a:schemeClr val="bg2"/>
-                </a:solidFill>
-              </a:rPr>
-              <a:t>Press the down arrow key to confirm and proceed to the next stimulus.</a:t>
-            </a:r>
-          </a:p>
-          <a:p>
-            <a:endParaRPr kumimoji="1" lang="en-US" altLang="ja-JP" sz="2000" dirty="0">
-              <a:solidFill>
-                <a:schemeClr val="bg2"/>
-              </a:solidFill>
-            </a:endParaRPr>
-          </a:p>
-        </p:txBody>
-      </p:sp>
-      <p:pic>
-        <p:nvPicPr>
-          <p:cNvPr id="4" name="図 3">
-            <a:extLst>
-              <a:ext uri="{FF2B5EF4-FFF2-40B4-BE49-F238E27FC236}">
-                <a16:creationId xmlns:a16="http://schemas.microsoft.com/office/drawing/2014/main" id="{6C402133-1581-93CB-1ED7-36557977FA9E}"/>
-              </a:ext>
-            </a:extLst>
-          </p:cNvPr>
-          <p:cNvPicPr>
-            <a:picLocks noChangeAspect="1"/>
-          </p:cNvPicPr>
-          <p:nvPr/>
-        </p:nvPicPr>
-        <p:blipFill>
-          <a:blip r:embed="rId2">
-            <a:extLst>
-              <a:ext uri="{28A0092B-C50C-407E-A947-70E740481C1C}">
-                <a14:useLocalDpi xmlns:a14="http://schemas.microsoft.com/office/drawing/2010/main" val="0"/>
-              </a:ext>
-            </a:extLst>
-          </a:blip>
-          <a:stretch>
-            <a:fillRect/>
-          </a:stretch>
-        </p:blipFill>
-        <p:spPr>
-          <a:xfrm>
-            <a:off x="505486" y="1089174"/>
-            <a:ext cx="3744000" cy="4679652"/>
-          </a:xfrm>
-          <a:prstGeom prst="rect">
-            <a:avLst/>
-          </a:prstGeom>
-        </p:spPr>
-      </p:pic>
-    </p:spTree>
-    <p:extLst>
-      <p:ext uri="{BB962C8B-B14F-4D97-AF65-F5344CB8AC3E}">
-        <p14:creationId xmlns:p14="http://schemas.microsoft.com/office/powerpoint/2010/main" val="234778964"/>
       </p:ext>
     </p:extLst>
   </p:cSld>
@@ -3841,20 +3934,12 @@
           </a:p>
           <a:p>
             <a:r>
-              <a:rPr kumimoji="1" lang="ja-JP" altLang="en-US" sz="2000">
-                <a:solidFill>
-                  <a:schemeClr val="bg1"/>
-                </a:solidFill>
-              </a:rPr>
-              <a:t>なお、キャリブレーションや調整実験では、性質上</a:t>
-            </a:r>
-            <a:r>
               <a:rPr kumimoji="1" lang="ja-JP" altLang="en-US" sz="2000" dirty="0">
                 <a:solidFill>
                   <a:schemeClr val="bg1"/>
                 </a:solidFill>
               </a:rPr>
-              <a:t>、前景ディスプレイの</a:t>
+              <a:t>なお、キャリブレーションや調整実験では、性質上、前景ディスプレイの</a:t>
             </a:r>
             <a:r>
               <a:rPr kumimoji="1" lang="en-US" altLang="ja-JP" sz="2000" dirty="0">
@@ -3870,7 +3955,7 @@
                   <a:schemeClr val="bg1"/>
                 </a:solidFill>
               </a:rPr>
-              <a:t>刺激にに焦点を合わせづらい場合があります。この場合は、</a:t>
+              <a:t>刺激に焦点を合わせづらい場合があります。この場合は、</a:t>
             </a:r>
             <a:r>
               <a:rPr kumimoji="1" lang="en-US" altLang="ja-JP" sz="2000" dirty="0">
@@ -3956,6 +4041,396 @@
 </file>
 
 <file path=ppt/slides/slide20.xml><?xml version="1.0" encoding="utf-8"?>
+<p:sld xmlns:a="http://schemas.openxmlformats.org/drawingml/2006/main" xmlns:r="http://schemas.openxmlformats.org/officeDocument/2006/relationships" xmlns:p="http://schemas.openxmlformats.org/presentationml/2006/main">
+  <p:cSld>
+    <p:bg>
+      <p:bgPr>
+        <a:solidFill>
+          <a:schemeClr val="tx2"/>
+        </a:solidFill>
+        <a:effectLst/>
+      </p:bgPr>
+    </p:bg>
+    <p:spTree>
+      <p:nvGrpSpPr>
+        <p:cNvPr id="1" name="">
+          <a:extLst>
+            <a:ext uri="{FF2B5EF4-FFF2-40B4-BE49-F238E27FC236}">
+              <a16:creationId xmlns:a16="http://schemas.microsoft.com/office/drawing/2014/main" id="{173EF7C9-532C-A758-9B7A-F0580337826E}"/>
+            </a:ext>
+          </a:extLst>
+        </p:cNvPr>
+        <p:cNvGrpSpPr/>
+        <p:nvPr/>
+      </p:nvGrpSpPr>
+      <p:grpSpPr>
+        <a:xfrm>
+          <a:off x="0" y="0"/>
+          <a:ext cx="0" cy="0"/>
+          <a:chOff x="0" y="0"/>
+          <a:chExt cx="0" cy="0"/>
+        </a:xfrm>
+      </p:grpSpPr>
+      <p:sp>
+        <p:nvSpPr>
+          <p:cNvPr id="3" name="テキスト ボックス 2">
+            <a:extLst>
+              <a:ext uri="{FF2B5EF4-FFF2-40B4-BE49-F238E27FC236}">
+                <a16:creationId xmlns:a16="http://schemas.microsoft.com/office/drawing/2014/main" id="{120884E8-D2D7-87B0-994F-BF2BCD6220D4}"/>
+              </a:ext>
+            </a:extLst>
+          </p:cNvPr>
+          <p:cNvSpPr txBox="1"/>
+          <p:nvPr/>
+        </p:nvSpPr>
+        <p:spPr>
+          <a:xfrm>
+            <a:off x="4655125" y="705177"/>
+            <a:ext cx="6643321" cy="4216539"/>
+          </a:xfrm>
+          <a:prstGeom prst="rect">
+            <a:avLst/>
+          </a:prstGeom>
+          <a:noFill/>
+        </p:spPr>
+        <p:txBody>
+          <a:bodyPr wrap="square" rtlCol="0">
+            <a:spAutoFit/>
+          </a:bodyPr>
+          <a:lstStyle/>
+          <a:p>
+            <a:r>
+              <a:rPr lang="ja-JP" altLang="ja-JP" sz="2800" b="1" dirty="0">
+                <a:solidFill>
+                  <a:schemeClr val="bg2"/>
+                </a:solidFill>
+              </a:rPr>
+              <a:t>Position calibration</a:t>
+            </a:r>
+            <a:endParaRPr lang="ja-JP" altLang="ja-JP" sz="2800" dirty="0">
+              <a:solidFill>
+                <a:schemeClr val="bg2"/>
+              </a:solidFill>
+            </a:endParaRPr>
+          </a:p>
+          <a:p>
+            <a:r>
+              <a:rPr lang="ja-JP" altLang="ja-JP" sz="2000" dirty="0">
+                <a:solidFill>
+                  <a:schemeClr val="bg2"/>
+                </a:solidFill>
+              </a:rPr>
+              <a:t>Using the arrow keys on the control PC, move the position of the square frame displayed on the rear display (red) and align it with the square frame displayed on the front display (white).</a:t>
+            </a:r>
+            <a:endParaRPr lang="en-US" altLang="ja-JP" sz="2000" dirty="0">
+              <a:solidFill>
+                <a:schemeClr val="bg2"/>
+              </a:solidFill>
+            </a:endParaRPr>
+          </a:p>
+          <a:p>
+            <a:endParaRPr lang="ja-JP" altLang="ja-JP" sz="2000" dirty="0">
+              <a:solidFill>
+                <a:schemeClr val="bg2"/>
+              </a:solidFill>
+            </a:endParaRPr>
+          </a:p>
+          <a:p>
+            <a:r>
+              <a:rPr lang="ja-JP" altLang="ja-JP" sz="2000" dirty="0">
+                <a:solidFill>
+                  <a:schemeClr val="bg2"/>
+                </a:solidFill>
+              </a:rPr>
+              <a:t>This procedure will be performed separately for the right eye and the left eye. Please cover the eye not being used with the eye patch provided.</a:t>
+            </a:r>
+            <a:endParaRPr lang="en-US" altLang="ja-JP" sz="2000" dirty="0">
+              <a:solidFill>
+                <a:schemeClr val="bg2"/>
+              </a:solidFill>
+            </a:endParaRPr>
+          </a:p>
+          <a:p>
+            <a:endParaRPr lang="ja-JP" altLang="ja-JP" sz="2000" dirty="0">
+              <a:solidFill>
+                <a:schemeClr val="bg2"/>
+              </a:solidFill>
+            </a:endParaRPr>
+          </a:p>
+          <a:p>
+            <a:r>
+              <a:rPr lang="ja-JP" altLang="ja-JP" sz="2000" dirty="0">
+                <a:solidFill>
+                  <a:schemeClr val="bg2"/>
+                </a:solidFill>
+              </a:rPr>
+              <a:t>Press the Enter key to confirm and proceed to the next step.</a:t>
+            </a:r>
+          </a:p>
+          <a:p>
+            <a:endParaRPr kumimoji="1" lang="en-US" altLang="ja-JP" sz="2000" dirty="0">
+              <a:solidFill>
+                <a:schemeClr val="bg2"/>
+              </a:solidFill>
+            </a:endParaRPr>
+          </a:p>
+        </p:txBody>
+      </p:sp>
+      <p:pic>
+        <p:nvPicPr>
+          <p:cNvPr id="7" name="図 6">
+            <a:extLst>
+              <a:ext uri="{FF2B5EF4-FFF2-40B4-BE49-F238E27FC236}">
+                <a16:creationId xmlns:a16="http://schemas.microsoft.com/office/drawing/2014/main" id="{DE67171A-F091-F061-0385-17689739AB73}"/>
+              </a:ext>
+            </a:extLst>
+          </p:cNvPr>
+          <p:cNvPicPr>
+            <a:picLocks noChangeAspect="1"/>
+          </p:cNvPicPr>
+          <p:nvPr/>
+        </p:nvPicPr>
+        <p:blipFill>
+          <a:blip r:embed="rId2">
+            <a:extLst>
+              <a:ext uri="{28A0092B-C50C-407E-A947-70E740481C1C}">
+                <a14:useLocalDpi xmlns:a14="http://schemas.microsoft.com/office/drawing/2010/main" val="0"/>
+              </a:ext>
+            </a:extLst>
+          </a:blip>
+          <a:stretch>
+            <a:fillRect/>
+          </a:stretch>
+        </p:blipFill>
+        <p:spPr>
+          <a:xfrm>
+            <a:off x="625105" y="1096241"/>
+            <a:ext cx="3744484" cy="4665518"/>
+          </a:xfrm>
+          <a:prstGeom prst="rect">
+            <a:avLst/>
+          </a:prstGeom>
+        </p:spPr>
+      </p:pic>
+    </p:spTree>
+    <p:extLst>
+      <p:ext uri="{BB962C8B-B14F-4D97-AF65-F5344CB8AC3E}">
+        <p14:creationId xmlns:p14="http://schemas.microsoft.com/office/powerpoint/2010/main" val="372765942"/>
+      </p:ext>
+    </p:extLst>
+  </p:cSld>
+  <p:clrMapOvr>
+    <a:masterClrMapping/>
+  </p:clrMapOvr>
+</p:sld>
+</file>
+
+<file path=ppt/slides/slide21.xml><?xml version="1.0" encoding="utf-8"?>
+<p:sld xmlns:a="http://schemas.openxmlformats.org/drawingml/2006/main" xmlns:r="http://schemas.openxmlformats.org/officeDocument/2006/relationships" xmlns:p="http://schemas.openxmlformats.org/presentationml/2006/main">
+  <p:cSld>
+    <p:bg>
+      <p:bgPr>
+        <a:solidFill>
+          <a:schemeClr val="tx2"/>
+        </a:solidFill>
+        <a:effectLst/>
+      </p:bgPr>
+    </p:bg>
+    <p:spTree>
+      <p:nvGrpSpPr>
+        <p:cNvPr id="1" name="">
+          <a:extLst>
+            <a:ext uri="{FF2B5EF4-FFF2-40B4-BE49-F238E27FC236}">
+              <a16:creationId xmlns:a16="http://schemas.microsoft.com/office/drawing/2014/main" id="{3350EA5C-2469-08FF-9889-08F575FA8DD9}"/>
+            </a:ext>
+          </a:extLst>
+        </p:cNvPr>
+        <p:cNvGrpSpPr/>
+        <p:nvPr/>
+      </p:nvGrpSpPr>
+      <p:grpSpPr>
+        <a:xfrm>
+          <a:off x="0" y="0"/>
+          <a:ext cx="0" cy="0"/>
+          <a:chOff x="0" y="0"/>
+          <a:chExt cx="0" cy="0"/>
+        </a:xfrm>
+      </p:grpSpPr>
+      <p:sp>
+        <p:nvSpPr>
+          <p:cNvPr id="3" name="テキスト ボックス 2">
+            <a:extLst>
+              <a:ext uri="{FF2B5EF4-FFF2-40B4-BE49-F238E27FC236}">
+                <a16:creationId xmlns:a16="http://schemas.microsoft.com/office/drawing/2014/main" id="{505801EC-12DF-8207-47A1-0FD0BDCBB230}"/>
+              </a:ext>
+            </a:extLst>
+          </p:cNvPr>
+          <p:cNvSpPr txBox="1"/>
+          <p:nvPr/>
+        </p:nvSpPr>
+        <p:spPr>
+          <a:xfrm>
+            <a:off x="4655127" y="705177"/>
+            <a:ext cx="6643320" cy="6063198"/>
+          </a:xfrm>
+          <a:prstGeom prst="rect">
+            <a:avLst/>
+          </a:prstGeom>
+          <a:noFill/>
+        </p:spPr>
+        <p:txBody>
+          <a:bodyPr wrap="square" rtlCol="0">
+            <a:spAutoFit/>
+          </a:bodyPr>
+          <a:lstStyle/>
+          <a:p>
+            <a:r>
+              <a:rPr lang="ja-JP" altLang="ja-JP" sz="2800" b="1" dirty="0">
+                <a:solidFill>
+                  <a:schemeClr val="bg2"/>
+                </a:solidFill>
+              </a:rPr>
+              <a:t>Blur calibration</a:t>
+            </a:r>
+            <a:endParaRPr lang="ja-JP" altLang="ja-JP" sz="2800" dirty="0">
+              <a:solidFill>
+                <a:schemeClr val="bg2"/>
+              </a:solidFill>
+            </a:endParaRPr>
+          </a:p>
+          <a:p>
+            <a:r>
+              <a:rPr lang="ja-JP" altLang="ja-JP" sz="2000" dirty="0">
+                <a:solidFill>
+                  <a:schemeClr val="bg2"/>
+                </a:solidFill>
+              </a:rPr>
+              <a:t>In the central display area, the same stimulus image and marker are shown in the upper and lower halves. Among these, only the stimulus image in the upper half is displayed on the rear display.</a:t>
+            </a:r>
+            <a:endParaRPr lang="en-US" altLang="ja-JP" sz="2000" dirty="0">
+              <a:solidFill>
+                <a:schemeClr val="bg2"/>
+              </a:solidFill>
+            </a:endParaRPr>
+          </a:p>
+          <a:p>
+            <a:endParaRPr lang="ja-JP" altLang="ja-JP" sz="2000" dirty="0">
+              <a:solidFill>
+                <a:schemeClr val="bg2"/>
+              </a:solidFill>
+            </a:endParaRPr>
+          </a:p>
+          <a:p>
+            <a:r>
+              <a:rPr lang="ja-JP" altLang="ja-JP" sz="2000" dirty="0">
+                <a:solidFill>
+                  <a:schemeClr val="bg2"/>
+                </a:solidFill>
+              </a:rPr>
+              <a:t>First, in the upper half of the display area, focus on the marker on the front display while observing the blur of the stimulus image on the rear display.</a:t>
+            </a:r>
+          </a:p>
+          <a:p>
+            <a:r>
+              <a:rPr lang="ja-JP" altLang="ja-JP" sz="2000" dirty="0">
+                <a:solidFill>
+                  <a:schemeClr val="bg2"/>
+                </a:solidFill>
+              </a:rPr>
+              <a:t>Then, using the left and right arrow keys on the control PC, adjust the blur of the stimulus image in the lower half so that it matches the blur observed in the upper half. The blur becomes stronger as you move to the right.</a:t>
+            </a:r>
+          </a:p>
+          <a:p>
+            <a:r>
+              <a:rPr lang="ja-JP" altLang="ja-JP" sz="2000" dirty="0">
+                <a:solidFill>
+                  <a:schemeClr val="bg2"/>
+                </a:solidFill>
+              </a:rPr>
+              <a:t>Repeat this process until you feel that the two levels of blur match completely.</a:t>
+            </a:r>
+            <a:endParaRPr lang="en-US" altLang="ja-JP" sz="2000" dirty="0">
+              <a:solidFill>
+                <a:schemeClr val="bg2"/>
+              </a:solidFill>
+            </a:endParaRPr>
+          </a:p>
+          <a:p>
+            <a:endParaRPr lang="ja-JP" altLang="ja-JP" sz="2000" dirty="0">
+              <a:solidFill>
+                <a:schemeClr val="bg2"/>
+              </a:solidFill>
+            </a:endParaRPr>
+          </a:p>
+          <a:p>
+            <a:r>
+              <a:rPr lang="ja-JP" altLang="ja-JP" sz="2000" dirty="0">
+                <a:solidFill>
+                  <a:schemeClr val="bg2"/>
+                </a:solidFill>
+              </a:rPr>
+              <a:t>Press the down arrow key to confirm and proceed to the next stimulus.</a:t>
+            </a:r>
+          </a:p>
+          <a:p>
+            <a:endParaRPr kumimoji="1" lang="en-US" altLang="ja-JP" sz="2000" dirty="0">
+              <a:solidFill>
+                <a:schemeClr val="bg2"/>
+              </a:solidFill>
+            </a:endParaRPr>
+          </a:p>
+        </p:txBody>
+      </p:sp>
+      <p:pic>
+        <p:nvPicPr>
+          <p:cNvPr id="4" name="図 3">
+            <a:extLst>
+              <a:ext uri="{FF2B5EF4-FFF2-40B4-BE49-F238E27FC236}">
+                <a16:creationId xmlns:a16="http://schemas.microsoft.com/office/drawing/2014/main" id="{6C402133-1581-93CB-1ED7-36557977FA9E}"/>
+              </a:ext>
+            </a:extLst>
+          </p:cNvPr>
+          <p:cNvPicPr>
+            <a:picLocks noChangeAspect="1"/>
+          </p:cNvPicPr>
+          <p:nvPr/>
+        </p:nvPicPr>
+        <p:blipFill>
+          <a:blip r:embed="rId2">
+            <a:extLst>
+              <a:ext uri="{28A0092B-C50C-407E-A947-70E740481C1C}">
+                <a14:useLocalDpi xmlns:a14="http://schemas.microsoft.com/office/drawing/2010/main" val="0"/>
+              </a:ext>
+            </a:extLst>
+          </a:blip>
+          <a:stretch>
+            <a:fillRect/>
+          </a:stretch>
+        </p:blipFill>
+        <p:spPr>
+          <a:xfrm>
+            <a:off x="505486" y="1089174"/>
+            <a:ext cx="3744000" cy="4679652"/>
+          </a:xfrm>
+          <a:prstGeom prst="rect">
+            <a:avLst/>
+          </a:prstGeom>
+        </p:spPr>
+      </p:pic>
+    </p:spTree>
+    <p:extLst>
+      <p:ext uri="{BB962C8B-B14F-4D97-AF65-F5344CB8AC3E}">
+        <p14:creationId xmlns:p14="http://schemas.microsoft.com/office/powerpoint/2010/main" val="234778964"/>
+      </p:ext>
+    </p:extLst>
+  </p:cSld>
+  <p:clrMapOvr>
+    <a:masterClrMapping/>
+  </p:clrMapOvr>
+</p:sld>
+</file>
+
+<file path=ppt/slides/slide22.xml><?xml version="1.0" encoding="utf-8"?>
 <p:sld xmlns:a="http://schemas.openxmlformats.org/drawingml/2006/main" xmlns:r="http://schemas.openxmlformats.org/officeDocument/2006/relationships" xmlns:p="http://schemas.openxmlformats.org/presentationml/2006/main">
   <p:cSld>
     <p:bg>
@@ -4161,7 +4636,7 @@
 </p:sld>
 </file>
 
-<file path=ppt/slides/slide21.xml><?xml version="1.0" encoding="utf-8"?>
+<file path=ppt/slides/slide23.xml><?xml version="1.0" encoding="utf-8"?>
 <p:sld xmlns:a="http://schemas.openxmlformats.org/drawingml/2006/main" xmlns:r="http://schemas.openxmlformats.org/officeDocument/2006/relationships" xmlns:p="http://schemas.openxmlformats.org/presentationml/2006/main">
   <p:cSld>
     <p:bg>
@@ -4538,7 +5013,7 @@
 </p:sld>
 </file>
 
-<file path=ppt/slides/slide22.xml><?xml version="1.0" encoding="utf-8"?>
+<file path=ppt/slides/slide24.xml><?xml version="1.0" encoding="utf-8"?>
 <p:sld xmlns:a="http://schemas.openxmlformats.org/drawingml/2006/main" xmlns:r="http://schemas.openxmlformats.org/officeDocument/2006/relationships" xmlns:p="http://schemas.openxmlformats.org/presentationml/2006/main">
   <p:cSld>
     <p:bg>
@@ -4675,7 +5150,7 @@
 </p:sld>
 </file>
 
-<file path=ppt/slides/slide23.xml><?xml version="1.0" encoding="utf-8"?>
+<file path=ppt/slides/slide25.xml><?xml version="1.0" encoding="utf-8"?>
 <p:sld xmlns:a="http://schemas.openxmlformats.org/drawingml/2006/main" xmlns:r="http://schemas.openxmlformats.org/officeDocument/2006/relationships" xmlns:p="http://schemas.openxmlformats.org/presentationml/2006/main">
   <p:cSld>
     <p:bg>
@@ -4860,7 +5335,7 @@
 </p:sld>
 </file>
 
-<file path=ppt/slides/slide24.xml><?xml version="1.0" encoding="utf-8"?>
+<file path=ppt/slides/slide26.xml><?xml version="1.0" encoding="utf-8"?>
 <p:sld xmlns:a="http://schemas.openxmlformats.org/drawingml/2006/main" xmlns:r="http://schemas.openxmlformats.org/officeDocument/2006/relationships" xmlns:p="http://schemas.openxmlformats.org/presentationml/2006/main">
   <p:cSld>
     <p:bg>
@@ -5065,7 +5540,7 @@
 </p:sld>
 </file>
 
-<file path=ppt/slides/slide25.xml><?xml version="1.0" encoding="utf-8"?>
+<file path=ppt/slides/slide27.xml><?xml version="1.0" encoding="utf-8"?>
 <p:sld xmlns:a="http://schemas.openxmlformats.org/drawingml/2006/main" xmlns:r="http://schemas.openxmlformats.org/officeDocument/2006/relationships" xmlns:p="http://schemas.openxmlformats.org/presentationml/2006/main">
   <p:cSld>
     <p:bg>
@@ -5271,7 +5746,7 @@
 </p:sld>
 </file>
 
-<file path=ppt/slides/slide26.xml><?xml version="1.0" encoding="utf-8"?>
+<file path=ppt/slides/slide28.xml><?xml version="1.0" encoding="utf-8"?>
 <p:sld xmlns:a="http://schemas.openxmlformats.org/drawingml/2006/main" xmlns:r="http://schemas.openxmlformats.org/officeDocument/2006/relationships" xmlns:p="http://schemas.openxmlformats.org/presentationml/2006/main">
   <p:cSld>
     <p:bg>
@@ -5648,7 +6123,7 @@
 </p:sld>
 </file>
 
-<file path=ppt/slides/slide27.xml><?xml version="1.0" encoding="utf-8"?>
+<file path=ppt/slides/slide29.xml><?xml version="1.0" encoding="utf-8"?>
 <p:sld xmlns:a="http://schemas.openxmlformats.org/drawingml/2006/main" xmlns:r="http://schemas.openxmlformats.org/officeDocument/2006/relationships" xmlns:p="http://schemas.openxmlformats.org/presentationml/2006/main">
   <p:cSld>
     <p:bg>
@@ -5766,6 +6241,320 @@
         <p:cNvPr id="1" name="">
           <a:extLst>
             <a:ext uri="{FF2B5EF4-FFF2-40B4-BE49-F238E27FC236}">
+              <a16:creationId xmlns:a16="http://schemas.microsoft.com/office/drawing/2014/main" id="{40FD4A37-65BC-6DC4-0137-9106D334D65B}"/>
+            </a:ext>
+          </a:extLst>
+        </p:cNvPr>
+        <p:cNvGrpSpPr/>
+        <p:nvPr/>
+      </p:nvGrpSpPr>
+      <p:grpSpPr>
+        <a:xfrm>
+          <a:off x="0" y="0"/>
+          <a:ext cx="0" cy="0"/>
+          <a:chOff x="0" y="0"/>
+          <a:chExt cx="0" cy="0"/>
+        </a:xfrm>
+      </p:grpSpPr>
+      <p:sp>
+        <p:nvSpPr>
+          <p:cNvPr id="2" name="テキスト ボックス 1">
+            <a:extLst>
+              <a:ext uri="{FF2B5EF4-FFF2-40B4-BE49-F238E27FC236}">
+                <a16:creationId xmlns:a16="http://schemas.microsoft.com/office/drawing/2014/main" id="{61244CB2-9ECE-50BE-1E58-EA310DEEC139}"/>
+              </a:ext>
+            </a:extLst>
+          </p:cNvPr>
+          <p:cNvSpPr txBox="1"/>
+          <p:nvPr/>
+        </p:nvSpPr>
+        <p:spPr>
+          <a:xfrm>
+            <a:off x="893553" y="705177"/>
+            <a:ext cx="10404894" cy="5409173"/>
+          </a:xfrm>
+          <a:prstGeom prst="rect">
+            <a:avLst/>
+          </a:prstGeom>
+          <a:noFill/>
+        </p:spPr>
+        <p:txBody>
+          <a:bodyPr wrap="square" rtlCol="0">
+            <a:spAutoFit/>
+          </a:bodyPr>
+          <a:lstStyle/>
+          <a:p>
+            <a:r>
+              <a:rPr lang="ja-JP" altLang="en-US" sz="2550" b="1" dirty="0">
+                <a:solidFill>
+                  <a:schemeClr val="bg1"/>
+                </a:solidFill>
+                <a:latin typeface="+mj-ea"/>
+                <a:ea typeface="+mj-ea"/>
+              </a:rPr>
+              <a:t>被験者情報の記録</a:t>
+            </a:r>
+            <a:endParaRPr lang="en-US" altLang="ja-JP" sz="2550" b="1" dirty="0">
+              <a:solidFill>
+                <a:schemeClr val="bg1"/>
+              </a:solidFill>
+              <a:latin typeface="+mj-ea"/>
+              <a:ea typeface="+mj-ea"/>
+            </a:endParaRPr>
+          </a:p>
+          <a:p>
+            <a:r>
+              <a:rPr kumimoji="1" lang="ja-JP" altLang="en-US" sz="2000" dirty="0">
+                <a:solidFill>
+                  <a:schemeClr val="bg1"/>
+                </a:solidFill>
+              </a:rPr>
+              <a:t>実際の操作に移る前に、被験者様の性別、年齢、利き目、瞳孔間距離を測定します。</a:t>
+            </a:r>
+            <a:endParaRPr kumimoji="1" lang="en-US" altLang="ja-JP" sz="2000" dirty="0">
+              <a:solidFill>
+                <a:schemeClr val="bg1"/>
+              </a:solidFill>
+            </a:endParaRPr>
+          </a:p>
+          <a:p>
+            <a:endParaRPr kumimoji="1" lang="en-US" altLang="ja-JP" sz="2000" dirty="0">
+              <a:solidFill>
+                <a:schemeClr val="bg1"/>
+              </a:solidFill>
+            </a:endParaRPr>
+          </a:p>
+          <a:p>
+            <a:r>
+              <a:rPr kumimoji="1" lang="ja-JP" altLang="en-US" sz="2000" dirty="0">
+                <a:solidFill>
+                  <a:schemeClr val="bg1"/>
+                </a:solidFill>
+              </a:rPr>
+              <a:t>性別、年齢については、実験担当者から質問があるのでお答えください。</a:t>
+            </a:r>
+            <a:endParaRPr kumimoji="1" lang="en-US" altLang="ja-JP" sz="2000" dirty="0">
+              <a:solidFill>
+                <a:schemeClr val="bg1"/>
+              </a:solidFill>
+            </a:endParaRPr>
+          </a:p>
+          <a:p>
+            <a:r>
+              <a:rPr kumimoji="1" lang="ja-JP" altLang="en-US" sz="2000" dirty="0">
+                <a:solidFill>
+                  <a:schemeClr val="bg1"/>
+                </a:solidFill>
+              </a:rPr>
+              <a:t>利き目については、実験担当者からの指示に従い、</a:t>
+            </a:r>
+            <a:r>
+              <a:rPr lang="ja-JP" altLang="ja-JP" sz="2000" dirty="0">
+                <a:solidFill>
+                  <a:schemeClr val="bg1"/>
+                </a:solidFill>
+              </a:rPr>
+              <a:t>以下の手順で</a:t>
+            </a:r>
+            <a:r>
+              <a:rPr lang="ja-JP" altLang="en-US" sz="2000" dirty="0">
+                <a:solidFill>
+                  <a:schemeClr val="bg1"/>
+                </a:solidFill>
+              </a:rPr>
+              <a:t>測定して</a:t>
+            </a:r>
+            <a:r>
+              <a:rPr lang="ja-JP" altLang="ja-JP" sz="2000" dirty="0">
+                <a:solidFill>
+                  <a:schemeClr val="bg1"/>
+                </a:solidFill>
+              </a:rPr>
+              <a:t>ください。</a:t>
+            </a:r>
+          </a:p>
+          <a:p>
+            <a:pPr marL="457200" indent="-457200">
+              <a:buFont typeface="+mj-lt"/>
+              <a:buAutoNum type="arabicPeriod"/>
+            </a:pPr>
+            <a:r>
+              <a:rPr lang="ja-JP" altLang="ja-JP" sz="2000" dirty="0">
+                <a:solidFill>
+                  <a:schemeClr val="bg1"/>
+                </a:solidFill>
+              </a:rPr>
+              <a:t>両手を前方に伸ばし、親指と人差し指で三角形の小さな隙間を作ります。</a:t>
+            </a:r>
+            <a:endParaRPr lang="en-US" altLang="ja-JP" sz="2000" dirty="0">
+              <a:solidFill>
+                <a:schemeClr val="bg1"/>
+              </a:solidFill>
+            </a:endParaRPr>
+          </a:p>
+          <a:p>
+            <a:pPr marL="457200" indent="-457200">
+              <a:buFont typeface="+mj-lt"/>
+              <a:buAutoNum type="arabicPeriod"/>
+            </a:pPr>
+            <a:r>
+              <a:rPr lang="ja-JP" altLang="ja-JP" sz="2000" dirty="0">
+                <a:solidFill>
+                  <a:schemeClr val="bg1"/>
+                </a:solidFill>
+              </a:rPr>
+              <a:t>両目を開けたまま、その隙間の中央に、実験担当者が指定した目標物が見えるように手の位置を調整します。</a:t>
+            </a:r>
+            <a:endParaRPr lang="en-US" altLang="ja-JP" sz="2000" dirty="0">
+              <a:solidFill>
+                <a:schemeClr val="bg1"/>
+              </a:solidFill>
+            </a:endParaRPr>
+          </a:p>
+          <a:p>
+            <a:pPr marL="457200" indent="-457200">
+              <a:buFont typeface="+mj-lt"/>
+              <a:buAutoNum type="arabicPeriod"/>
+            </a:pPr>
+            <a:r>
+              <a:rPr lang="ja-JP" altLang="ja-JP" sz="2000" dirty="0">
+                <a:solidFill>
+                  <a:schemeClr val="bg1"/>
+                </a:solidFill>
+              </a:rPr>
+              <a:t>手と顔を動かさず、左右の目を交互に閉じます。</a:t>
+            </a:r>
+            <a:endParaRPr lang="en-US" altLang="ja-JP" sz="2000" dirty="0">
+              <a:solidFill>
+                <a:schemeClr val="bg1"/>
+              </a:solidFill>
+            </a:endParaRPr>
+          </a:p>
+          <a:p>
+            <a:pPr marL="457200" indent="-457200">
+              <a:buFont typeface="+mj-lt"/>
+              <a:buAutoNum type="arabicPeriod"/>
+            </a:pPr>
+            <a:r>
+              <a:rPr lang="ja-JP" altLang="ja-JP" sz="2000" dirty="0">
+                <a:solidFill>
+                  <a:schemeClr val="bg1"/>
+                </a:solidFill>
+              </a:rPr>
+              <a:t>目標物が隙間の中央に見え続ける側の目を、利き目として記録します。</a:t>
+            </a:r>
+            <a:endParaRPr kumimoji="1" lang="en-US" altLang="ja-JP" sz="2000" dirty="0">
+              <a:solidFill>
+                <a:schemeClr val="bg1"/>
+              </a:solidFill>
+            </a:endParaRPr>
+          </a:p>
+          <a:p>
+            <a:r>
+              <a:rPr kumimoji="1" lang="ja-JP" altLang="en-US" sz="2000" dirty="0">
+                <a:solidFill>
+                  <a:schemeClr val="bg1"/>
+                </a:solidFill>
+              </a:rPr>
+              <a:t>瞳孔間距離については、眉のあたりに定規を当てていただき、その写真を撮影することで測定します。記録後、被験者様の目の前で、写真を削除します。</a:t>
+            </a:r>
+            <a:br>
+              <a:rPr kumimoji="1" lang="en-US" altLang="ja-JP" sz="2000" dirty="0">
+                <a:solidFill>
+                  <a:schemeClr val="bg1"/>
+                </a:solidFill>
+              </a:rPr>
+            </a:br>
+            <a:br>
+              <a:rPr kumimoji="1" lang="en-US" altLang="ja-JP" sz="2000" dirty="0">
+                <a:solidFill>
+                  <a:schemeClr val="bg1"/>
+                </a:solidFill>
+              </a:rPr>
+            </a:br>
+            <a:r>
+              <a:rPr kumimoji="1" lang="ja-JP" altLang="en-US" sz="2000" dirty="0">
+                <a:solidFill>
+                  <a:schemeClr val="bg1"/>
+                </a:solidFill>
+              </a:rPr>
+              <a:t>繰り返しになりますが、</a:t>
+            </a:r>
+            <a:r>
+              <a:rPr lang="ja-JP" altLang="en-US" sz="2000" dirty="0">
+                <a:solidFill>
+                  <a:schemeClr val="bg1"/>
+                </a:solidFill>
+              </a:rPr>
+              <a:t>実験データを分析、公表する際はデータはすべて匿名化され、プライバシーに関する情報を開示することはございません。</a:t>
+            </a:r>
+            <a:endParaRPr kumimoji="1" lang="en-US" altLang="ja-JP" sz="2000" dirty="0">
+              <a:solidFill>
+                <a:schemeClr val="bg1"/>
+              </a:solidFill>
+            </a:endParaRPr>
+          </a:p>
+          <a:p>
+            <a:endParaRPr lang="en-US" altLang="ja-JP" sz="2000" dirty="0">
+              <a:solidFill>
+                <a:schemeClr val="bg1"/>
+              </a:solidFill>
+            </a:endParaRPr>
+          </a:p>
+          <a:p>
+            <a:r>
+              <a:rPr kumimoji="1" lang="en-US" altLang="ja-JP" sz="2000" dirty="0">
+                <a:solidFill>
+                  <a:schemeClr val="bg1"/>
+                </a:solidFill>
+              </a:rPr>
+              <a:t>Space</a:t>
+            </a:r>
+            <a:r>
+              <a:rPr kumimoji="1" lang="ja-JP" altLang="en-US" sz="2000" dirty="0">
+                <a:solidFill>
+                  <a:schemeClr val="bg1"/>
+                </a:solidFill>
+              </a:rPr>
+              <a:t>キーで次へ進みます</a:t>
+            </a:r>
+            <a:endParaRPr kumimoji="1" lang="en-US" altLang="ja-JP" sz="2000" dirty="0">
+              <a:solidFill>
+                <a:schemeClr val="bg1"/>
+              </a:solidFill>
+            </a:endParaRPr>
+          </a:p>
+        </p:txBody>
+      </p:sp>
+    </p:spTree>
+    <p:extLst>
+      <p:ext uri="{BB962C8B-B14F-4D97-AF65-F5344CB8AC3E}">
+        <p14:creationId xmlns:p14="http://schemas.microsoft.com/office/powerpoint/2010/main" val="316370290"/>
+      </p:ext>
+    </p:extLst>
+  </p:cSld>
+  <p:clrMapOvr>
+    <a:masterClrMapping/>
+  </p:clrMapOvr>
+</p:sld>
+</file>
+
+<file path=ppt/slides/slide4.xml><?xml version="1.0" encoding="utf-8"?>
+<p:sld xmlns:a="http://schemas.openxmlformats.org/drawingml/2006/main" xmlns:r="http://schemas.openxmlformats.org/officeDocument/2006/relationships" xmlns:p="http://schemas.openxmlformats.org/presentationml/2006/main">
+  <p:cSld>
+    <p:bg>
+      <p:bgPr>
+        <a:solidFill>
+          <a:schemeClr val="tx2"/>
+        </a:solidFill>
+        <a:effectLst/>
+      </p:bgPr>
+    </p:bg>
+    <p:spTree>
+      <p:nvGrpSpPr>
+        <p:cNvPr id="1" name="">
+          <a:extLst>
+            <a:ext uri="{FF2B5EF4-FFF2-40B4-BE49-F238E27FC236}">
               <a16:creationId xmlns:a16="http://schemas.microsoft.com/office/drawing/2014/main" id="{FC5C5AF3-9201-45E8-C4AF-918B1AE3E3ED}"/>
             </a:ext>
           </a:extLst>
@@ -5940,7 +6729,7 @@
 </p:sld>
 </file>
 
-<file path=ppt/slides/slide4.xml><?xml version="1.0" encoding="utf-8"?>
+<file path=ppt/slides/slide5.xml><?xml version="1.0" encoding="utf-8"?>
 <p:sld xmlns:a="http://schemas.openxmlformats.org/drawingml/2006/main" xmlns:r="http://schemas.openxmlformats.org/officeDocument/2006/relationships" xmlns:p="http://schemas.openxmlformats.org/presentationml/2006/main">
   <p:cSld>
     <p:bg>
@@ -6165,7 +6954,7 @@
 </p:sld>
 </file>
 
-<file path=ppt/slides/slide5.xml><?xml version="1.0" encoding="utf-8"?>
+<file path=ppt/slides/slide6.xml><?xml version="1.0" encoding="utf-8"?>
 <p:sld xmlns:a="http://schemas.openxmlformats.org/drawingml/2006/main" xmlns:r="http://schemas.openxmlformats.org/officeDocument/2006/relationships" xmlns:p="http://schemas.openxmlformats.org/presentationml/2006/main">
   <p:cSld>
     <p:bg>
@@ -6403,7 +7192,7 @@
 </p:sld>
 </file>
 
-<file path=ppt/slides/slide6.xml><?xml version="1.0" encoding="utf-8"?>
+<file path=ppt/slides/slide7.xml><?xml version="1.0" encoding="utf-8"?>
 <p:sld xmlns:a="http://schemas.openxmlformats.org/drawingml/2006/main" xmlns:r="http://schemas.openxmlformats.org/officeDocument/2006/relationships" xmlns:p="http://schemas.openxmlformats.org/presentationml/2006/main">
   <p:cSld>
     <p:bg>
@@ -6650,7 +7439,7 @@
 </p:sld>
 </file>
 
-<file path=ppt/slides/slide7.xml><?xml version="1.0" encoding="utf-8"?>
+<file path=ppt/slides/slide8.xml><?xml version="1.0" encoding="utf-8"?>
 <p:sld xmlns:a="http://schemas.openxmlformats.org/drawingml/2006/main" xmlns:r="http://schemas.openxmlformats.org/officeDocument/2006/relationships" xmlns:p="http://schemas.openxmlformats.org/presentationml/2006/main">
   <p:cSld>
     <p:bg>
@@ -7080,7 +7869,7 @@
 </p:sld>
 </file>
 
-<file path=ppt/slides/slide8.xml><?xml version="1.0" encoding="utf-8"?>
+<file path=ppt/slides/slide9.xml><?xml version="1.0" encoding="utf-8"?>
 <p:sld xmlns:a="http://schemas.openxmlformats.org/drawingml/2006/main" xmlns:r="http://schemas.openxmlformats.org/officeDocument/2006/relationships" xmlns:p="http://schemas.openxmlformats.org/presentationml/2006/main">
   <p:cSld>
     <p:bg>
@@ -7246,231 +8035,6 @@
     <p:extLst>
       <p:ext uri="{BB962C8B-B14F-4D97-AF65-F5344CB8AC3E}">
         <p14:creationId xmlns:p14="http://schemas.microsoft.com/office/powerpoint/2010/main" val="3199074743"/>
-      </p:ext>
-    </p:extLst>
-  </p:cSld>
-  <p:clrMapOvr>
-    <a:masterClrMapping/>
-  </p:clrMapOvr>
-</p:sld>
-</file>
-
-<file path=ppt/slides/slide9.xml><?xml version="1.0" encoding="utf-8"?>
-<p:sld xmlns:a="http://schemas.openxmlformats.org/drawingml/2006/main" xmlns:r="http://schemas.openxmlformats.org/officeDocument/2006/relationships" xmlns:p="http://schemas.openxmlformats.org/presentationml/2006/main">
-  <p:cSld>
-    <p:bg>
-      <p:bgPr>
-        <a:solidFill>
-          <a:schemeClr val="tx2"/>
-        </a:solidFill>
-        <a:effectLst/>
-      </p:bgPr>
-    </p:bg>
-    <p:spTree>
-      <p:nvGrpSpPr>
-        <p:cNvPr id="1" name="">
-          <a:extLst>
-            <a:ext uri="{FF2B5EF4-FFF2-40B4-BE49-F238E27FC236}">
-              <a16:creationId xmlns:a16="http://schemas.microsoft.com/office/drawing/2014/main" id="{3D0AA7F7-94A8-27FC-F16E-E99757B66783}"/>
-            </a:ext>
-          </a:extLst>
-        </p:cNvPr>
-        <p:cNvGrpSpPr/>
-        <p:nvPr/>
-      </p:nvGrpSpPr>
-      <p:grpSpPr>
-        <a:xfrm>
-          <a:off x="0" y="0"/>
-          <a:ext cx="0" cy="0"/>
-          <a:chOff x="0" y="0"/>
-          <a:chExt cx="0" cy="0"/>
-        </a:xfrm>
-      </p:grpSpPr>
-      <p:sp>
-        <p:nvSpPr>
-          <p:cNvPr id="3" name="テキスト ボックス 2">
-            <a:extLst>
-              <a:ext uri="{FF2B5EF4-FFF2-40B4-BE49-F238E27FC236}">
-                <a16:creationId xmlns:a16="http://schemas.microsoft.com/office/drawing/2014/main" id="{BA8E8BD9-3F83-842A-0E88-2F2D568B59FE}"/>
-              </a:ext>
-            </a:extLst>
-          </p:cNvPr>
-          <p:cNvSpPr txBox="1"/>
-          <p:nvPr/>
-        </p:nvSpPr>
-        <p:spPr>
-          <a:xfrm>
-            <a:off x="4655125" y="705177"/>
-            <a:ext cx="6643321" cy="3870290"/>
-          </a:xfrm>
-          <a:prstGeom prst="rect">
-            <a:avLst/>
-          </a:prstGeom>
-          <a:noFill/>
-        </p:spPr>
-        <p:txBody>
-          <a:bodyPr wrap="square" rtlCol="0">
-            <a:spAutoFit/>
-          </a:bodyPr>
-          <a:lstStyle/>
-          <a:p>
-            <a:r>
-              <a:rPr lang="ja-JP" altLang="en-US" sz="2550" b="1" dirty="0">
-                <a:solidFill>
-                  <a:schemeClr val="bg1"/>
-                </a:solidFill>
-                <a:latin typeface="+mj-ea"/>
-                <a:ea typeface="+mj-ea"/>
-              </a:rPr>
-              <a:t>位置キャリブレーション</a:t>
-            </a:r>
-            <a:endParaRPr lang="en-US" altLang="ja-JP" sz="2550" b="1" dirty="0">
-              <a:solidFill>
-                <a:schemeClr val="bg1"/>
-              </a:solidFill>
-              <a:latin typeface="+mj-ea"/>
-              <a:ea typeface="+mj-ea"/>
-            </a:endParaRPr>
-          </a:p>
-          <a:p>
-            <a:endParaRPr lang="en-US" altLang="ja-JP" sz="2000" dirty="0">
-              <a:solidFill>
-                <a:schemeClr val="bg1"/>
-              </a:solidFill>
-            </a:endParaRPr>
-          </a:p>
-          <a:p>
-            <a:r>
-              <a:rPr lang="ja-JP" altLang="en-US" sz="2000" dirty="0">
-                <a:solidFill>
-                  <a:schemeClr val="bg1"/>
-                </a:solidFill>
-              </a:rPr>
-              <a:t>操作用</a:t>
-            </a:r>
-            <a:r>
-              <a:rPr lang="en-US" altLang="ja-JP" sz="2000" dirty="0">
-                <a:solidFill>
-                  <a:schemeClr val="bg1"/>
-                </a:solidFill>
-              </a:rPr>
-              <a:t>PC</a:t>
-            </a:r>
-            <a:r>
-              <a:rPr lang="ja-JP" altLang="en-US" sz="2000" dirty="0">
-                <a:solidFill>
-                  <a:schemeClr val="bg1"/>
-                </a:solidFill>
-              </a:rPr>
-              <a:t>の矢印キーを用いて、奥のディスプレイに表示されている正方形の枠（赤）の位置を動かし、手前のディスプレイに表示されている正方形の枠（白）に合わせます。</a:t>
-            </a:r>
-            <a:endParaRPr lang="en-US" altLang="ja-JP" sz="2000" dirty="0">
-              <a:solidFill>
-                <a:schemeClr val="bg1"/>
-              </a:solidFill>
-            </a:endParaRPr>
-          </a:p>
-          <a:p>
-            <a:endParaRPr kumimoji="1" lang="en-US" altLang="ja-JP" sz="2000" dirty="0">
-              <a:solidFill>
-                <a:schemeClr val="bg1"/>
-              </a:solidFill>
-            </a:endParaRPr>
-          </a:p>
-          <a:p>
-            <a:r>
-              <a:rPr kumimoji="1" lang="ja-JP" altLang="en-US" sz="2000" dirty="0">
-                <a:solidFill>
-                  <a:schemeClr val="bg1"/>
-                </a:solidFill>
-              </a:rPr>
-              <a:t>この操作は、右目と左目片方ずつ行うので、使用していない方の目は、手元の目隠しで覆ってください。</a:t>
-            </a:r>
-            <a:endParaRPr kumimoji="1" lang="en-US" altLang="ja-JP" sz="2000" dirty="0">
-              <a:solidFill>
-                <a:schemeClr val="bg1"/>
-              </a:solidFill>
-            </a:endParaRPr>
-          </a:p>
-          <a:p>
-            <a:endParaRPr kumimoji="1" lang="en-US" altLang="ja-JP" sz="2000" dirty="0">
-              <a:solidFill>
-                <a:schemeClr val="bg1"/>
-              </a:solidFill>
-            </a:endParaRPr>
-          </a:p>
-          <a:p>
-            <a:endParaRPr lang="en-US" altLang="ja-JP" sz="2000" dirty="0">
-              <a:solidFill>
-                <a:schemeClr val="bg1"/>
-              </a:solidFill>
-            </a:endParaRPr>
-          </a:p>
-          <a:p>
-            <a:r>
-              <a:rPr kumimoji="1" lang="en-US" altLang="ja-JP" sz="2000" dirty="0">
-                <a:solidFill>
-                  <a:schemeClr val="bg1"/>
-                </a:solidFill>
-              </a:rPr>
-              <a:t>Enter</a:t>
-            </a:r>
-            <a:r>
-              <a:rPr kumimoji="1" lang="ja-JP" altLang="en-US" sz="2000" dirty="0">
-                <a:solidFill>
-                  <a:schemeClr val="bg1"/>
-                </a:solidFill>
-              </a:rPr>
-              <a:t>キーで確定し、次に進みます。</a:t>
-            </a:r>
-            <a:endParaRPr kumimoji="1" lang="en-US" altLang="ja-JP" sz="2000" dirty="0">
-              <a:solidFill>
-                <a:schemeClr val="bg1"/>
-              </a:solidFill>
-            </a:endParaRPr>
-          </a:p>
-        </p:txBody>
-      </p:sp>
-      <p:pic>
-        <p:nvPicPr>
-          <p:cNvPr id="7" name="図 6">
-            <a:extLst>
-              <a:ext uri="{FF2B5EF4-FFF2-40B4-BE49-F238E27FC236}">
-                <a16:creationId xmlns:a16="http://schemas.microsoft.com/office/drawing/2014/main" id="{01AE8888-E6C6-638D-BF5D-D42E3DECA8E1}"/>
-              </a:ext>
-            </a:extLst>
-          </p:cNvPr>
-          <p:cNvPicPr>
-            <a:picLocks noChangeAspect="1"/>
-          </p:cNvPicPr>
-          <p:nvPr/>
-        </p:nvPicPr>
-        <p:blipFill>
-          <a:blip r:embed="rId2">
-            <a:extLst>
-              <a:ext uri="{28A0092B-C50C-407E-A947-70E740481C1C}">
-                <a14:useLocalDpi xmlns:a14="http://schemas.microsoft.com/office/drawing/2010/main" val="0"/>
-              </a:ext>
-            </a:extLst>
-          </a:blip>
-          <a:stretch>
-            <a:fillRect/>
-          </a:stretch>
-        </p:blipFill>
-        <p:spPr>
-          <a:xfrm>
-            <a:off x="625105" y="1096241"/>
-            <a:ext cx="3744484" cy="4665518"/>
-          </a:xfrm>
-          <a:prstGeom prst="rect">
-            <a:avLst/>
-          </a:prstGeom>
-        </p:spPr>
-      </p:pic>
-    </p:spTree>
-    <p:extLst>
-      <p:ext uri="{BB962C8B-B14F-4D97-AF65-F5344CB8AC3E}">
-        <p14:creationId xmlns:p14="http://schemas.microsoft.com/office/powerpoint/2010/main" val="799801735"/>
       </p:ext>
     </p:extLst>
   </p:cSld>

--- a/tex/ethicsreview/ethics_review_visibility/別紙2評価実験説明.pptx
+++ b/tex/ethicsreview/ethics_review_visibility/別紙2評価実験説明.pptx
@@ -326,7 +326,7 @@
           <a:p>
             <a:fld id="{416BA5EB-ECB0-409F-8DA9-B63B0BA08A82}" type="datetimeFigureOut">
               <a:rPr kumimoji="1" lang="ja-JP" altLang="en-US" smtClean="0"/>
-              <a:t>2026/7/19</a:t>
+              <a:t>2026/7/21</a:t>
             </a:fld>
             <a:endParaRPr kumimoji="1" lang="ja-JP" altLang="en-US"/>
           </a:p>
@@ -558,7 +558,7 @@
           <a:p>
             <a:fld id="{416BA5EB-ECB0-409F-8DA9-B63B0BA08A82}" type="datetimeFigureOut">
               <a:rPr kumimoji="1" lang="ja-JP" altLang="en-US" smtClean="0"/>
-              <a:t>2026/7/19</a:t>
+              <a:t>2026/7/21</a:t>
             </a:fld>
             <a:endParaRPr kumimoji="1" lang="ja-JP" altLang="en-US"/>
           </a:p>
@@ -707,7 +707,7 @@
           <a:p>
             <a:fld id="{416BA5EB-ECB0-409F-8DA9-B63B0BA08A82}" type="datetimeFigureOut">
               <a:rPr kumimoji="1" lang="ja-JP" altLang="en-US" smtClean="0"/>
-              <a:t>2026/7/19</a:t>
+              <a:t>2026/7/21</a:t>
             </a:fld>
             <a:endParaRPr kumimoji="1" lang="ja-JP" altLang="en-US"/>
           </a:p>
@@ -952,7 +952,7 @@
           <a:p>
             <a:fld id="{416BA5EB-ECB0-409F-8DA9-B63B0BA08A82}" type="datetimeFigureOut">
               <a:rPr kumimoji="1" lang="ja-JP" altLang="en-US" smtClean="0"/>
-              <a:t>2026/7/19</a:t>
+              <a:t>2026/7/21</a:t>
             </a:fld>
             <a:endParaRPr kumimoji="1" lang="ja-JP" altLang="en-US"/>
           </a:p>
@@ -1411,7 +1411,7 @@
                   <a:schemeClr val="bg1"/>
                 </a:solidFill>
               </a:rPr>
-              <a:t>実験者様には、</a:t>
+              <a:t>参加者様には、</a:t>
             </a:r>
             <a:r>
               <a:rPr lang="en-US" altLang="ja-JP" sz="2000" dirty="0">
@@ -1443,7 +1443,7 @@
                   <a:schemeClr val="bg1"/>
                 </a:solidFill>
               </a:rPr>
-              <a:t>画像の二枚の刺激画像を見ていただき、操作や判断を行っていただきます。実験は、キャリブレーションセクションと、二つの実験セクションに分かれており、操作や判断の詳細は各セクションの前に説明します。所要時間は各セクション</a:t>
+              <a:t>画像の二枚の刺激画像を見ていただき、操作や判断を行っていただきます。実験は、キャリブレーションセクションと、実験セクションに分かれており、操作や判断の詳細は各セクションの前に説明します。所要時間は各セクション</a:t>
             </a:r>
             <a:r>
               <a:rPr lang="en-US" altLang="ja-JP" sz="2000" dirty="0">
@@ -1451,7 +1451,7 @@
                   <a:schemeClr val="bg1"/>
                 </a:solidFill>
               </a:rPr>
-              <a:t>40</a:t>
+              <a:t>20</a:t>
             </a:r>
             <a:r>
               <a:rPr lang="ja-JP" altLang="en-US" sz="2000" dirty="0">
@@ -1459,6 +1459,22 @@
                   <a:schemeClr val="bg1"/>
                 </a:solidFill>
               </a:rPr>
+              <a:t>分</a:t>
+            </a:r>
+            <a:r>
+              <a:rPr lang="en-US" altLang="ja-JP" sz="2000" dirty="0">
+                <a:solidFill>
+                  <a:schemeClr val="bg1"/>
+                </a:solidFill>
+              </a:rPr>
+              <a:t>~30</a:t>
+            </a:r>
+            <a:r>
+              <a:rPr lang="ja-JP" altLang="en-US" sz="2000" dirty="0">
+                <a:solidFill>
+                  <a:schemeClr val="bg1"/>
+                </a:solidFill>
+              </a:rPr>
               <a:t>分、全体で</a:t>
             </a:r>
             <a:r>
@@ -1467,7 +1483,7 @@
                   <a:schemeClr val="bg1"/>
                 </a:solidFill>
               </a:rPr>
-              <a:t>80</a:t>
+              <a:t>60</a:t>
             </a:r>
             <a:r>
               <a:rPr lang="ja-JP" altLang="en-US" sz="2000" dirty="0">
@@ -2170,7 +2186,7 @@
                   <a:schemeClr val="bg1"/>
                 </a:solidFill>
               </a:rPr>
-              <a:t>まず、上半分の領域において、刺激画像の見え方を確認してください。</a:t>
+              <a:t>まず、上半分の領域において、刺激画像の見やすさを確認してください。</a:t>
             </a:r>
             <a:endParaRPr kumimoji="1" lang="en-US" altLang="ja-JP" sz="2000" dirty="0">
               <a:solidFill>
@@ -2201,7 +2217,7 @@
                   <a:schemeClr val="bg1"/>
                 </a:solidFill>
               </a:rPr>
-              <a:t>の左右矢印キーを用いて、下半分の刺激画像の見え方を、上半分の見え方と一致させてください。右に行くほど見え方が濃くなります。</a:t>
+              <a:t>の左右矢印キーを用いて、下半分の刺激画像の見え方を、上半分の見やすさと一致させてください。右に行くほど見え方が濃くなります。</a:t>
             </a:r>
             <a:endParaRPr kumimoji="1" lang="en-US" altLang="ja-JP" sz="2000" dirty="0">
               <a:solidFill>
@@ -2314,7 +2330,7 @@
 </file>
 
 <file path=ppt/slides/slide13.xml><?xml version="1.0" encoding="utf-8"?>
-<p:sld xmlns:a="http://schemas.openxmlformats.org/drawingml/2006/main" xmlns:r="http://schemas.openxmlformats.org/officeDocument/2006/relationships" xmlns:p="http://schemas.openxmlformats.org/presentationml/2006/main">
+<p:sld xmlns:a="http://schemas.openxmlformats.org/drawingml/2006/main" xmlns:r="http://schemas.openxmlformats.org/officeDocument/2006/relationships" xmlns:p="http://schemas.openxmlformats.org/presentationml/2006/main" show="0">
   <p:cSld>
     <p:bg>
       <p:bgPr>
@@ -2454,7 +2470,7 @@
                   <a:schemeClr val="bg1"/>
                 </a:solidFill>
               </a:rPr>
-              <a:t>刺激表示終了後に、背景の追加によって生じた、手前の画像の視認性低下の程度を、</a:t>
+              <a:t>刺激表示終了後に、背景の追加によって生じた、手前の画像の見やすさの程度を、</a:t>
             </a:r>
             <a:r>
               <a:rPr kumimoji="1" lang="en-US" altLang="ja-JP" sz="2000" dirty="0">
@@ -3107,7 +3123,39 @@
                   <a:schemeClr val="bg2"/>
                 </a:solidFill>
               </a:rPr>
-              <a:t>You will be asked to view two stimulus images, a Reference image and a Test image, and perform operations or make judgments based on them. The experiment consists of a calibration section and two experimental sections. The details of the operations and judgments will be explained before each section. The two experimental sections are expected to take about 40 minutes each, for approximately 80 minutes overall.</a:t>
+              <a:t>You will be asked to view two stimulus images, a Reference image and a Test image, and perform operations or make judgments based on them. The experiment consists of a calibration section and two experimental sections. The details of the operations and judgments will be explained before each section. The two experimental sections are expected to take about </a:t>
+            </a:r>
+            <a:r>
+              <a:rPr lang="en-US" altLang="ja-JP" sz="2000" dirty="0">
+                <a:solidFill>
+                  <a:schemeClr val="bg2"/>
+                </a:solidFill>
+              </a:rPr>
+              <a:t>20~30</a:t>
+            </a:r>
+            <a:r>
+              <a:rPr lang="ja-JP" altLang="ja-JP" sz="2000" dirty="0">
+                <a:solidFill>
+                  <a:schemeClr val="bg2"/>
+                </a:solidFill>
+              </a:rPr>
+              <a:t> minutes each, for approximately </a:t>
+            </a:r>
+            <a:r>
+              <a:rPr lang="en-US" altLang="ja-JP" sz="2000" dirty="0">
+                <a:solidFill>
+                  <a:schemeClr val="bg2"/>
+                </a:solidFill>
+              </a:rPr>
+              <a:t>6</a:t>
+            </a:r>
+            <a:r>
+              <a:rPr lang="ja-JP" altLang="ja-JP" sz="2000" dirty="0">
+                <a:solidFill>
+                  <a:schemeClr val="bg2"/>
+                </a:solidFill>
+              </a:rPr>
+              <a:t>0 minutes overall.</a:t>
             </a:r>
             <a:endParaRPr lang="en-US" altLang="ja-JP" sz="2000" dirty="0">
               <a:solidFill>
@@ -6292,7 +6340,7 @@
                 <a:latin typeface="+mj-ea"/>
                 <a:ea typeface="+mj-ea"/>
               </a:rPr>
-              <a:t>被験者情報の記録</a:t>
+              <a:t>参加者情報の記録</a:t>
             </a:r>
             <a:endParaRPr lang="en-US" altLang="ja-JP" sz="2550" b="1" dirty="0">
               <a:solidFill>
@@ -6309,7 +6357,7 @@
                   <a:schemeClr val="bg1"/>
                 </a:solidFill>
               </a:rPr>
-              <a:t>実際の操作に移る前に、被験者様の性別、年齢、利き目、瞳孔間距離を測定します。</a:t>
+              <a:t>実際の操作に移る前に、参加者様の性別、年齢、利き目、瞳孔間距離を測定します。</a:t>
             </a:r>
             <a:endParaRPr kumimoji="1" lang="en-US" altLang="ja-JP" sz="2000" dirty="0">
               <a:solidFill>
@@ -6456,7 +6504,7 @@
                   <a:schemeClr val="bg1"/>
                 </a:solidFill>
               </a:rPr>
-              <a:t>瞳孔間距離については、眉のあたりに定規を当てていただき、その写真を撮影することで測定します。記録後、被験者様の目の前で、写真を削除します。</a:t>
+              <a:t>瞳孔間距離については、眉のあたりに定規を当てていただき、その写真を撮影することで測定します。記録後、参加者様の目の前で、写真を削除します。</a:t>
             </a:r>
             <a:br>
               <a:rPr kumimoji="1" lang="en-US" altLang="ja-JP" sz="2000" dirty="0">
@@ -7296,7 +7344,7 @@
                   <a:schemeClr val="bg1"/>
                 </a:solidFill>
               </a:rPr>
-              <a:t>まず、上半分の領域において、刺激画像の見え方を確認してください。</a:t>
+              <a:t>まず、上半分の領域において、刺激画像の見やすさを確認してください。</a:t>
             </a:r>
             <a:endParaRPr kumimoji="1" lang="en-US" altLang="ja-JP" sz="2000" dirty="0">
               <a:solidFill>
@@ -7327,7 +7375,7 @@
                   <a:schemeClr val="bg1"/>
                 </a:solidFill>
               </a:rPr>
-              <a:t>の左右矢印キーを用いて、下半分の刺激画像の見え方を、上半分の見え方と一致させてください。右に行くほど見え方が濃くなります。</a:t>
+              <a:t>の左右矢印キーを用いて、下半分の刺激画像の見え方を、上半分の見やすさと一致させてください。右に行くほど見え方が濃くなります。</a:t>
             </a:r>
             <a:endParaRPr kumimoji="1" lang="en-US" altLang="ja-JP" sz="2000" dirty="0">
               <a:solidFill>
@@ -7440,7 +7488,7 @@
 </file>
 
 <file path=ppt/slides/slide8.xml><?xml version="1.0" encoding="utf-8"?>
-<p:sld xmlns:a="http://schemas.openxmlformats.org/drawingml/2006/main" xmlns:r="http://schemas.openxmlformats.org/officeDocument/2006/relationships" xmlns:p="http://schemas.openxmlformats.org/presentationml/2006/main">
+<p:sld xmlns:a="http://schemas.openxmlformats.org/drawingml/2006/main" xmlns:r="http://schemas.openxmlformats.org/officeDocument/2006/relationships" xmlns:p="http://schemas.openxmlformats.org/presentationml/2006/main" show="0">
   <p:cSld>
     <p:bg>
       <p:bgPr>
@@ -7580,7 +7628,7 @@
                   <a:schemeClr val="bg1"/>
                 </a:solidFill>
               </a:rPr>
-              <a:t>刺激表示終了後に、背景の追加によって生じた、手前の画像の視認性低下の程度を、</a:t>
+              <a:t>刺激表示終了後に、背景の追加によって生じた、手前の画像の見やすさの程度を、</a:t>
             </a:r>
             <a:r>
               <a:rPr kumimoji="1" lang="en-US" altLang="ja-JP" sz="2000" dirty="0">

--- a/tex/ethicsreview/ethics_review_visibility/別紙2評価実験説明.pptx
+++ b/tex/ethicsreview/ethics_review_visibility/別紙2評価実験説明.pptx
@@ -2281,10 +2281,10 @@
       </p:sp>
       <p:pic>
         <p:nvPicPr>
-          <p:cNvPr id="4" name="図 3">
+          <p:cNvPr id="3" name="図 2">
             <a:extLst>
               <a:ext uri="{FF2B5EF4-FFF2-40B4-BE49-F238E27FC236}">
-                <a16:creationId xmlns:a16="http://schemas.microsoft.com/office/drawing/2014/main" id="{88C9368C-38C0-F3D2-9E70-248A669C2F46}"/>
+                <a16:creationId xmlns:a16="http://schemas.microsoft.com/office/drawing/2014/main" id="{E605D65A-2438-AFC3-57A3-74A354EA86A8}"/>
               </a:ext>
             </a:extLst>
           </p:cNvPr>
@@ -2293,7 +2293,7 @@
           </p:cNvPicPr>
           <p:nvPr/>
         </p:nvPicPr>
-        <p:blipFill rotWithShape="1">
+        <p:blipFill>
           <a:blip r:embed="rId2">
             <a:extLst>
               <a:ext uri="{28A0092B-C50C-407E-A947-70E740481C1C}">
@@ -2301,21 +2301,283 @@
               </a:ext>
             </a:extLst>
           </a:blip>
-          <a:srcRect l="24295" r="24295"/>
+          <a:srcRect l="22666" r="22172" b="34275"/>
           <a:stretch>
             <a:fillRect/>
           </a:stretch>
         </p:blipFill>
         <p:spPr>
-          <a:xfrm flipH="1">
-            <a:off x="451730" y="1205192"/>
-            <a:ext cx="3744000" cy="3793590"/>
+          <a:xfrm>
+            <a:off x="696190" y="3541113"/>
+            <a:ext cx="3605646" cy="2600649"/>
           </a:xfrm>
           <a:prstGeom prst="rect">
             <a:avLst/>
           </a:prstGeom>
         </p:spPr>
       </p:pic>
+      <p:pic>
+        <p:nvPicPr>
+          <p:cNvPr id="5" name="図 4">
+            <a:extLst>
+              <a:ext uri="{FF2B5EF4-FFF2-40B4-BE49-F238E27FC236}">
+                <a16:creationId xmlns:a16="http://schemas.microsoft.com/office/drawing/2014/main" id="{CFEC7611-9BA2-526F-00A8-E338B77F38DB}"/>
+              </a:ext>
+            </a:extLst>
+          </p:cNvPr>
+          <p:cNvPicPr>
+            <a:picLocks noChangeAspect="1"/>
+          </p:cNvPicPr>
+          <p:nvPr/>
+        </p:nvPicPr>
+        <p:blipFill>
+          <a:blip r:embed="rId3">
+            <a:extLst>
+              <a:ext uri="{28A0092B-C50C-407E-A947-70E740481C1C}">
+                <a14:useLocalDpi xmlns:a14="http://schemas.microsoft.com/office/drawing/2010/main" val="0"/>
+              </a:ext>
+            </a:extLst>
+          </a:blip>
+          <a:srcRect l="21226" t="3686" r="22872" b="33758"/>
+          <a:stretch>
+            <a:fillRect/>
+          </a:stretch>
+        </p:blipFill>
+        <p:spPr>
+          <a:xfrm>
+            <a:off x="696190" y="532123"/>
+            <a:ext cx="3605646" cy="2538582"/>
+          </a:xfrm>
+          <a:prstGeom prst="rect">
+            <a:avLst/>
+          </a:prstGeom>
+        </p:spPr>
+      </p:pic>
+      <p:cxnSp>
+        <p:nvCxnSpPr>
+          <p:cNvPr id="6" name="直線矢印コネクタ 5">
+            <a:extLst>
+              <a:ext uri="{FF2B5EF4-FFF2-40B4-BE49-F238E27FC236}">
+                <a16:creationId xmlns:a16="http://schemas.microsoft.com/office/drawing/2014/main" id="{7EF7DD97-FAE6-0A1C-F504-240BD6735C7C}"/>
+              </a:ext>
+            </a:extLst>
+          </p:cNvPr>
+          <p:cNvCxnSpPr>
+            <a:cxnSpLocks/>
+            <a:stCxn id="5" idx="2"/>
+            <a:endCxn id="3" idx="0"/>
+          </p:cNvCxnSpPr>
+          <p:nvPr/>
+        </p:nvCxnSpPr>
+        <p:spPr>
+          <a:xfrm>
+            <a:off x="2499013" y="3070705"/>
+            <a:ext cx="0" cy="470408"/>
+          </a:xfrm>
+          <a:prstGeom prst="straightConnector1">
+            <a:avLst/>
+          </a:prstGeom>
+          <a:ln w="38100" cap="flat" cmpd="sng" algn="ctr">
+            <a:solidFill>
+              <a:schemeClr val="accent5"/>
+            </a:solidFill>
+            <a:prstDash val="solid"/>
+            <a:round/>
+            <a:headEnd type="arrow" w="med" len="med"/>
+            <a:tailEnd type="arrow" w="med" len="med"/>
+          </a:ln>
+        </p:spPr>
+        <p:style>
+          <a:lnRef idx="0">
+            <a:scrgbClr r="0" g="0" b="0"/>
+          </a:lnRef>
+          <a:fillRef idx="0">
+            <a:scrgbClr r="0" g="0" b="0"/>
+          </a:fillRef>
+          <a:effectRef idx="0">
+            <a:scrgbClr r="0" g="0" b="0"/>
+          </a:effectRef>
+          <a:fontRef idx="minor">
+            <a:schemeClr val="tx1"/>
+          </a:fontRef>
+        </p:style>
+      </p:cxnSp>
+      <p:sp>
+        <p:nvSpPr>
+          <p:cNvPr id="7" name="テキスト ボックス 6">
+            <a:extLst>
+              <a:ext uri="{FF2B5EF4-FFF2-40B4-BE49-F238E27FC236}">
+                <a16:creationId xmlns:a16="http://schemas.microsoft.com/office/drawing/2014/main" id="{3B68B297-7B24-1670-2957-9516E39377EF}"/>
+              </a:ext>
+            </a:extLst>
+          </p:cNvPr>
+          <p:cNvSpPr txBox="1"/>
+          <p:nvPr/>
+        </p:nvSpPr>
+        <p:spPr>
+          <a:xfrm>
+            <a:off x="1496291" y="1091045"/>
+            <a:ext cx="508473" cy="369332"/>
+          </a:xfrm>
+          <a:prstGeom prst="rect">
+            <a:avLst/>
+          </a:prstGeom>
+          <a:noFill/>
+        </p:spPr>
+        <p:txBody>
+          <a:bodyPr wrap="none" rtlCol="0">
+            <a:spAutoFit/>
+          </a:bodyPr>
+          <a:lstStyle/>
+          <a:p>
+            <a:r>
+              <a:rPr kumimoji="1" lang="en-US" altLang="ja-JP" dirty="0">
+                <a:solidFill>
+                  <a:schemeClr val="bg1"/>
+                </a:solidFill>
+              </a:rPr>
+              <a:t>Ref</a:t>
+            </a:r>
+            <a:endParaRPr kumimoji="1" lang="ja-JP" altLang="en-US" dirty="0">
+              <a:solidFill>
+                <a:schemeClr val="bg1"/>
+              </a:solidFill>
+            </a:endParaRPr>
+          </a:p>
+        </p:txBody>
+      </p:sp>
+      <p:sp>
+        <p:nvSpPr>
+          <p:cNvPr id="8" name="テキスト ボックス 7">
+            <a:extLst>
+              <a:ext uri="{FF2B5EF4-FFF2-40B4-BE49-F238E27FC236}">
+                <a16:creationId xmlns:a16="http://schemas.microsoft.com/office/drawing/2014/main" id="{53686EEF-C271-9FEB-DAE3-8F83D7ADE49D}"/>
+              </a:ext>
+            </a:extLst>
+          </p:cNvPr>
+          <p:cNvSpPr txBox="1"/>
+          <p:nvPr/>
+        </p:nvSpPr>
+        <p:spPr>
+          <a:xfrm>
+            <a:off x="1496290" y="4028208"/>
+            <a:ext cx="508473" cy="369332"/>
+          </a:xfrm>
+          <a:prstGeom prst="rect">
+            <a:avLst/>
+          </a:prstGeom>
+          <a:noFill/>
+        </p:spPr>
+        <p:txBody>
+          <a:bodyPr wrap="none" rtlCol="0">
+            <a:spAutoFit/>
+          </a:bodyPr>
+          <a:lstStyle/>
+          <a:p>
+            <a:r>
+              <a:rPr kumimoji="1" lang="en-US" altLang="ja-JP" dirty="0">
+                <a:solidFill>
+                  <a:schemeClr val="bg1"/>
+                </a:solidFill>
+              </a:rPr>
+              <a:t>Ref</a:t>
+            </a:r>
+            <a:endParaRPr kumimoji="1" lang="ja-JP" altLang="en-US" dirty="0">
+              <a:solidFill>
+                <a:schemeClr val="bg1"/>
+              </a:solidFill>
+            </a:endParaRPr>
+          </a:p>
+        </p:txBody>
+      </p:sp>
+      <p:sp>
+        <p:nvSpPr>
+          <p:cNvPr id="9" name="テキスト ボックス 8">
+            <a:extLst>
+              <a:ext uri="{FF2B5EF4-FFF2-40B4-BE49-F238E27FC236}">
+                <a16:creationId xmlns:a16="http://schemas.microsoft.com/office/drawing/2014/main" id="{32315E74-71E1-5C09-DD6F-370087C29009}"/>
+              </a:ext>
+            </a:extLst>
+          </p:cNvPr>
+          <p:cNvSpPr txBox="1"/>
+          <p:nvPr/>
+        </p:nvSpPr>
+        <p:spPr>
+          <a:xfrm>
+            <a:off x="1496290" y="5314131"/>
+            <a:ext cx="577659" cy="369332"/>
+          </a:xfrm>
+          <a:prstGeom prst="rect">
+            <a:avLst/>
+          </a:prstGeom>
+          <a:noFill/>
+        </p:spPr>
+        <p:txBody>
+          <a:bodyPr wrap="none" rtlCol="0">
+            <a:spAutoFit/>
+          </a:bodyPr>
+          <a:lstStyle/>
+          <a:p>
+            <a:r>
+              <a:rPr kumimoji="1" lang="en-US" altLang="ja-JP" dirty="0">
+                <a:solidFill>
+                  <a:schemeClr val="bg1"/>
+                </a:solidFill>
+              </a:rPr>
+              <a:t>Test</a:t>
+            </a:r>
+            <a:endParaRPr kumimoji="1" lang="ja-JP" altLang="en-US" dirty="0">
+              <a:solidFill>
+                <a:schemeClr val="bg1"/>
+              </a:solidFill>
+            </a:endParaRPr>
+          </a:p>
+        </p:txBody>
+      </p:sp>
+      <p:sp>
+        <p:nvSpPr>
+          <p:cNvPr id="10" name="テキスト ボックス 9">
+            <a:extLst>
+              <a:ext uri="{FF2B5EF4-FFF2-40B4-BE49-F238E27FC236}">
+                <a16:creationId xmlns:a16="http://schemas.microsoft.com/office/drawing/2014/main" id="{AD39004A-7143-F98B-375A-EFABC48249F0}"/>
+              </a:ext>
+            </a:extLst>
+          </p:cNvPr>
+          <p:cNvSpPr txBox="1"/>
+          <p:nvPr/>
+        </p:nvSpPr>
+        <p:spPr>
+          <a:xfrm>
+            <a:off x="1464435" y="2192302"/>
+            <a:ext cx="577659" cy="369332"/>
+          </a:xfrm>
+          <a:prstGeom prst="rect">
+            <a:avLst/>
+          </a:prstGeom>
+          <a:noFill/>
+        </p:spPr>
+        <p:txBody>
+          <a:bodyPr wrap="none" rtlCol="0">
+            <a:spAutoFit/>
+          </a:bodyPr>
+          <a:lstStyle/>
+          <a:p>
+            <a:r>
+              <a:rPr kumimoji="1" lang="en-US" altLang="ja-JP" dirty="0">
+                <a:solidFill>
+                  <a:schemeClr val="bg1"/>
+                </a:solidFill>
+              </a:rPr>
+              <a:t>Test</a:t>
+            </a:r>
+            <a:endParaRPr kumimoji="1" lang="ja-JP" altLang="en-US" dirty="0">
+              <a:solidFill>
+                <a:schemeClr val="bg1"/>
+              </a:solidFill>
+            </a:endParaRPr>
+          </a:p>
+        </p:txBody>
+      </p:sp>
     </p:spTree>
     <p:extLst>
       <p:ext uri="{BB962C8B-B14F-4D97-AF65-F5344CB8AC3E}">
@@ -3131,7 +3393,7 @@
                   <a:schemeClr val="bg2"/>
                 </a:solidFill>
               </a:rPr>
-              <a:t>20~30</a:t>
+              <a:t>10~20</a:t>
             </a:r>
             <a:r>
               <a:rPr lang="ja-JP" altLang="ja-JP" sz="2000" dirty="0">
@@ -3147,7 +3409,7 @@
                   <a:schemeClr val="bg2"/>
                 </a:solidFill>
               </a:rPr>
-              <a:t>6</a:t>
+              <a:t>3</a:t>
             </a:r>
             <a:r>
               <a:rPr lang="ja-JP" altLang="ja-JP" sz="2000" dirty="0">
@@ -3346,7 +3608,39 @@
                   <a:schemeClr val="bg2"/>
                 </a:solidFill>
               </a:rPr>
-              <a:t>For tasks in which you are asked to match the appearance of the Reference stimulus and the Test stimulus, please proceed carefully by moving back and forth around the point at which the two stimuli appear to match.</a:t>
+              <a:t>For tasks in which you are asked to match the </a:t>
+            </a:r>
+            <a:r>
+              <a:rPr lang="en-US" altLang="ja-JP" sz="2000" dirty="0">
+                <a:solidFill>
+                  <a:schemeClr val="bg2"/>
+                </a:solidFill>
+              </a:rPr>
+              <a:t>visibility</a:t>
+            </a:r>
+            <a:r>
+              <a:rPr lang="ja-JP" altLang="ja-JP" sz="2000" dirty="0">
+                <a:solidFill>
+                  <a:schemeClr val="bg2"/>
+                </a:solidFill>
+              </a:rPr>
+              <a:t> of the Reference stimulus and the Test stimulus, please proceed carefully by moving back and forth around the point at which the two stimuli</a:t>
+            </a:r>
+            <a:r>
+              <a:rPr lang="en-US" altLang="ja-JP" sz="2000" dirty="0">
+                <a:solidFill>
+                  <a:schemeClr val="bg2"/>
+                </a:solidFill>
+              </a:rPr>
+              <a:t>’s visibility</a:t>
+            </a:r>
+            <a:r>
+              <a:rPr lang="ja-JP" altLang="ja-JP" sz="2000" dirty="0">
+                <a:solidFill>
+                  <a:schemeClr val="bg2"/>
+                </a:solidFill>
+              </a:rPr>
+              <a:t> to match.</a:t>
             </a:r>
             <a:endParaRPr lang="en-US" altLang="ja-JP" sz="2000" dirty="0">
               <a:solidFill>
@@ -3965,7 +4259,7 @@
                   <a:schemeClr val="bg1"/>
                 </a:solidFill>
               </a:rPr>
-              <a:t>刺激の見え方を一致させるタスクの際は、一致点の前後を行き来するように、慎重に行ってください。</a:t>
+              <a:t>刺激の見やすさを一致させるタスクの際は、一致点の前後を行き来するように、慎重に行ってください。</a:t>
             </a:r>
             <a:endParaRPr kumimoji="1" lang="en-US" altLang="ja-JP" sz="2000" dirty="0">
               <a:solidFill>
@@ -4524,7 +4818,7 @@
         <p:spPr>
           <a:xfrm>
             <a:off x="4655127" y="705177"/>
-            <a:ext cx="6643320" cy="6063198"/>
+            <a:ext cx="6643320" cy="5755422"/>
           </a:xfrm>
           <a:prstGeom prst="rect">
             <a:avLst/>
@@ -4580,17 +4874,23 @@
                   <a:schemeClr val="bg2"/>
                 </a:solidFill>
               </a:rPr>
-              <a:t>First, observe the appearance of the stimulus image in the upper half of the display area.</a:t>
-            </a:r>
-          </a:p>
-          <a:p>
+              <a:t>First, observe the </a:t>
+            </a:r>
+            <a:r>
+              <a:rPr lang="en-US" altLang="ja-JP" sz="2000" dirty="0">
+                <a:solidFill>
+                  <a:schemeClr val="bg2"/>
+                </a:solidFill>
+              </a:rPr>
+              <a:t>visibility</a:t>
+            </a:r>
             <a:r>
               <a:rPr lang="ja-JP" altLang="ja-JP" sz="2000" dirty="0">
                 <a:solidFill>
                   <a:schemeClr val="bg2"/>
                 </a:solidFill>
               </a:rPr>
-              <a:t>Then, using the left and right arrow keys on the control PC, adjust the appearance of the stimulus image in the lower half so that it matches the appearance of the upper half. The appearance becomes stronger as you move to the right.</a:t>
+              <a:t> of the stimulus image in the upper half of the display area.</a:t>
             </a:r>
           </a:p>
           <a:p>
@@ -4600,7 +4900,65 @@
                   <a:schemeClr val="bg2"/>
                 </a:solidFill>
               </a:rPr>
-              <a:t>Repeat this process until you feel that the two appearances match completely.</a:t>
+              <a:t>Then, using the left and right arrow keys on the control PC, adjust the </a:t>
+            </a:r>
+            <a:r>
+              <a:rPr lang="en-US" altLang="ja-JP" sz="2000" dirty="0">
+                <a:solidFill>
+                  <a:schemeClr val="bg2"/>
+                </a:solidFill>
+              </a:rPr>
+              <a:t>visibility</a:t>
+            </a:r>
+            <a:r>
+              <a:rPr lang="ja-JP" altLang="ja-JP" sz="2000" dirty="0">
+                <a:solidFill>
+                  <a:schemeClr val="bg2"/>
+                </a:solidFill>
+              </a:rPr>
+              <a:t> of the stimulus image in the lower half so that it matches the appearance of the upper half. The </a:t>
+            </a:r>
+            <a:r>
+              <a:rPr lang="en-US" altLang="ja-JP" sz="2000" dirty="0">
+                <a:solidFill>
+                  <a:schemeClr val="bg2"/>
+                </a:solidFill>
+              </a:rPr>
+              <a:t>visibility</a:t>
+            </a:r>
+            <a:r>
+              <a:rPr lang="ja-JP" altLang="ja-JP" sz="2000" dirty="0">
+                <a:solidFill>
+                  <a:schemeClr val="bg2"/>
+                </a:solidFill>
+              </a:rPr>
+              <a:t> becomes stronger as you move to the right.</a:t>
+            </a:r>
+          </a:p>
+          <a:p>
+            <a:r>
+              <a:rPr lang="ja-JP" altLang="ja-JP" sz="2000" dirty="0">
+                <a:solidFill>
+                  <a:schemeClr val="bg2"/>
+                </a:solidFill>
+              </a:rPr>
+              <a:t>Repeat this process until you feel that the two </a:t>
+            </a:r>
+            <a:r>
+              <a:rPr lang="en-US" altLang="ja-JP" sz="2000" dirty="0">
+                <a:solidFill>
+                  <a:schemeClr val="bg2"/>
+                </a:solidFill>
+              </a:rPr>
+              <a:t>visibilities</a:t>
+            </a:r>
+            <a:r>
+              <a:rPr lang="ja-JP" altLang="ja-JP" sz="2000" dirty="0">
+                <a:solidFill>
+                  <a:schemeClr val="bg2"/>
+                </a:solidFill>
+              </a:rPr>
+              <a:t> match completely.</a:t>
             </a:r>
             <a:endParaRPr lang="en-US" altLang="ja-JP" sz="2000" dirty="0">
               <a:solidFill>
@@ -4636,10 +4994,10 @@
       </p:sp>
       <p:pic>
         <p:nvPicPr>
-          <p:cNvPr id="4" name="図 3">
+          <p:cNvPr id="3" name="図 2">
             <a:extLst>
               <a:ext uri="{FF2B5EF4-FFF2-40B4-BE49-F238E27FC236}">
-                <a16:creationId xmlns:a16="http://schemas.microsoft.com/office/drawing/2014/main" id="{EFBC59DC-13C1-5848-F6E6-E5A83F493FFC}"/>
+                <a16:creationId xmlns:a16="http://schemas.microsoft.com/office/drawing/2014/main" id="{B18A3FB3-0552-9A0E-6C14-2B7F754103CC}"/>
               </a:ext>
             </a:extLst>
           </p:cNvPr>
@@ -4648,7 +5006,7 @@
           </p:cNvPicPr>
           <p:nvPr/>
         </p:nvPicPr>
-        <p:blipFill rotWithShape="1">
+        <p:blipFill>
           <a:blip r:embed="rId2">
             <a:extLst>
               <a:ext uri="{28A0092B-C50C-407E-A947-70E740481C1C}">
@@ -4656,21 +5014,283 @@
               </a:ext>
             </a:extLst>
           </a:blip>
-          <a:srcRect l="24295" r="24295"/>
+          <a:srcRect l="22666" r="22172" b="34275"/>
           <a:stretch>
             <a:fillRect/>
           </a:stretch>
         </p:blipFill>
         <p:spPr>
-          <a:xfrm flipH="1">
-            <a:off x="451730" y="1205192"/>
-            <a:ext cx="3744000" cy="3793590"/>
+          <a:xfrm>
+            <a:off x="696190" y="3541113"/>
+            <a:ext cx="3605646" cy="2600649"/>
           </a:xfrm>
           <a:prstGeom prst="rect">
             <a:avLst/>
           </a:prstGeom>
         </p:spPr>
       </p:pic>
+      <p:pic>
+        <p:nvPicPr>
+          <p:cNvPr id="5" name="図 4">
+            <a:extLst>
+              <a:ext uri="{FF2B5EF4-FFF2-40B4-BE49-F238E27FC236}">
+                <a16:creationId xmlns:a16="http://schemas.microsoft.com/office/drawing/2014/main" id="{225D1D96-FDCF-5C29-3253-A215692652D6}"/>
+              </a:ext>
+            </a:extLst>
+          </p:cNvPr>
+          <p:cNvPicPr>
+            <a:picLocks noChangeAspect="1"/>
+          </p:cNvPicPr>
+          <p:nvPr/>
+        </p:nvPicPr>
+        <p:blipFill>
+          <a:blip r:embed="rId3">
+            <a:extLst>
+              <a:ext uri="{28A0092B-C50C-407E-A947-70E740481C1C}">
+                <a14:useLocalDpi xmlns:a14="http://schemas.microsoft.com/office/drawing/2010/main" val="0"/>
+              </a:ext>
+            </a:extLst>
+          </a:blip>
+          <a:srcRect l="21226" t="3686" r="22872" b="33758"/>
+          <a:stretch>
+            <a:fillRect/>
+          </a:stretch>
+        </p:blipFill>
+        <p:spPr>
+          <a:xfrm>
+            <a:off x="696190" y="532123"/>
+            <a:ext cx="3605646" cy="2538582"/>
+          </a:xfrm>
+          <a:prstGeom prst="rect">
+            <a:avLst/>
+          </a:prstGeom>
+        </p:spPr>
+      </p:pic>
+      <p:cxnSp>
+        <p:nvCxnSpPr>
+          <p:cNvPr id="6" name="直線矢印コネクタ 5">
+            <a:extLst>
+              <a:ext uri="{FF2B5EF4-FFF2-40B4-BE49-F238E27FC236}">
+                <a16:creationId xmlns:a16="http://schemas.microsoft.com/office/drawing/2014/main" id="{AFCF1412-038D-E6A9-DD57-F51D5AC6F2AF}"/>
+              </a:ext>
+            </a:extLst>
+          </p:cNvPr>
+          <p:cNvCxnSpPr>
+            <a:cxnSpLocks/>
+            <a:stCxn id="5" idx="2"/>
+            <a:endCxn id="3" idx="0"/>
+          </p:cNvCxnSpPr>
+          <p:nvPr/>
+        </p:nvCxnSpPr>
+        <p:spPr>
+          <a:xfrm>
+            <a:off x="2499013" y="3070705"/>
+            <a:ext cx="0" cy="470408"/>
+          </a:xfrm>
+          <a:prstGeom prst="straightConnector1">
+            <a:avLst/>
+          </a:prstGeom>
+          <a:ln w="38100" cap="flat" cmpd="sng" algn="ctr">
+            <a:solidFill>
+              <a:schemeClr val="accent5"/>
+            </a:solidFill>
+            <a:prstDash val="solid"/>
+            <a:round/>
+            <a:headEnd type="arrow" w="med" len="med"/>
+            <a:tailEnd type="arrow" w="med" len="med"/>
+          </a:ln>
+        </p:spPr>
+        <p:style>
+          <a:lnRef idx="0">
+            <a:scrgbClr r="0" g="0" b="0"/>
+          </a:lnRef>
+          <a:fillRef idx="0">
+            <a:scrgbClr r="0" g="0" b="0"/>
+          </a:fillRef>
+          <a:effectRef idx="0">
+            <a:scrgbClr r="0" g="0" b="0"/>
+          </a:effectRef>
+          <a:fontRef idx="minor">
+            <a:schemeClr val="tx1"/>
+          </a:fontRef>
+        </p:style>
+      </p:cxnSp>
+      <p:sp>
+        <p:nvSpPr>
+          <p:cNvPr id="7" name="テキスト ボックス 6">
+            <a:extLst>
+              <a:ext uri="{FF2B5EF4-FFF2-40B4-BE49-F238E27FC236}">
+                <a16:creationId xmlns:a16="http://schemas.microsoft.com/office/drawing/2014/main" id="{9106997A-9ED7-C84E-7870-DB4497C4A88E}"/>
+              </a:ext>
+            </a:extLst>
+          </p:cNvPr>
+          <p:cNvSpPr txBox="1"/>
+          <p:nvPr/>
+        </p:nvSpPr>
+        <p:spPr>
+          <a:xfrm>
+            <a:off x="1496291" y="1091045"/>
+            <a:ext cx="508473" cy="369332"/>
+          </a:xfrm>
+          <a:prstGeom prst="rect">
+            <a:avLst/>
+          </a:prstGeom>
+          <a:noFill/>
+        </p:spPr>
+        <p:txBody>
+          <a:bodyPr wrap="none" rtlCol="0">
+            <a:spAutoFit/>
+          </a:bodyPr>
+          <a:lstStyle/>
+          <a:p>
+            <a:r>
+              <a:rPr kumimoji="1" lang="en-US" altLang="ja-JP" dirty="0">
+                <a:solidFill>
+                  <a:schemeClr val="bg1"/>
+                </a:solidFill>
+              </a:rPr>
+              <a:t>Ref</a:t>
+            </a:r>
+            <a:endParaRPr kumimoji="1" lang="ja-JP" altLang="en-US" dirty="0">
+              <a:solidFill>
+                <a:schemeClr val="bg1"/>
+              </a:solidFill>
+            </a:endParaRPr>
+          </a:p>
+        </p:txBody>
+      </p:sp>
+      <p:sp>
+        <p:nvSpPr>
+          <p:cNvPr id="8" name="テキスト ボックス 7">
+            <a:extLst>
+              <a:ext uri="{FF2B5EF4-FFF2-40B4-BE49-F238E27FC236}">
+                <a16:creationId xmlns:a16="http://schemas.microsoft.com/office/drawing/2014/main" id="{772B8B92-E8FD-0A4B-F0B8-FA7A79B2A812}"/>
+              </a:ext>
+            </a:extLst>
+          </p:cNvPr>
+          <p:cNvSpPr txBox="1"/>
+          <p:nvPr/>
+        </p:nvSpPr>
+        <p:spPr>
+          <a:xfrm>
+            <a:off x="1496290" y="4028208"/>
+            <a:ext cx="508473" cy="369332"/>
+          </a:xfrm>
+          <a:prstGeom prst="rect">
+            <a:avLst/>
+          </a:prstGeom>
+          <a:noFill/>
+        </p:spPr>
+        <p:txBody>
+          <a:bodyPr wrap="none" rtlCol="0">
+            <a:spAutoFit/>
+          </a:bodyPr>
+          <a:lstStyle/>
+          <a:p>
+            <a:r>
+              <a:rPr kumimoji="1" lang="en-US" altLang="ja-JP" dirty="0">
+                <a:solidFill>
+                  <a:schemeClr val="bg1"/>
+                </a:solidFill>
+              </a:rPr>
+              <a:t>Ref</a:t>
+            </a:r>
+            <a:endParaRPr kumimoji="1" lang="ja-JP" altLang="en-US" dirty="0">
+              <a:solidFill>
+                <a:schemeClr val="bg1"/>
+              </a:solidFill>
+            </a:endParaRPr>
+          </a:p>
+        </p:txBody>
+      </p:sp>
+      <p:sp>
+        <p:nvSpPr>
+          <p:cNvPr id="9" name="テキスト ボックス 8">
+            <a:extLst>
+              <a:ext uri="{FF2B5EF4-FFF2-40B4-BE49-F238E27FC236}">
+                <a16:creationId xmlns:a16="http://schemas.microsoft.com/office/drawing/2014/main" id="{E342A1CE-FAAA-6909-2F6F-875599D5D155}"/>
+              </a:ext>
+            </a:extLst>
+          </p:cNvPr>
+          <p:cNvSpPr txBox="1"/>
+          <p:nvPr/>
+        </p:nvSpPr>
+        <p:spPr>
+          <a:xfrm>
+            <a:off x="1496290" y="5314131"/>
+            <a:ext cx="577659" cy="369332"/>
+          </a:xfrm>
+          <a:prstGeom prst="rect">
+            <a:avLst/>
+          </a:prstGeom>
+          <a:noFill/>
+        </p:spPr>
+        <p:txBody>
+          <a:bodyPr wrap="none" rtlCol="0">
+            <a:spAutoFit/>
+          </a:bodyPr>
+          <a:lstStyle/>
+          <a:p>
+            <a:r>
+              <a:rPr kumimoji="1" lang="en-US" altLang="ja-JP" dirty="0">
+                <a:solidFill>
+                  <a:schemeClr val="bg1"/>
+                </a:solidFill>
+              </a:rPr>
+              <a:t>Test</a:t>
+            </a:r>
+            <a:endParaRPr kumimoji="1" lang="ja-JP" altLang="en-US" dirty="0">
+              <a:solidFill>
+                <a:schemeClr val="bg1"/>
+              </a:solidFill>
+            </a:endParaRPr>
+          </a:p>
+        </p:txBody>
+      </p:sp>
+      <p:sp>
+        <p:nvSpPr>
+          <p:cNvPr id="10" name="テキスト ボックス 9">
+            <a:extLst>
+              <a:ext uri="{FF2B5EF4-FFF2-40B4-BE49-F238E27FC236}">
+                <a16:creationId xmlns:a16="http://schemas.microsoft.com/office/drawing/2014/main" id="{868D751B-A3FF-ECF3-A260-F94BA4C66585}"/>
+              </a:ext>
+            </a:extLst>
+          </p:cNvPr>
+          <p:cNvSpPr txBox="1"/>
+          <p:nvPr/>
+        </p:nvSpPr>
+        <p:spPr>
+          <a:xfrm>
+            <a:off x="1464435" y="2192302"/>
+            <a:ext cx="577659" cy="369332"/>
+          </a:xfrm>
+          <a:prstGeom prst="rect">
+            <a:avLst/>
+          </a:prstGeom>
+          <a:noFill/>
+        </p:spPr>
+        <p:txBody>
+          <a:bodyPr wrap="none" rtlCol="0">
+            <a:spAutoFit/>
+          </a:bodyPr>
+          <a:lstStyle/>
+          <a:p>
+            <a:r>
+              <a:rPr kumimoji="1" lang="en-US" altLang="ja-JP" dirty="0">
+                <a:solidFill>
+                  <a:schemeClr val="bg1"/>
+                </a:solidFill>
+              </a:rPr>
+              <a:t>Test</a:t>
+            </a:r>
+            <a:endParaRPr kumimoji="1" lang="ja-JP" altLang="en-US" dirty="0">
+              <a:solidFill>
+                <a:schemeClr val="bg1"/>
+              </a:solidFill>
+            </a:endParaRPr>
+          </a:p>
+        </p:txBody>
+      </p:sp>
     </p:spTree>
     <p:extLst>
       <p:ext uri="{BB962C8B-B14F-4D97-AF65-F5344CB8AC3E}">
@@ -4685,7 +5305,7 @@
 </file>
 
 <file path=ppt/slides/slide23.xml><?xml version="1.0" encoding="utf-8"?>
-<p:sld xmlns:a="http://schemas.openxmlformats.org/drawingml/2006/main" xmlns:r="http://schemas.openxmlformats.org/officeDocument/2006/relationships" xmlns:p="http://schemas.openxmlformats.org/presentationml/2006/main">
+<p:sld xmlns:a="http://schemas.openxmlformats.org/drawingml/2006/main" xmlns:r="http://schemas.openxmlformats.org/officeDocument/2006/relationships" xmlns:p="http://schemas.openxmlformats.org/presentationml/2006/main" show="0">
   <p:cSld>
     <p:bg>
       <p:bgPr>
@@ -5619,137 +6239,12 @@
           <a:chExt cx="0" cy="0"/>
         </a:xfrm>
       </p:grpSpPr>
-      <p:sp>
-        <p:nvSpPr>
-          <p:cNvPr id="2" name="テキスト ボックス 1">
-            <a:extLst>
-              <a:ext uri="{FF2B5EF4-FFF2-40B4-BE49-F238E27FC236}">
-                <a16:creationId xmlns:a16="http://schemas.microsoft.com/office/drawing/2014/main" id="{0769E6FF-A9B6-B77C-5393-B4A7FBD91FF1}"/>
-              </a:ext>
-            </a:extLst>
-          </p:cNvPr>
-          <p:cNvSpPr txBox="1"/>
-          <p:nvPr/>
-        </p:nvSpPr>
-        <p:spPr>
-          <a:xfrm>
-            <a:off x="4655127" y="705177"/>
-            <a:ext cx="6643320" cy="6063198"/>
-          </a:xfrm>
-          <a:prstGeom prst="rect">
-            <a:avLst/>
-          </a:prstGeom>
-          <a:noFill/>
-        </p:spPr>
-        <p:txBody>
-          <a:bodyPr wrap="square" rtlCol="0">
-            <a:spAutoFit/>
-          </a:bodyPr>
-          <a:lstStyle/>
-          <a:p>
-            <a:r>
-              <a:rPr lang="ja-JP" altLang="ja-JP" sz="2800" b="1" dirty="0">
-                <a:solidFill>
-                  <a:schemeClr val="bg2"/>
-                </a:solidFill>
-              </a:rPr>
-              <a:t>Adjustment experiment</a:t>
-            </a:r>
-            <a:endParaRPr lang="ja-JP" altLang="ja-JP" sz="2800" dirty="0">
-              <a:solidFill>
-                <a:schemeClr val="bg2"/>
-              </a:solidFill>
-            </a:endParaRPr>
-          </a:p>
-          <a:p>
-            <a:r>
-              <a:rPr lang="ja-JP" altLang="ja-JP" sz="2000" dirty="0">
-                <a:solidFill>
-                  <a:schemeClr val="bg2"/>
-                </a:solidFill>
-              </a:rPr>
-              <a:t>In the central display area, stimulus images are shown in the upper and lower halves. The image in the lower half is created by adding noise to the background of the image in the upper half.</a:t>
-            </a:r>
-            <a:endParaRPr lang="en-US" altLang="ja-JP" sz="2000" dirty="0">
-              <a:solidFill>
-                <a:schemeClr val="bg2"/>
-              </a:solidFill>
-            </a:endParaRPr>
-          </a:p>
-          <a:p>
-            <a:endParaRPr lang="ja-JP" altLang="ja-JP" sz="2000" dirty="0">
-              <a:solidFill>
-                <a:schemeClr val="bg2"/>
-              </a:solidFill>
-            </a:endParaRPr>
-          </a:p>
-          <a:p>
-            <a:r>
-              <a:rPr lang="ja-JP" altLang="ja-JP" sz="2000" dirty="0">
-                <a:solidFill>
-                  <a:schemeClr val="bg2"/>
-                </a:solidFill>
-              </a:rPr>
-              <a:t>First, observe the appearance of the stimulus image in the upper half of the display area.</a:t>
-            </a:r>
-          </a:p>
-          <a:p>
-            <a:r>
-              <a:rPr lang="ja-JP" altLang="ja-JP" sz="2000" dirty="0">
-                <a:solidFill>
-                  <a:schemeClr val="bg2"/>
-                </a:solidFill>
-              </a:rPr>
-              <a:t>Then, using the left and right arrow keys on the control PC, adjust the appearance of the stimulus image in the lower half so that it matches the appearance of the upper half. The appearance becomes stronger as you move to the right.</a:t>
-            </a:r>
-          </a:p>
-          <a:p>
-            <a:r>
-              <a:rPr lang="ja-JP" altLang="ja-JP" sz="2000" dirty="0">
-                <a:solidFill>
-                  <a:schemeClr val="bg2"/>
-                </a:solidFill>
-              </a:rPr>
-              <a:t>Repeat this process until you feel that the two appearances match completely.</a:t>
-            </a:r>
-            <a:endParaRPr lang="en-US" altLang="ja-JP" sz="2000" dirty="0">
-              <a:solidFill>
-                <a:schemeClr val="bg2"/>
-              </a:solidFill>
-            </a:endParaRPr>
-          </a:p>
-          <a:p>
-            <a:endParaRPr lang="ja-JP" altLang="ja-JP" sz="2000" dirty="0">
-              <a:solidFill>
-                <a:schemeClr val="bg2"/>
-              </a:solidFill>
-            </a:endParaRPr>
-          </a:p>
-          <a:p>
-            <a:r>
-              <a:rPr lang="ja-JP" altLang="ja-JP" sz="2000" dirty="0">
-                <a:solidFill>
-                  <a:schemeClr val="bg2"/>
-                </a:solidFill>
-              </a:rPr>
-              <a:t>Press the Enter key to confirm and proceed to the next stimulus.</a:t>
-            </a:r>
-          </a:p>
-          <a:p>
-            <a:endParaRPr kumimoji="1" lang="en-US" altLang="ja-JP" sz="2000" dirty="0">
-              <a:solidFill>
-                <a:schemeClr val="bg2"/>
-              </a:solidFill>
-            </a:endParaRPr>
-          </a:p>
-        </p:txBody>
-      </p:sp>
       <p:pic>
         <p:nvPicPr>
-          <p:cNvPr id="4" name="図 3">
+          <p:cNvPr id="3" name="図 2">
             <a:extLst>
               <a:ext uri="{FF2B5EF4-FFF2-40B4-BE49-F238E27FC236}">
-                <a16:creationId xmlns:a16="http://schemas.microsoft.com/office/drawing/2014/main" id="{AB1E5889-3C1F-D6C5-C3B8-CF7277D63A4D}"/>
+                <a16:creationId xmlns:a16="http://schemas.microsoft.com/office/drawing/2014/main" id="{1EBD3E08-1BBC-E694-D80C-78BD943CE5EE}"/>
               </a:ext>
             </a:extLst>
           </p:cNvPr>
@@ -5758,7 +6253,7 @@
           </p:cNvPicPr>
           <p:nvPr/>
         </p:nvPicPr>
-        <p:blipFill rotWithShape="1">
+        <p:blipFill>
           <a:blip r:embed="rId2">
             <a:extLst>
               <a:ext uri="{28A0092B-C50C-407E-A947-70E740481C1C}">
@@ -5766,21 +6261,472 @@
               </a:ext>
             </a:extLst>
           </a:blip>
-          <a:srcRect l="24295" r="24295"/>
+          <a:srcRect l="22666" r="22172" b="34275"/>
           <a:stretch>
             <a:fillRect/>
           </a:stretch>
         </p:blipFill>
         <p:spPr>
-          <a:xfrm flipH="1">
-            <a:off x="451730" y="1205192"/>
-            <a:ext cx="3744000" cy="3793590"/>
+          <a:xfrm>
+            <a:off x="696190" y="3541113"/>
+            <a:ext cx="3605646" cy="2600649"/>
           </a:xfrm>
           <a:prstGeom prst="rect">
             <a:avLst/>
           </a:prstGeom>
         </p:spPr>
       </p:pic>
+      <p:pic>
+        <p:nvPicPr>
+          <p:cNvPr id="5" name="図 4">
+            <a:extLst>
+              <a:ext uri="{FF2B5EF4-FFF2-40B4-BE49-F238E27FC236}">
+                <a16:creationId xmlns:a16="http://schemas.microsoft.com/office/drawing/2014/main" id="{36DBA0C5-6CAE-5632-9D3E-ABAEAD75F488}"/>
+              </a:ext>
+            </a:extLst>
+          </p:cNvPr>
+          <p:cNvPicPr>
+            <a:picLocks noChangeAspect="1"/>
+          </p:cNvPicPr>
+          <p:nvPr/>
+        </p:nvPicPr>
+        <p:blipFill>
+          <a:blip r:embed="rId3">
+            <a:extLst>
+              <a:ext uri="{28A0092B-C50C-407E-A947-70E740481C1C}">
+                <a14:useLocalDpi xmlns:a14="http://schemas.microsoft.com/office/drawing/2010/main" val="0"/>
+              </a:ext>
+            </a:extLst>
+          </a:blip>
+          <a:srcRect l="21226" t="3686" r="22872" b="33758"/>
+          <a:stretch>
+            <a:fillRect/>
+          </a:stretch>
+        </p:blipFill>
+        <p:spPr>
+          <a:xfrm>
+            <a:off x="696190" y="532123"/>
+            <a:ext cx="3605646" cy="2538582"/>
+          </a:xfrm>
+          <a:prstGeom prst="rect">
+            <a:avLst/>
+          </a:prstGeom>
+        </p:spPr>
+      </p:pic>
+      <p:cxnSp>
+        <p:nvCxnSpPr>
+          <p:cNvPr id="6" name="直線矢印コネクタ 5">
+            <a:extLst>
+              <a:ext uri="{FF2B5EF4-FFF2-40B4-BE49-F238E27FC236}">
+                <a16:creationId xmlns:a16="http://schemas.microsoft.com/office/drawing/2014/main" id="{D6D8FC9D-7C64-5084-E8B0-062F5F825EA7}"/>
+              </a:ext>
+            </a:extLst>
+          </p:cNvPr>
+          <p:cNvCxnSpPr>
+            <a:cxnSpLocks/>
+            <a:stCxn id="5" idx="2"/>
+            <a:endCxn id="3" idx="0"/>
+          </p:cNvCxnSpPr>
+          <p:nvPr/>
+        </p:nvCxnSpPr>
+        <p:spPr>
+          <a:xfrm>
+            <a:off x="2499013" y="3070705"/>
+            <a:ext cx="0" cy="470408"/>
+          </a:xfrm>
+          <a:prstGeom prst="straightConnector1">
+            <a:avLst/>
+          </a:prstGeom>
+          <a:ln w="38100" cap="flat" cmpd="sng" algn="ctr">
+            <a:solidFill>
+              <a:schemeClr val="accent5"/>
+            </a:solidFill>
+            <a:prstDash val="solid"/>
+            <a:round/>
+            <a:headEnd type="arrow" w="med" len="med"/>
+            <a:tailEnd type="arrow" w="med" len="med"/>
+          </a:ln>
+        </p:spPr>
+        <p:style>
+          <a:lnRef idx="0">
+            <a:scrgbClr r="0" g="0" b="0"/>
+          </a:lnRef>
+          <a:fillRef idx="0">
+            <a:scrgbClr r="0" g="0" b="0"/>
+          </a:fillRef>
+          <a:effectRef idx="0">
+            <a:scrgbClr r="0" g="0" b="0"/>
+          </a:effectRef>
+          <a:fontRef idx="minor">
+            <a:schemeClr val="tx1"/>
+          </a:fontRef>
+        </p:style>
+      </p:cxnSp>
+      <p:sp>
+        <p:nvSpPr>
+          <p:cNvPr id="7" name="テキスト ボックス 6">
+            <a:extLst>
+              <a:ext uri="{FF2B5EF4-FFF2-40B4-BE49-F238E27FC236}">
+                <a16:creationId xmlns:a16="http://schemas.microsoft.com/office/drawing/2014/main" id="{360519A6-D99A-A35F-D122-5D882AB6818E}"/>
+              </a:ext>
+            </a:extLst>
+          </p:cNvPr>
+          <p:cNvSpPr txBox="1"/>
+          <p:nvPr/>
+        </p:nvSpPr>
+        <p:spPr>
+          <a:xfrm>
+            <a:off x="1496291" y="1091045"/>
+            <a:ext cx="508473" cy="369332"/>
+          </a:xfrm>
+          <a:prstGeom prst="rect">
+            <a:avLst/>
+          </a:prstGeom>
+          <a:noFill/>
+        </p:spPr>
+        <p:txBody>
+          <a:bodyPr wrap="none" rtlCol="0">
+            <a:spAutoFit/>
+          </a:bodyPr>
+          <a:lstStyle/>
+          <a:p>
+            <a:r>
+              <a:rPr kumimoji="1" lang="en-US" altLang="ja-JP" dirty="0">
+                <a:solidFill>
+                  <a:schemeClr val="bg1"/>
+                </a:solidFill>
+              </a:rPr>
+              <a:t>Ref</a:t>
+            </a:r>
+            <a:endParaRPr kumimoji="1" lang="ja-JP" altLang="en-US" dirty="0">
+              <a:solidFill>
+                <a:schemeClr val="bg1"/>
+              </a:solidFill>
+            </a:endParaRPr>
+          </a:p>
+        </p:txBody>
+      </p:sp>
+      <p:sp>
+        <p:nvSpPr>
+          <p:cNvPr id="8" name="テキスト ボックス 7">
+            <a:extLst>
+              <a:ext uri="{FF2B5EF4-FFF2-40B4-BE49-F238E27FC236}">
+                <a16:creationId xmlns:a16="http://schemas.microsoft.com/office/drawing/2014/main" id="{8D8263A5-31E3-15E5-4747-CB05C2E8F8A6}"/>
+              </a:ext>
+            </a:extLst>
+          </p:cNvPr>
+          <p:cNvSpPr txBox="1"/>
+          <p:nvPr/>
+        </p:nvSpPr>
+        <p:spPr>
+          <a:xfrm>
+            <a:off x="1496290" y="4028208"/>
+            <a:ext cx="508473" cy="369332"/>
+          </a:xfrm>
+          <a:prstGeom prst="rect">
+            <a:avLst/>
+          </a:prstGeom>
+          <a:noFill/>
+        </p:spPr>
+        <p:txBody>
+          <a:bodyPr wrap="none" rtlCol="0">
+            <a:spAutoFit/>
+          </a:bodyPr>
+          <a:lstStyle/>
+          <a:p>
+            <a:r>
+              <a:rPr kumimoji="1" lang="en-US" altLang="ja-JP" dirty="0">
+                <a:solidFill>
+                  <a:schemeClr val="bg1"/>
+                </a:solidFill>
+              </a:rPr>
+              <a:t>Ref</a:t>
+            </a:r>
+            <a:endParaRPr kumimoji="1" lang="ja-JP" altLang="en-US" dirty="0">
+              <a:solidFill>
+                <a:schemeClr val="bg1"/>
+              </a:solidFill>
+            </a:endParaRPr>
+          </a:p>
+        </p:txBody>
+      </p:sp>
+      <p:sp>
+        <p:nvSpPr>
+          <p:cNvPr id="9" name="テキスト ボックス 8">
+            <a:extLst>
+              <a:ext uri="{FF2B5EF4-FFF2-40B4-BE49-F238E27FC236}">
+                <a16:creationId xmlns:a16="http://schemas.microsoft.com/office/drawing/2014/main" id="{76C12BDF-E60A-849A-2C77-10E218A154D5}"/>
+              </a:ext>
+            </a:extLst>
+          </p:cNvPr>
+          <p:cNvSpPr txBox="1"/>
+          <p:nvPr/>
+        </p:nvSpPr>
+        <p:spPr>
+          <a:xfrm>
+            <a:off x="1496290" y="5314131"/>
+            <a:ext cx="577659" cy="369332"/>
+          </a:xfrm>
+          <a:prstGeom prst="rect">
+            <a:avLst/>
+          </a:prstGeom>
+          <a:noFill/>
+        </p:spPr>
+        <p:txBody>
+          <a:bodyPr wrap="none" rtlCol="0">
+            <a:spAutoFit/>
+          </a:bodyPr>
+          <a:lstStyle/>
+          <a:p>
+            <a:r>
+              <a:rPr kumimoji="1" lang="en-US" altLang="ja-JP" dirty="0">
+                <a:solidFill>
+                  <a:schemeClr val="bg1"/>
+                </a:solidFill>
+              </a:rPr>
+              <a:t>Test</a:t>
+            </a:r>
+            <a:endParaRPr kumimoji="1" lang="ja-JP" altLang="en-US" dirty="0">
+              <a:solidFill>
+                <a:schemeClr val="bg1"/>
+              </a:solidFill>
+            </a:endParaRPr>
+          </a:p>
+        </p:txBody>
+      </p:sp>
+      <p:sp>
+        <p:nvSpPr>
+          <p:cNvPr id="10" name="テキスト ボックス 9">
+            <a:extLst>
+              <a:ext uri="{FF2B5EF4-FFF2-40B4-BE49-F238E27FC236}">
+                <a16:creationId xmlns:a16="http://schemas.microsoft.com/office/drawing/2014/main" id="{8E177740-CD45-32F6-C84F-890E14803F95}"/>
+              </a:ext>
+            </a:extLst>
+          </p:cNvPr>
+          <p:cNvSpPr txBox="1"/>
+          <p:nvPr/>
+        </p:nvSpPr>
+        <p:spPr>
+          <a:xfrm>
+            <a:off x="1464435" y="2192302"/>
+            <a:ext cx="577659" cy="369332"/>
+          </a:xfrm>
+          <a:prstGeom prst="rect">
+            <a:avLst/>
+          </a:prstGeom>
+          <a:noFill/>
+        </p:spPr>
+        <p:txBody>
+          <a:bodyPr wrap="none" rtlCol="0">
+            <a:spAutoFit/>
+          </a:bodyPr>
+          <a:lstStyle/>
+          <a:p>
+            <a:r>
+              <a:rPr kumimoji="1" lang="en-US" altLang="ja-JP" dirty="0">
+                <a:solidFill>
+                  <a:schemeClr val="bg1"/>
+                </a:solidFill>
+              </a:rPr>
+              <a:t>Test</a:t>
+            </a:r>
+            <a:endParaRPr kumimoji="1" lang="ja-JP" altLang="en-US" dirty="0">
+              <a:solidFill>
+                <a:schemeClr val="bg1"/>
+              </a:solidFill>
+            </a:endParaRPr>
+          </a:p>
+        </p:txBody>
+      </p:sp>
+      <p:sp>
+        <p:nvSpPr>
+          <p:cNvPr id="12" name="テキスト ボックス 11">
+            <a:extLst>
+              <a:ext uri="{FF2B5EF4-FFF2-40B4-BE49-F238E27FC236}">
+                <a16:creationId xmlns:a16="http://schemas.microsoft.com/office/drawing/2014/main" id="{8CCC861E-4EB5-BAE4-0AE3-A2D75DAD5268}"/>
+              </a:ext>
+            </a:extLst>
+          </p:cNvPr>
+          <p:cNvSpPr txBox="1"/>
+          <p:nvPr/>
+        </p:nvSpPr>
+        <p:spPr>
+          <a:xfrm>
+            <a:off x="4655127" y="705177"/>
+            <a:ext cx="6643320" cy="5755422"/>
+          </a:xfrm>
+          <a:prstGeom prst="rect">
+            <a:avLst/>
+          </a:prstGeom>
+          <a:noFill/>
+        </p:spPr>
+        <p:txBody>
+          <a:bodyPr wrap="square" rtlCol="0">
+            <a:spAutoFit/>
+          </a:bodyPr>
+          <a:lstStyle/>
+          <a:p>
+            <a:r>
+              <a:rPr lang="ja-JP" altLang="ja-JP" sz="2800" b="1" dirty="0">
+                <a:solidFill>
+                  <a:schemeClr val="bg2"/>
+                </a:solidFill>
+              </a:rPr>
+              <a:t>Adjustment experiment</a:t>
+            </a:r>
+            <a:endParaRPr lang="ja-JP" altLang="ja-JP" sz="2800" dirty="0">
+              <a:solidFill>
+                <a:schemeClr val="bg2"/>
+              </a:solidFill>
+            </a:endParaRPr>
+          </a:p>
+          <a:p>
+            <a:r>
+              <a:rPr lang="ja-JP" altLang="ja-JP" sz="2000" dirty="0">
+                <a:solidFill>
+                  <a:schemeClr val="bg2"/>
+                </a:solidFill>
+              </a:rPr>
+              <a:t>In the central display area, stimulus images are shown in the upper and lower halves. The image in the lower half is created by adding noise to the background of the image in the upper half.</a:t>
+            </a:r>
+            <a:endParaRPr lang="en-US" altLang="ja-JP" sz="2000" dirty="0">
+              <a:solidFill>
+                <a:schemeClr val="bg2"/>
+              </a:solidFill>
+            </a:endParaRPr>
+          </a:p>
+          <a:p>
+            <a:endParaRPr lang="ja-JP" altLang="ja-JP" sz="2000" dirty="0">
+              <a:solidFill>
+                <a:schemeClr val="bg2"/>
+              </a:solidFill>
+            </a:endParaRPr>
+          </a:p>
+          <a:p>
+            <a:r>
+              <a:rPr lang="ja-JP" altLang="ja-JP" sz="2000" dirty="0">
+                <a:solidFill>
+                  <a:schemeClr val="bg2"/>
+                </a:solidFill>
+              </a:rPr>
+              <a:t>First, observe the </a:t>
+            </a:r>
+            <a:r>
+              <a:rPr lang="en-US" altLang="ja-JP" sz="2000" dirty="0">
+                <a:solidFill>
+                  <a:schemeClr val="bg2"/>
+                </a:solidFill>
+              </a:rPr>
+              <a:t>visibility</a:t>
+            </a:r>
+            <a:r>
+              <a:rPr lang="ja-JP" altLang="ja-JP" sz="2000" dirty="0">
+                <a:solidFill>
+                  <a:schemeClr val="bg2"/>
+                </a:solidFill>
+              </a:rPr>
+              <a:t> of the stimulus image in the upper half of the display area.</a:t>
+            </a:r>
+          </a:p>
+          <a:p>
+            <a:r>
+              <a:rPr lang="ja-JP" altLang="ja-JP" sz="2000" dirty="0">
+                <a:solidFill>
+                  <a:schemeClr val="bg2"/>
+                </a:solidFill>
+              </a:rPr>
+              <a:t>Then, using the left and right arrow keys on the control PC, adjust the </a:t>
+            </a:r>
+            <a:r>
+              <a:rPr lang="en-US" altLang="ja-JP" sz="2000" dirty="0">
+                <a:solidFill>
+                  <a:schemeClr val="bg2"/>
+                </a:solidFill>
+              </a:rPr>
+              <a:t>visibility</a:t>
+            </a:r>
+            <a:r>
+              <a:rPr lang="ja-JP" altLang="ja-JP" sz="2000" dirty="0">
+                <a:solidFill>
+                  <a:schemeClr val="bg2"/>
+                </a:solidFill>
+              </a:rPr>
+              <a:t> of the stimulus image in the lower half so that it matches the appearance of the upper half. The </a:t>
+            </a:r>
+            <a:r>
+              <a:rPr lang="en-US" altLang="ja-JP" sz="2000" dirty="0">
+                <a:solidFill>
+                  <a:schemeClr val="bg2"/>
+                </a:solidFill>
+              </a:rPr>
+              <a:t>visibility</a:t>
+            </a:r>
+            <a:r>
+              <a:rPr lang="ja-JP" altLang="ja-JP" sz="2000" dirty="0">
+                <a:solidFill>
+                  <a:schemeClr val="bg2"/>
+                </a:solidFill>
+              </a:rPr>
+              <a:t> becomes stronger as you move to the right.</a:t>
+            </a:r>
+          </a:p>
+          <a:p>
+            <a:r>
+              <a:rPr lang="ja-JP" altLang="ja-JP" sz="2000" dirty="0">
+                <a:solidFill>
+                  <a:schemeClr val="bg2"/>
+                </a:solidFill>
+              </a:rPr>
+              <a:t>Repeat this process until you feel that the two </a:t>
+            </a:r>
+            <a:r>
+              <a:rPr lang="en-US" altLang="ja-JP" sz="2000" dirty="0">
+                <a:solidFill>
+                  <a:schemeClr val="bg2"/>
+                </a:solidFill>
+              </a:rPr>
+              <a:t>visibilities</a:t>
+            </a:r>
+            <a:r>
+              <a:rPr lang="ja-JP" altLang="ja-JP" sz="2000" dirty="0">
+                <a:solidFill>
+                  <a:schemeClr val="bg2"/>
+                </a:solidFill>
+              </a:rPr>
+              <a:t> match completely.</a:t>
+            </a:r>
+            <a:endParaRPr lang="en-US" altLang="ja-JP" sz="2000" dirty="0">
+              <a:solidFill>
+                <a:schemeClr val="bg2"/>
+              </a:solidFill>
+            </a:endParaRPr>
+          </a:p>
+          <a:p>
+            <a:endParaRPr lang="ja-JP" altLang="ja-JP" sz="2000" dirty="0">
+              <a:solidFill>
+                <a:schemeClr val="bg2"/>
+              </a:solidFill>
+            </a:endParaRPr>
+          </a:p>
+          <a:p>
+            <a:r>
+              <a:rPr lang="ja-JP" altLang="ja-JP" sz="2000" dirty="0">
+                <a:solidFill>
+                  <a:schemeClr val="bg2"/>
+                </a:solidFill>
+              </a:rPr>
+              <a:t>Press the Enter key to confirm and proceed to the next stimulus.</a:t>
+            </a:r>
+          </a:p>
+          <a:p>
+            <a:endParaRPr kumimoji="1" lang="en-US" altLang="ja-JP" sz="2000" dirty="0">
+              <a:solidFill>
+                <a:schemeClr val="bg2"/>
+              </a:solidFill>
+            </a:endParaRPr>
+          </a:p>
+        </p:txBody>
+      </p:sp>
     </p:spTree>
     <p:extLst>
       <p:ext uri="{BB962C8B-B14F-4D97-AF65-F5344CB8AC3E}">
@@ -5795,7 +6741,7 @@
 </file>
 
 <file path=ppt/slides/slide28.xml><?xml version="1.0" encoding="utf-8"?>
-<p:sld xmlns:a="http://schemas.openxmlformats.org/drawingml/2006/main" xmlns:r="http://schemas.openxmlformats.org/officeDocument/2006/relationships" xmlns:p="http://schemas.openxmlformats.org/presentationml/2006/main">
+<p:sld xmlns:a="http://schemas.openxmlformats.org/drawingml/2006/main" xmlns:r="http://schemas.openxmlformats.org/officeDocument/2006/relationships" xmlns:p="http://schemas.openxmlformats.org/presentationml/2006/main" show="0">
   <p:cSld>
     <p:bg>
       <p:bgPr>
@@ -7439,10 +8385,10 @@
       </p:sp>
       <p:pic>
         <p:nvPicPr>
-          <p:cNvPr id="4" name="図 3">
+          <p:cNvPr id="5" name="図 4">
             <a:extLst>
               <a:ext uri="{FF2B5EF4-FFF2-40B4-BE49-F238E27FC236}">
-                <a16:creationId xmlns:a16="http://schemas.microsoft.com/office/drawing/2014/main" id="{9B7854CB-ADCD-EA94-0FB2-D78104FAFCB4}"/>
+                <a16:creationId xmlns:a16="http://schemas.microsoft.com/office/drawing/2014/main" id="{58D60898-F138-0193-07FA-234CBC13A099}"/>
               </a:ext>
             </a:extLst>
           </p:cNvPr>
@@ -7451,7 +8397,7 @@
           </p:cNvPicPr>
           <p:nvPr/>
         </p:nvPicPr>
-        <p:blipFill rotWithShape="1">
+        <p:blipFill>
           <a:blip r:embed="rId2">
             <a:extLst>
               <a:ext uri="{28A0092B-C50C-407E-A947-70E740481C1C}">
@@ -7459,21 +8405,283 @@
               </a:ext>
             </a:extLst>
           </a:blip>
-          <a:srcRect l="24295" r="24295"/>
+          <a:srcRect l="22666" r="22172" b="34275"/>
           <a:stretch>
             <a:fillRect/>
           </a:stretch>
         </p:blipFill>
         <p:spPr>
-          <a:xfrm flipH="1">
-            <a:off x="451730" y="1205192"/>
-            <a:ext cx="3744000" cy="3793590"/>
+          <a:xfrm>
+            <a:off x="696190" y="3541113"/>
+            <a:ext cx="3605646" cy="2600649"/>
           </a:xfrm>
           <a:prstGeom prst="rect">
             <a:avLst/>
           </a:prstGeom>
         </p:spPr>
       </p:pic>
+      <p:pic>
+        <p:nvPicPr>
+          <p:cNvPr id="7" name="図 6">
+            <a:extLst>
+              <a:ext uri="{FF2B5EF4-FFF2-40B4-BE49-F238E27FC236}">
+                <a16:creationId xmlns:a16="http://schemas.microsoft.com/office/drawing/2014/main" id="{89E229FB-57A1-4752-1026-804CEC3B6601}"/>
+              </a:ext>
+            </a:extLst>
+          </p:cNvPr>
+          <p:cNvPicPr>
+            <a:picLocks noChangeAspect="1"/>
+          </p:cNvPicPr>
+          <p:nvPr/>
+        </p:nvPicPr>
+        <p:blipFill>
+          <a:blip r:embed="rId3">
+            <a:extLst>
+              <a:ext uri="{28A0092B-C50C-407E-A947-70E740481C1C}">
+                <a14:useLocalDpi xmlns:a14="http://schemas.microsoft.com/office/drawing/2010/main" val="0"/>
+              </a:ext>
+            </a:extLst>
+          </a:blip>
+          <a:srcRect l="21226" t="3686" r="22872" b="33758"/>
+          <a:stretch>
+            <a:fillRect/>
+          </a:stretch>
+        </p:blipFill>
+        <p:spPr>
+          <a:xfrm>
+            <a:off x="696190" y="532123"/>
+            <a:ext cx="3605646" cy="2538582"/>
+          </a:xfrm>
+          <a:prstGeom prst="rect">
+            <a:avLst/>
+          </a:prstGeom>
+        </p:spPr>
+      </p:pic>
+      <p:cxnSp>
+        <p:nvCxnSpPr>
+          <p:cNvPr id="9" name="直線矢印コネクタ 8">
+            <a:extLst>
+              <a:ext uri="{FF2B5EF4-FFF2-40B4-BE49-F238E27FC236}">
+                <a16:creationId xmlns:a16="http://schemas.microsoft.com/office/drawing/2014/main" id="{313E7B1E-9900-079A-7EB4-B996B1FB43FE}"/>
+              </a:ext>
+            </a:extLst>
+          </p:cNvPr>
+          <p:cNvCxnSpPr>
+            <a:cxnSpLocks/>
+            <a:stCxn id="7" idx="2"/>
+            <a:endCxn id="5" idx="0"/>
+          </p:cNvCxnSpPr>
+          <p:nvPr/>
+        </p:nvCxnSpPr>
+        <p:spPr>
+          <a:xfrm>
+            <a:off x="2499013" y="3070705"/>
+            <a:ext cx="0" cy="470408"/>
+          </a:xfrm>
+          <a:prstGeom prst="straightConnector1">
+            <a:avLst/>
+          </a:prstGeom>
+          <a:ln w="38100" cap="flat" cmpd="sng" algn="ctr">
+            <a:solidFill>
+              <a:schemeClr val="accent5"/>
+            </a:solidFill>
+            <a:prstDash val="solid"/>
+            <a:round/>
+            <a:headEnd type="arrow" w="med" len="med"/>
+            <a:tailEnd type="arrow" w="med" len="med"/>
+          </a:ln>
+        </p:spPr>
+        <p:style>
+          <a:lnRef idx="0">
+            <a:scrgbClr r="0" g="0" b="0"/>
+          </a:lnRef>
+          <a:fillRef idx="0">
+            <a:scrgbClr r="0" g="0" b="0"/>
+          </a:fillRef>
+          <a:effectRef idx="0">
+            <a:scrgbClr r="0" g="0" b="0"/>
+          </a:effectRef>
+          <a:fontRef idx="minor">
+            <a:schemeClr val="tx1"/>
+          </a:fontRef>
+        </p:style>
+      </p:cxnSp>
+      <p:sp>
+        <p:nvSpPr>
+          <p:cNvPr id="11" name="テキスト ボックス 10">
+            <a:extLst>
+              <a:ext uri="{FF2B5EF4-FFF2-40B4-BE49-F238E27FC236}">
+                <a16:creationId xmlns:a16="http://schemas.microsoft.com/office/drawing/2014/main" id="{DDD5FE92-B69B-6733-3A35-B6399C17E51D}"/>
+              </a:ext>
+            </a:extLst>
+          </p:cNvPr>
+          <p:cNvSpPr txBox="1"/>
+          <p:nvPr/>
+        </p:nvSpPr>
+        <p:spPr>
+          <a:xfrm>
+            <a:off x="1496291" y="1091045"/>
+            <a:ext cx="508473" cy="369332"/>
+          </a:xfrm>
+          <a:prstGeom prst="rect">
+            <a:avLst/>
+          </a:prstGeom>
+          <a:noFill/>
+        </p:spPr>
+        <p:txBody>
+          <a:bodyPr wrap="none" rtlCol="0">
+            <a:spAutoFit/>
+          </a:bodyPr>
+          <a:lstStyle/>
+          <a:p>
+            <a:r>
+              <a:rPr kumimoji="1" lang="en-US" altLang="ja-JP" dirty="0">
+                <a:solidFill>
+                  <a:schemeClr val="bg1"/>
+                </a:solidFill>
+              </a:rPr>
+              <a:t>Ref</a:t>
+            </a:r>
+            <a:endParaRPr kumimoji="1" lang="ja-JP" altLang="en-US" dirty="0">
+              <a:solidFill>
+                <a:schemeClr val="bg1"/>
+              </a:solidFill>
+            </a:endParaRPr>
+          </a:p>
+        </p:txBody>
+      </p:sp>
+      <p:sp>
+        <p:nvSpPr>
+          <p:cNvPr id="13" name="テキスト ボックス 12">
+            <a:extLst>
+              <a:ext uri="{FF2B5EF4-FFF2-40B4-BE49-F238E27FC236}">
+                <a16:creationId xmlns:a16="http://schemas.microsoft.com/office/drawing/2014/main" id="{B254103C-30EE-A839-11D9-74CFB0D35D66}"/>
+              </a:ext>
+            </a:extLst>
+          </p:cNvPr>
+          <p:cNvSpPr txBox="1"/>
+          <p:nvPr/>
+        </p:nvSpPr>
+        <p:spPr>
+          <a:xfrm>
+            <a:off x="1496290" y="4028208"/>
+            <a:ext cx="508473" cy="369332"/>
+          </a:xfrm>
+          <a:prstGeom prst="rect">
+            <a:avLst/>
+          </a:prstGeom>
+          <a:noFill/>
+        </p:spPr>
+        <p:txBody>
+          <a:bodyPr wrap="none" rtlCol="0">
+            <a:spAutoFit/>
+          </a:bodyPr>
+          <a:lstStyle/>
+          <a:p>
+            <a:r>
+              <a:rPr kumimoji="1" lang="en-US" altLang="ja-JP" dirty="0">
+                <a:solidFill>
+                  <a:schemeClr val="bg1"/>
+                </a:solidFill>
+              </a:rPr>
+              <a:t>Ref</a:t>
+            </a:r>
+            <a:endParaRPr kumimoji="1" lang="ja-JP" altLang="en-US" dirty="0">
+              <a:solidFill>
+                <a:schemeClr val="bg1"/>
+              </a:solidFill>
+            </a:endParaRPr>
+          </a:p>
+        </p:txBody>
+      </p:sp>
+      <p:sp>
+        <p:nvSpPr>
+          <p:cNvPr id="15" name="テキスト ボックス 14">
+            <a:extLst>
+              <a:ext uri="{FF2B5EF4-FFF2-40B4-BE49-F238E27FC236}">
+                <a16:creationId xmlns:a16="http://schemas.microsoft.com/office/drawing/2014/main" id="{6FECE16E-0F1D-EBF4-67EB-A01CEBFB6F4B}"/>
+              </a:ext>
+            </a:extLst>
+          </p:cNvPr>
+          <p:cNvSpPr txBox="1"/>
+          <p:nvPr/>
+        </p:nvSpPr>
+        <p:spPr>
+          <a:xfrm>
+            <a:off x="1496290" y="5314131"/>
+            <a:ext cx="577659" cy="369332"/>
+          </a:xfrm>
+          <a:prstGeom prst="rect">
+            <a:avLst/>
+          </a:prstGeom>
+          <a:noFill/>
+        </p:spPr>
+        <p:txBody>
+          <a:bodyPr wrap="none" rtlCol="0">
+            <a:spAutoFit/>
+          </a:bodyPr>
+          <a:lstStyle/>
+          <a:p>
+            <a:r>
+              <a:rPr kumimoji="1" lang="en-US" altLang="ja-JP" dirty="0">
+                <a:solidFill>
+                  <a:schemeClr val="bg1"/>
+                </a:solidFill>
+              </a:rPr>
+              <a:t>Test</a:t>
+            </a:r>
+            <a:endParaRPr kumimoji="1" lang="ja-JP" altLang="en-US" dirty="0">
+              <a:solidFill>
+                <a:schemeClr val="bg1"/>
+              </a:solidFill>
+            </a:endParaRPr>
+          </a:p>
+        </p:txBody>
+      </p:sp>
+      <p:sp>
+        <p:nvSpPr>
+          <p:cNvPr id="19" name="テキスト ボックス 18">
+            <a:extLst>
+              <a:ext uri="{FF2B5EF4-FFF2-40B4-BE49-F238E27FC236}">
+                <a16:creationId xmlns:a16="http://schemas.microsoft.com/office/drawing/2014/main" id="{828B5ACB-4A17-F25B-98D6-EE1D269A3C81}"/>
+              </a:ext>
+            </a:extLst>
+          </p:cNvPr>
+          <p:cNvSpPr txBox="1"/>
+          <p:nvPr/>
+        </p:nvSpPr>
+        <p:spPr>
+          <a:xfrm>
+            <a:off x="1464435" y="2192302"/>
+            <a:ext cx="577659" cy="369332"/>
+          </a:xfrm>
+          <a:prstGeom prst="rect">
+            <a:avLst/>
+          </a:prstGeom>
+          <a:noFill/>
+        </p:spPr>
+        <p:txBody>
+          <a:bodyPr wrap="none" rtlCol="0">
+            <a:spAutoFit/>
+          </a:bodyPr>
+          <a:lstStyle/>
+          <a:p>
+            <a:r>
+              <a:rPr kumimoji="1" lang="en-US" altLang="ja-JP" dirty="0">
+                <a:solidFill>
+                  <a:schemeClr val="bg1"/>
+                </a:solidFill>
+              </a:rPr>
+              <a:t>Test</a:t>
+            </a:r>
+            <a:endParaRPr kumimoji="1" lang="ja-JP" altLang="en-US" dirty="0">
+              <a:solidFill>
+                <a:schemeClr val="bg1"/>
+              </a:solidFill>
+            </a:endParaRPr>
+          </a:p>
+        </p:txBody>
+      </p:sp>
     </p:spTree>
     <p:extLst>
       <p:ext uri="{BB962C8B-B14F-4D97-AF65-F5344CB8AC3E}">
